--- a/DECK.pptx
+++ b/DECK.pptx
@@ -3358,8 +3358,9 @@
                 <a:latin typeface="Calibri"/>
               </a:rPr>
               <a:t>RC: 1,637 uploaded, never passed, only blur / weak OCR / not legible.
-Insurance: 411, same definition. Most Insurance volume never uploaded after Fitness — C1b does not claim that pile.
-Later attempts pass HIGHER. That is capture/UX. Eligibility would go the other way.</a:t>
+Insurance: 411, same definition. ~2,530 never uploaded after Fitness — C1b does not claim that pile.
+Other stages: real loss, wrong tool. DL cannot defer. Aadhaar/Permit/Fitness mostly never-upload or eligibility.
+Later attempts pass HIGHER. Capture/UX — not harder remainder.</a:t>
             </a:r>
           </a:p>
         </p:txBody>
@@ -3397,10 +3398,8 @@
               <a:t>Pass by attempt
 RC          65.3% → 68.4% → 74.1%
 Insurance   67.4% → 73.8% → 76.4%
-C1a pass floor = RC att-3 74.1%
-C1a ceiling = field RC 78.4%
-C1b uses Insurance’s own ladder
-— not 85–90%.</a:t>
+Reuse the same camera on other docs after C1b — free rider, not in the 180.
+Never-upload is not another WhatsApp (CAMP = 0pp). Next: assist RCT.</a:t>
             </a:r>
           </a:p>
         </p:txBody>
@@ -3576,8 +3575,9 @@
 411 people. Must clear before first ride.
 67→74→76% × 91% approved-if-cleared
 → ~46–52/month.
-No deferral sign-off. Ship without waiting on Legal.
-R2A: 98.7% of today’s approved take a first order (3,895/3,946).</a:t>
+No deferral sign-off. Ship this week.
+Then: same UX on DL/Aadhaar/Permit/Fitness — measure, do not add to 180.
+R2A: 98.7% of approved take a first order.</a:t>
             </a:r>
           </a:p>
         </p:txBody>
@@ -3884,11 +3884,11 @@
                 </a:solidFill>
                 <a:latin typeface="Calibri"/>
               </a:rPr>
-              <a:t>Got CAMP_WA_002 vs never got it: ~29% vs ~11% approved  →  TARGETING (sent after RC).
-Clicked vs not, among delivered: 28.3% vs 29.8% (−1.5pp, interval −3.6 to +0.6)  →  0 pp lift. Do not scale 5×.
-Field vs app/paid mechanical gap: 128–256/month IF zero selection difference. Field recruits in person.
-726 of the C1a captains sit inside that gap. Do not add ~180 to 128–256.
-Test: randomised assist on ordinary app/paid signups (~900/arm for a 5pp approval lift).</a:t>
+              <a:t>Got CAMP_WA_002 vs never got it: ~29% vs ~11%  →  TARGETING (sent after RC).
+Clicked vs not, delivered: −1.5pp  →  0 pp lift. Do not scale 5×. Do not use WhatsApp to harvest never-uploads.
+Never-upload is the leftover (RC ~2,388; Insurance ~2,530). Fos Insurance abandon 26% vs paid 43%.
+Field vs app 128–256/month IF zero selection. 726 of C1a already inside. Do not add to ~180.
+Test: randomised assist on app/paid (~900/arm for 5pp approval lift).</a:t>
             </a:r>
           </a:p>
         </p:txBody>
@@ -4019,10 +4019,12 @@
                 </a:solidFill>
                 <a:latin typeface="Calibri"/>
               </a:rPr>
-              <a:t>1  C1a 10-day RC grace + C1b Insurance UX     ~180/mo (~134+~50)     Legal/T&amp;S + ~1 FTE on C1a. Ship C1b now.
-2  ARA at ₹35.4 / eligible leg     sample ~₹69–103k/mo     4-week pilot: returns up, cancels down, run-rate FALLING. Then maybe hire.
-3  Stop 5× CAMP_WA_002; send/no-send RCT     cost avoided + 4–6 week answer     Near zero. This week. Aadhaar + approved.
-Do not: 5× WhatsApp · blanket airport hiring · bank 128–256 · price ARA at 30% of fare.</a:t>
+              <a:t>1  C1b camera UX this week + C1a RC grace after Legal     ~180/mo (~50+~134). Reuse camera on other docs: not in the 180.
+2  ARA ₹35.4/eligible leg — DO NOT HIRE THE AIRPORT     sample ~₹69–103k/mo. Two independent penalties; mix does not shift overnight.
+    4-week pilot: returns up, cancels down, run-rate FALLING. Hire only if nights stay unfilled after that.
+3  Stop 5× CAMP_WA_002; send/no-send RCT     cost avoided + 4–6 week answer. This week.
+Do not: WhatsApp for never-uploads · blanket airport hiring · bank 128–256 · ARA at 30% of fare.
+Queue: other-doc camera → assist RCT.</a:t>
             </a:r>
           </a:p>
         </p:txBody>

--- a/DECK.pptx
+++ b/DECK.pptx
@@ -3431,102 +3431,6 @@
           </a:p>
         </p:txBody>
       </p:sp>
-      <p:pic>
-        <p:nvPicPr>
-          <p:cNvPr id="9" name="Image 0" descr="preencoded.png">    </p:cNvPr>
-          <p:cNvPicPr>
-            <a:picLocks noChangeAspect="1"/>
-          </p:cNvPicPr>
-          <p:nvPr/>
-        </p:nvPicPr>
-        <p:blipFill>
-          <a:blip r:embed="rId1"/>
-          <a:stretch>
-            <a:fillRect/>
-          </a:stretch>
-        </p:blipFill>
-        <p:spPr>
-          <a:xfrm>
-            <a:off x="640080" y="5074920"/>
-            <a:ext cx="960120" cy="960120"/>
-          </a:xfrm>
-          <a:prstGeom prst="rect">
-            <a:avLst/>
-          </a:prstGeom>
-        </p:spPr>
-      </p:pic>
-      <p:pic>
-        <p:nvPicPr>
-          <p:cNvPr id="10" name="Image 1" descr="preencoded.png">    </p:cNvPr>
-          <p:cNvPicPr>
-            <a:picLocks noChangeAspect="1"/>
-          </p:cNvPicPr>
-          <p:nvPr/>
-        </p:nvPicPr>
-        <p:blipFill>
-          <a:blip r:embed="rId2"/>
-          <a:stretch>
-            <a:fillRect/>
-          </a:stretch>
-        </p:blipFill>
-        <p:spPr>
-          <a:xfrm>
-            <a:off x="1828800" y="5138928"/>
-            <a:ext cx="868680" cy="868680"/>
-          </a:xfrm>
-          <a:prstGeom prst="rect">
-            <a:avLst/>
-          </a:prstGeom>
-        </p:spPr>
-      </p:pic>
-      <p:pic>
-        <p:nvPicPr>
-          <p:cNvPr id="11" name="Image 2" descr="preencoded.png">    </p:cNvPr>
-          <p:cNvPicPr>
-            <a:picLocks noChangeAspect="1"/>
-          </p:cNvPicPr>
-          <p:nvPr/>
-        </p:nvPicPr>
-        <p:blipFill>
-          <a:blip r:embed="rId3"/>
-          <a:stretch>
-            <a:fillRect/>
-          </a:stretch>
-        </p:blipFill>
-        <p:spPr>
-          <a:xfrm>
-            <a:off x="2971800" y="5102352"/>
-            <a:ext cx="914400" cy="914400"/>
-          </a:xfrm>
-          <a:prstGeom prst="rect">
-            <a:avLst/>
-          </a:prstGeom>
-        </p:spPr>
-      </p:pic>
-      <p:pic>
-        <p:nvPicPr>
-          <p:cNvPr id="12" name="Image 3" descr="preencoded.png">    </p:cNvPr>
-          <p:cNvPicPr>
-            <a:picLocks noChangeAspect="1"/>
-          </p:cNvPicPr>
-          <p:nvPr/>
-        </p:nvPicPr>
-        <p:blipFill>
-          <a:blip r:embed="rId4"/>
-          <a:stretch>
-            <a:fillRect/>
-          </a:stretch>
-        </p:blipFill>
-        <p:spPr>
-          <a:xfrm>
-            <a:off x="4160520" y="5138928"/>
-            <a:ext cx="868680" cy="868680"/>
-          </a:xfrm>
-          <a:prstGeom prst="rect">
-            <a:avLst/>
-          </a:prstGeom>
-        </p:spPr>
-      </p:pic>
     </p:spTree>
   </p:cSld>
   <p:clrMapOvr>
@@ -4915,33 +4819,9 @@
           </a:p>
         </p:txBody>
       </p:sp>
-      <p:pic>
-        <p:nvPicPr>
-          <p:cNvPr id="7" name="Image 0" descr="preencoded.png">    </p:cNvPr>
-          <p:cNvPicPr>
-            <a:picLocks noChangeAspect="1"/>
-          </p:cNvPicPr>
-          <p:nvPr/>
-        </p:nvPicPr>
-        <p:blipFill>
-          <a:blip r:embed="rId1"/>
-          <a:stretch>
-            <a:fillRect/>
-          </a:stretch>
-        </p:blipFill>
-        <p:spPr>
-          <a:xfrm>
-            <a:off x="5166360" y="1170432"/>
-            <a:ext cx="475488" cy="475488"/>
-          </a:xfrm>
-          <a:prstGeom prst="rect">
-            <a:avLst/>
-          </a:prstGeom>
-        </p:spPr>
-      </p:pic>
-      <p:sp>
-        <p:nvSpPr>
-          <p:cNvPr id="8" name="Text 5"/>
+      <p:sp>
+        <p:nvSpPr>
+          <p:cNvPr id="7" name="Text 5"/>
           <p:cNvSpPr/>
           <p:nvPr/>
         </p:nvSpPr>
@@ -4980,7 +4860,7 @@
       </p:sp>
       <p:sp>
         <p:nvSpPr>
-          <p:cNvPr id="9" name="Text 6"/>
+          <p:cNvPr id="8" name="Text 6"/>
           <p:cNvSpPr/>
           <p:nvPr/>
         </p:nvSpPr>
@@ -5019,7 +4899,7 @@
       </p:sp>
       <p:sp>
         <p:nvSpPr>
-          <p:cNvPr id="10" name="Text 7"/>
+          <p:cNvPr id="9" name="Text 7"/>
           <p:cNvSpPr/>
           <p:nvPr/>
         </p:nvSpPr>
@@ -5058,7 +4938,7 @@
       </p:sp>
       <p:sp>
         <p:nvSpPr>
-          <p:cNvPr id="11" name="Text 8"/>
+          <p:cNvPr id="10" name="Text 8"/>
           <p:cNvSpPr/>
           <p:nvPr/>
         </p:nvSpPr>
@@ -5097,7 +4977,7 @@
       </p:sp>
       <p:sp>
         <p:nvSpPr>
-          <p:cNvPr id="12" name="Text 9"/>
+          <p:cNvPr id="11" name="Text 9"/>
           <p:cNvSpPr/>
           <p:nvPr/>
         </p:nvSpPr>
@@ -5136,7 +5016,7 @@
       </p:sp>
       <p:sp>
         <p:nvSpPr>
-          <p:cNvPr id="13" name="Text 10"/>
+          <p:cNvPr id="12" name="Text 10"/>
           <p:cNvSpPr/>
           <p:nvPr/>
         </p:nvSpPr>
@@ -5175,7 +5055,7 @@
       </p:sp>
       <p:sp>
         <p:nvSpPr>
-          <p:cNvPr id="14" name="Text 11"/>
+          <p:cNvPr id="13" name="Text 11"/>
           <p:cNvSpPr/>
           <p:nvPr/>
         </p:nvSpPr>
@@ -5214,7 +5094,7 @@
       </p:sp>
       <p:sp>
         <p:nvSpPr>
-          <p:cNvPr id="15" name="Text 12"/>
+          <p:cNvPr id="14" name="Text 12"/>
           <p:cNvSpPr/>
           <p:nvPr/>
         </p:nvSpPr>
@@ -5253,7 +5133,7 @@
       </p:sp>
       <p:sp>
         <p:nvSpPr>
-          <p:cNvPr id="16" name="Text 13"/>
+          <p:cNvPr id="15" name="Text 13"/>
           <p:cNvSpPr/>
           <p:nvPr/>
         </p:nvSpPr>
@@ -5292,7 +5172,7 @@
       </p:sp>
       <p:sp>
         <p:nvSpPr>
-          <p:cNvPr id="17" name="Text 14"/>
+          <p:cNvPr id="16" name="Text 14"/>
           <p:cNvSpPr/>
           <p:nvPr/>
         </p:nvSpPr>
@@ -5331,7 +5211,7 @@
       </p:sp>
       <p:sp>
         <p:nvSpPr>
-          <p:cNvPr id="18" name="Text 15"/>
+          <p:cNvPr id="17" name="Text 15"/>
           <p:cNvSpPr/>
           <p:nvPr/>
         </p:nvSpPr>
@@ -5370,7 +5250,7 @@
       </p:sp>
       <p:sp>
         <p:nvSpPr>
-          <p:cNvPr id="19" name="Shape 16"/>
+          <p:cNvPr id="18" name="Shape 16"/>
           <p:cNvSpPr/>
           <p:nvPr/>
         </p:nvSpPr>
@@ -5397,7 +5277,7 @@
       </p:sp>
       <p:sp>
         <p:nvSpPr>
-          <p:cNvPr id="20" name="Shape 17"/>
+          <p:cNvPr id="19" name="Shape 17"/>
           <p:cNvSpPr/>
           <p:nvPr/>
         </p:nvSpPr>
@@ -5419,7 +5299,7 @@
       </p:sp>
       <p:sp>
         <p:nvSpPr>
-          <p:cNvPr id="21" name="Text 18"/>
+          <p:cNvPr id="20" name="Text 18"/>
           <p:cNvSpPr/>
           <p:nvPr/>
         </p:nvSpPr>
@@ -5456,33 +5336,9 @@
           </a:p>
         </p:txBody>
       </p:sp>
-      <p:pic>
-        <p:nvPicPr>
-          <p:cNvPr id="22" name="Image 1" descr="preencoded.png">    </p:cNvPr>
-          <p:cNvPicPr>
-            <a:picLocks noChangeAspect="1"/>
-          </p:cNvPicPr>
-          <p:nvPr/>
-        </p:nvPicPr>
-        <p:blipFill>
-          <a:blip r:embed="rId2"/>
-          <a:stretch>
-            <a:fillRect/>
-          </a:stretch>
-        </p:blipFill>
-        <p:spPr>
-          <a:xfrm>
-            <a:off x="10927080" y="1170432"/>
-            <a:ext cx="475488" cy="475488"/>
-          </a:xfrm>
-          <a:prstGeom prst="rect">
-            <a:avLst/>
-          </a:prstGeom>
-        </p:spPr>
-      </p:pic>
-      <p:sp>
-        <p:nvSpPr>
-          <p:cNvPr id="23" name="Text 19"/>
+      <p:sp>
+        <p:nvSpPr>
+          <p:cNvPr id="21" name="Text 19"/>
           <p:cNvSpPr/>
           <p:nvPr/>
         </p:nvSpPr>
@@ -5521,7 +5377,7 @@
       </p:sp>
       <p:sp>
         <p:nvSpPr>
-          <p:cNvPr id="24" name="Text 20"/>
+          <p:cNvPr id="22" name="Text 20"/>
           <p:cNvSpPr/>
           <p:nvPr/>
         </p:nvSpPr>
@@ -5560,7 +5416,7 @@
       </p:sp>
       <p:sp>
         <p:nvSpPr>
-          <p:cNvPr id="25" name="Text 21"/>
+          <p:cNvPr id="23" name="Text 21"/>
           <p:cNvSpPr/>
           <p:nvPr/>
         </p:nvSpPr>
@@ -5599,7 +5455,7 @@
       </p:sp>
       <p:sp>
         <p:nvSpPr>
-          <p:cNvPr id="26" name="Text 22"/>
+          <p:cNvPr id="24" name="Text 22"/>
           <p:cNvSpPr/>
           <p:nvPr/>
         </p:nvSpPr>
@@ -5638,7 +5494,7 @@
       </p:sp>
       <p:sp>
         <p:nvSpPr>
-          <p:cNvPr id="27" name="Text 23"/>
+          <p:cNvPr id="25" name="Text 23"/>
           <p:cNvSpPr/>
           <p:nvPr/>
         </p:nvSpPr>
@@ -5677,7 +5533,7 @@
       </p:sp>
       <p:sp>
         <p:nvSpPr>
-          <p:cNvPr id="28" name="Text 24"/>
+          <p:cNvPr id="26" name="Text 24"/>
           <p:cNvSpPr/>
           <p:nvPr/>
         </p:nvSpPr>
@@ -5716,7 +5572,7 @@
       </p:sp>
       <p:sp>
         <p:nvSpPr>
-          <p:cNvPr id="29" name="Text 25"/>
+          <p:cNvPr id="27" name="Text 25"/>
           <p:cNvSpPr/>
           <p:nvPr/>
         </p:nvSpPr>
@@ -5755,7 +5611,7 @@
       </p:sp>
       <p:sp>
         <p:nvSpPr>
-          <p:cNvPr id="30" name="Text 26"/>
+          <p:cNvPr id="28" name="Text 26"/>
           <p:cNvSpPr/>
           <p:nvPr/>
         </p:nvSpPr>
@@ -5794,7 +5650,7 @@
       </p:sp>
       <p:sp>
         <p:nvSpPr>
-          <p:cNvPr id="31" name="Text 27"/>
+          <p:cNvPr id="29" name="Text 27"/>
           <p:cNvSpPr/>
           <p:nvPr/>
         </p:nvSpPr>
@@ -5833,7 +5689,7 @@
       </p:sp>
       <p:sp>
         <p:nvSpPr>
-          <p:cNvPr id="32" name="Text 28"/>
+          <p:cNvPr id="30" name="Text 28"/>
           <p:cNvSpPr/>
           <p:nvPr/>
         </p:nvSpPr>
@@ -5872,7 +5728,7 @@
       </p:sp>
       <p:sp>
         <p:nvSpPr>
-          <p:cNvPr id="33" name="Text 29"/>
+          <p:cNvPr id="31" name="Text 29"/>
           <p:cNvSpPr/>
           <p:nvPr/>
         </p:nvSpPr>
@@ -5911,7 +5767,7 @@
       </p:sp>
       <p:sp>
         <p:nvSpPr>
-          <p:cNvPr id="34" name="Text 30"/>
+          <p:cNvPr id="32" name="Text 30"/>
           <p:cNvSpPr/>
           <p:nvPr/>
         </p:nvSpPr>
@@ -5950,7 +5806,7 @@
       </p:sp>
       <p:sp>
         <p:nvSpPr>
-          <p:cNvPr id="35" name="Text 31"/>
+          <p:cNvPr id="33" name="Text 31"/>
           <p:cNvSpPr/>
           <p:nvPr/>
         </p:nvSpPr>
@@ -7361,39 +7217,15 @@
           </a:ln>
         </p:spPr>
       </p:sp>
-      <p:pic>
-        <p:nvPicPr>
-          <p:cNvPr id="5" name="Image 0" descr="preencoded.png">    </p:cNvPr>
-          <p:cNvPicPr>
-            <a:picLocks noChangeAspect="1"/>
-          </p:cNvPicPr>
-          <p:nvPr/>
-        </p:nvPicPr>
-        <p:blipFill>
-          <a:blip r:embed="rId1"/>
-          <a:stretch>
-            <a:fillRect/>
-          </a:stretch>
-        </p:blipFill>
-        <p:spPr>
-          <a:xfrm>
-            <a:off x="640080" y="1225296"/>
-            <a:ext cx="640080" cy="640080"/>
-          </a:xfrm>
-          <a:prstGeom prst="rect">
-            <a:avLst/>
-          </a:prstGeom>
-        </p:spPr>
-      </p:pic>
-      <p:sp>
-        <p:nvSpPr>
-          <p:cNvPr id="6" name="Shape 3"/>
-          <p:cNvSpPr/>
-          <p:nvPr/>
-        </p:nvSpPr>
-        <p:spPr>
-          <a:xfrm>
-            <a:off x="1417320" y="1316736"/>
+      <p:sp>
+        <p:nvSpPr>
+          <p:cNvPr id="5" name="Shape 3"/>
+          <p:cNvSpPr/>
+          <p:nvPr/>
+        </p:nvSpPr>
+        <p:spPr>
+          <a:xfrm>
+            <a:off x="658368" y="1316736"/>
             <a:ext cx="384048" cy="384048"/>
           </a:xfrm>
           <a:prstGeom prst="ellipse">
@@ -7407,13 +7239,13 @@
       </p:sp>
       <p:sp>
         <p:nvSpPr>
-          <p:cNvPr id="7" name="Text 4"/>
-          <p:cNvSpPr/>
-          <p:nvPr/>
-        </p:nvSpPr>
-        <p:spPr>
-          <a:xfrm>
-            <a:off x="1417320" y="1316736"/>
+          <p:cNvPr id="6" name="Text 4"/>
+          <p:cNvSpPr/>
+          <p:nvPr/>
+        </p:nvSpPr>
+        <p:spPr>
+          <a:xfrm>
+            <a:off x="658368" y="1316736"/>
             <a:ext cx="384048" cy="384048"/>
           </a:xfrm>
           <a:prstGeom prst="rect">
@@ -7446,14 +7278,14 @@
       </p:sp>
       <p:sp>
         <p:nvSpPr>
-          <p:cNvPr id="8" name="Text 5"/>
-          <p:cNvSpPr/>
-          <p:nvPr/>
-        </p:nvSpPr>
-        <p:spPr>
-          <a:xfrm>
-            <a:off x="1965960" y="1188720"/>
-            <a:ext cx="5029200" cy="713232"/>
+          <p:cNvPr id="7" name="Text 5"/>
+          <p:cNvSpPr/>
+          <p:nvPr/>
+        </p:nvSpPr>
+        <p:spPr>
+          <a:xfrm>
+            <a:off x="1234440" y="1188720"/>
+            <a:ext cx="5669280" cy="713232"/>
           </a:xfrm>
           <a:prstGeom prst="rect">
             <a:avLst/>
@@ -7485,7 +7317,7 @@
       </p:sp>
       <p:sp>
         <p:nvSpPr>
-          <p:cNvPr id="9" name="Text 6"/>
+          <p:cNvPr id="8" name="Text 6"/>
           <p:cNvSpPr/>
           <p:nvPr/>
         </p:nvSpPr>
@@ -7524,7 +7356,7 @@
       </p:sp>
       <p:sp>
         <p:nvSpPr>
-          <p:cNvPr id="10" name="Text 7"/>
+          <p:cNvPr id="9" name="Text 7"/>
           <p:cNvSpPr/>
           <p:nvPr/>
         </p:nvSpPr>
@@ -7563,7 +7395,7 @@
       </p:sp>
       <p:sp>
         <p:nvSpPr>
-          <p:cNvPr id="11" name="Shape 8"/>
+          <p:cNvPr id="10" name="Shape 8"/>
           <p:cNvSpPr/>
           <p:nvPr/>
         </p:nvSpPr>
@@ -7588,39 +7420,15 @@
           </a:ln>
         </p:spPr>
       </p:sp>
-      <p:pic>
-        <p:nvPicPr>
-          <p:cNvPr id="12" name="Image 1" descr="preencoded.png">    </p:cNvPr>
-          <p:cNvPicPr>
-            <a:picLocks noChangeAspect="1"/>
-          </p:cNvPicPr>
-          <p:nvPr/>
-        </p:nvPicPr>
-        <p:blipFill>
-          <a:blip r:embed="rId2"/>
-          <a:stretch>
-            <a:fillRect/>
-          </a:stretch>
-        </p:blipFill>
-        <p:spPr>
-          <a:xfrm>
-            <a:off x="640080" y="2340864"/>
-            <a:ext cx="640080" cy="640080"/>
-          </a:xfrm>
-          <a:prstGeom prst="rect">
-            <a:avLst/>
-          </a:prstGeom>
-        </p:spPr>
-      </p:pic>
-      <p:sp>
-        <p:nvSpPr>
-          <p:cNvPr id="13" name="Shape 9"/>
-          <p:cNvSpPr/>
-          <p:nvPr/>
-        </p:nvSpPr>
-        <p:spPr>
-          <a:xfrm>
-            <a:off x="1417320" y="2432304"/>
+      <p:sp>
+        <p:nvSpPr>
+          <p:cNvPr id="11" name="Shape 9"/>
+          <p:cNvSpPr/>
+          <p:nvPr/>
+        </p:nvSpPr>
+        <p:spPr>
+          <a:xfrm>
+            <a:off x="658368" y="2432304"/>
             <a:ext cx="384048" cy="384048"/>
           </a:xfrm>
           <a:prstGeom prst="ellipse">
@@ -7634,13 +7442,13 @@
       </p:sp>
       <p:sp>
         <p:nvSpPr>
-          <p:cNvPr id="14" name="Text 10"/>
-          <p:cNvSpPr/>
-          <p:nvPr/>
-        </p:nvSpPr>
-        <p:spPr>
-          <a:xfrm>
-            <a:off x="1417320" y="2432304"/>
+          <p:cNvPr id="12" name="Text 10"/>
+          <p:cNvSpPr/>
+          <p:nvPr/>
+        </p:nvSpPr>
+        <p:spPr>
+          <a:xfrm>
+            <a:off x="658368" y="2432304"/>
             <a:ext cx="384048" cy="384048"/>
           </a:xfrm>
           <a:prstGeom prst="rect">
@@ -7673,14 +7481,14 @@
       </p:sp>
       <p:sp>
         <p:nvSpPr>
-          <p:cNvPr id="15" name="Text 11"/>
-          <p:cNvSpPr/>
-          <p:nvPr/>
-        </p:nvSpPr>
-        <p:spPr>
-          <a:xfrm>
-            <a:off x="1965960" y="2304288"/>
-            <a:ext cx="5029200" cy="713232"/>
+          <p:cNvPr id="13" name="Text 11"/>
+          <p:cNvSpPr/>
+          <p:nvPr/>
+        </p:nvSpPr>
+        <p:spPr>
+          <a:xfrm>
+            <a:off x="1234440" y="2304288"/>
+            <a:ext cx="5669280" cy="713232"/>
           </a:xfrm>
           <a:prstGeom prst="rect">
             <a:avLst/>
@@ -7712,7 +7520,7 @@
       </p:sp>
       <p:sp>
         <p:nvSpPr>
-          <p:cNvPr id="16" name="Text 12"/>
+          <p:cNvPr id="14" name="Text 12"/>
           <p:cNvSpPr/>
           <p:nvPr/>
         </p:nvSpPr>
@@ -7751,7 +7559,7 @@
       </p:sp>
       <p:sp>
         <p:nvSpPr>
-          <p:cNvPr id="17" name="Text 13"/>
+          <p:cNvPr id="15" name="Text 13"/>
           <p:cNvSpPr/>
           <p:nvPr/>
         </p:nvSpPr>
@@ -7790,7 +7598,7 @@
       </p:sp>
       <p:sp>
         <p:nvSpPr>
-          <p:cNvPr id="18" name="Shape 14"/>
+          <p:cNvPr id="16" name="Shape 14"/>
           <p:cNvSpPr/>
           <p:nvPr/>
         </p:nvSpPr>
@@ -7815,39 +7623,15 @@
           </a:ln>
         </p:spPr>
       </p:sp>
-      <p:pic>
-        <p:nvPicPr>
-          <p:cNvPr id="19" name="Image 2" descr="preencoded.png">    </p:cNvPr>
-          <p:cNvPicPr>
-            <a:picLocks noChangeAspect="1"/>
-          </p:cNvPicPr>
-          <p:nvPr/>
-        </p:nvPicPr>
-        <p:blipFill>
-          <a:blip r:embed="rId3"/>
-          <a:stretch>
-            <a:fillRect/>
-          </a:stretch>
-        </p:blipFill>
-        <p:spPr>
-          <a:xfrm>
-            <a:off x="640080" y="3456432"/>
-            <a:ext cx="640080" cy="640080"/>
-          </a:xfrm>
-          <a:prstGeom prst="rect">
-            <a:avLst/>
-          </a:prstGeom>
-        </p:spPr>
-      </p:pic>
-      <p:sp>
-        <p:nvSpPr>
-          <p:cNvPr id="20" name="Shape 15"/>
-          <p:cNvSpPr/>
-          <p:nvPr/>
-        </p:nvSpPr>
-        <p:spPr>
-          <a:xfrm>
-            <a:off x="1417320" y="3547872"/>
+      <p:sp>
+        <p:nvSpPr>
+          <p:cNvPr id="17" name="Shape 15"/>
+          <p:cNvSpPr/>
+          <p:nvPr/>
+        </p:nvSpPr>
+        <p:spPr>
+          <a:xfrm>
+            <a:off x="658368" y="3547872"/>
             <a:ext cx="384048" cy="384048"/>
           </a:xfrm>
           <a:prstGeom prst="ellipse">
@@ -7861,13 +7645,13 @@
       </p:sp>
       <p:sp>
         <p:nvSpPr>
-          <p:cNvPr id="21" name="Text 16"/>
-          <p:cNvSpPr/>
-          <p:nvPr/>
-        </p:nvSpPr>
-        <p:spPr>
-          <a:xfrm>
-            <a:off x="1417320" y="3547872"/>
+          <p:cNvPr id="18" name="Text 16"/>
+          <p:cNvSpPr/>
+          <p:nvPr/>
+        </p:nvSpPr>
+        <p:spPr>
+          <a:xfrm>
+            <a:off x="658368" y="3547872"/>
             <a:ext cx="384048" cy="384048"/>
           </a:xfrm>
           <a:prstGeom prst="rect">
@@ -7900,14 +7684,14 @@
       </p:sp>
       <p:sp>
         <p:nvSpPr>
-          <p:cNvPr id="22" name="Text 17"/>
-          <p:cNvSpPr/>
-          <p:nvPr/>
-        </p:nvSpPr>
-        <p:spPr>
-          <a:xfrm>
-            <a:off x="1965960" y="3419856"/>
-            <a:ext cx="5029200" cy="713232"/>
+          <p:cNvPr id="19" name="Text 17"/>
+          <p:cNvSpPr/>
+          <p:nvPr/>
+        </p:nvSpPr>
+        <p:spPr>
+          <a:xfrm>
+            <a:off x="1234440" y="3419856"/>
+            <a:ext cx="5669280" cy="713232"/>
           </a:xfrm>
           <a:prstGeom prst="rect">
             <a:avLst/>
@@ -7939,7 +7723,7 @@
       </p:sp>
       <p:sp>
         <p:nvSpPr>
-          <p:cNvPr id="23" name="Text 18"/>
+          <p:cNvPr id="20" name="Text 18"/>
           <p:cNvSpPr/>
           <p:nvPr/>
         </p:nvSpPr>
@@ -7978,7 +7762,7 @@
       </p:sp>
       <p:sp>
         <p:nvSpPr>
-          <p:cNvPr id="24" name="Text 19"/>
+          <p:cNvPr id="21" name="Text 19"/>
           <p:cNvSpPr/>
           <p:nvPr/>
         </p:nvSpPr>
@@ -8017,7 +7801,7 @@
       </p:sp>
       <p:sp>
         <p:nvSpPr>
-          <p:cNvPr id="25" name="Shape 20"/>
+          <p:cNvPr id="22" name="Shape 20"/>
           <p:cNvSpPr/>
           <p:nvPr/>
         </p:nvSpPr>
@@ -8044,7 +7828,7 @@
       </p:sp>
       <p:sp>
         <p:nvSpPr>
-          <p:cNvPr id="26" name="Text 21"/>
+          <p:cNvPr id="23" name="Text 21"/>
           <p:cNvSpPr/>
           <p:nvPr/>
         </p:nvSpPr>
@@ -8083,7 +7867,7 @@
       </p:sp>
       <p:sp>
         <p:nvSpPr>
-          <p:cNvPr id="27" name="Text 22"/>
+          <p:cNvPr id="24" name="Text 22"/>
           <p:cNvSpPr/>
           <p:nvPr/>
         </p:nvSpPr>
@@ -8122,7 +7906,7 @@
       </p:sp>
       <p:sp>
         <p:nvSpPr>
-          <p:cNvPr id="28" name="Text 23"/>
+          <p:cNvPr id="25" name="Text 23"/>
           <p:cNvSpPr/>
           <p:nvPr/>
         </p:nvSpPr>

--- a/DECK.pptx
+++ b/DECK.pptx
@@ -121,10 +121,8 @@
     <c:autoTitleDeleted val="1"/>
     <c:plotArea>
       <c:layout/>
-      <c:barChart>
-        <c:barDir val="col"/>
-        <c:grouping val="clustered"/>
-        <c:varyColors val="0"/>
+      <c:doughnutChart>
+        <c:varyColors val="1"/>
         <c:ser>
           <c:idx val="0"/>
           <c:order val="0"/>
@@ -134,78 +132,26 @@
               <c:strCache>
                 <c:ptCount val="1"/>
                 <c:pt idx="0">
-                  <c:v>Captain Recovery Estimate (/month)</c:v>
+                  <c:v>of ~180/mo</c:v>
                 </c:pt>
               </c:strCache>
             </c:strRef>
           </c:tx>
           <c:spPr>
             <a:solidFill>
-              <a:srgbClr val="1E2761"/>
+              <a:schemeClr val="accent1"/>
             </a:solidFill>
+            <a:ln w="9525" cap="flat">
+              <a:solidFill>
+                <a:srgbClr val="F9F9F9"/>
+              </a:solidFill>
+              <a:prstDash val="solid"/>
+              <a:round/>
+            </a:ln>
             <a:effectLst/>
           </c:spPr>
-          <c:invertIfNegative val="0"/>
-          <c:dLbls>
-            <c:numFmt formatCode="#,##0" sourceLinked="0"/>
-            <c:txPr>
-              <a:bodyPr/>
-              <a:lstStyle/>
-              <a:p>
-                <a:pPr>
-                  <a:defRPr b="0" i="0" strike="noStrike" sz="900" u="none">
-                    <a:solidFill>
-                      <a:srgbClr val="333333"/>
-                    </a:solidFill>
-                    <a:latin typeface="Arial"/>
-                  </a:defRPr>
-                </a:pPr>
-              </a:p>
-            </c:txPr>
-            <c:showLegendKey val="0"/>
-            <c:showVal val="1"/>
-            <c:showCatName val="0"/>
-            <c:showSerName val="0"/>
-            <c:showPercent val="0"/>
-            <c:showBubbleSize val="0"/>
-            <c:showLeaderLines val="0"/>
-          </c:dLbls>
           <c:dPt>
             <c:idx val="0"/>
-            <c:invertIfNegative val="0"/>
-            <c:bubble3D val="0"/>
-            <c:spPr>
-              <a:solidFill>
-                <a:srgbClr val="1E2761"/>
-              </a:solidFill>
-              <a:effectLst/>
-            </c:spPr>
-          </c:dPt>
-          <c:dPt>
-            <c:idx val="1"/>
-            <c:invertIfNegative val="0"/>
-            <c:bubble3D val="0"/>
-            <c:spPr>
-              <a:solidFill>
-                <a:srgbClr val="27AE60"/>
-              </a:solidFill>
-              <a:effectLst/>
-            </c:spPr>
-          </c:dPt>
-          <c:dPt>
-            <c:idx val="2"/>
-            <c:invertIfNegative val="0"/>
-            <c:bubble3D val="0"/>
-            <c:spPr>
-              <a:solidFill>
-                <a:srgbClr val="27AE60"/>
-              </a:solidFill>
-              <a:effectLst/>
-            </c:spPr>
-          </c:dPt>
-          <c:dPt>
-            <c:idx val="3"/>
-            <c:invertIfNegative val="0"/>
             <c:bubble3D val="0"/>
             <c:spPr>
               <a:solidFill>
@@ -214,242 +160,76 @@
               <a:effectLst/>
             </c:spPr>
           </c:dPt>
-          <c:cat>
-            <c:multiLvlStrRef>
-              <c:f>Sheet1!$A$2:$A$5</c:f>
-              <c:multiLvlStrCache>
-                <c:ptCount val="4"/>
-                <c:lvl>
-                  <c:pt idx="0">
-                    <c:v>Baseline
-Approved</c:v>
-                  </c:pt>
-                  <c:pt idx="1">
-                    <c:v>RC Grace
-Window (+)</c:v>
-                  </c:pt>
-                  <c:pt idx="2">
-                    <c:v>Insurance
-UX (+)</c:v>
-                  </c:pt>
-                  <c:pt idx="3">
-                    <c:v>New
-Total</c:v>
-                  </c:pt>
-                </c:lvl>
-              </c:multiLvlStrCache>
-            </c:multiLvlStrRef>
-          </c:cat>
-          <c:val>
-            <c:numRef>
-              <c:f>Sheet1!$B$2:$B$5</c:f>
-              <c:numCache>
-                <c:formatCode>General</c:formatCode>
-                <c:ptCount val="4"/>
-                <c:pt idx="0">
-                  <c:v>3946</c:v>
-                </c:pt>
-                <c:pt idx="1">
-                  <c:v>134</c:v>
-                </c:pt>
-                <c:pt idx="2">
-                  <c:v>50</c:v>
-                </c:pt>
-                <c:pt idx="3">
-                  <c:v>4130</c:v>
-                </c:pt>
-              </c:numCache>
-            </c:numRef>
-          </c:val>
-        </c:ser>
-        <c:dLbls>
-          <c:numFmt formatCode="#,##0" sourceLinked="0"/>
-          <c:txPr>
-            <a:bodyPr/>
-            <a:lstStyle/>
-            <a:p>
-              <a:pPr>
-                <a:defRPr b="0" i="0" strike="noStrike" sz="900" u="none">
-                  <a:solidFill>
-                    <a:srgbClr val="333333"/>
-                  </a:solidFill>
-                  <a:latin typeface="Arial"/>
-                </a:defRPr>
-              </a:pPr>
-            </a:p>
-          </c:txPr>
-          <c:showLegendKey val="0"/>
-          <c:showVal val="1"/>
-          <c:showCatName val="0"/>
-          <c:showSerName val="0"/>
-          <c:showPercent val="0"/>
-          <c:showBubbleSize val="0"/>
-          <c:showLeaderLines val="0"/>
-        </c:dLbls>
-        <c:gapWidth val="150"/>
-        <c:overlap val="0"/>
-        <c:axId val="2094734554"/>
-        <c:axId val="2094734552"/>
-        <c:axId val="2094734556"/>
-      </c:barChart>
-      <c:catAx>
-        <c:axId val="2094734554"/>
-        <c:scaling>
-          <c:orientation val="minMax"/>
-        </c:scaling>
-        <c:delete val="0"/>
-        <c:axPos val="b"/>
-        <c:numFmt formatCode="General" sourceLinked="1"/>
-        <c:majorTickMark val="out"/>
-        <c:minorTickMark val="none"/>
-        <c:tickLblPos val="low"/>
-        <c:spPr>
-          <a:ln w="12700" cap="flat">
-            <a:solidFill>
-              <a:srgbClr val="888888"/>
-            </a:solidFill>
-            <a:prstDash val="solid"/>
-            <a:round/>
-          </a:ln>
-        </c:spPr>
-        <c:txPr>
-          <a:bodyPr/>
-          <a:lstStyle/>
-          <a:p>
-            <a:pPr>
-              <a:defRPr sz="800" b="0" i="0" u="none" strike="noStrike">
-                <a:solidFill>
-                  <a:srgbClr val="444444"/>
-                </a:solidFill>
-                <a:latin typeface="Arial"/>
-              </a:defRPr>
-            </a:pPr>
-            <a:endParaRPr lang="en-US"/>
-          </a:p>
-        </c:txPr>
-        <c:crossAx val="2094734552"/>
-        <c:crosses val="autoZero"/>
-        <c:auto val="1"/>
-        <c:lblAlgn val="ctr"/>
-        <c:noMultiLvlLbl val="1"/>
-      </c:catAx>
-      <c:valAx>
-        <c:axId val="2094734552"/>
-        <c:scaling>
-          <c:orientation val="minMax"/>
-        </c:scaling>
-        <c:delete val="0"/>
-        <c:axPos val="l"/>
-        <c:majorGridlines>
-          <c:spPr>
-            <a:ln w="6350" cap="flat">
+          <c:dPt>
+            <c:idx val="1"/>
+            <c:bubble3D val="0"/>
+            <c:spPr>
               <a:solidFill>
-                <a:srgbClr val="E8E8E8"/>
+                <a:srgbClr val="F96167"/>
               </a:solidFill>
-              <a:prstDash val="solid"/>
-              <a:round/>
-            </a:ln>
-          </c:spPr>
-        </c:majorGridlines>
-        <c:numFmt formatCode="General" sourceLinked="0"/>
-        <c:majorTickMark val="out"/>
-        <c:minorTickMark val="none"/>
-        <c:tickLblPos val="nextTo"/>
-        <c:spPr>
-          <a:ln w="12700" cap="flat">
-            <a:solidFill>
-              <a:srgbClr val="888888"/>
-            </a:solidFill>
-            <a:prstDash val="solid"/>
-            <a:round/>
-          </a:ln>
-        </c:spPr>
-        <c:txPr>
-          <a:bodyPr/>
-          <a:lstStyle/>
-          <a:p>
-            <a:pPr>
-              <a:defRPr sz="800" b="0" i="0" u="none" strike="noStrike">
-                <a:solidFill>
-                  <a:srgbClr val="888888"/>
-                </a:solidFill>
-                <a:latin typeface="Arial"/>
-              </a:defRPr>
-            </a:pPr>
-            <a:endParaRPr lang="en-US"/>
-          </a:p>
-        </c:txPr>
-        <c:crossAx val="2094734554"/>
-        <c:crosses val="autoZero"/>
-        <c:crossBetween val="between"/>
-      </c:valAx>
-      <c:spPr>
-        <a:noFill/>
-        <a:ln>
-          <a:noFill/>
-        </a:ln>
-        <a:effectLst/>
-      </c:spPr>
-    </c:plotArea>
-    <c:plotVisOnly val="1"/>
-    <c:dispBlanksAs val="span"/>
-  </c:chart>
-  <c:spPr>
-    <a:noFill/>
-    <a:ln>
-      <a:noFill/>
-    </a:ln>
-    <a:effectLst/>
-  </c:spPr>
-  <c:externalData r:id="rId1">
-    <c:autoUpdate val="0"/>
-  </c:externalData>
-</c:chartSpace>
-</file>
-
-<file path=ppt/charts/chart2.xml><?xml version="1.0" encoding="utf-8"?>
-<c:chartSpace xmlns:c="http://schemas.openxmlformats.org/drawingml/2006/chart" xmlns:a="http://schemas.openxmlformats.org/drawingml/2006/main" xmlns:r="http://schemas.openxmlformats.org/officeDocument/2006/relationships">
-  <c:date1904 val="0"/>
-  <c:roundedCorners val="1"/>
-  <c:chart>
-    <c:autoTitleDeleted val="1"/>
-    <c:plotArea>
-      <c:layout/>
-      <c:barChart>
-        <c:barDir val="bar"/>
-        <c:grouping val="stacked"/>
-        <c:varyColors val="0"/>
-        <c:ser>
-          <c:idx val="0"/>
-          <c:order val="0"/>
-          <c:tx>
-            <c:strRef>
-              <c:f>Sheet1!$B$1</c:f>
-              <c:strCache>
-                <c:ptCount val="1"/>
-                <c:pt idx="0">
-                  <c:v>Approved</c:v>
-                </c:pt>
-              </c:strCache>
-            </c:strRef>
-          </c:tx>
-          <c:spPr>
-            <a:solidFill>
-              <a:srgbClr val="1C7293"/>
-            </a:solidFill>
-            <a:effectLst/>
-          </c:spPr>
-          <c:invertIfNegative val="0"/>
+              <a:effectLst/>
+            </c:spPr>
+          </c:dPt>
           <c:dLbls>
-            <c:numFmt formatCode="#,##0" sourceLinked="0"/>
+            <c:dLbl>
+              <c:idx val="0"/>
+              <c:numFmt formatCode="0%" sourceLinked="0"/>
+              <c:spPr/>
+              <c:txPr>
+                <a:bodyPr/>
+                <a:lstStyle/>
+                <a:p>
+                  <a:pPr>
+                    <a:defRPr sz="1200" b="0" i="0" u="none" strike="noStrike">
+                      <a:solidFill>
+                        <a:srgbClr val="000000"/>
+                      </a:solidFill>
+                      <a:latin typeface="Arial"/>
+                    </a:defRPr>
+                  </a:pPr>
+                </a:p>
+              </c:txPr>
+              <c:showLegendKey val="0"/>
+              <c:showVal val="0"/>
+              <c:showCatName val="0"/>
+              <c:showSerName val="0"/>
+              <c:showPercent val="1"/>
+              <c:showBubbleSize val="0"/>
+            </c:dLbl>
+            <c:dLbl>
+              <c:idx val="1"/>
+              <c:numFmt formatCode="0%" sourceLinked="0"/>
+              <c:spPr/>
+              <c:txPr>
+                <a:bodyPr/>
+                <a:lstStyle/>
+                <a:p>
+                  <a:pPr>
+                    <a:defRPr sz="1200" b="0" i="0" u="none" strike="noStrike">
+                      <a:solidFill>
+                        <a:srgbClr val="000000"/>
+                      </a:solidFill>
+                      <a:latin typeface="Arial"/>
+                    </a:defRPr>
+                  </a:pPr>
+                </a:p>
+              </c:txPr>
+              <c:showLegendKey val="0"/>
+              <c:showVal val="0"/>
+              <c:showCatName val="0"/>
+              <c:showSerName val="0"/>
+              <c:showPercent val="1"/>
+              <c:showBubbleSize val="0"/>
+            </c:dLbl>
+            <c:numFmt formatCode="0%" sourceLinked="0"/>
             <c:txPr>
               <a:bodyPr/>
               <a:lstStyle/>
               <a:p>
                 <a:pPr>
-                  <a:defRPr b="0" i="0" strike="noStrike" sz="800" u="none">
+                  <a:defRPr sz="1800" b="0" i="0" u="none" strike="noStrike">
                     <a:solidFill>
-                      <a:srgbClr val="FFFFFF"/>
+                      <a:srgbClr val="000000"/>
                     </a:solidFill>
                     <a:latin typeface="Arial"/>
                   </a:defRPr>
@@ -458,290 +238,44 @@
             </c:txPr>
             <c:showLegendKey val="0"/>
             <c:showVal val="0"/>
-            <c:showCatName val="0"/>
+            <c:showCatName val="1"/>
             <c:showSerName val="0"/>
-            <c:showPercent val="0"/>
+            <c:showPercent val="1"/>
             <c:showBubbleSize val="0"/>
             <c:showLeaderLines val="0"/>
           </c:dLbls>
           <c:cat>
-            <c:multiLvlStrRef>
-              <c:f>Sheet1!$A$2:$A$7</c:f>
-              <c:multiLvlStrCache>
-                <c:ptCount val="6"/>
-                <c:lvl>
-                  <c:pt idx="0">
-                    <c:v>RC</c:v>
-                  </c:pt>
-                  <c:pt idx="1">
-                    <c:v>Insurance</c:v>
-                  </c:pt>
-                  <c:pt idx="2">
-                    <c:v>DL</c:v>
-                  </c:pt>
-                  <c:pt idx="3">
-                    <c:v>Aadhaar</c:v>
-                  </c:pt>
-                  <c:pt idx="4">
-                    <c:v>Permit</c:v>
-                  </c:pt>
-                  <c:pt idx="5">
-                    <c:v>Fitness</c:v>
-                  </c:pt>
-                </c:lvl>
-              </c:multiLvlStrCache>
-            </c:multiLvlStrRef>
+            <c:strRef>
+              <c:f>Sheet1!$A$2:$A$3</c:f>
+              <c:strCache>
+                <c:ptCount val="2"/>
+                <c:pt idx="0">
+                  <c:v>C1a RC ~134</c:v>
+                </c:pt>
+                <c:pt idx="1">
+                  <c:v>C1b Insurance ~50</c:v>
+                </c:pt>
+              </c:strCache>
+            </c:strRef>
           </c:cat>
           <c:val>
             <c:numRef>
-              <c:f>Sheet1!$B$2:$B$7</c:f>
+              <c:f>Sheet1!$B$2:$B$3</c:f>
               <c:numCache>
-                <c:formatCode>General</c:formatCode>
-                <c:ptCount val="6"/>
+                <c:ptCount val="2"/>
                 <c:pt idx="0">
-                  <c:v>3946</c:v>
+                  <c:v>134</c:v>
                 </c:pt>
                 <c:pt idx="1">
-                  <c:v>3289</c:v>
-                </c:pt>
-                <c:pt idx="2">
-                  <c:v>2283</c:v>
-                </c:pt>
-                <c:pt idx="3">
-                  <c:v>2045</c:v>
-                </c:pt>
-                <c:pt idx="4">
-                  <c:v>1428</c:v>
-                </c:pt>
-                <c:pt idx="5">
-                  <c:v>775</c:v>
+                  <c:v>50</c:v>
                 </c:pt>
               </c:numCache>
             </c:numRef>
           </c:val>
         </c:ser>
-        <c:ser>
-          <c:idx val="1"/>
-          <c:order val="1"/>
-          <c:tx>
-            <c:strRef>
-              <c:f>Sheet1!$C$1</c:f>
-              <c:strCache>
-                <c:ptCount val="1"/>
-                <c:pt idx="0">
-                  <c:v>Lost</c:v>
-                </c:pt>
-              </c:strCache>
-            </c:strRef>
-          </c:tx>
-          <c:spPr>
-            <a:solidFill>
-              <a:srgbClr val="F96167"/>
-            </a:solidFill>
-            <a:effectLst/>
-          </c:spPr>
-          <c:invertIfNegative val="0"/>
-          <c:dLbls>
-            <c:numFmt formatCode="#,##0" sourceLinked="0"/>
-            <c:txPr>
-              <a:bodyPr/>
-              <a:lstStyle/>
-              <a:p>
-                <a:pPr>
-                  <a:defRPr b="0" i="0" strike="noStrike" sz="800" u="none">
-                    <a:solidFill>
-                      <a:srgbClr val="FFFFFF"/>
-                    </a:solidFill>
-                    <a:latin typeface="Arial"/>
-                  </a:defRPr>
-                </a:pPr>
-              </a:p>
-            </c:txPr>
-            <c:showLegendKey val="0"/>
-            <c:showVal val="0"/>
-            <c:showCatName val="0"/>
-            <c:showSerName val="0"/>
-            <c:showPercent val="0"/>
-            <c:showBubbleSize val="0"/>
-            <c:showLeaderLines val="0"/>
-          </c:dLbls>
-          <c:cat>
-            <c:multiLvlStrRef>
-              <c:f>Sheet1!$A$2:$A$7</c:f>
-              <c:multiLvlStrCache>
-                <c:ptCount val="6"/>
-                <c:lvl>
-                  <c:pt idx="0">
-                    <c:v>RC</c:v>
-                  </c:pt>
-                  <c:pt idx="1">
-                    <c:v>Insurance</c:v>
-                  </c:pt>
-                  <c:pt idx="2">
-                    <c:v>DL</c:v>
-                  </c:pt>
-                  <c:pt idx="3">
-                    <c:v>Aadhaar</c:v>
-                  </c:pt>
-                  <c:pt idx="4">
-                    <c:v>Permit</c:v>
-                  </c:pt>
-                  <c:pt idx="5">
-                    <c:v>Fitness</c:v>
-                  </c:pt>
-                </c:lvl>
-              </c:multiLvlStrCache>
-            </c:multiLvlStrRef>
-          </c:cat>
-          <c:val>
-            <c:numRef>
-              <c:f>Sheet1!$C$2:$C$7</c:f>
-              <c:numCache>
-                <c:formatCode>General</c:formatCode>
-                <c:ptCount val="6"/>
-                <c:pt idx="0">
-                  <c:v>5405</c:v>
-                </c:pt>
-                <c:pt idx="1">
-                  <c:v>3289</c:v>
-                </c:pt>
-                <c:pt idx="2">
-                  <c:v>1166</c:v>
-                </c:pt>
-                <c:pt idx="3">
-                  <c:v>1540</c:v>
-                </c:pt>
-                <c:pt idx="4">
-                  <c:v>2616</c:v>
-                </c:pt>
-                <c:pt idx="5">
-                  <c:v>2653</c:v>
-                </c:pt>
-              </c:numCache>
-            </c:numRef>
-          </c:val>
-        </c:ser>
-        <c:dLbls>
-          <c:numFmt formatCode="#,##0" sourceLinked="0"/>
-          <c:txPr>
-            <a:bodyPr/>
-            <a:lstStyle/>
-            <a:p>
-              <a:pPr>
-                <a:defRPr b="0" i="0" strike="noStrike" sz="800" u="none">
-                  <a:solidFill>
-                    <a:srgbClr val="FFFFFF"/>
-                  </a:solidFill>
-                  <a:latin typeface="Arial"/>
-                </a:defRPr>
-              </a:pPr>
-            </a:p>
-          </c:txPr>
-          <c:showLegendKey val="0"/>
-          <c:showVal val="0"/>
-          <c:showCatName val="0"/>
-          <c:showSerName val="0"/>
-          <c:showPercent val="0"/>
-          <c:showBubbleSize val="0"/>
-          <c:showLeaderLines val="0"/>
-        </c:dLbls>
-        <c:gapWidth val="50"/>
-        <c:overlap val="100"/>
-        <c:axId val="2094734554"/>
-        <c:axId val="2094734552"/>
-        <c:axId val="2094734556"/>
-      </c:barChart>
-      <c:catAx>
-        <c:axId val="2094734554"/>
-        <c:scaling>
-          <c:orientation val="minMax"/>
-        </c:scaling>
-        <c:delete val="0"/>
-        <c:axPos val="l"/>
-        <c:numFmt formatCode="General" sourceLinked="1"/>
-        <c:majorTickMark val="out"/>
-        <c:minorTickMark val="none"/>
-        <c:tickLblPos val="nextTo"/>
-        <c:spPr>
-          <a:ln w="12700" cap="flat">
-            <a:solidFill>
-              <a:srgbClr val="888888"/>
-            </a:solidFill>
-            <a:prstDash val="solid"/>
-            <a:round/>
-          </a:ln>
-        </c:spPr>
-        <c:txPr>
-          <a:bodyPr/>
-          <a:lstStyle/>
-          <a:p>
-            <a:pPr>
-              <a:defRPr sz="900" b="0" i="0" u="none" strike="noStrike">
-                <a:solidFill>
-                  <a:srgbClr val="444444"/>
-                </a:solidFill>
-                <a:latin typeface="Arial"/>
-              </a:defRPr>
-            </a:pPr>
-            <a:endParaRPr lang="en-US"/>
-          </a:p>
-        </c:txPr>
-        <c:crossAx val="2094734552"/>
-        <c:crosses val="autoZero"/>
-        <c:auto val="1"/>
-        <c:lblAlgn val="ctr"/>
-        <c:noMultiLvlLbl val="1"/>
-      </c:catAx>
-      <c:valAx>
-        <c:axId val="2094734552"/>
-        <c:scaling>
-          <c:orientation val="minMax"/>
-        </c:scaling>
-        <c:delete val="0"/>
-        <c:axPos val="b"/>
-        <c:majorGridlines>
-          <c:spPr>
-            <a:ln w="6350" cap="flat">
-              <a:solidFill>
-                <a:srgbClr val="E8E8E8"/>
-              </a:solidFill>
-              <a:prstDash val="solid"/>
-              <a:round/>
-            </a:ln>
-          </c:spPr>
-        </c:majorGridlines>
-        <c:numFmt formatCode="General" sourceLinked="0"/>
-        <c:majorTickMark val="out"/>
-        <c:minorTickMark val="none"/>
-        <c:tickLblPos val="low"/>
-        <c:spPr>
-          <a:ln w="12700" cap="flat">
-            <a:solidFill>
-              <a:srgbClr val="888888"/>
-            </a:solidFill>
-            <a:prstDash val="solid"/>
-            <a:round/>
-          </a:ln>
-        </c:spPr>
-        <c:txPr>
-          <a:bodyPr/>
-          <a:lstStyle/>
-          <a:p>
-            <a:pPr>
-              <a:defRPr sz="800" b="0" i="0" u="none" strike="noStrike">
-                <a:solidFill>
-                  <a:srgbClr val="888888"/>
-                </a:solidFill>
-                <a:latin typeface="Arial"/>
-              </a:defRPr>
-            </a:pPr>
-            <a:endParaRPr lang="en-US"/>
-          </a:p>
-        </c:txPr>
-        <c:crossAx val="2094734554"/>
-        <c:crosses val="autoZero"/>
-        <c:crossBetween val="between"/>
-      </c:valAx>
+        <c:firstSliceAng val="0"/>
+        <c:holeSize val="50"/>
+      </c:doughnutChart>
       <c:spPr>
         <a:noFill/>
         <a:ln>
@@ -772,7 +306,216 @@
     <c:dispBlanksAs val="span"/>
   </c:chart>
   <c:spPr>
-    <a:noFill/>
+    <a:solidFill>
+      <a:srgbClr val="FFFFFF"/>
+    </a:solidFill>
+    <a:ln>
+      <a:noFill/>
+    </a:ln>
+    <a:effectLst/>
+  </c:spPr>
+  <c:externalData r:id="rId1">
+    <c:autoUpdate val="0"/>
+  </c:externalData>
+</c:chartSpace>
+</file>
+
+<file path=ppt/charts/chart2.xml><?xml version="1.0" encoding="utf-8"?>
+<c:chartSpace xmlns:c="http://schemas.openxmlformats.org/drawingml/2006/chart" xmlns:a="http://schemas.openxmlformats.org/drawingml/2006/main" xmlns:r="http://schemas.openxmlformats.org/officeDocument/2006/relationships">
+  <c:date1904 val="0"/>
+  <c:roundedCorners val="1"/>
+  <c:chart>
+    <c:autoTitleDeleted val="1"/>
+    <c:plotArea>
+      <c:layout/>
+      <c:doughnutChart>
+        <c:varyColors val="1"/>
+        <c:ser>
+          <c:idx val="0"/>
+          <c:order val="0"/>
+          <c:tx>
+            <c:strRef>
+              <c:f>Sheet1!$B$1</c:f>
+              <c:strCache>
+                <c:ptCount val="1"/>
+                <c:pt idx="0">
+                  <c:v>RC lost</c:v>
+                </c:pt>
+              </c:strCache>
+            </c:strRef>
+          </c:tx>
+          <c:spPr>
+            <a:solidFill>
+              <a:schemeClr val="accent1"/>
+            </a:solidFill>
+            <a:ln w="9525" cap="flat">
+              <a:solidFill>
+                <a:srgbClr val="F9F9F9"/>
+              </a:solidFill>
+              <a:prstDash val="solid"/>
+              <a:round/>
+            </a:ln>
+            <a:effectLst/>
+          </c:spPr>
+          <c:dPt>
+            <c:idx val="0"/>
+            <c:bubble3D val="0"/>
+            <c:spPr>
+              <a:solidFill>
+                <a:srgbClr val="F96167"/>
+              </a:solidFill>
+              <a:effectLst/>
+            </c:spPr>
+          </c:dPt>
+          <c:dPt>
+            <c:idx val="1"/>
+            <c:bubble3D val="0"/>
+            <c:spPr>
+              <a:solidFill>
+                <a:srgbClr val="CADCFC"/>
+              </a:solidFill>
+              <a:effectLst/>
+            </c:spPr>
+          </c:dPt>
+          <c:dLbls>
+            <c:dLbl>
+              <c:idx val="0"/>
+              <c:numFmt formatCode="0%" sourceLinked="0"/>
+              <c:spPr/>
+              <c:txPr>
+                <a:bodyPr/>
+                <a:lstStyle/>
+                <a:p>
+                  <a:pPr>
+                    <a:defRPr sz="1200" b="0" i="0" u="none" strike="noStrike">
+                      <a:solidFill>
+                        <a:srgbClr val="000000"/>
+                      </a:solidFill>
+                      <a:latin typeface="Arial"/>
+                    </a:defRPr>
+                  </a:pPr>
+                </a:p>
+              </c:txPr>
+              <c:showLegendKey val="0"/>
+              <c:showVal val="0"/>
+              <c:showCatName val="0"/>
+              <c:showSerName val="0"/>
+              <c:showPercent val="1"/>
+              <c:showBubbleSize val="0"/>
+            </c:dLbl>
+            <c:dLbl>
+              <c:idx val="1"/>
+              <c:numFmt formatCode="0%" sourceLinked="0"/>
+              <c:spPr/>
+              <c:txPr>
+                <a:bodyPr/>
+                <a:lstStyle/>
+                <a:p>
+                  <a:pPr>
+                    <a:defRPr sz="1200" b="0" i="0" u="none" strike="noStrike">
+                      <a:solidFill>
+                        <a:srgbClr val="000000"/>
+                      </a:solidFill>
+                      <a:latin typeface="Arial"/>
+                    </a:defRPr>
+                  </a:pPr>
+                </a:p>
+              </c:txPr>
+              <c:showLegendKey val="0"/>
+              <c:showVal val="0"/>
+              <c:showCatName val="0"/>
+              <c:showSerName val="0"/>
+              <c:showPercent val="1"/>
+              <c:showBubbleSize val="0"/>
+            </c:dLbl>
+            <c:numFmt formatCode="0%" sourceLinked="0"/>
+            <c:txPr>
+              <a:bodyPr/>
+              <a:lstStyle/>
+              <a:p>
+                <a:pPr>
+                  <a:defRPr sz="1800" b="0" i="0" u="none" strike="noStrike">
+                    <a:solidFill>
+                      <a:srgbClr val="000000"/>
+                    </a:solidFill>
+                    <a:latin typeface="Arial"/>
+                  </a:defRPr>
+                </a:pPr>
+              </a:p>
+            </c:txPr>
+            <c:showLegendKey val="0"/>
+            <c:showVal val="0"/>
+            <c:showCatName val="1"/>
+            <c:showSerName val="0"/>
+            <c:showPercent val="1"/>
+            <c:showBubbleSize val="0"/>
+            <c:showLeaderLines val="0"/>
+          </c:dLbls>
+          <c:cat>
+            <c:strRef>
+              <c:f>Sheet1!$A$2:$A$3</c:f>
+              <c:strCache>
+                <c:ptCount val="2"/>
+                <c:pt idx="0">
+                  <c:v>Capture-only 1,637</c:v>
+                </c:pt>
+                <c:pt idx="1">
+                  <c:v>Other RC 3,768</c:v>
+                </c:pt>
+              </c:strCache>
+            </c:strRef>
+          </c:cat>
+          <c:val>
+            <c:numRef>
+              <c:f>Sheet1!$B$2:$B$3</c:f>
+              <c:numCache>
+                <c:ptCount val="2"/>
+                <c:pt idx="0">
+                  <c:v>1637</c:v>
+                </c:pt>
+                <c:pt idx="1">
+                  <c:v>3768</c:v>
+                </c:pt>
+              </c:numCache>
+            </c:numRef>
+          </c:val>
+        </c:ser>
+        <c:firstSliceAng val="0"/>
+        <c:holeSize val="50"/>
+      </c:doughnutChart>
+      <c:spPr>
+        <a:noFill/>
+        <a:ln>
+          <a:noFill/>
+        </a:ln>
+        <a:effectLst/>
+      </c:spPr>
+    </c:plotArea>
+    <c:legend>
+      <c:legendPos val="b"/>
+      <c:overlay val="0"/>
+      <c:txPr>
+        <a:bodyPr/>
+        <a:lstStyle/>
+        <a:p>
+          <a:pPr>
+            <a:defRPr sz="900">
+              <a:solidFill>
+                <a:srgbClr val="444444"/>
+              </a:solidFill>
+            </a:defRPr>
+          </a:pPr>
+          <a:endParaRPr lang="en-US"/>
+        </a:p>
+      </c:txPr>
+    </c:legend>
+    <c:plotVisOnly val="1"/>
+    <c:dispBlanksAs val="span"/>
+  </c:chart>
+  <c:spPr>
+    <a:solidFill>
+      <a:srgbClr val="FFFFFF"/>
+    </a:solidFill>
     <a:ln>
       <a:noFill/>
     </a:ln>
@@ -1182,8 +925,8 @@
     <c:autoTitleDeleted val="1"/>
     <c:plotArea>
       <c:layout/>
-      <c:lineChart>
-        <c:varyColors val="0"/>
+      <c:pieChart>
+        <c:varyColors val="1"/>
         <c:ser>
           <c:idx val="0"/>
           <c:order val="0"/>
@@ -1193,33 +936,102 @@
               <c:strCache>
                 <c:ptCount val="1"/>
                 <c:pt idx="0">
-                  <c:v>Captains Online</c:v>
+                  <c:v>Airport unfulfilled</c:v>
                 </c:pt>
               </c:strCache>
             </c:strRef>
           </c:tx>
           <c:spPr>
             <a:solidFill>
-              <a:srgbClr val="FFC400"/>
+              <a:schemeClr val="accent1"/>
             </a:solidFill>
-            <a:ln w="31750" cap="flat">
+            <a:ln w="9525" cap="flat">
               <a:solidFill>
-                <a:srgbClr val="FFC400"/>
+                <a:srgbClr val="F9F9F9"/>
               </a:solidFill>
               <a:prstDash val="solid"/>
               <a:round/>
             </a:ln>
             <a:effectLst/>
           </c:spPr>
-          <c:invertIfNegative val="0"/>
+          <c:dPt>
+            <c:idx val="0"/>
+            <c:bubble3D val="0"/>
+            <c:spPr>
+              <a:solidFill>
+                <a:srgbClr val="F96167"/>
+              </a:solidFill>
+              <a:effectLst/>
+            </c:spPr>
+          </c:dPt>
+          <c:dPt>
+            <c:idx val="1"/>
+            <c:bubble3D val="0"/>
+            <c:spPr>
+              <a:solidFill>
+                <a:srgbClr val="FFC400"/>
+              </a:solidFill>
+              <a:effectLst/>
+            </c:spPr>
+          </c:dPt>
           <c:dLbls>
-            <c:numFmt formatCode="#,##0" sourceLinked="0"/>
+            <c:dLbl>
+              <c:idx val="0"/>
+              <c:numFmt formatCode="0%" sourceLinked="0"/>
+              <c:spPr/>
+              <c:txPr>
+                <a:bodyPr/>
+                <a:lstStyle/>
+                <a:p>
+                  <a:pPr>
+                    <a:defRPr sz="1200" b="0" i="0" u="none" strike="noStrike">
+                      <a:solidFill>
+                        <a:srgbClr val="000000"/>
+                      </a:solidFill>
+                      <a:latin typeface="Arial"/>
+                    </a:defRPr>
+                  </a:pPr>
+                </a:p>
+              </c:txPr>
+              <c:showLegendKey val="0"/>
+              <c:showVal val="0"/>
+              <c:showCatName val="0"/>
+              <c:showSerName val="0"/>
+              <c:showPercent val="1"/>
+              <c:showBubbleSize val="0"/>
+            </c:dLbl>
+            <c:dLbl>
+              <c:idx val="1"/>
+              <c:numFmt formatCode="0%" sourceLinked="0"/>
+              <c:spPr/>
+              <c:txPr>
+                <a:bodyPr/>
+                <a:lstStyle/>
+                <a:p>
+                  <a:pPr>
+                    <a:defRPr sz="1200" b="0" i="0" u="none" strike="noStrike">
+                      <a:solidFill>
+                        <a:srgbClr val="000000"/>
+                      </a:solidFill>
+                      <a:latin typeface="Arial"/>
+                    </a:defRPr>
+                  </a:pPr>
+                </a:p>
+              </c:txPr>
+              <c:showLegendKey val="0"/>
+              <c:showVal val="0"/>
+              <c:showCatName val="0"/>
+              <c:showSerName val="0"/>
+              <c:showPercent val="1"/>
+              <c:showBubbleSize val="0"/>
+            </c:dLbl>
+            <c:numFmt formatCode="0%" sourceLinked="0"/>
             <c:txPr>
               <a:bodyPr/>
               <a:lstStyle/>
               <a:p>
                 <a:pPr>
-                  <a:defRPr b="0" i="0" strike="noStrike" sz="1200" u="none">
+                  <a:defRPr sz="1800" b="0" i="0" u="none" strike="noStrike">
                     <a:solidFill>
                       <a:srgbClr val="000000"/>
                     </a:solidFill>
@@ -1228,406 +1040,46 @@
                 </a:pPr>
               </a:p>
             </c:txPr>
+            <c:dLblPos val="ctr"/>
             <c:showLegendKey val="0"/>
             <c:showVal val="0"/>
-            <c:showCatName val="0"/>
+            <c:showCatName val="1"/>
             <c:showSerName val="0"/>
-            <c:showPercent val="0"/>
+            <c:showPercent val="1"/>
             <c:showBubbleSize val="0"/>
             <c:showLeaderLines val="0"/>
           </c:dLbls>
-          <c:marker>
-            <c:symbol val="circle"/>
-            <c:size val="6"/>
-            <c:spPr>
-              <a:solidFill>
-                <a:srgbClr val="FFC400"/>
-              </a:solidFill>
-              <a:ln w="9525" cap="flat">
-                <a:solidFill>
-                  <a:srgbClr val="FFC400"/>
-                </a:solidFill>
-                <a:prstDash val="solid"/>
-                <a:round/>
-              </a:ln>
-              <a:effectLst/>
-            </c:spPr>
-          </c:marker>
           <c:cat>
-            <c:multiLvlStrRef>
-              <c:f>Sheet1!$A$2:$A$13</c:f>
-              <c:multiLvlStrCache>
-                <c:ptCount val="12"/>
-                <c:lvl>
-                  <c:pt idx="0">
-                    <c:v>18</c:v>
-                  </c:pt>
-                  <c:pt idx="1">
-                    <c:v>19</c:v>
-                  </c:pt>
-                  <c:pt idx="2">
-                    <c:v>20</c:v>
-                  </c:pt>
-                  <c:pt idx="3">
-                    <c:v>21</c:v>
-                  </c:pt>
-                  <c:pt idx="4">
-                    <c:v>22</c:v>
-                  </c:pt>
-                  <c:pt idx="5">
-                    <c:v>23</c:v>
-                  </c:pt>
-                  <c:pt idx="6">
-                    <c:v>00</c:v>
-                  </c:pt>
-                  <c:pt idx="7">
-                    <c:v>01</c:v>
-                  </c:pt>
-                  <c:pt idx="8">
-                    <c:v>02</c:v>
-                  </c:pt>
-                  <c:pt idx="9">
-                    <c:v>03</c:v>
-                  </c:pt>
-                  <c:pt idx="10">
-                    <c:v>04</c:v>
-                  </c:pt>
-                  <c:pt idx="11">
-                    <c:v>05</c:v>
-                  </c:pt>
-                </c:lvl>
-              </c:multiLvlStrCache>
-            </c:multiLvlStrRef>
+            <c:strRef>
+              <c:f>Sheet1!$A$2:$A$3</c:f>
+              <c:strCache>
+                <c:ptCount val="2"/>
+                <c:pt idx="0">
+                  <c:v>21:00–03:59</c:v>
+                </c:pt>
+                <c:pt idx="1">
+                  <c:v>Rest of day</c:v>
+                </c:pt>
+              </c:strCache>
+            </c:strRef>
           </c:cat>
           <c:val>
             <c:numRef>
-              <c:f>Sheet1!$B$2:$B$13</c:f>
+              <c:f>Sheet1!$B$2:$B$3</c:f>
               <c:numCache>
-                <c:formatCode>General</c:formatCode>
-                <c:ptCount val="12"/>
+                <c:ptCount val="2"/>
                 <c:pt idx="0">
-                  <c:v>37</c:v>
+                  <c:v>84</c:v>
                 </c:pt>
                 <c:pt idx="1">
-                  <c:v>34</c:v>
-                </c:pt>
-                <c:pt idx="2">
-                  <c:v>28</c:v>
-                </c:pt>
-                <c:pt idx="3">
-                  <c:v>18</c:v>
-                </c:pt>
-                <c:pt idx="4">
-                  <c:v>14</c:v>
-                </c:pt>
-                <c:pt idx="5">
-                  <c:v>13</c:v>
-                </c:pt>
-                <c:pt idx="6">
-                  <c:v>13</c:v>
-                </c:pt>
-                <c:pt idx="7">
-                  <c:v>12</c:v>
-                </c:pt>
-                <c:pt idx="8">
-                  <c:v>11</c:v>
-                </c:pt>
-                <c:pt idx="9">
-                  <c:v>13</c:v>
-                </c:pt>
-                <c:pt idx="10">
-                  <c:v>18</c:v>
-                </c:pt>
-                <c:pt idx="11">
-                  <c:v>29</c:v>
+                  <c:v>16</c:v>
                 </c:pt>
               </c:numCache>
             </c:numRef>
           </c:val>
-          <c:smooth val="0"/>
         </c:ser>
-        <c:ser>
-          <c:idx val="1"/>
-          <c:order val="1"/>
-          <c:tx>
-            <c:strRef>
-              <c:f>Sheet1!$C$1</c:f>
-              <c:strCache>
-                <c:ptCount val="1"/>
-                <c:pt idx="0">
-                  <c:v>Demand Index</c:v>
-                </c:pt>
-              </c:strCache>
-            </c:strRef>
-          </c:tx>
-          <c:spPr>
-            <a:solidFill>
-              <a:srgbClr val="F96167"/>
-            </a:solidFill>
-            <a:ln w="31750" cap="flat">
-              <a:solidFill>
-                <a:srgbClr val="F96167"/>
-              </a:solidFill>
-              <a:prstDash val="solid"/>
-              <a:round/>
-            </a:ln>
-            <a:effectLst/>
-          </c:spPr>
-          <c:invertIfNegative val="0"/>
-          <c:dLbls>
-            <c:numFmt formatCode="#,##0" sourceLinked="0"/>
-            <c:txPr>
-              <a:bodyPr/>
-              <a:lstStyle/>
-              <a:p>
-                <a:pPr>
-                  <a:defRPr b="0" i="0" strike="noStrike" sz="1200" u="none">
-                    <a:solidFill>
-                      <a:srgbClr val="000000"/>
-                    </a:solidFill>
-                    <a:latin typeface="Arial"/>
-                  </a:defRPr>
-                </a:pPr>
-              </a:p>
-            </c:txPr>
-            <c:showLegendKey val="0"/>
-            <c:showVal val="0"/>
-            <c:showCatName val="0"/>
-            <c:showSerName val="0"/>
-            <c:showPercent val="0"/>
-            <c:showBubbleSize val="0"/>
-            <c:showLeaderLines val="0"/>
-          </c:dLbls>
-          <c:marker>
-            <c:symbol val="circle"/>
-            <c:size val="6"/>
-            <c:spPr>
-              <a:solidFill>
-                <a:srgbClr val="F96167"/>
-              </a:solidFill>
-              <a:ln w="9525" cap="flat">
-                <a:solidFill>
-                  <a:srgbClr val="F96167"/>
-                </a:solidFill>
-                <a:prstDash val="solid"/>
-                <a:round/>
-              </a:ln>
-              <a:effectLst/>
-            </c:spPr>
-          </c:marker>
-          <c:cat>
-            <c:multiLvlStrRef>
-              <c:f>Sheet1!$A$2:$A$13</c:f>
-              <c:multiLvlStrCache>
-                <c:ptCount val="12"/>
-                <c:lvl>
-                  <c:pt idx="0">
-                    <c:v>18</c:v>
-                  </c:pt>
-                  <c:pt idx="1">
-                    <c:v>19</c:v>
-                  </c:pt>
-                  <c:pt idx="2">
-                    <c:v>20</c:v>
-                  </c:pt>
-                  <c:pt idx="3">
-                    <c:v>21</c:v>
-                  </c:pt>
-                  <c:pt idx="4">
-                    <c:v>22</c:v>
-                  </c:pt>
-                  <c:pt idx="5">
-                    <c:v>23</c:v>
-                  </c:pt>
-                  <c:pt idx="6">
-                    <c:v>00</c:v>
-                  </c:pt>
-                  <c:pt idx="7">
-                    <c:v>01</c:v>
-                  </c:pt>
-                  <c:pt idx="8">
-                    <c:v>02</c:v>
-                  </c:pt>
-                  <c:pt idx="9">
-                    <c:v>03</c:v>
-                  </c:pt>
-                  <c:pt idx="10">
-                    <c:v>04</c:v>
-                  </c:pt>
-                  <c:pt idx="11">
-                    <c:v>05</c:v>
-                  </c:pt>
-                </c:lvl>
-              </c:multiLvlStrCache>
-            </c:multiLvlStrRef>
-          </c:cat>
-          <c:val>
-            <c:numRef>
-              <c:f>Sheet1!$C$2:$C$13</c:f>
-              <c:numCache>
-                <c:formatCode>General</c:formatCode>
-                <c:ptCount val="12"/>
-                <c:pt idx="0">
-                  <c:v>45</c:v>
-                </c:pt>
-                <c:pt idx="1">
-                  <c:v>50</c:v>
-                </c:pt>
-                <c:pt idx="2">
-                  <c:v>55</c:v>
-                </c:pt>
-                <c:pt idx="3">
-                  <c:v>70</c:v>
-                </c:pt>
-                <c:pt idx="4">
-                  <c:v>75</c:v>
-                </c:pt>
-                <c:pt idx="5">
-                  <c:v>72</c:v>
-                </c:pt>
-                <c:pt idx="6">
-                  <c:v>65</c:v>
-                </c:pt>
-                <c:pt idx="7">
-                  <c:v>60</c:v>
-                </c:pt>
-                <c:pt idx="8">
-                  <c:v>55</c:v>
-                </c:pt>
-                <c:pt idx="9">
-                  <c:v>50</c:v>
-                </c:pt>
-                <c:pt idx="10">
-                  <c:v>40</c:v>
-                </c:pt>
-                <c:pt idx="11">
-                  <c:v>35</c:v>
-                </c:pt>
-              </c:numCache>
-            </c:numRef>
-          </c:val>
-          <c:smooth val="0"/>
-        </c:ser>
-        <c:dLbls>
-          <c:numFmt formatCode="#,##0" sourceLinked="0"/>
-          <c:txPr>
-            <a:bodyPr/>
-            <a:lstStyle/>
-            <a:p>
-              <a:pPr>
-                <a:defRPr b="0" i="0" strike="noStrike" sz="1200" u="none">
-                  <a:solidFill>
-                    <a:srgbClr val="000000"/>
-                  </a:solidFill>
-                  <a:latin typeface="Arial"/>
-                </a:defRPr>
-              </a:pPr>
-            </a:p>
-          </c:txPr>
-          <c:showLegendKey val="0"/>
-          <c:showVal val="0"/>
-          <c:showCatName val="0"/>
-          <c:showSerName val="0"/>
-          <c:showPercent val="0"/>
-          <c:showBubbleSize val="0"/>
-          <c:showLeaderLines val="0"/>
-        </c:dLbls>
-        <c:marker val="1"/>
-        <c:axId val="2094734554"/>
-        <c:axId val="2094734552"/>
-        <c:axId val="2094734556"/>
-      </c:lineChart>
-      <c:catAx>
-        <c:axId val="2094734554"/>
-        <c:scaling>
-          <c:orientation val="minMax"/>
-        </c:scaling>
-        <c:delete val="0"/>
-        <c:axPos val="b"/>
-        <c:numFmt formatCode="General" sourceLinked="1"/>
-        <c:majorTickMark val="out"/>
-        <c:minorTickMark val="none"/>
-        <c:tickLblPos val="low"/>
-        <c:spPr>
-          <a:ln w="12700" cap="flat">
-            <a:solidFill>
-              <a:srgbClr val="888888"/>
-            </a:solidFill>
-            <a:prstDash val="solid"/>
-            <a:round/>
-          </a:ln>
-        </c:spPr>
-        <c:txPr>
-          <a:bodyPr/>
-          <a:lstStyle/>
-          <a:p>
-            <a:pPr>
-              <a:defRPr sz="850" b="0" i="0" u="none" strike="noStrike">
-                <a:solidFill>
-                  <a:srgbClr val="444444"/>
-                </a:solidFill>
-                <a:latin typeface="Arial"/>
-              </a:defRPr>
-            </a:pPr>
-            <a:endParaRPr lang="en-US"/>
-          </a:p>
-        </c:txPr>
-        <c:crossAx val="2094734552"/>
-        <c:crosses val="autoZero"/>
-        <c:auto val="1"/>
-        <c:lblAlgn val="ctr"/>
-        <c:noMultiLvlLbl val="1"/>
-      </c:catAx>
-      <c:valAx>
-        <c:axId val="2094734552"/>
-        <c:scaling>
-          <c:orientation val="minMax"/>
-        </c:scaling>
-        <c:delete val="0"/>
-        <c:axPos val="l"/>
-        <c:majorGridlines>
-          <c:spPr>
-            <a:ln w="6350" cap="flat">
-              <a:solidFill>
-                <a:srgbClr val="E8E8E8"/>
-              </a:solidFill>
-              <a:prstDash val="solid"/>
-              <a:round/>
-            </a:ln>
-          </c:spPr>
-        </c:majorGridlines>
-        <c:numFmt formatCode="General" sourceLinked="0"/>
-        <c:majorTickMark val="out"/>
-        <c:minorTickMark val="none"/>
-        <c:tickLblPos val="nextTo"/>
-        <c:spPr>
-          <a:ln w="12700" cap="flat">
-            <a:solidFill>
-              <a:srgbClr val="888888"/>
-            </a:solidFill>
-            <a:prstDash val="solid"/>
-            <a:round/>
-          </a:ln>
-        </c:spPr>
-        <c:txPr>
-          <a:bodyPr/>
-          <a:lstStyle/>
-          <a:p>
-            <a:pPr>
-              <a:defRPr sz="800" b="0" i="0" u="none" strike="noStrike">
-                <a:solidFill>
-                  <a:srgbClr val="888888"/>
-                </a:solidFill>
-                <a:latin typeface="Arial"/>
-              </a:defRPr>
-            </a:pPr>
-            <a:endParaRPr lang="en-US"/>
-          </a:p>
-        </c:txPr>
-        <c:crossAx val="2094734554"/>
-        <c:crosses val="autoZero"/>
-        <c:crossBetween val="between"/>
-      </c:valAx>
+        <c:firstSliceAng val="0"/>
+      </c:pieChart>
       <c:spPr>
         <a:noFill/>
         <a:ln>
@@ -1658,7 +1110,9 @@
     <c:dispBlanksAs val="span"/>
   </c:chart>
   <c:spPr>
-    <a:noFill/>
+    <a:solidFill>
+      <a:srgbClr val="FFFFFF"/>
+    </a:solidFill>
     <a:ln>
       <a:noFill/>
     </a:ln>
@@ -4148,7 +3602,7 @@
                 <a:ea typeface="Calibri" pitchFamily="34" charset="-122"/>
                 <a:cs typeface="Calibri" pitchFamily="34" charset="-120"/>
               </a:rPr>
-              <a:t>Approved captain recovery by fix</a:t>
+              <a:t>Split of the ~180  (disjoint C1a + C1b)</a:t>
             </a:r>
             <a:endParaRPr lang="en-US" sz="1000" dirty="0"/>
           </a:p>
@@ -4161,8 +3615,8 @@
           <p:nvPr/>
         </p:nvGraphicFramePr>
         <p:xfrm>
-          <a:off x="594360" y="2359152"/>
-          <a:ext cx="6675120" cy="3383280"/>
+          <a:off x="594360" y="2331720"/>
+          <a:ext cx="6675120" cy="3429000"/>
         </p:xfrm>
         <a:graphic xmlns:a="http://schemas.openxmlformats.org/drawingml/2006/main">
           <a:graphicData uri="http://schemas.openxmlformats.org/drawingml/2006/chart">
@@ -4769,7 +4223,7 @@
                 <a:ea typeface="Calibri" pitchFamily="34" charset="-122"/>
                 <a:cs typeface="Calibri" pitchFamily="34" charset="-120"/>
               </a:rPr>
-              <a:t>Funnel: approved vs. lost by document</a:t>
+              <a:t>RC loss: only the photo slice is C1a</a:t>
             </a:r>
             <a:endParaRPr lang="en-US" sz="950" dirty="0"/>
           </a:p>
@@ -6437,7 +5891,7 @@
                 <a:ea typeface="Calibri" pitchFamily="34" charset="-122"/>
                 <a:cs typeface="Calibri" pitchFamily="34" charset="-120"/>
               </a:rPr>
-              <a:t>Captains online vs demand index by hour (18:00–05:00)</a:t>
+              <a:t>When the pain sits (unfulfilled volume)</a:t>
             </a:r>
             <a:endParaRPr lang="en-US" sz="900" dirty="0"/>
           </a:p>

--- a/DECK.pptx
+++ b/DECK.pptx
@@ -121,1017 +121,6 @@
     <c:autoTitleDeleted val="1"/>
     <c:plotArea>
       <c:layout/>
-      <c:doughnutChart>
-        <c:varyColors val="1"/>
-        <c:ser>
-          <c:idx val="0"/>
-          <c:order val="0"/>
-          <c:tx>
-            <c:strRef>
-              <c:f>Sheet1!$B$1</c:f>
-              <c:strCache>
-                <c:ptCount val="1"/>
-                <c:pt idx="0">
-                  <c:v>of ~180/mo</c:v>
-                </c:pt>
-              </c:strCache>
-            </c:strRef>
-          </c:tx>
-          <c:spPr>
-            <a:solidFill>
-              <a:schemeClr val="accent1"/>
-            </a:solidFill>
-            <a:ln w="9525" cap="flat">
-              <a:solidFill>
-                <a:srgbClr val="F9F9F9"/>
-              </a:solidFill>
-              <a:prstDash val="solid"/>
-              <a:round/>
-            </a:ln>
-            <a:effectLst/>
-          </c:spPr>
-          <c:dPt>
-            <c:idx val="0"/>
-            <c:bubble3D val="0"/>
-            <c:spPr>
-              <a:solidFill>
-                <a:srgbClr val="1C7293"/>
-              </a:solidFill>
-              <a:effectLst/>
-            </c:spPr>
-          </c:dPt>
-          <c:dPt>
-            <c:idx val="1"/>
-            <c:bubble3D val="0"/>
-            <c:spPr>
-              <a:solidFill>
-                <a:srgbClr val="F96167"/>
-              </a:solidFill>
-              <a:effectLst/>
-            </c:spPr>
-          </c:dPt>
-          <c:dLbls>
-            <c:dLbl>
-              <c:idx val="0"/>
-              <c:numFmt formatCode="0%" sourceLinked="0"/>
-              <c:spPr/>
-              <c:txPr>
-                <a:bodyPr/>
-                <a:lstStyle/>
-                <a:p>
-                  <a:pPr>
-                    <a:defRPr sz="1200" b="0" i="0" u="none" strike="noStrike">
-                      <a:solidFill>
-                        <a:srgbClr val="000000"/>
-                      </a:solidFill>
-                      <a:latin typeface="Arial"/>
-                    </a:defRPr>
-                  </a:pPr>
-                </a:p>
-              </c:txPr>
-              <c:showLegendKey val="0"/>
-              <c:showVal val="0"/>
-              <c:showCatName val="0"/>
-              <c:showSerName val="0"/>
-              <c:showPercent val="1"/>
-              <c:showBubbleSize val="0"/>
-            </c:dLbl>
-            <c:dLbl>
-              <c:idx val="1"/>
-              <c:numFmt formatCode="0%" sourceLinked="0"/>
-              <c:spPr/>
-              <c:txPr>
-                <a:bodyPr/>
-                <a:lstStyle/>
-                <a:p>
-                  <a:pPr>
-                    <a:defRPr sz="1200" b="0" i="0" u="none" strike="noStrike">
-                      <a:solidFill>
-                        <a:srgbClr val="000000"/>
-                      </a:solidFill>
-                      <a:latin typeface="Arial"/>
-                    </a:defRPr>
-                  </a:pPr>
-                </a:p>
-              </c:txPr>
-              <c:showLegendKey val="0"/>
-              <c:showVal val="0"/>
-              <c:showCatName val="0"/>
-              <c:showSerName val="0"/>
-              <c:showPercent val="1"/>
-              <c:showBubbleSize val="0"/>
-            </c:dLbl>
-            <c:numFmt formatCode="0%" sourceLinked="0"/>
-            <c:txPr>
-              <a:bodyPr/>
-              <a:lstStyle/>
-              <a:p>
-                <a:pPr>
-                  <a:defRPr sz="1800" b="0" i="0" u="none" strike="noStrike">
-                    <a:solidFill>
-                      <a:srgbClr val="000000"/>
-                    </a:solidFill>
-                    <a:latin typeface="Arial"/>
-                  </a:defRPr>
-                </a:pPr>
-              </a:p>
-            </c:txPr>
-            <c:showLegendKey val="0"/>
-            <c:showVal val="0"/>
-            <c:showCatName val="1"/>
-            <c:showSerName val="0"/>
-            <c:showPercent val="1"/>
-            <c:showBubbleSize val="0"/>
-            <c:showLeaderLines val="0"/>
-          </c:dLbls>
-          <c:cat>
-            <c:strRef>
-              <c:f>Sheet1!$A$2:$A$3</c:f>
-              <c:strCache>
-                <c:ptCount val="2"/>
-                <c:pt idx="0">
-                  <c:v>C1a RC ~134</c:v>
-                </c:pt>
-                <c:pt idx="1">
-                  <c:v>C1b Insurance ~50</c:v>
-                </c:pt>
-              </c:strCache>
-            </c:strRef>
-          </c:cat>
-          <c:val>
-            <c:numRef>
-              <c:f>Sheet1!$B$2:$B$3</c:f>
-              <c:numCache>
-                <c:ptCount val="2"/>
-                <c:pt idx="0">
-                  <c:v>134</c:v>
-                </c:pt>
-                <c:pt idx="1">
-                  <c:v>50</c:v>
-                </c:pt>
-              </c:numCache>
-            </c:numRef>
-          </c:val>
-        </c:ser>
-        <c:firstSliceAng val="0"/>
-        <c:holeSize val="50"/>
-      </c:doughnutChart>
-      <c:spPr>
-        <a:noFill/>
-        <a:ln>
-          <a:noFill/>
-        </a:ln>
-        <a:effectLst/>
-      </c:spPr>
-    </c:plotArea>
-    <c:legend>
-      <c:legendPos val="b"/>
-      <c:overlay val="0"/>
-      <c:txPr>
-        <a:bodyPr/>
-        <a:lstStyle/>
-        <a:p>
-          <a:pPr>
-            <a:defRPr sz="900">
-              <a:solidFill>
-                <a:srgbClr val="444444"/>
-              </a:solidFill>
-            </a:defRPr>
-          </a:pPr>
-          <a:endParaRPr lang="en-US"/>
-        </a:p>
-      </c:txPr>
-    </c:legend>
-    <c:plotVisOnly val="1"/>
-    <c:dispBlanksAs val="span"/>
-  </c:chart>
-  <c:spPr>
-    <a:solidFill>
-      <a:srgbClr val="FFFFFF"/>
-    </a:solidFill>
-    <a:ln>
-      <a:noFill/>
-    </a:ln>
-    <a:effectLst/>
-  </c:spPr>
-  <c:externalData r:id="rId1">
-    <c:autoUpdate val="0"/>
-  </c:externalData>
-</c:chartSpace>
-</file>
-
-<file path=ppt/charts/chart2.xml><?xml version="1.0" encoding="utf-8"?>
-<c:chartSpace xmlns:c="http://schemas.openxmlformats.org/drawingml/2006/chart" xmlns:a="http://schemas.openxmlformats.org/drawingml/2006/main" xmlns:r="http://schemas.openxmlformats.org/officeDocument/2006/relationships">
-  <c:date1904 val="0"/>
-  <c:roundedCorners val="1"/>
-  <c:chart>
-    <c:autoTitleDeleted val="1"/>
-    <c:plotArea>
-      <c:layout/>
-      <c:doughnutChart>
-        <c:varyColors val="1"/>
-        <c:ser>
-          <c:idx val="0"/>
-          <c:order val="0"/>
-          <c:tx>
-            <c:strRef>
-              <c:f>Sheet1!$B$1</c:f>
-              <c:strCache>
-                <c:ptCount val="1"/>
-                <c:pt idx="0">
-                  <c:v>RC lost</c:v>
-                </c:pt>
-              </c:strCache>
-            </c:strRef>
-          </c:tx>
-          <c:spPr>
-            <a:solidFill>
-              <a:schemeClr val="accent1"/>
-            </a:solidFill>
-            <a:ln w="9525" cap="flat">
-              <a:solidFill>
-                <a:srgbClr val="F9F9F9"/>
-              </a:solidFill>
-              <a:prstDash val="solid"/>
-              <a:round/>
-            </a:ln>
-            <a:effectLst/>
-          </c:spPr>
-          <c:dPt>
-            <c:idx val="0"/>
-            <c:bubble3D val="0"/>
-            <c:spPr>
-              <a:solidFill>
-                <a:srgbClr val="F96167"/>
-              </a:solidFill>
-              <a:effectLst/>
-            </c:spPr>
-          </c:dPt>
-          <c:dPt>
-            <c:idx val="1"/>
-            <c:bubble3D val="0"/>
-            <c:spPr>
-              <a:solidFill>
-                <a:srgbClr val="CADCFC"/>
-              </a:solidFill>
-              <a:effectLst/>
-            </c:spPr>
-          </c:dPt>
-          <c:dLbls>
-            <c:dLbl>
-              <c:idx val="0"/>
-              <c:numFmt formatCode="0%" sourceLinked="0"/>
-              <c:spPr/>
-              <c:txPr>
-                <a:bodyPr/>
-                <a:lstStyle/>
-                <a:p>
-                  <a:pPr>
-                    <a:defRPr sz="1200" b="0" i="0" u="none" strike="noStrike">
-                      <a:solidFill>
-                        <a:srgbClr val="000000"/>
-                      </a:solidFill>
-                      <a:latin typeface="Arial"/>
-                    </a:defRPr>
-                  </a:pPr>
-                </a:p>
-              </c:txPr>
-              <c:showLegendKey val="0"/>
-              <c:showVal val="0"/>
-              <c:showCatName val="0"/>
-              <c:showSerName val="0"/>
-              <c:showPercent val="1"/>
-              <c:showBubbleSize val="0"/>
-            </c:dLbl>
-            <c:dLbl>
-              <c:idx val="1"/>
-              <c:numFmt formatCode="0%" sourceLinked="0"/>
-              <c:spPr/>
-              <c:txPr>
-                <a:bodyPr/>
-                <a:lstStyle/>
-                <a:p>
-                  <a:pPr>
-                    <a:defRPr sz="1200" b="0" i="0" u="none" strike="noStrike">
-                      <a:solidFill>
-                        <a:srgbClr val="000000"/>
-                      </a:solidFill>
-                      <a:latin typeface="Arial"/>
-                    </a:defRPr>
-                  </a:pPr>
-                </a:p>
-              </c:txPr>
-              <c:showLegendKey val="0"/>
-              <c:showVal val="0"/>
-              <c:showCatName val="0"/>
-              <c:showSerName val="0"/>
-              <c:showPercent val="1"/>
-              <c:showBubbleSize val="0"/>
-            </c:dLbl>
-            <c:numFmt formatCode="0%" sourceLinked="0"/>
-            <c:txPr>
-              <a:bodyPr/>
-              <a:lstStyle/>
-              <a:p>
-                <a:pPr>
-                  <a:defRPr sz="1800" b="0" i="0" u="none" strike="noStrike">
-                    <a:solidFill>
-                      <a:srgbClr val="000000"/>
-                    </a:solidFill>
-                    <a:latin typeface="Arial"/>
-                  </a:defRPr>
-                </a:pPr>
-              </a:p>
-            </c:txPr>
-            <c:showLegendKey val="0"/>
-            <c:showVal val="0"/>
-            <c:showCatName val="1"/>
-            <c:showSerName val="0"/>
-            <c:showPercent val="1"/>
-            <c:showBubbleSize val="0"/>
-            <c:showLeaderLines val="0"/>
-          </c:dLbls>
-          <c:cat>
-            <c:strRef>
-              <c:f>Sheet1!$A$2:$A$3</c:f>
-              <c:strCache>
-                <c:ptCount val="2"/>
-                <c:pt idx="0">
-                  <c:v>Capture-only 1,637</c:v>
-                </c:pt>
-                <c:pt idx="1">
-                  <c:v>Other RC 3,768</c:v>
-                </c:pt>
-              </c:strCache>
-            </c:strRef>
-          </c:cat>
-          <c:val>
-            <c:numRef>
-              <c:f>Sheet1!$B$2:$B$3</c:f>
-              <c:numCache>
-                <c:ptCount val="2"/>
-                <c:pt idx="0">
-                  <c:v>1637</c:v>
-                </c:pt>
-                <c:pt idx="1">
-                  <c:v>3768</c:v>
-                </c:pt>
-              </c:numCache>
-            </c:numRef>
-          </c:val>
-        </c:ser>
-        <c:firstSliceAng val="0"/>
-        <c:holeSize val="50"/>
-      </c:doughnutChart>
-      <c:spPr>
-        <a:noFill/>
-        <a:ln>
-          <a:noFill/>
-        </a:ln>
-        <a:effectLst/>
-      </c:spPr>
-    </c:plotArea>
-    <c:legend>
-      <c:legendPos val="b"/>
-      <c:overlay val="0"/>
-      <c:txPr>
-        <a:bodyPr/>
-        <a:lstStyle/>
-        <a:p>
-          <a:pPr>
-            <a:defRPr sz="900">
-              <a:solidFill>
-                <a:srgbClr val="444444"/>
-              </a:solidFill>
-            </a:defRPr>
-          </a:pPr>
-          <a:endParaRPr lang="en-US"/>
-        </a:p>
-      </c:txPr>
-    </c:legend>
-    <c:plotVisOnly val="1"/>
-    <c:dispBlanksAs val="span"/>
-  </c:chart>
-  <c:spPr>
-    <a:solidFill>
-      <a:srgbClr val="FFFFFF"/>
-    </a:solidFill>
-    <a:ln>
-      <a:noFill/>
-    </a:ln>
-    <a:effectLst/>
-  </c:spPr>
-  <c:externalData r:id="rId1">
-    <c:autoUpdate val="0"/>
-  </c:externalData>
-</c:chartSpace>
-</file>
-
-<file path=ppt/charts/chart3.xml><?xml version="1.0" encoding="utf-8"?>
-<c:chartSpace xmlns:c="http://schemas.openxmlformats.org/drawingml/2006/chart" xmlns:a="http://schemas.openxmlformats.org/drawingml/2006/main" xmlns:r="http://schemas.openxmlformats.org/officeDocument/2006/relationships">
-  <c:date1904 val="0"/>
-  <c:roundedCorners val="1"/>
-  <c:chart>
-    <c:autoTitleDeleted val="1"/>
-    <c:plotArea>
-      <c:layout/>
-      <c:lineChart>
-        <c:varyColors val="0"/>
-        <c:ser>
-          <c:idx val="0"/>
-          <c:order val="0"/>
-          <c:tx>
-            <c:strRef>
-              <c:f>Sheet1!$B$1</c:f>
-              <c:strCache>
-                <c:ptCount val="1"/>
-                <c:pt idx="0">
-                  <c:v>RC Pass Rate (%)</c:v>
-                </c:pt>
-              </c:strCache>
-            </c:strRef>
-          </c:tx>
-          <c:spPr>
-            <a:solidFill>
-              <a:srgbClr val="F96167"/>
-            </a:solidFill>
-            <a:ln w="31750" cap="flat">
-              <a:solidFill>
-                <a:srgbClr val="F96167"/>
-              </a:solidFill>
-              <a:prstDash val="solid"/>
-              <a:round/>
-            </a:ln>
-            <a:effectLst/>
-          </c:spPr>
-          <c:invertIfNegative val="0"/>
-          <c:dLbls>
-            <c:numFmt formatCode="#,##0" sourceLinked="0"/>
-            <c:txPr>
-              <a:bodyPr/>
-              <a:lstStyle/>
-              <a:p>
-                <a:pPr>
-                  <a:defRPr b="0" i="0" strike="noStrike" sz="850" u="none">
-                    <a:solidFill>
-                      <a:srgbClr val="333333"/>
-                    </a:solidFill>
-                    <a:latin typeface="Arial"/>
-                  </a:defRPr>
-                </a:pPr>
-              </a:p>
-            </c:txPr>
-            <c:showLegendKey val="0"/>
-            <c:showVal val="1"/>
-            <c:showCatName val="0"/>
-            <c:showSerName val="0"/>
-            <c:showPercent val="0"/>
-            <c:showBubbleSize val="0"/>
-            <c:showLeaderLines val="0"/>
-          </c:dLbls>
-          <c:marker>
-            <c:symbol val="circle"/>
-            <c:size val="6"/>
-            <c:spPr>
-              <a:solidFill>
-                <a:srgbClr val="F96167"/>
-              </a:solidFill>
-              <a:ln w="9525" cap="flat">
-                <a:solidFill>
-                  <a:srgbClr val="F96167"/>
-                </a:solidFill>
-                <a:prstDash val="solid"/>
-                <a:round/>
-              </a:ln>
-              <a:effectLst/>
-            </c:spPr>
-          </c:marker>
-          <c:cat>
-            <c:multiLvlStrRef>
-              <c:f>Sheet1!$A$2:$A$4</c:f>
-              <c:multiLvlStrCache>
-                <c:ptCount val="3"/>
-                <c:lvl>
-                  <c:pt idx="0">
-                    <c:v>1st try</c:v>
-                  </c:pt>
-                  <c:pt idx="1">
-                    <c:v>2nd try</c:v>
-                  </c:pt>
-                  <c:pt idx="2">
-                    <c:v>3rd try</c:v>
-                  </c:pt>
-                </c:lvl>
-              </c:multiLvlStrCache>
-            </c:multiLvlStrRef>
-          </c:cat>
-          <c:val>
-            <c:numRef>
-              <c:f>Sheet1!$B$2:$B$4</c:f>
-              <c:numCache>
-                <c:formatCode>General</c:formatCode>
-                <c:ptCount val="3"/>
-                <c:pt idx="0">
-                  <c:v>65.3</c:v>
-                </c:pt>
-                <c:pt idx="1">
-                  <c:v>68.4</c:v>
-                </c:pt>
-                <c:pt idx="2">
-                  <c:v>74.1</c:v>
-                </c:pt>
-              </c:numCache>
-            </c:numRef>
-          </c:val>
-          <c:smooth val="0"/>
-        </c:ser>
-        <c:ser>
-          <c:idx val="1"/>
-          <c:order val="1"/>
-          <c:tx>
-            <c:strRef>
-              <c:f>Sheet1!$C$1</c:f>
-              <c:strCache>
-                <c:ptCount val="1"/>
-                <c:pt idx="0">
-                  <c:v>Insurance Pass Rate (%)</c:v>
-                </c:pt>
-              </c:strCache>
-            </c:strRef>
-          </c:tx>
-          <c:spPr>
-            <a:solidFill>
-              <a:srgbClr val="1C7293"/>
-            </a:solidFill>
-            <a:ln w="31750" cap="flat">
-              <a:solidFill>
-                <a:srgbClr val="1C7293"/>
-              </a:solidFill>
-              <a:prstDash val="solid"/>
-              <a:round/>
-            </a:ln>
-            <a:effectLst/>
-          </c:spPr>
-          <c:invertIfNegative val="0"/>
-          <c:dLbls>
-            <c:numFmt formatCode="#,##0" sourceLinked="0"/>
-            <c:txPr>
-              <a:bodyPr/>
-              <a:lstStyle/>
-              <a:p>
-                <a:pPr>
-                  <a:defRPr b="0" i="0" strike="noStrike" sz="850" u="none">
-                    <a:solidFill>
-                      <a:srgbClr val="333333"/>
-                    </a:solidFill>
-                    <a:latin typeface="Arial"/>
-                  </a:defRPr>
-                </a:pPr>
-              </a:p>
-            </c:txPr>
-            <c:showLegendKey val="0"/>
-            <c:showVal val="1"/>
-            <c:showCatName val="0"/>
-            <c:showSerName val="0"/>
-            <c:showPercent val="0"/>
-            <c:showBubbleSize val="0"/>
-            <c:showLeaderLines val="0"/>
-          </c:dLbls>
-          <c:marker>
-            <c:symbol val="circle"/>
-            <c:size val="6"/>
-            <c:spPr>
-              <a:solidFill>
-                <a:srgbClr val="1C7293"/>
-              </a:solidFill>
-              <a:ln w="9525" cap="flat">
-                <a:solidFill>
-                  <a:srgbClr val="1C7293"/>
-                </a:solidFill>
-                <a:prstDash val="solid"/>
-                <a:round/>
-              </a:ln>
-              <a:effectLst/>
-            </c:spPr>
-          </c:marker>
-          <c:cat>
-            <c:multiLvlStrRef>
-              <c:f>Sheet1!$A$2:$A$4</c:f>
-              <c:multiLvlStrCache>
-                <c:ptCount val="3"/>
-                <c:lvl>
-                  <c:pt idx="0">
-                    <c:v>1st try</c:v>
-                  </c:pt>
-                  <c:pt idx="1">
-                    <c:v>2nd try</c:v>
-                  </c:pt>
-                  <c:pt idx="2">
-                    <c:v>3rd try</c:v>
-                  </c:pt>
-                </c:lvl>
-              </c:multiLvlStrCache>
-            </c:multiLvlStrRef>
-          </c:cat>
-          <c:val>
-            <c:numRef>
-              <c:f>Sheet1!$C$2:$C$4</c:f>
-              <c:numCache>
-                <c:formatCode>General</c:formatCode>
-                <c:ptCount val="3"/>
-                <c:pt idx="0">
-                  <c:v>67</c:v>
-                </c:pt>
-                <c:pt idx="1">
-                  <c:v>74</c:v>
-                </c:pt>
-                <c:pt idx="2">
-                  <c:v>76</c:v>
-                </c:pt>
-              </c:numCache>
-            </c:numRef>
-          </c:val>
-          <c:smooth val="0"/>
-        </c:ser>
-        <c:dLbls>
-          <c:numFmt formatCode="#,##0" sourceLinked="0"/>
-          <c:txPr>
-            <a:bodyPr/>
-            <a:lstStyle/>
-            <a:p>
-              <a:pPr>
-                <a:defRPr b="0" i="0" strike="noStrike" sz="850" u="none">
-                  <a:solidFill>
-                    <a:srgbClr val="333333"/>
-                  </a:solidFill>
-                  <a:latin typeface="Arial"/>
-                </a:defRPr>
-              </a:pPr>
-            </a:p>
-          </c:txPr>
-          <c:showLegendKey val="0"/>
-          <c:showVal val="1"/>
-          <c:showCatName val="0"/>
-          <c:showSerName val="0"/>
-          <c:showPercent val="0"/>
-          <c:showBubbleSize val="0"/>
-          <c:showLeaderLines val="0"/>
-        </c:dLbls>
-        <c:marker val="1"/>
-        <c:axId val="2094734554"/>
-        <c:axId val="2094734552"/>
-        <c:axId val="2094734556"/>
-      </c:lineChart>
-      <c:catAx>
-        <c:axId val="2094734554"/>
-        <c:scaling>
-          <c:orientation val="minMax"/>
-        </c:scaling>
-        <c:delete val="0"/>
-        <c:axPos val="b"/>
-        <c:numFmt formatCode="General" sourceLinked="1"/>
-        <c:majorTickMark val="out"/>
-        <c:minorTickMark val="none"/>
-        <c:tickLblPos val="low"/>
-        <c:spPr>
-          <a:ln w="12700" cap="flat">
-            <a:solidFill>
-              <a:srgbClr val="888888"/>
-            </a:solidFill>
-            <a:prstDash val="solid"/>
-            <a:round/>
-          </a:ln>
-        </c:spPr>
-        <c:txPr>
-          <a:bodyPr/>
-          <a:lstStyle/>
-          <a:p>
-            <a:pPr>
-              <a:defRPr sz="900" b="0" i="0" u="none" strike="noStrike">
-                <a:solidFill>
-                  <a:srgbClr val="444444"/>
-                </a:solidFill>
-                <a:latin typeface="Arial"/>
-              </a:defRPr>
-            </a:pPr>
-            <a:endParaRPr lang="en-US"/>
-          </a:p>
-        </c:txPr>
-        <c:crossAx val="2094734552"/>
-        <c:crosses val="autoZero"/>
-        <c:auto val="1"/>
-        <c:lblAlgn val="ctr"/>
-        <c:noMultiLvlLbl val="1"/>
-      </c:catAx>
-      <c:valAx>
-        <c:axId val="2094734552"/>
-        <c:scaling>
-          <c:orientation val="minMax"/>
-          <c:max val="85"/>
-          <c:min val="55"/>
-        </c:scaling>
-        <c:delete val="0"/>
-        <c:axPos val="l"/>
-        <c:majorGridlines>
-          <c:spPr>
-            <a:ln w="6350" cap="flat">
-              <a:solidFill>
-                <a:srgbClr val="E8E8E8"/>
-              </a:solidFill>
-              <a:prstDash val="solid"/>
-              <a:round/>
-            </a:ln>
-          </c:spPr>
-        </c:majorGridlines>
-        <c:numFmt formatCode="General" sourceLinked="0"/>
-        <c:majorTickMark val="out"/>
-        <c:minorTickMark val="none"/>
-        <c:tickLblPos val="nextTo"/>
-        <c:spPr>
-          <a:ln w="12700" cap="flat">
-            <a:solidFill>
-              <a:srgbClr val="888888"/>
-            </a:solidFill>
-            <a:prstDash val="solid"/>
-            <a:round/>
-          </a:ln>
-        </c:spPr>
-        <c:txPr>
-          <a:bodyPr/>
-          <a:lstStyle/>
-          <a:p>
-            <a:pPr>
-              <a:defRPr sz="800" b="0" i="0" u="none" strike="noStrike">
-                <a:solidFill>
-                  <a:srgbClr val="888888"/>
-                </a:solidFill>
-                <a:latin typeface="Arial"/>
-              </a:defRPr>
-            </a:pPr>
-            <a:endParaRPr lang="en-US"/>
-          </a:p>
-        </c:txPr>
-        <c:crossAx val="2094734554"/>
-        <c:crosses val="autoZero"/>
-        <c:crossBetween val="between"/>
-      </c:valAx>
-      <c:spPr>
-        <a:noFill/>
-        <a:ln>
-          <a:noFill/>
-        </a:ln>
-        <a:effectLst/>
-      </c:spPr>
-    </c:plotArea>
-    <c:legend>
-      <c:legendPos val="b"/>
-      <c:overlay val="0"/>
-      <c:txPr>
-        <a:bodyPr/>
-        <a:lstStyle/>
-        <a:p>
-          <a:pPr>
-            <a:defRPr sz="900">
-              <a:solidFill>
-                <a:srgbClr val="444444"/>
-              </a:solidFill>
-            </a:defRPr>
-          </a:pPr>
-          <a:endParaRPr lang="en-US"/>
-        </a:p>
-      </c:txPr>
-    </c:legend>
-    <c:plotVisOnly val="1"/>
-    <c:dispBlanksAs val="span"/>
-  </c:chart>
-  <c:spPr>
-    <a:noFill/>
-    <a:ln>
-      <a:noFill/>
-    </a:ln>
-    <a:effectLst/>
-  </c:spPr>
-  <c:externalData r:id="rId1">
-    <c:autoUpdate val="0"/>
-  </c:externalData>
-</c:chartSpace>
-</file>
-
-<file path=ppt/charts/chart4.xml><?xml version="1.0" encoding="utf-8"?>
-<c:chartSpace xmlns:c="http://schemas.openxmlformats.org/drawingml/2006/chart" xmlns:a="http://schemas.openxmlformats.org/drawingml/2006/main" xmlns:r="http://schemas.openxmlformats.org/officeDocument/2006/relationships">
-  <c:date1904 val="0"/>
-  <c:roundedCorners val="1"/>
-  <c:chart>
-    <c:autoTitleDeleted val="1"/>
-    <c:plotArea>
-      <c:layout/>
-      <c:pieChart>
-        <c:varyColors val="1"/>
-        <c:ser>
-          <c:idx val="0"/>
-          <c:order val="0"/>
-          <c:tx>
-            <c:strRef>
-              <c:f>Sheet1!$B$1</c:f>
-              <c:strCache>
-                <c:ptCount val="1"/>
-                <c:pt idx="0">
-                  <c:v>Airport unfulfilled</c:v>
-                </c:pt>
-              </c:strCache>
-            </c:strRef>
-          </c:tx>
-          <c:spPr>
-            <a:solidFill>
-              <a:schemeClr val="accent1"/>
-            </a:solidFill>
-            <a:ln w="9525" cap="flat">
-              <a:solidFill>
-                <a:srgbClr val="F9F9F9"/>
-              </a:solidFill>
-              <a:prstDash val="solid"/>
-              <a:round/>
-            </a:ln>
-            <a:effectLst/>
-          </c:spPr>
-          <c:dPt>
-            <c:idx val="0"/>
-            <c:bubble3D val="0"/>
-            <c:spPr>
-              <a:solidFill>
-                <a:srgbClr val="F96167"/>
-              </a:solidFill>
-              <a:effectLst/>
-            </c:spPr>
-          </c:dPt>
-          <c:dPt>
-            <c:idx val="1"/>
-            <c:bubble3D val="0"/>
-            <c:spPr>
-              <a:solidFill>
-                <a:srgbClr val="FFC400"/>
-              </a:solidFill>
-              <a:effectLst/>
-            </c:spPr>
-          </c:dPt>
-          <c:dLbls>
-            <c:dLbl>
-              <c:idx val="0"/>
-              <c:numFmt formatCode="0%" sourceLinked="0"/>
-              <c:spPr/>
-              <c:txPr>
-                <a:bodyPr/>
-                <a:lstStyle/>
-                <a:p>
-                  <a:pPr>
-                    <a:defRPr sz="1200" b="0" i="0" u="none" strike="noStrike">
-                      <a:solidFill>
-                        <a:srgbClr val="000000"/>
-                      </a:solidFill>
-                      <a:latin typeface="Arial"/>
-                    </a:defRPr>
-                  </a:pPr>
-                </a:p>
-              </c:txPr>
-              <c:showLegendKey val="0"/>
-              <c:showVal val="0"/>
-              <c:showCatName val="0"/>
-              <c:showSerName val="0"/>
-              <c:showPercent val="1"/>
-              <c:showBubbleSize val="0"/>
-            </c:dLbl>
-            <c:dLbl>
-              <c:idx val="1"/>
-              <c:numFmt formatCode="0%" sourceLinked="0"/>
-              <c:spPr/>
-              <c:txPr>
-                <a:bodyPr/>
-                <a:lstStyle/>
-                <a:p>
-                  <a:pPr>
-                    <a:defRPr sz="1200" b="0" i="0" u="none" strike="noStrike">
-                      <a:solidFill>
-                        <a:srgbClr val="000000"/>
-                      </a:solidFill>
-                      <a:latin typeface="Arial"/>
-                    </a:defRPr>
-                  </a:pPr>
-                </a:p>
-              </c:txPr>
-              <c:showLegendKey val="0"/>
-              <c:showVal val="0"/>
-              <c:showCatName val="0"/>
-              <c:showSerName val="0"/>
-              <c:showPercent val="1"/>
-              <c:showBubbleSize val="0"/>
-            </c:dLbl>
-            <c:numFmt formatCode="0%" sourceLinked="0"/>
-            <c:txPr>
-              <a:bodyPr/>
-              <a:lstStyle/>
-              <a:p>
-                <a:pPr>
-                  <a:defRPr sz="1800" b="0" i="0" u="none" strike="noStrike">
-                    <a:solidFill>
-                      <a:srgbClr val="000000"/>
-                    </a:solidFill>
-                    <a:latin typeface="Arial"/>
-                  </a:defRPr>
-                </a:pPr>
-              </a:p>
-            </c:txPr>
-            <c:dLblPos val="ctr"/>
-            <c:showLegendKey val="0"/>
-            <c:showVal val="0"/>
-            <c:showCatName val="1"/>
-            <c:showSerName val="0"/>
-            <c:showPercent val="1"/>
-            <c:showBubbleSize val="0"/>
-            <c:showLeaderLines val="0"/>
-          </c:dLbls>
-          <c:cat>
-            <c:strRef>
-              <c:f>Sheet1!$A$2:$A$3</c:f>
-              <c:strCache>
-                <c:ptCount val="2"/>
-                <c:pt idx="0">
-                  <c:v>21:00–03:59</c:v>
-                </c:pt>
-                <c:pt idx="1">
-                  <c:v>Rest of day</c:v>
-                </c:pt>
-              </c:strCache>
-            </c:strRef>
-          </c:cat>
-          <c:val>
-            <c:numRef>
-              <c:f>Sheet1!$B$2:$B$3</c:f>
-              <c:numCache>
-                <c:ptCount val="2"/>
-                <c:pt idx="0">
-                  <c:v>84</c:v>
-                </c:pt>
-                <c:pt idx="1">
-                  <c:v>16</c:v>
-                </c:pt>
-              </c:numCache>
-            </c:numRef>
-          </c:val>
-        </c:ser>
-        <c:firstSliceAng val="0"/>
-      </c:pieChart>
-      <c:spPr>
-        <a:noFill/>
-        <a:ln>
-          <a:noFill/>
-        </a:ln>
-        <a:effectLst/>
-      </c:spPr>
-    </c:plotArea>
-    <c:legend>
-      <c:legendPos val="b"/>
-      <c:overlay val="0"/>
-      <c:txPr>
-        <a:bodyPr/>
-        <a:lstStyle/>
-        <a:p>
-          <a:pPr>
-            <a:defRPr sz="900">
-              <a:solidFill>
-                <a:srgbClr val="444444"/>
-              </a:solidFill>
-            </a:defRPr>
-          </a:pPr>
-          <a:endParaRPr lang="en-US"/>
-        </a:p>
-      </c:txPr>
-    </c:legend>
-    <c:plotVisOnly val="1"/>
-    <c:dispBlanksAs val="span"/>
-  </c:chart>
-  <c:spPr>
-    <a:solidFill>
-      <a:srgbClr val="FFFFFF"/>
-    </a:solidFill>
-    <a:ln>
-      <a:noFill/>
-    </a:ln>
-    <a:effectLst/>
-  </c:spPr>
-  <c:externalData r:id="rId1">
-    <c:autoUpdate val="0"/>
-  </c:externalData>
-</c:chartSpace>
-</file>
-
-<file path=ppt/charts/chart5.xml><?xml version="1.0" encoding="utf-8"?>
-<c:chartSpace xmlns:c="http://schemas.openxmlformats.org/drawingml/2006/chart" xmlns:a="http://schemas.openxmlformats.org/drawingml/2006/main" xmlns:r="http://schemas.openxmlformats.org/officeDocument/2006/relationships">
-  <c:date1904 val="0"/>
-  <c:roundedCorners val="1"/>
-  <c:chart>
-    <c:autoTitleDeleted val="1"/>
-    <c:plotArea>
-      <c:layout/>
       <c:barChart>
         <c:barDir val="col"/>
         <c:grouping val="clustered"/>
@@ -1152,7 +141,7 @@
           </c:tx>
           <c:spPr>
             <a:solidFill>
-              <a:srgbClr val="1C7293"/>
+              <a:srgbClr val="C45C26"/>
             </a:solidFill>
             <a:effectLst/>
           </c:spPr>
@@ -1187,7 +176,7 @@
             <c:bubble3D val="0"/>
             <c:spPr>
               <a:solidFill>
-                <a:srgbClr val="1C7293"/>
+                <a:srgbClr val="C45C26"/>
               </a:solidFill>
               <a:effectLst/>
             </c:spPr>
@@ -1209,7 +198,7 @@
             <c:bubble3D val="0"/>
             <c:spPr>
               <a:solidFill>
-                <a:srgbClr val="F96167"/>
+                <a:srgbClr val="E85D4C"/>
               </a:solidFill>
               <a:effectLst/>
             </c:spPr>
@@ -1402,7 +391,7 @@
 </c:chartSpace>
 </file>
 
-<file path=ppt/charts/chart6.xml><?xml version="1.0" encoding="utf-8"?>
+<file path=ppt/charts/chart2.xml><?xml version="1.0" encoding="utf-8"?>
 <c:chartSpace xmlns:c="http://schemas.openxmlformats.org/drawingml/2006/chart" xmlns:a="http://schemas.openxmlformats.org/drawingml/2006/main" xmlns:r="http://schemas.openxmlformats.org/officeDocument/2006/relationships">
   <c:date1904 val="0"/>
   <c:roundedCorners val="1"/>
@@ -1430,7 +419,7 @@
           </c:tx>
           <c:spPr>
             <a:solidFill>
-              <a:srgbClr val="F96167"/>
+              <a:srgbClr val="E85D4C"/>
             </a:solidFill>
             <a:effectLst/>
           </c:spPr>
@@ -1465,7 +454,7 @@
             <c:bubble3D val="0"/>
             <c:spPr>
               <a:solidFill>
-                <a:srgbClr val="F96167"/>
+                <a:srgbClr val="E85D4C"/>
               </a:solidFill>
               <a:effectLst/>
             </c:spPr>
@@ -1476,7 +465,7 @@
             <c:bubble3D val="0"/>
             <c:spPr>
               <a:solidFill>
-                <a:srgbClr val="8A8FA3"/>
+                <a:srgbClr val="6B4A2A"/>
               </a:solidFill>
               <a:effectLst/>
             </c:spPr>
@@ -1487,7 +476,7 @@
             <c:bubble3D val="0"/>
             <c:spPr>
               <a:solidFill>
-                <a:srgbClr val="1C7293"/>
+                <a:srgbClr val="C45C26"/>
               </a:solidFill>
               <a:effectLst/>
             </c:spPr>
@@ -1498,7 +487,7 @@
             <c:bubble3D val="0"/>
             <c:spPr>
               <a:solidFill>
-                <a:srgbClr val="8A8FA3"/>
+                <a:srgbClr val="6B4A2A"/>
               </a:solidFill>
               <a:effectLst/>
             </c:spPr>
@@ -2976,7 +1965,7 @@
     <p:bg>
       <p:bgPr>
         <a:solidFill>
-          <a:srgbClr val="16193B"/>
+          <a:srgbClr val="FFC400"/>
         </a:solidFill>
       </p:bgPr>
     </p:bg>
@@ -3009,7 +1998,7 @@
             <a:avLst/>
           </a:prstGeom>
           <a:solidFill>
-            <a:srgbClr val="1A2255"/>
+            <a:srgbClr val="FF8A3D"/>
           </a:solidFill>
           <a:ln/>
         </p:spPr>
@@ -3029,7 +2018,7 @@
             <a:avLst/>
           </a:prstGeom>
           <a:solidFill>
-            <a:srgbClr val="1A2255"/>
+            <a:srgbClr val="E85D4C"/>
           </a:solidFill>
           <a:ln/>
         </p:spPr>
@@ -3049,7 +2038,7 @@
             <a:avLst/>
           </a:prstGeom>
           <a:solidFill>
-            <a:srgbClr val="1D2A6A"/>
+            <a:srgbClr val="FF8A3D"/>
           </a:solidFill>
           <a:ln/>
         </p:spPr>
@@ -3081,7 +2070,7 @@
             <a:r>
               <a:rPr lang="en-US" sz="1350" b="1" spc="300" kern="0" dirty="0">
                 <a:solidFill>
-                  <a:srgbClr val="FFC400"/>
+                  <a:srgbClr val="1E2761"/>
                 </a:solidFill>
                 <a:latin typeface="Calibri" pitchFamily="34" charset="0"/>
                 <a:ea typeface="Calibri" pitchFamily="34" charset="-122"/>
@@ -3123,7 +2112,7 @@
             <a:r>
               <a:rPr lang="en-US" sz="3600" b="1" dirty="0">
                 <a:solidFill>
-                  <a:srgbClr val="FFFFFF"/>
+                  <a:srgbClr val="1E2761"/>
                 </a:solidFill>
                 <a:latin typeface="Cambria" pitchFamily="34" charset="0"/>
                 <a:ea typeface="Cambria" pitchFamily="34" charset="-122"/>
@@ -3143,7 +2132,7 @@
             <a:r>
               <a:rPr lang="en-US" sz="3600" b="1" dirty="0">
                 <a:solidFill>
-                  <a:srgbClr val="FFFFFF"/>
+                  <a:srgbClr val="1E2761"/>
                 </a:solidFill>
                 <a:latin typeface="Cambria" pitchFamily="34" charset="0"/>
                 <a:ea typeface="Cambria" pitchFamily="34" charset="-122"/>
@@ -3185,7 +2174,7 @@
             <a:r>
               <a:rPr lang="en-US" sz="1350" dirty="0">
                 <a:solidFill>
-                  <a:srgbClr val="CADCFC"/>
+                  <a:srgbClr val="1E2761"/>
                 </a:solidFill>
                 <a:latin typeface="Calibri" pitchFamily="34" charset="0"/>
                 <a:ea typeface="Calibri" pitchFamily="34" charset="-122"/>
@@ -3247,7 +2236,7 @@
             <a:r>
               <a:rPr lang="en-US" sz="2000" b="1" dirty="0">
                 <a:solidFill>
-                  <a:srgbClr val="FFFFFF"/>
+                  <a:srgbClr val="1E2761"/>
                 </a:solidFill>
                 <a:latin typeface="Cambria" pitchFamily="34" charset="0"/>
                 <a:ea typeface="Cambria" pitchFamily="34" charset="-122"/>
@@ -3286,7 +2275,7 @@
             <a:r>
               <a:rPr lang="en-US" sz="1100" dirty="0">
                 <a:solidFill>
-                  <a:srgbClr val="8A8FA3"/>
+                  <a:srgbClr val="6B4A2A"/>
                 </a:solidFill>
                 <a:latin typeface="Calibri" pitchFamily="34" charset="0"/>
                 <a:ea typeface="Calibri" pitchFamily="34" charset="-122"/>
@@ -3325,7 +2314,7 @@
             <a:r>
               <a:rPr lang="en-US" sz="1050" i="1" dirty="0">
                 <a:solidFill>
-                  <a:srgbClr val="8A8FA3"/>
+                  <a:srgbClr val="6B4A2A"/>
                 </a:solidFill>
                 <a:latin typeface="Calibri" pitchFamily="34" charset="0"/>
                 <a:ea typeface="Calibri" pitchFamily="34" charset="-122"/>
@@ -3351,7 +2340,7 @@
     <p:bg>
       <p:bgPr>
         <a:solidFill>
-          <a:srgbClr val="16193B"/>
+          <a:srgbClr val="FF8A3D"/>
         </a:solidFill>
       </p:bgPr>
     </p:bg>
@@ -3396,7 +2385,7 @@
             <a:r>
               <a:rPr lang="en-US" sz="1100" b="1" spc="250" kern="0" dirty="0">
                 <a:solidFill>
-                  <a:srgbClr val="FFC400"/>
+                  <a:srgbClr val="1E2761"/>
                 </a:solidFill>
                 <a:latin typeface="Calibri" pitchFamily="34" charset="0"/>
                 <a:ea typeface="Calibri" pitchFamily="34" charset="-122"/>
@@ -3435,7 +2424,7 @@
             <a:r>
               <a:rPr lang="en-US" sz="2600" b="1" dirty="0">
                 <a:solidFill>
-                  <a:srgbClr val="FFFFFF"/>
+                  <a:srgbClr val="1E2761"/>
                 </a:solidFill>
                 <a:latin typeface="Cambria" pitchFamily="34" charset="0"/>
                 <a:ea typeface="Cambria" pitchFamily="34" charset="-122"/>
@@ -3477,7 +2466,7 @@
             <a:r>
               <a:rPr lang="en-US" sz="1300" b="1" dirty="0">
                 <a:solidFill>
-                  <a:srgbClr val="FFFFFF"/>
+                  <a:srgbClr val="1E2761"/>
                 </a:solidFill>
                 <a:latin typeface="Calibri" pitchFamily="34" charset="0"/>
                 <a:ea typeface="Calibri" pitchFamily="34" charset="-122"/>
@@ -3494,7 +2483,7 @@
             <a:r>
               <a:rPr lang="en-US" sz="1300" dirty="0">
                 <a:solidFill>
-                  <a:srgbClr val="CADCFC"/>
+                  <a:srgbClr val="3A2208"/>
                 </a:solidFill>
                 <a:latin typeface="Calibri" pitchFamily="34" charset="0"/>
                 <a:ea typeface="Calibri" pitchFamily="34" charset="-122"/>
@@ -3511,7 +2500,7 @@
             <a:r>
               <a:rPr lang="en-US" sz="1300" b="1" dirty="0">
                 <a:solidFill>
-                  <a:srgbClr val="FFC400"/>
+                  <a:srgbClr val="1E2761"/>
                 </a:solidFill>
                 <a:latin typeface="Calibri" pitchFamily="34" charset="0"/>
                 <a:ea typeface="Calibri" pitchFamily="34" charset="-122"/>
@@ -3528,7 +2517,7 @@
             <a:r>
               <a:rPr lang="en-US" sz="1300" dirty="0">
                 <a:solidFill>
-                  <a:srgbClr val="CADCFC"/>
+                  <a:srgbClr val="3A2208"/>
                 </a:solidFill>
                 <a:latin typeface="Calibri" pitchFamily="34" charset="0"/>
                 <a:ea typeface="Calibri" pitchFamily="34" charset="-122"/>
@@ -3560,13 +2549,6 @@
             <a:srgbClr val="FFFFFF"/>
           </a:solidFill>
           <a:ln/>
-          <a:effectLst>
-            <a:outerShdw sx="100000" sy="100000" kx="0" ky="0" algn="bl" rotWithShape="0" blurRad="127000" dist="50800" dir="5400000">
-              <a:srgbClr val="000000">
-                <a:alpha val="25000"/>
-              </a:srgbClr>
-            </a:outerShdw>
-          </a:effectLst>
         </p:spPr>
       </p:sp>
       <p:sp>
@@ -3608,22 +2590,30 @@
           </a:p>
         </p:txBody>
       </p:sp>
-      <p:graphicFrame>
-        <p:nvGraphicFramePr>
-          <p:cNvPr id="7" name="Chart 0" descr=""/>
-          <p:cNvGraphicFramePr/>
-          <p:nvPr/>
-        </p:nvGraphicFramePr>
-        <p:xfrm>
-          <a:off x="594360" y="2331720"/>
-          <a:ext cx="6675120" cy="3429000"/>
-        </p:xfrm>
-        <a:graphic xmlns:a="http://schemas.openxmlformats.org/drawingml/2006/main">
-          <a:graphicData uri="http://schemas.openxmlformats.org/drawingml/2006/chart">
-            <c:chart xmlns:c="http://schemas.openxmlformats.org/drawingml/2006/chart" r:id="rId1"/>
-          </a:graphicData>
-        </a:graphic>
-      </p:graphicFrame>
+      <p:pic>
+        <p:nvPicPr>
+          <p:cNvPr id="7" name="Image 0" descr="preencoded.png">    </p:cNvPr>
+          <p:cNvPicPr>
+            <a:picLocks noChangeAspect="1"/>
+          </p:cNvPicPr>
+          <p:nvPr/>
+        </p:nvPicPr>
+        <p:blipFill>
+          <a:blip r:embed="rId1"/>
+          <a:stretch>
+            <a:fillRect/>
+          </a:stretch>
+        </p:blipFill>
+        <p:spPr>
+          <a:xfrm>
+            <a:off x="685800" y="2331720"/>
+            <a:ext cx="6492240" cy="3474720"/>
+          </a:xfrm>
+          <a:prstGeom prst="rect">
+            <a:avLst/>
+          </a:prstGeom>
+        </p:spPr>
+      </p:pic>
       <p:sp>
         <p:nvSpPr>
           <p:cNvPr id="8" name="Shape 5"/>
@@ -3673,7 +2663,7 @@
             <a:r>
               <a:rPr lang="en-US" sz="2800" b="1" dirty="0">
                 <a:solidFill>
-                  <a:srgbClr val="F96167"/>
+                  <a:srgbClr val="E85D4C"/>
                 </a:solidFill>
                 <a:latin typeface="Cambria" pitchFamily="34" charset="0"/>
                 <a:ea typeface="Cambria" pitchFamily="34" charset="-122"/>
@@ -3715,7 +2705,7 @@
             <a:r>
               <a:rPr lang="en-US" sz="900" dirty="0">
                 <a:solidFill>
-                  <a:srgbClr val="CADCFC"/>
+                  <a:srgbClr val="FFE8C2"/>
                 </a:solidFill>
                 <a:latin typeface="Calibri" pitchFamily="34" charset="0"/>
                 <a:ea typeface="Calibri" pitchFamily="34" charset="-122"/>
@@ -3818,7 +2808,7 @@
             <a:r>
               <a:rPr lang="en-US" sz="900" dirty="0">
                 <a:solidFill>
-                  <a:srgbClr val="CADCFC"/>
+                  <a:srgbClr val="FFE8C2"/>
                 </a:solidFill>
                 <a:latin typeface="Calibri" pitchFamily="34" charset="0"/>
                 <a:ea typeface="Calibri" pitchFamily="34" charset="-122"/>
@@ -3879,7 +2869,7 @@
             <a:r>
               <a:rPr lang="en-US" sz="2800" b="1" dirty="0">
                 <a:solidFill>
-                  <a:srgbClr val="27AE60"/>
+                  <a:srgbClr val="E85D4C"/>
                 </a:solidFill>
                 <a:latin typeface="Cambria" pitchFamily="34" charset="0"/>
                 <a:ea typeface="Cambria" pitchFamily="34" charset="-122"/>
@@ -3921,7 +2911,7 @@
             <a:r>
               <a:rPr lang="en-US" sz="900" dirty="0">
                 <a:solidFill>
-                  <a:srgbClr val="CADCFC"/>
+                  <a:srgbClr val="FFE8C2"/>
                 </a:solidFill>
                 <a:latin typeface="Calibri" pitchFamily="34" charset="0"/>
                 <a:ea typeface="Calibri" pitchFamily="34" charset="-122"/>
@@ -3960,7 +2950,7 @@
             <a:r>
               <a:rPr lang="en-US" sz="850" dirty="0">
                 <a:solidFill>
-                  <a:srgbClr val="8A8FA3"/>
+                  <a:srgbClr val="6B4A2A"/>
                 </a:solidFill>
                 <a:latin typeface="Calibri" pitchFamily="34" charset="0"/>
                 <a:ea typeface="Calibri" pitchFamily="34" charset="-122"/>
@@ -3999,7 +2989,7 @@
             <a:r>
               <a:rPr lang="en-US" sz="850" dirty="0">
                 <a:solidFill>
-                  <a:srgbClr val="8A8FA3"/>
+                  <a:srgbClr val="6B4A2A"/>
                 </a:solidFill>
                 <a:latin typeface="Calibri" pitchFamily="34" charset="0"/>
                 <a:ea typeface="Calibri" pitchFamily="34" charset="-122"/>
@@ -4025,7 +3015,7 @@
     <p:bg>
       <p:bgPr>
         <a:solidFill>
-          <a:srgbClr val="FFF8E1"/>
+          <a:srgbClr val="FFC400"/>
         </a:solidFill>
       </p:bgPr>
     </p:bg>
@@ -4070,7 +3060,7 @@
             <a:r>
               <a:rPr lang="en-US" sz="1100" b="1" spc="250" kern="0" dirty="0">
                 <a:solidFill>
-                  <a:srgbClr val="F96167"/>
+                  <a:srgbClr val="E85D4C"/>
                 </a:solidFill>
                 <a:latin typeface="Calibri" pitchFamily="34" charset="0"/>
                 <a:ea typeface="Calibri" pitchFamily="34" charset="-122"/>
@@ -4184,7 +3174,7 @@
           </a:solidFill>
           <a:ln w="12700">
             <a:solidFill>
-              <a:srgbClr val="F0E0A8"/>
+              <a:srgbClr val="E07A2F"/>
             </a:solidFill>
             <a:prstDash val="solid"/>
           </a:ln>
@@ -4229,22 +3219,30 @@
           </a:p>
         </p:txBody>
       </p:sp>
-      <p:graphicFrame>
-        <p:nvGraphicFramePr>
-          <p:cNvPr id="7" name="Chart 0" descr=""/>
-          <p:cNvGraphicFramePr/>
-          <p:nvPr/>
-        </p:nvGraphicFramePr>
-        <p:xfrm>
-          <a:off x="594360" y="2121408"/>
-          <a:ext cx="5303520" cy="3383280"/>
-        </p:xfrm>
-        <a:graphic xmlns:a="http://schemas.openxmlformats.org/drawingml/2006/main">
-          <a:graphicData uri="http://schemas.openxmlformats.org/drawingml/2006/chart">
-            <c:chart xmlns:c="http://schemas.openxmlformats.org/drawingml/2006/chart" r:id="rId1"/>
-          </a:graphicData>
-        </a:graphic>
-      </p:graphicFrame>
+      <p:pic>
+        <p:nvPicPr>
+          <p:cNvPr id="7" name="Image 0" descr="preencoded.png">    </p:cNvPr>
+          <p:cNvPicPr>
+            <a:picLocks noChangeAspect="1"/>
+          </p:cNvPicPr>
+          <p:nvPr/>
+        </p:nvPicPr>
+        <p:blipFill>
+          <a:blip r:embed="rId1"/>
+          <a:stretch>
+            <a:fillRect/>
+          </a:stretch>
+        </p:blipFill>
+        <p:spPr>
+          <a:xfrm>
+            <a:off x="640080" y="2176272"/>
+            <a:ext cx="5212080" cy="3383280"/>
+          </a:xfrm>
+          <a:prstGeom prst="rect">
+            <a:avLst/>
+          </a:prstGeom>
+        </p:spPr>
+      </p:pic>
       <p:sp>
         <p:nvSpPr>
           <p:cNvPr id="8" name="Shape 5"/>
@@ -4266,7 +3264,7 @@
           </a:solidFill>
           <a:ln w="12700">
             <a:solidFill>
-              <a:srgbClr val="F0E0A8"/>
+              <a:srgbClr val="E07A2F"/>
             </a:solidFill>
             <a:prstDash val="solid"/>
           </a:ln>
@@ -4305,28 +3303,36 @@
                 <a:ea typeface="Calibri" pitchFamily="34" charset="-122"/>
                 <a:cs typeface="Calibri" pitchFamily="34" charset="-120"/>
               </a:rPr>
-              <a:t>Retry pass rates rise — capture problem, not eligibility</a:t>
+              <a:t>Insurance leftovers — only 411 are C1b</a:t>
             </a:r>
             <a:endParaRPr lang="en-US" sz="950" dirty="0"/>
           </a:p>
         </p:txBody>
       </p:sp>
-      <p:graphicFrame>
-        <p:nvGraphicFramePr>
-          <p:cNvPr id="10" name="Chart 1" descr=""/>
-          <p:cNvGraphicFramePr/>
-          <p:nvPr/>
-        </p:nvGraphicFramePr>
-        <p:xfrm>
-          <a:off x="6263640" y="2121408"/>
-          <a:ext cx="5303520" cy="3383280"/>
-        </p:xfrm>
-        <a:graphic xmlns:a="http://schemas.openxmlformats.org/drawingml/2006/main">
-          <a:graphicData uri="http://schemas.openxmlformats.org/drawingml/2006/chart">
-            <c:chart xmlns:c="http://schemas.openxmlformats.org/drawingml/2006/chart" r:id="rId2"/>
-          </a:graphicData>
-        </a:graphic>
-      </p:graphicFrame>
+      <p:pic>
+        <p:nvPicPr>
+          <p:cNvPr id="10" name="Image 1" descr="preencoded.png">    </p:cNvPr>
+          <p:cNvPicPr>
+            <a:picLocks noChangeAspect="1"/>
+          </p:cNvPicPr>
+          <p:nvPr/>
+        </p:nvPicPr>
+        <p:blipFill>
+          <a:blip r:embed="rId2"/>
+          <a:stretch>
+            <a:fillRect/>
+          </a:stretch>
+        </p:blipFill>
+        <p:spPr>
+          <a:xfrm>
+            <a:off x="6309360" y="2176272"/>
+            <a:ext cx="5257800" cy="3383280"/>
+          </a:xfrm>
+          <a:prstGeom prst="rect">
+            <a:avLst/>
+          </a:prstGeom>
+        </p:spPr>
+      </p:pic>
       <p:sp>
         <p:nvSpPr>
           <p:cNvPr id="11" name="Shape 7"/>
@@ -4396,7 +3402,7 @@
             <a:r>
               <a:rPr lang="en-US" sz="1050" dirty="0">
                 <a:solidFill>
-                  <a:srgbClr val="CADCFC"/>
+                  <a:srgbClr val="FFE8C2"/>
                 </a:solidFill>
                 <a:latin typeface="Calibri" pitchFamily="34" charset="0"/>
                 <a:ea typeface="Calibri" pitchFamily="34" charset="-122"/>
@@ -4430,7 +3436,7 @@
             <a:r>
               <a:rPr lang="en-US" sz="1050" dirty="0">
                 <a:solidFill>
-                  <a:srgbClr val="CADCFC"/>
+                  <a:srgbClr val="FFE8C2"/>
                 </a:solidFill>
                 <a:latin typeface="Calibri" pitchFamily="34" charset="0"/>
                 <a:ea typeface="Calibri" pitchFamily="34" charset="-122"/>
@@ -4469,7 +3475,7 @@
             <a:r>
               <a:rPr lang="en-US" sz="850" dirty="0">
                 <a:solidFill>
-                  <a:srgbClr val="8A8FA3"/>
+                  <a:srgbClr val="6B4A2A"/>
                 </a:solidFill>
                 <a:latin typeface="Calibri" pitchFamily="34" charset="0"/>
                 <a:ea typeface="Calibri" pitchFamily="34" charset="-122"/>
@@ -4508,7 +3514,7 @@
             <a:r>
               <a:rPr lang="en-US" sz="850" dirty="0">
                 <a:solidFill>
-                  <a:srgbClr val="8A8FA3"/>
+                  <a:srgbClr val="6B4A2A"/>
                 </a:solidFill>
                 <a:latin typeface="Calibri" pitchFamily="34" charset="0"/>
                 <a:ea typeface="Calibri" pitchFamily="34" charset="-122"/>
@@ -4534,7 +3540,7 @@
     <p:bg>
       <p:bgPr>
         <a:solidFill>
-          <a:srgbClr val="FFF8E1"/>
+          <a:srgbClr val="FFC400"/>
         </a:solidFill>
       </p:bgPr>
     </p:bg>
@@ -4579,7 +3585,7 @@
             <a:r>
               <a:rPr lang="en-US" sz="1100" b="1" spc="250" kern="0" dirty="0">
                 <a:solidFill>
-                  <a:srgbClr val="F96167"/>
+                  <a:srgbClr val="E85D4C"/>
                 </a:solidFill>
                 <a:latin typeface="Calibri" pitchFamily="34" charset="0"/>
                 <a:ea typeface="Calibri" pitchFamily="34" charset="-122"/>
@@ -4651,7 +3657,7 @@
           </a:solidFill>
           <a:ln w="12700">
             <a:solidFill>
-              <a:srgbClr val="F0E0A8"/>
+              <a:srgbClr val="E07A2F"/>
             </a:solidFill>
             <a:prstDash val="solid"/>
           </a:ln>
@@ -4810,7 +3816,7 @@
             <a:r>
               <a:rPr lang="en-US" sz="1050" b="1" dirty="0">
                 <a:solidFill>
-                  <a:srgbClr val="1C7293"/>
+                  <a:srgbClr val="C45C26"/>
                 </a:solidFill>
                 <a:latin typeface="Calibri" pitchFamily="34" charset="0"/>
                 <a:ea typeface="Calibri" pitchFamily="34" charset="-122"/>
@@ -4869,7 +3875,7 @@
             <a:r>
               <a:rPr lang="en-US" sz="1050" b="1" dirty="0">
                 <a:solidFill>
-                  <a:srgbClr val="1C7293"/>
+                  <a:srgbClr val="C45C26"/>
                 </a:solidFill>
                 <a:latin typeface="Calibri" pitchFamily="34" charset="0"/>
                 <a:ea typeface="Calibri" pitchFamily="34" charset="-122"/>
@@ -4928,7 +3934,7 @@
             <a:r>
               <a:rPr lang="en-US" sz="1050" b="1" dirty="0">
                 <a:solidFill>
-                  <a:srgbClr val="1C7293"/>
+                  <a:srgbClr val="C45C26"/>
                 </a:solidFill>
                 <a:latin typeface="Calibri" pitchFamily="34" charset="0"/>
                 <a:ea typeface="Calibri" pitchFamily="34" charset="-122"/>
@@ -4987,7 +3993,7 @@
             <a:r>
               <a:rPr lang="en-US" sz="1050" b="1" dirty="0">
                 <a:solidFill>
-                  <a:srgbClr val="1C7293"/>
+                  <a:srgbClr val="C45C26"/>
                 </a:solidFill>
                 <a:latin typeface="Calibri" pitchFamily="34" charset="0"/>
                 <a:ea typeface="Calibri" pitchFamily="34" charset="-122"/>
@@ -5004,7 +4010,7 @@
             <a:r>
               <a:rPr lang="en-US" sz="1050" dirty="0">
                 <a:solidFill>
-                  <a:srgbClr val="F96167"/>
+                  <a:srgbClr val="E85D4C"/>
                 </a:solidFill>
                 <a:latin typeface="Calibri" pitchFamily="34" charset="0"/>
                 <a:ea typeface="Calibri" pitchFamily="34" charset="-122"/>
@@ -5046,7 +4052,7 @@
             <a:r>
               <a:rPr lang="en-US" sz="1050" b="1" dirty="0">
                 <a:solidFill>
-                  <a:srgbClr val="1C7293"/>
+                  <a:srgbClr val="C45C26"/>
                 </a:solidFill>
                 <a:latin typeface="Calibri" pitchFamily="34" charset="0"/>
                 <a:ea typeface="Calibri" pitchFamily="34" charset="-122"/>
@@ -5092,7 +4098,7 @@
             </a:avLst>
           </a:prstGeom>
           <a:solidFill>
-            <a:srgbClr val="FFF8E1"/>
+            <a:srgbClr val="FFC400"/>
           </a:solidFill>
           <a:ln/>
         </p:spPr>
@@ -5127,7 +4133,7 @@
             <a:r>
               <a:rPr lang="en-US" sz="880" i="1" dirty="0">
                 <a:solidFill>
-                  <a:srgbClr val="8A8FA3"/>
+                  <a:srgbClr val="6B4A2A"/>
                 </a:solidFill>
                 <a:latin typeface="Calibri" pitchFamily="34" charset="0"/>
                 <a:ea typeface="Calibri" pitchFamily="34" charset="-122"/>
@@ -5160,7 +4166,7 @@
           </a:solidFill>
           <a:ln w="12700">
             <a:solidFill>
-              <a:srgbClr val="F0E0A8"/>
+              <a:srgbClr val="E07A2F"/>
             </a:solidFill>
             <a:prstDash val="solid"/>
           </a:ln>
@@ -5215,7 +4221,7 @@
             <a:r>
               <a:rPr lang="en-US" sz="1150" b="1" dirty="0">
                 <a:solidFill>
-                  <a:srgbClr val="27AE60"/>
+                  <a:srgbClr val="E85D4C"/>
                 </a:solidFill>
                 <a:latin typeface="Calibri" pitchFamily="34" charset="0"/>
                 <a:ea typeface="Calibri" pitchFamily="34" charset="-122"/>
@@ -5319,7 +4325,7 @@
             <a:r>
               <a:rPr lang="en-US" sz="1050" b="1" dirty="0">
                 <a:solidFill>
-                  <a:srgbClr val="1C7293"/>
+                  <a:srgbClr val="C45C26"/>
                 </a:solidFill>
                 <a:latin typeface="Calibri" pitchFamily="34" charset="0"/>
                 <a:ea typeface="Calibri" pitchFamily="34" charset="-122"/>
@@ -5378,7 +4384,7 @@
             <a:r>
               <a:rPr lang="en-US" sz="1050" b="1" dirty="0">
                 <a:solidFill>
-                  <a:srgbClr val="1C7293"/>
+                  <a:srgbClr val="C45C26"/>
                 </a:solidFill>
                 <a:latin typeface="Calibri" pitchFamily="34" charset="0"/>
                 <a:ea typeface="Calibri" pitchFamily="34" charset="-122"/>
@@ -5437,7 +4443,7 @@
             <a:r>
               <a:rPr lang="en-US" sz="1050" b="1" dirty="0">
                 <a:solidFill>
-                  <a:srgbClr val="1C7293"/>
+                  <a:srgbClr val="C45C26"/>
                 </a:solidFill>
                 <a:latin typeface="Calibri" pitchFamily="34" charset="0"/>
                 <a:ea typeface="Calibri" pitchFamily="34" charset="-122"/>
@@ -5496,7 +4502,7 @@
             <a:r>
               <a:rPr lang="en-US" sz="1050" b="1" dirty="0">
                 <a:solidFill>
-                  <a:srgbClr val="1C7293"/>
+                  <a:srgbClr val="C45C26"/>
                 </a:solidFill>
                 <a:latin typeface="Calibri" pitchFamily="34" charset="0"/>
                 <a:ea typeface="Calibri" pitchFamily="34" charset="-122"/>
@@ -5513,7 +4519,7 @@
             <a:r>
               <a:rPr lang="en-US" sz="1050" dirty="0">
                 <a:solidFill>
-                  <a:srgbClr val="F96167"/>
+                  <a:srgbClr val="E85D4C"/>
                 </a:solidFill>
                 <a:latin typeface="Calibri" pitchFamily="34" charset="0"/>
                 <a:ea typeface="Calibri" pitchFamily="34" charset="-122"/>
@@ -5555,7 +4561,7 @@
             <a:r>
               <a:rPr lang="en-US" sz="1050" b="1" dirty="0">
                 <a:solidFill>
-                  <a:srgbClr val="1C7293"/>
+                  <a:srgbClr val="C45C26"/>
                 </a:solidFill>
                 <a:latin typeface="Calibri" pitchFamily="34" charset="0"/>
                 <a:ea typeface="Calibri" pitchFamily="34" charset="-122"/>
@@ -5601,7 +4607,7 @@
             </a:avLst>
           </a:prstGeom>
           <a:solidFill>
-            <a:srgbClr val="FFF8E1"/>
+            <a:srgbClr val="FFC400"/>
           </a:solidFill>
           <a:ln/>
         </p:spPr>
@@ -5636,7 +4642,7 @@
             <a:r>
               <a:rPr lang="en-US" sz="880" i="1" dirty="0">
                 <a:solidFill>
-                  <a:srgbClr val="8A8FA3"/>
+                  <a:srgbClr val="6B4A2A"/>
                 </a:solidFill>
                 <a:latin typeface="Calibri" pitchFamily="34" charset="0"/>
                 <a:ea typeface="Calibri" pitchFamily="34" charset="-122"/>
@@ -5675,7 +4681,7 @@
             <a:r>
               <a:rPr lang="en-US" sz="850" dirty="0">
                 <a:solidFill>
-                  <a:srgbClr val="8A8FA3"/>
+                  <a:srgbClr val="6B4A2A"/>
                 </a:solidFill>
                 <a:latin typeface="Calibri" pitchFamily="34" charset="0"/>
                 <a:ea typeface="Calibri" pitchFamily="34" charset="-122"/>
@@ -5714,7 +4720,7 @@
             <a:r>
               <a:rPr lang="en-US" sz="850" dirty="0">
                 <a:solidFill>
-                  <a:srgbClr val="8A8FA3"/>
+                  <a:srgbClr val="6B4A2A"/>
                 </a:solidFill>
                 <a:latin typeface="Calibri" pitchFamily="34" charset="0"/>
                 <a:ea typeface="Calibri" pitchFamily="34" charset="-122"/>
@@ -5740,7 +4746,7 @@
     <p:bg>
       <p:bgPr>
         <a:solidFill>
-          <a:srgbClr val="16193B"/>
+          <a:srgbClr val="E85D4C"/>
         </a:solidFill>
       </p:bgPr>
     </p:bg>
@@ -5897,22 +4903,30 @@
           </a:p>
         </p:txBody>
       </p:sp>
-      <p:graphicFrame>
-        <p:nvGraphicFramePr>
-          <p:cNvPr id="6" name="Chart 0" descr=""/>
-          <p:cNvGraphicFramePr/>
-          <p:nvPr/>
-        </p:nvGraphicFramePr>
-        <p:xfrm>
-          <a:off x="594360" y="1783080"/>
-          <a:ext cx="5303520" cy="3017520"/>
-        </p:xfrm>
-        <a:graphic xmlns:a="http://schemas.openxmlformats.org/drawingml/2006/main">
-          <a:graphicData uri="http://schemas.openxmlformats.org/drawingml/2006/chart">
-            <c:chart xmlns:c="http://schemas.openxmlformats.org/drawingml/2006/chart" r:id="rId1"/>
-          </a:graphicData>
-        </a:graphic>
-      </p:graphicFrame>
+      <p:pic>
+        <p:nvPicPr>
+          <p:cNvPr id="6" name="Image 0" descr="preencoded.png">    </p:cNvPr>
+          <p:cNvPicPr>
+            <a:picLocks noChangeAspect="1"/>
+          </p:cNvPicPr>
+          <p:nvPr/>
+        </p:nvPicPr>
+        <p:blipFill>
+          <a:blip r:embed="rId1"/>
+          <a:stretch>
+            <a:fillRect/>
+          </a:stretch>
+        </p:blipFill>
+        <p:spPr>
+          <a:xfrm>
+            <a:off x="640080" y="1783080"/>
+            <a:ext cx="5212080" cy="3063240"/>
+          </a:xfrm>
+          <a:prstGeom prst="rect">
+            <a:avLst/>
+          </a:prstGeom>
+        </p:spPr>
+      </p:pic>
       <p:sp>
         <p:nvSpPr>
           <p:cNvPr id="7" name="Shape 4"/>
@@ -5976,7 +4990,7 @@
       </p:sp>
       <p:graphicFrame>
         <p:nvGraphicFramePr>
-          <p:cNvPr id="9" name="Chart 1" descr=""/>
+          <p:cNvPr id="9" name="Chart 0" descr=""/>
           <p:cNvGraphicFramePr/>
           <p:nvPr/>
         </p:nvGraphicFramePr>
@@ -6039,7 +5053,7 @@
             <a:r>
               <a:rPr lang="en-US" sz="2400" b="1" dirty="0">
                 <a:solidFill>
-                  <a:srgbClr val="F96167"/>
+                  <a:srgbClr val="E85D4C"/>
                 </a:solidFill>
                 <a:latin typeface="Cambria" pitchFamily="34" charset="0"/>
                 <a:ea typeface="Cambria" pitchFamily="34" charset="-122"/>
@@ -6081,7 +5095,7 @@
             <a:r>
               <a:rPr lang="en-US" sz="920" dirty="0">
                 <a:solidFill>
-                  <a:srgbClr val="CADCFC"/>
+                  <a:srgbClr val="FFE8C2"/>
                 </a:solidFill>
                 <a:latin typeface="Calibri" pitchFamily="34" charset="0"/>
                 <a:ea typeface="Calibri" pitchFamily="34" charset="-122"/>
@@ -6184,7 +5198,7 @@
             <a:r>
               <a:rPr lang="en-US" sz="920" dirty="0">
                 <a:solidFill>
-                  <a:srgbClr val="CADCFC"/>
+                  <a:srgbClr val="FFE8C2"/>
                 </a:solidFill>
                 <a:latin typeface="Calibri" pitchFamily="34" charset="0"/>
                 <a:ea typeface="Calibri" pitchFamily="34" charset="-122"/>
@@ -6245,7 +5259,7 @@
             <a:r>
               <a:rPr lang="en-US" sz="2400" b="1" dirty="0">
                 <a:solidFill>
-                  <a:srgbClr val="CADCFC"/>
+                  <a:srgbClr val="FFE8C2"/>
                 </a:solidFill>
                 <a:latin typeface="Cambria" pitchFamily="34" charset="0"/>
                 <a:ea typeface="Cambria" pitchFamily="34" charset="-122"/>
@@ -6287,7 +5301,7 @@
             <a:r>
               <a:rPr lang="en-US" sz="920" dirty="0">
                 <a:solidFill>
-                  <a:srgbClr val="CADCFC"/>
+                  <a:srgbClr val="FFE8C2"/>
                 </a:solidFill>
                 <a:latin typeface="Calibri" pitchFamily="34" charset="0"/>
                 <a:ea typeface="Calibri" pitchFamily="34" charset="-122"/>
@@ -6326,7 +5340,7 @@
             <a:r>
               <a:rPr lang="en-US" sz="850" dirty="0">
                 <a:solidFill>
-                  <a:srgbClr val="8A8FA3"/>
+                  <a:srgbClr val="6B4A2A"/>
                 </a:solidFill>
                 <a:latin typeface="Calibri" pitchFamily="34" charset="0"/>
                 <a:ea typeface="Calibri" pitchFamily="34" charset="-122"/>
@@ -6365,7 +5379,7 @@
             <a:r>
               <a:rPr lang="en-US" sz="850" dirty="0">
                 <a:solidFill>
-                  <a:srgbClr val="8A8FA3"/>
+                  <a:srgbClr val="6B4A2A"/>
                 </a:solidFill>
                 <a:latin typeface="Calibri" pitchFamily="34" charset="0"/>
                 <a:ea typeface="Calibri" pitchFamily="34" charset="-122"/>
@@ -6391,7 +5405,7 @@
     <p:bg>
       <p:bgPr>
         <a:solidFill>
-          <a:srgbClr val="FFF8E1"/>
+          <a:srgbClr val="FFC400"/>
         </a:solidFill>
       </p:bgPr>
     </p:bg>
@@ -6436,7 +5450,7 @@
             <a:r>
               <a:rPr lang="en-US" sz="1100" b="1" spc="250" kern="0" dirty="0">
                 <a:solidFill>
-                  <a:srgbClr val="F96167"/>
+                  <a:srgbClr val="E85D4C"/>
                 </a:solidFill>
                 <a:latin typeface="Calibri" pitchFamily="34" charset="0"/>
                 <a:ea typeface="Calibri" pitchFamily="34" charset="-122"/>
@@ -6508,7 +5522,7 @@
           </a:solidFill>
           <a:ln w="12700">
             <a:solidFill>
-              <a:srgbClr val="F0E0A8"/>
+              <a:srgbClr val="E07A2F"/>
             </a:solidFill>
             <a:prstDash val="solid"/>
           </a:ln>
@@ -6580,7 +5594,7 @@
             <a:r>
               <a:rPr lang="en-US" sz="1050" b="1" dirty="0">
                 <a:solidFill>
-                  <a:srgbClr val="F96167"/>
+                  <a:srgbClr val="E85D4C"/>
                 </a:solidFill>
                 <a:latin typeface="Calibri" pitchFamily="34" charset="0"/>
                 <a:ea typeface="Calibri" pitchFamily="34" charset="-122"/>
@@ -6677,7 +5691,7 @@
             <a:r>
               <a:rPr lang="en-US" sz="900" i="1" dirty="0">
                 <a:solidFill>
-                  <a:srgbClr val="8A8FA3"/>
+                  <a:srgbClr val="6B4A2A"/>
                 </a:solidFill>
                 <a:latin typeface="Calibri" pitchFamily="34" charset="0"/>
                 <a:ea typeface="Calibri" pitchFamily="34" charset="-122"/>
@@ -6710,7 +5724,7 @@
           </a:solidFill>
           <a:ln w="12700">
             <a:solidFill>
-              <a:srgbClr val="F0E0A8"/>
+              <a:srgbClr val="E07A2F"/>
             </a:solidFill>
             <a:prstDash val="solid"/>
           </a:ln>
@@ -6770,7 +5784,7 @@
             <a:avLst/>
           </a:prstGeom>
           <a:solidFill>
-            <a:srgbClr val="F96167"/>
+            <a:srgbClr val="E85D4C"/>
           </a:solidFill>
           <a:ln/>
         </p:spPr>
@@ -6822,7 +5836,7 @@
             <a:r>
               <a:rPr lang="en-US" sz="1020" dirty="0">
                 <a:solidFill>
-                  <a:srgbClr val="F96167"/>
+                  <a:srgbClr val="E85D4C"/>
                 </a:solidFill>
                 <a:latin typeface="Calibri" pitchFamily="34" charset="0"/>
                 <a:ea typeface="Calibri" pitchFamily="34" charset="-122"/>
@@ -6849,7 +5863,7 @@
             <a:avLst/>
           </a:prstGeom>
           <a:solidFill>
-            <a:srgbClr val="F96167"/>
+            <a:srgbClr val="E85D4C"/>
           </a:solidFill>
           <a:ln/>
         </p:spPr>
@@ -6928,7 +5942,7 @@
             <a:avLst/>
           </a:prstGeom>
           <a:solidFill>
-            <a:srgbClr val="F96167"/>
+            <a:srgbClr val="E85D4C"/>
           </a:solidFill>
           <a:ln/>
         </p:spPr>
@@ -6980,7 +5994,7 @@
             <a:r>
               <a:rPr lang="en-US" sz="1020" dirty="0">
                 <a:solidFill>
-                  <a:srgbClr val="F96167"/>
+                  <a:srgbClr val="E85D4C"/>
                 </a:solidFill>
                 <a:latin typeface="Calibri" pitchFamily="34" charset="0"/>
                 <a:ea typeface="Calibri" pitchFamily="34" charset="-122"/>
@@ -7007,7 +6021,7 @@
             <a:avLst/>
           </a:prstGeom>
           <a:solidFill>
-            <a:srgbClr val="F96167"/>
+            <a:srgbClr val="E85D4C"/>
           </a:solidFill>
           <a:ln/>
         </p:spPr>
@@ -7086,7 +6100,7 @@
             <a:avLst/>
           </a:prstGeom>
           <a:solidFill>
-            <a:srgbClr val="F96167"/>
+            <a:srgbClr val="E85D4C"/>
           </a:solidFill>
           <a:ln/>
         </p:spPr>
@@ -7138,7 +6152,7 @@
             <a:r>
               <a:rPr lang="en-US" sz="1020" dirty="0">
                 <a:solidFill>
-                  <a:srgbClr val="1C7293"/>
+                  <a:srgbClr val="C45C26"/>
                 </a:solidFill>
                 <a:latin typeface="Calibri" pitchFamily="34" charset="0"/>
                 <a:ea typeface="Calibri" pitchFamily="34" charset="-122"/>
@@ -7219,7 +6233,7 @@
             <a:r>
               <a:rPr lang="en-US" dirty="0">
                 <a:solidFill>
-                  <a:srgbClr val="CADCFC"/>
+                  <a:srgbClr val="FFE8C2"/>
                 </a:solidFill>
                 <a:latin typeface="Calibri" pitchFamily="34" charset="0"/>
                 <a:ea typeface="Calibri" pitchFamily="34" charset="-122"/>
@@ -7253,7 +6267,7 @@
             <a:r>
               <a:rPr lang="en-US" dirty="0">
                 <a:solidFill>
-                  <a:srgbClr val="CADCFC"/>
+                  <a:srgbClr val="FFE8C2"/>
                 </a:solidFill>
                 <a:latin typeface="Calibri" pitchFamily="34" charset="0"/>
                 <a:ea typeface="Calibri" pitchFamily="34" charset="-122"/>
@@ -7292,7 +6306,7 @@
             <a:r>
               <a:rPr lang="en-US" sz="850" dirty="0">
                 <a:solidFill>
-                  <a:srgbClr val="8A8FA3"/>
+                  <a:srgbClr val="6B4A2A"/>
                 </a:solidFill>
                 <a:latin typeface="Calibri" pitchFamily="34" charset="0"/>
                 <a:ea typeface="Calibri" pitchFamily="34" charset="-122"/>
@@ -7331,7 +6345,7 @@
             <a:r>
               <a:rPr lang="en-US" sz="850" dirty="0">
                 <a:solidFill>
-                  <a:srgbClr val="8A8FA3"/>
+                  <a:srgbClr val="6B4A2A"/>
                 </a:solidFill>
                 <a:latin typeface="Calibri" pitchFamily="34" charset="0"/>
                 <a:ea typeface="Calibri" pitchFamily="34" charset="-122"/>
@@ -7357,7 +6371,7 @@
     <p:bg>
       <p:bgPr>
         <a:solidFill>
-          <a:srgbClr val="16193B"/>
+          <a:srgbClr val="FF8A3D"/>
         </a:solidFill>
       </p:bgPr>
     </p:bg>
@@ -7402,7 +6416,7 @@
             <a:r>
               <a:rPr lang="en-US" sz="1100" b="1" spc="250" kern="0" dirty="0">
                 <a:solidFill>
-                  <a:srgbClr val="FFC400"/>
+                  <a:srgbClr val="1E2761"/>
                 </a:solidFill>
                 <a:latin typeface="Calibri" pitchFamily="34" charset="0"/>
                 <a:ea typeface="Calibri" pitchFamily="34" charset="-122"/>
@@ -7441,7 +6455,7 @@
             <a:r>
               <a:rPr lang="en-US" sz="2200" b="1" dirty="0">
                 <a:solidFill>
-                  <a:srgbClr val="FFFFFF"/>
+                  <a:srgbClr val="1E2761"/>
                 </a:solidFill>
                 <a:latin typeface="Cambria" pitchFamily="34" charset="0"/>
                 <a:ea typeface="Cambria" pitchFamily="34" charset="-122"/>
@@ -7490,7 +6504,7 @@
             <a:avLst/>
           </a:prstGeom>
           <a:solidFill>
-            <a:srgbClr val="F96167"/>
+            <a:srgbClr val="E85D4C"/>
           </a:solidFill>
           <a:ln/>
         </p:spPr>
@@ -7626,7 +6640,7 @@
             <a:r>
               <a:rPr lang="en-US" sz="1050" b="1" dirty="0">
                 <a:solidFill>
-                  <a:srgbClr val="F96167"/>
+                  <a:srgbClr val="E85D4C"/>
                 </a:solidFill>
                 <a:latin typeface="Calibri" pitchFamily="34" charset="0"/>
                 <a:ea typeface="Calibri" pitchFamily="34" charset="-122"/>
@@ -7668,7 +6682,7 @@
             <a:r>
               <a:rPr lang="en-US" sz="900" dirty="0">
                 <a:solidFill>
-                  <a:srgbClr val="CADCFC"/>
+                  <a:srgbClr val="FFE8C2"/>
                 </a:solidFill>
                 <a:latin typeface="Calibri" pitchFamily="34" charset="0"/>
                 <a:ea typeface="Calibri" pitchFamily="34" charset="-122"/>
@@ -7688,7 +6702,7 @@
             <a:r>
               <a:rPr lang="en-US" sz="900" dirty="0">
                 <a:solidFill>
-                  <a:srgbClr val="CADCFC"/>
+                  <a:srgbClr val="FFE8C2"/>
                 </a:solidFill>
                 <a:latin typeface="Calibri" pitchFamily="34" charset="0"/>
                 <a:ea typeface="Calibri" pitchFamily="34" charset="-122"/>
@@ -7730,7 +6744,7 @@
             <a:r>
               <a:rPr lang="en-US" sz="820" i="1" dirty="0">
                 <a:solidFill>
-                  <a:srgbClr val="8A8FA3"/>
+                  <a:srgbClr val="6B4A2A"/>
                 </a:solidFill>
                 <a:latin typeface="Calibri" pitchFamily="34" charset="0"/>
                 <a:ea typeface="Calibri" pitchFamily="34" charset="-122"/>
@@ -7937,7 +6951,7 @@
             <a:r>
               <a:rPr lang="en-US" sz="900" dirty="0">
                 <a:solidFill>
-                  <a:srgbClr val="CADCFC"/>
+                  <a:srgbClr val="FFE8C2"/>
                 </a:solidFill>
                 <a:latin typeface="Calibri" pitchFamily="34" charset="0"/>
                 <a:ea typeface="Calibri" pitchFamily="34" charset="-122"/>
@@ -7979,7 +6993,7 @@
             <a:r>
               <a:rPr lang="en-US" sz="820" i="1" dirty="0">
                 <a:solidFill>
-                  <a:srgbClr val="8A8FA3"/>
+                  <a:srgbClr val="6B4A2A"/>
                 </a:solidFill>
                 <a:latin typeface="Calibri" pitchFamily="34" charset="0"/>
                 <a:ea typeface="Calibri" pitchFamily="34" charset="-122"/>
@@ -8028,7 +7042,7 @@
             <a:avLst/>
           </a:prstGeom>
           <a:solidFill>
-            <a:srgbClr val="27AE60"/>
+            <a:srgbClr val="E85D4C"/>
           </a:solidFill>
           <a:ln/>
         </p:spPr>
@@ -8144,7 +7158,7 @@
             <a:r>
               <a:rPr lang="en-US" sz="1050" b="1" dirty="0">
                 <a:solidFill>
-                  <a:srgbClr val="27AE60"/>
+                  <a:srgbClr val="E85D4C"/>
                 </a:solidFill>
                 <a:latin typeface="Calibri" pitchFamily="34" charset="0"/>
                 <a:ea typeface="Calibri" pitchFamily="34" charset="-122"/>
@@ -8186,7 +7200,7 @@
             <a:r>
               <a:rPr lang="en-US" sz="900" dirty="0">
                 <a:solidFill>
-                  <a:srgbClr val="CADCFC"/>
+                  <a:srgbClr val="FFE8C2"/>
                 </a:solidFill>
                 <a:latin typeface="Calibri" pitchFamily="34" charset="0"/>
                 <a:ea typeface="Calibri" pitchFamily="34" charset="-122"/>
@@ -8228,7 +7242,7 @@
             <a:r>
               <a:rPr lang="en-US" sz="820" i="1" dirty="0">
                 <a:solidFill>
-                  <a:srgbClr val="8A8FA3"/>
+                  <a:srgbClr val="6B4A2A"/>
                 </a:solidFill>
                 <a:latin typeface="Calibri" pitchFamily="34" charset="0"/>
                 <a:ea typeface="Calibri" pitchFamily="34" charset="-122"/>
@@ -8267,7 +7281,7 @@
             <a:r>
               <a:rPr lang="en-US" sz="750" b="1" spc="150" kern="0" dirty="0">
                 <a:solidFill>
-                  <a:srgbClr val="8A8FA3"/>
+                  <a:srgbClr val="6B4A2A"/>
                 </a:solidFill>
                 <a:latin typeface="Calibri" pitchFamily="34" charset="0"/>
                 <a:ea typeface="Calibri" pitchFamily="34" charset="-122"/>
@@ -8306,7 +7320,7 @@
             <a:r>
               <a:rPr lang="en-US" sz="750" b="1" spc="150" kern="0" dirty="0">
                 <a:solidFill>
-                  <a:srgbClr val="8A8FA3"/>
+                  <a:srgbClr val="6B4A2A"/>
                 </a:solidFill>
                 <a:latin typeface="Calibri" pitchFamily="34" charset="0"/>
                 <a:ea typeface="Calibri" pitchFamily="34" charset="-122"/>
@@ -8345,7 +7359,7 @@
             <a:r>
               <a:rPr lang="en-US" sz="750" b="1" spc="150" kern="0" dirty="0">
                 <a:solidFill>
-                  <a:srgbClr val="8A8FA3"/>
+                  <a:srgbClr val="6B4A2A"/>
                 </a:solidFill>
                 <a:latin typeface="Calibri" pitchFamily="34" charset="0"/>
                 <a:ea typeface="Calibri" pitchFamily="34" charset="-122"/>
@@ -8384,7 +7398,7 @@
             <a:r>
               <a:rPr lang="en-US" sz="750" b="1" spc="150" kern="0" dirty="0">
                 <a:solidFill>
-                  <a:srgbClr val="8A8FA3"/>
+                  <a:srgbClr val="6B4A2A"/>
                 </a:solidFill>
                 <a:latin typeface="Calibri" pitchFamily="34" charset="0"/>
                 <a:ea typeface="Calibri" pitchFamily="34" charset="-122"/>
@@ -8413,7 +7427,7 @@
             </a:avLst>
           </a:prstGeom>
           <a:solidFill>
-            <a:srgbClr val="F96167"/>
+            <a:srgbClr val="E85D4C"/>
           </a:solidFill>
           <a:ln/>
         </p:spPr>
@@ -8504,7 +7518,7 @@
             <a:r>
               <a:rPr lang="en-US" sz="850" dirty="0">
                 <a:solidFill>
-                  <a:srgbClr val="8A8FA3"/>
+                  <a:srgbClr val="6B4A2A"/>
                 </a:solidFill>
                 <a:latin typeface="Calibri" pitchFamily="34" charset="0"/>
                 <a:ea typeface="Calibri" pitchFamily="34" charset="-122"/>
@@ -8543,7 +7557,7 @@
             <a:r>
               <a:rPr lang="en-US" sz="850" dirty="0">
                 <a:solidFill>
-                  <a:srgbClr val="8A8FA3"/>
+                  <a:srgbClr val="6B4A2A"/>
                 </a:solidFill>
                 <a:latin typeface="Calibri" pitchFamily="34" charset="0"/>
                 <a:ea typeface="Calibri" pitchFamily="34" charset="-122"/>

--- a/DECK.pptx
+++ b/DECK.pptx
@@ -2287,9 +2287,105 @@
           </a:p>
         </p:txBody>
       </p:sp>
-      <p:sp>
-        <p:nvSpPr>
-          <p:cNvPr id="11" name="Text 9"/>
+      <p:pic>
+        <p:nvPicPr>
+          <p:cNvPr id="11" name="Image 0" descr="preencoded.png">    </p:cNvPr>
+          <p:cNvPicPr>
+            <a:picLocks noChangeAspect="1"/>
+          </p:cNvPicPr>
+          <p:nvPr/>
+        </p:nvPicPr>
+        <p:blipFill>
+          <a:blip r:embed="rId1"/>
+          <a:stretch>
+            <a:fillRect/>
+          </a:stretch>
+        </p:blipFill>
+        <p:spPr>
+          <a:xfrm>
+            <a:off x="822960" y="5285232"/>
+            <a:ext cx="658368" cy="658368"/>
+          </a:xfrm>
+          <a:prstGeom prst="rect">
+            <a:avLst/>
+          </a:prstGeom>
+        </p:spPr>
+      </p:pic>
+      <p:pic>
+        <p:nvPicPr>
+          <p:cNvPr id="12" name="Image 1" descr="preencoded.png">    </p:cNvPr>
+          <p:cNvPicPr>
+            <a:picLocks noChangeAspect="1"/>
+          </p:cNvPicPr>
+          <p:nvPr/>
+        </p:nvPicPr>
+        <p:blipFill>
+          <a:blip r:embed="rId2"/>
+          <a:stretch>
+            <a:fillRect/>
+          </a:stretch>
+        </p:blipFill>
+        <p:spPr>
+          <a:xfrm>
+            <a:off x="1691640" y="5285232"/>
+            <a:ext cx="658368" cy="658368"/>
+          </a:xfrm>
+          <a:prstGeom prst="rect">
+            <a:avLst/>
+          </a:prstGeom>
+        </p:spPr>
+      </p:pic>
+      <p:pic>
+        <p:nvPicPr>
+          <p:cNvPr id="13" name="Image 2" descr="preencoded.png">    </p:cNvPr>
+          <p:cNvPicPr>
+            <a:picLocks noChangeAspect="1"/>
+          </p:cNvPicPr>
+          <p:nvPr/>
+        </p:nvPicPr>
+        <p:blipFill>
+          <a:blip r:embed="rId3"/>
+          <a:stretch>
+            <a:fillRect/>
+          </a:stretch>
+        </p:blipFill>
+        <p:spPr>
+          <a:xfrm>
+            <a:off x="2560320" y="5285232"/>
+            <a:ext cx="658368" cy="658368"/>
+          </a:xfrm>
+          <a:prstGeom prst="rect">
+            <a:avLst/>
+          </a:prstGeom>
+        </p:spPr>
+      </p:pic>
+      <p:pic>
+        <p:nvPicPr>
+          <p:cNvPr id="14" name="Image 3" descr="preencoded.png">    </p:cNvPr>
+          <p:cNvPicPr>
+            <a:picLocks noChangeAspect="1"/>
+          </p:cNvPicPr>
+          <p:nvPr/>
+        </p:nvPicPr>
+        <p:blipFill>
+          <a:blip r:embed="rId4"/>
+          <a:stretch>
+            <a:fillRect/>
+          </a:stretch>
+        </p:blipFill>
+        <p:spPr>
+          <a:xfrm>
+            <a:off x="3429000" y="5285232"/>
+            <a:ext cx="658368" cy="658368"/>
+          </a:xfrm>
+          <a:prstGeom prst="rect">
+            <a:avLst/>
+          </a:prstGeom>
+        </p:spPr>
+      </p:pic>
+      <p:sp>
+        <p:nvSpPr>
+          <p:cNvPr id="15" name="Text 9"/>
           <p:cNvSpPr txBox="1"/>
           <p:nvPr/>
         </p:nvSpPr>
@@ -3724,9 +3820,33 @@
           </a:p>
         </p:txBody>
       </p:sp>
-      <p:sp>
-        <p:nvSpPr>
-          <p:cNvPr id="7" name="Text 5"/>
+      <p:pic>
+        <p:nvPicPr>
+          <p:cNvPr id="7" name="Image 0" descr="preencoded.png">    </p:cNvPr>
+          <p:cNvPicPr>
+            <a:picLocks noChangeAspect="1"/>
+          </p:cNvPicPr>
+          <p:nvPr/>
+        </p:nvPicPr>
+        <p:blipFill>
+          <a:blip r:embed="rId1"/>
+          <a:stretch>
+            <a:fillRect/>
+          </a:stretch>
+        </p:blipFill>
+        <p:spPr>
+          <a:xfrm>
+            <a:off x="5212080" y="1444752"/>
+            <a:ext cx="475488" cy="475488"/>
+          </a:xfrm>
+          <a:prstGeom prst="rect">
+            <a:avLst/>
+          </a:prstGeom>
+        </p:spPr>
+      </p:pic>
+      <p:sp>
+        <p:nvSpPr>
+          <p:cNvPr id="8" name="Text 5"/>
           <p:cNvSpPr txBox="1"/>
           <p:nvPr/>
         </p:nvSpPr>
@@ -3788,7 +3908,7 @@
       </p:sp>
       <p:sp>
         <p:nvSpPr>
-          <p:cNvPr id="8" name="Text 6"/>
+          <p:cNvPr id="9" name="Text 6"/>
           <p:cNvSpPr txBox="1"/>
           <p:nvPr/>
         </p:nvSpPr>
@@ -3847,7 +3967,7 @@
       </p:sp>
       <p:sp>
         <p:nvSpPr>
-          <p:cNvPr id="9" name="Text 7"/>
+          <p:cNvPr id="10" name="Text 7"/>
           <p:cNvSpPr txBox="1"/>
           <p:nvPr/>
         </p:nvSpPr>
@@ -3906,7 +4026,7 @@
       </p:sp>
       <p:sp>
         <p:nvSpPr>
-          <p:cNvPr id="10" name="Text 8"/>
+          <p:cNvPr id="11" name="Text 8"/>
           <p:cNvSpPr txBox="1"/>
           <p:nvPr/>
         </p:nvSpPr>
@@ -3965,7 +4085,7 @@
       </p:sp>
       <p:sp>
         <p:nvSpPr>
-          <p:cNvPr id="11" name="Text 9"/>
+          <p:cNvPr id="12" name="Text 9"/>
           <p:cNvSpPr txBox="1"/>
           <p:nvPr/>
         </p:nvSpPr>
@@ -4024,7 +4144,7 @@
       </p:sp>
       <p:sp>
         <p:nvSpPr>
-          <p:cNvPr id="12" name="Text 10"/>
+          <p:cNvPr id="13" name="Text 10"/>
           <p:cNvSpPr txBox="1"/>
           <p:nvPr/>
         </p:nvSpPr>
@@ -4083,7 +4203,7 @@
       </p:sp>
       <p:sp>
         <p:nvSpPr>
-          <p:cNvPr id="13" name="Shape 11"/>
+          <p:cNvPr id="14" name="Shape 11"/>
           <p:cNvSpPr/>
           <p:nvPr/>
         </p:nvSpPr>
@@ -4105,7 +4225,7 @@
       </p:sp>
       <p:sp>
         <p:nvSpPr>
-          <p:cNvPr id="14" name="Text 12"/>
+          <p:cNvPr id="15" name="Text 12"/>
           <p:cNvSpPr txBox="1"/>
           <p:nvPr/>
         </p:nvSpPr>
@@ -4147,7 +4267,7 @@
       </p:sp>
       <p:sp>
         <p:nvSpPr>
-          <p:cNvPr id="15" name="Shape 13"/>
+          <p:cNvPr id="16" name="Shape 13"/>
           <p:cNvSpPr/>
           <p:nvPr/>
         </p:nvSpPr>
@@ -4174,7 +4294,7 @@
       </p:sp>
       <p:sp>
         <p:nvSpPr>
-          <p:cNvPr id="16" name="Shape 14"/>
+          <p:cNvPr id="17" name="Shape 14"/>
           <p:cNvSpPr/>
           <p:nvPr/>
         </p:nvSpPr>
@@ -4196,7 +4316,7 @@
       </p:sp>
       <p:sp>
         <p:nvSpPr>
-          <p:cNvPr id="17" name="Text 15"/>
+          <p:cNvPr id="18" name="Text 15"/>
           <p:cNvSpPr txBox="1"/>
           <p:nvPr/>
         </p:nvSpPr>
@@ -4233,9 +4353,33 @@
           </a:p>
         </p:txBody>
       </p:sp>
-      <p:sp>
-        <p:nvSpPr>
-          <p:cNvPr id="18" name="Text 16"/>
+      <p:pic>
+        <p:nvPicPr>
+          <p:cNvPr id="19" name="Image 1" descr="preencoded.png">    </p:cNvPr>
+          <p:cNvPicPr>
+            <a:picLocks noChangeAspect="1"/>
+          </p:cNvPicPr>
+          <p:nvPr/>
+        </p:nvPicPr>
+        <p:blipFill>
+          <a:blip r:embed="rId2"/>
+          <a:stretch>
+            <a:fillRect/>
+          </a:stretch>
+        </p:blipFill>
+        <p:spPr>
+          <a:xfrm>
+            <a:off x="10908792" y="1444752"/>
+            <a:ext cx="475488" cy="475488"/>
+          </a:xfrm>
+          <a:prstGeom prst="rect">
+            <a:avLst/>
+          </a:prstGeom>
+        </p:spPr>
+      </p:pic>
+      <p:sp>
+        <p:nvSpPr>
+          <p:cNvPr id="20" name="Text 16"/>
           <p:cNvSpPr txBox="1"/>
           <p:nvPr/>
         </p:nvSpPr>
@@ -4297,7 +4441,7 @@
       </p:sp>
       <p:sp>
         <p:nvSpPr>
-          <p:cNvPr id="19" name="Text 17"/>
+          <p:cNvPr id="21" name="Text 17"/>
           <p:cNvSpPr txBox="1"/>
           <p:nvPr/>
         </p:nvSpPr>
@@ -4356,7 +4500,7 @@
       </p:sp>
       <p:sp>
         <p:nvSpPr>
-          <p:cNvPr id="20" name="Text 18"/>
+          <p:cNvPr id="22" name="Text 18"/>
           <p:cNvSpPr txBox="1"/>
           <p:nvPr/>
         </p:nvSpPr>
@@ -4415,7 +4559,7 @@
       </p:sp>
       <p:sp>
         <p:nvSpPr>
-          <p:cNvPr id="21" name="Text 19"/>
+          <p:cNvPr id="23" name="Text 19"/>
           <p:cNvSpPr txBox="1"/>
           <p:nvPr/>
         </p:nvSpPr>
@@ -4474,7 +4618,7 @@
       </p:sp>
       <p:sp>
         <p:nvSpPr>
-          <p:cNvPr id="22" name="Text 20"/>
+          <p:cNvPr id="24" name="Text 20"/>
           <p:cNvSpPr txBox="1"/>
           <p:nvPr/>
         </p:nvSpPr>
@@ -4533,7 +4677,7 @@
       </p:sp>
       <p:sp>
         <p:nvSpPr>
-          <p:cNvPr id="23" name="Text 21"/>
+          <p:cNvPr id="25" name="Text 21"/>
           <p:cNvSpPr txBox="1"/>
           <p:nvPr/>
         </p:nvSpPr>
@@ -4592,7 +4736,7 @@
       </p:sp>
       <p:sp>
         <p:nvSpPr>
-          <p:cNvPr id="24" name="Shape 22"/>
+          <p:cNvPr id="26" name="Shape 22"/>
           <p:cNvSpPr/>
           <p:nvPr/>
         </p:nvSpPr>
@@ -4614,7 +4758,7 @@
       </p:sp>
       <p:sp>
         <p:nvSpPr>
-          <p:cNvPr id="25" name="Text 23"/>
+          <p:cNvPr id="27" name="Text 23"/>
           <p:cNvSpPr txBox="1"/>
           <p:nvPr/>
         </p:nvSpPr>
@@ -4656,7 +4800,7 @@
       </p:sp>
       <p:sp>
         <p:nvSpPr>
-          <p:cNvPr id="26" name="Text 24"/>
+          <p:cNvPr id="28" name="Text 24"/>
           <p:cNvSpPr txBox="1"/>
           <p:nvPr/>
         </p:nvSpPr>
@@ -4695,7 +4839,7 @@
       </p:sp>
       <p:sp>
         <p:nvSpPr>
-          <p:cNvPr id="27" name="Text 25"/>
+          <p:cNvPr id="29" name="Text 25"/>
           <p:cNvSpPr txBox="1"/>
           <p:nvPr/>
         </p:nvSpPr>
@@ -6489,15 +6633,39 @@
           <a:ln/>
         </p:spPr>
       </p:sp>
-      <p:sp>
-        <p:nvSpPr>
-          <p:cNvPr id="5" name="Shape 3"/>
+      <p:pic>
+        <p:nvPicPr>
+          <p:cNvPr id="5" name="Image 0" descr="preencoded.png">    </p:cNvPr>
+          <p:cNvPicPr>
+            <a:picLocks noChangeAspect="1"/>
+          </p:cNvPicPr>
+          <p:nvPr/>
+        </p:nvPicPr>
+        <p:blipFill>
+          <a:blip r:embed="rId1"/>
+          <a:stretch>
+            <a:fillRect/>
+          </a:stretch>
+        </p:blipFill>
+        <p:spPr>
+          <a:xfrm>
+            <a:off x="621792" y="1591056"/>
+            <a:ext cx="566928" cy="566928"/>
+          </a:xfrm>
+          <a:prstGeom prst="rect">
+            <a:avLst/>
+          </a:prstGeom>
+        </p:spPr>
+      </p:pic>
+      <p:sp>
+        <p:nvSpPr>
+          <p:cNvPr id="6" name="Shape 3"/>
           <p:cNvSpPr/>
           <p:nvPr/>
         </p:nvSpPr>
         <p:spPr>
           <a:xfrm>
-            <a:off x="685800" y="1682496"/>
+            <a:off x="1298448" y="1682496"/>
             <a:ext cx="384048" cy="384048"/>
           </a:xfrm>
           <a:prstGeom prst="ellipse">
@@ -6511,13 +6679,13 @@
       </p:sp>
       <p:sp>
         <p:nvSpPr>
-          <p:cNvPr id="6" name="Text 4"/>
-          <p:cNvSpPr txBox="1"/>
-          <p:nvPr/>
-        </p:nvSpPr>
-        <p:spPr>
-          <a:xfrm>
-            <a:off x="685800" y="1682496"/>
+          <p:cNvPr id="7" name="Text 4"/>
+          <p:cNvSpPr txBox="1"/>
+          <p:nvPr/>
+        </p:nvSpPr>
+        <p:spPr>
+          <a:xfrm>
+            <a:off x="1298448" y="1682496"/>
             <a:ext cx="384048" cy="384048"/>
           </a:xfrm>
           <a:prstGeom prst="rect">
@@ -6550,14 +6718,14 @@
       </p:sp>
       <p:sp>
         <p:nvSpPr>
-          <p:cNvPr id="7" name="Text 5"/>
-          <p:cNvSpPr txBox="1"/>
-          <p:nvPr/>
-        </p:nvSpPr>
-        <p:spPr>
-          <a:xfrm>
-            <a:off x="1280160" y="1444752"/>
-            <a:ext cx="4617720" cy="914400"/>
+          <p:cNvPr id="8" name="Text 5"/>
+          <p:cNvSpPr txBox="1"/>
+          <p:nvPr/>
+        </p:nvSpPr>
+        <p:spPr>
+          <a:xfrm>
+            <a:off x="1828800" y="1444752"/>
+            <a:ext cx="4069080" cy="914400"/>
           </a:xfrm>
           <a:prstGeom prst="rect">
             <a:avLst/>
@@ -6612,7 +6780,7 @@
       </p:sp>
       <p:sp>
         <p:nvSpPr>
-          <p:cNvPr id="8" name="Text 6"/>
+          <p:cNvPr id="9" name="Text 6"/>
           <p:cNvSpPr txBox="1"/>
           <p:nvPr/>
         </p:nvSpPr>
@@ -6654,7 +6822,7 @@
       </p:sp>
       <p:sp>
         <p:nvSpPr>
-          <p:cNvPr id="9" name="Text 7"/>
+          <p:cNvPr id="10" name="Text 7"/>
           <p:cNvSpPr txBox="1"/>
           <p:nvPr/>
         </p:nvSpPr>
@@ -6716,7 +6884,7 @@
       </p:sp>
       <p:sp>
         <p:nvSpPr>
-          <p:cNvPr id="10" name="Text 8"/>
+          <p:cNvPr id="11" name="Text 8"/>
           <p:cNvSpPr txBox="1"/>
           <p:nvPr/>
         </p:nvSpPr>
@@ -6758,7 +6926,7 @@
       </p:sp>
       <p:sp>
         <p:nvSpPr>
-          <p:cNvPr id="11" name="Shape 9"/>
+          <p:cNvPr id="12" name="Shape 9"/>
           <p:cNvSpPr/>
           <p:nvPr/>
         </p:nvSpPr>
@@ -6778,15 +6946,39 @@
           <a:ln/>
         </p:spPr>
       </p:sp>
-      <p:sp>
-        <p:nvSpPr>
-          <p:cNvPr id="12" name="Shape 10"/>
+      <p:pic>
+        <p:nvPicPr>
+          <p:cNvPr id="13" name="Image 1" descr="preencoded.png">    </p:cNvPr>
+          <p:cNvPicPr>
+            <a:picLocks noChangeAspect="1"/>
+          </p:cNvPicPr>
+          <p:nvPr/>
+        </p:nvPicPr>
+        <p:blipFill>
+          <a:blip r:embed="rId2"/>
+          <a:stretch>
+            <a:fillRect/>
+          </a:stretch>
+        </p:blipFill>
+        <p:spPr>
+          <a:xfrm>
+            <a:off x="621792" y="2688336"/>
+            <a:ext cx="566928" cy="566928"/>
+          </a:xfrm>
+          <a:prstGeom prst="rect">
+            <a:avLst/>
+          </a:prstGeom>
+        </p:spPr>
+      </p:pic>
+      <p:sp>
+        <p:nvSpPr>
+          <p:cNvPr id="14" name="Shape 10"/>
           <p:cNvSpPr/>
           <p:nvPr/>
         </p:nvSpPr>
         <p:spPr>
           <a:xfrm>
-            <a:off x="685800" y="2779776"/>
+            <a:off x="1298448" y="2779776"/>
             <a:ext cx="384048" cy="384048"/>
           </a:xfrm>
           <a:prstGeom prst="ellipse">
@@ -6800,13 +6992,13 @@
       </p:sp>
       <p:sp>
         <p:nvSpPr>
-          <p:cNvPr id="13" name="Text 11"/>
-          <p:cNvSpPr txBox="1"/>
-          <p:nvPr/>
-        </p:nvSpPr>
-        <p:spPr>
-          <a:xfrm>
-            <a:off x="685800" y="2779776"/>
+          <p:cNvPr id="15" name="Text 11"/>
+          <p:cNvSpPr txBox="1"/>
+          <p:nvPr/>
+        </p:nvSpPr>
+        <p:spPr>
+          <a:xfrm>
+            <a:off x="1298448" y="2779776"/>
             <a:ext cx="384048" cy="384048"/>
           </a:xfrm>
           <a:prstGeom prst="rect">
@@ -6839,14 +7031,14 @@
       </p:sp>
       <p:sp>
         <p:nvSpPr>
-          <p:cNvPr id="14" name="Text 12"/>
-          <p:cNvSpPr txBox="1"/>
-          <p:nvPr/>
-        </p:nvSpPr>
-        <p:spPr>
-          <a:xfrm>
-            <a:off x="1280160" y="2542032"/>
-            <a:ext cx="4617720" cy="914400"/>
+          <p:cNvPr id="16" name="Text 12"/>
+          <p:cNvSpPr txBox="1"/>
+          <p:nvPr/>
+        </p:nvSpPr>
+        <p:spPr>
+          <a:xfrm>
+            <a:off x="1828800" y="2542032"/>
+            <a:ext cx="4069080" cy="914400"/>
           </a:xfrm>
           <a:prstGeom prst="rect">
             <a:avLst/>
@@ -6881,7 +7073,7 @@
       </p:sp>
       <p:sp>
         <p:nvSpPr>
-          <p:cNvPr id="15" name="Text 13"/>
+          <p:cNvPr id="17" name="Text 13"/>
           <p:cNvSpPr txBox="1"/>
           <p:nvPr/>
         </p:nvSpPr>
@@ -6923,7 +7115,7 @@
       </p:sp>
       <p:sp>
         <p:nvSpPr>
-          <p:cNvPr id="16" name="Text 14"/>
+          <p:cNvPr id="18" name="Text 14"/>
           <p:cNvSpPr txBox="1"/>
           <p:nvPr/>
         </p:nvSpPr>
@@ -6965,7 +7157,7 @@
       </p:sp>
       <p:sp>
         <p:nvSpPr>
-          <p:cNvPr id="17" name="Text 15"/>
+          <p:cNvPr id="19" name="Text 15"/>
           <p:cNvSpPr txBox="1"/>
           <p:nvPr/>
         </p:nvSpPr>
@@ -7007,7 +7199,7 @@
       </p:sp>
       <p:sp>
         <p:nvSpPr>
-          <p:cNvPr id="18" name="Shape 16"/>
+          <p:cNvPr id="20" name="Shape 16"/>
           <p:cNvSpPr/>
           <p:nvPr/>
         </p:nvSpPr>
@@ -7027,15 +7219,39 @@
           <a:ln/>
         </p:spPr>
       </p:sp>
-      <p:sp>
-        <p:nvSpPr>
-          <p:cNvPr id="19" name="Shape 17"/>
+      <p:pic>
+        <p:nvPicPr>
+          <p:cNvPr id="21" name="Image 2" descr="preencoded.png">    </p:cNvPr>
+          <p:cNvPicPr>
+            <a:picLocks noChangeAspect="1"/>
+          </p:cNvPicPr>
+          <p:nvPr/>
+        </p:nvPicPr>
+        <p:blipFill>
+          <a:blip r:embed="rId3"/>
+          <a:stretch>
+            <a:fillRect/>
+          </a:stretch>
+        </p:blipFill>
+        <p:spPr>
+          <a:xfrm>
+            <a:off x="621792" y="3785616"/>
+            <a:ext cx="566928" cy="566928"/>
+          </a:xfrm>
+          <a:prstGeom prst="rect">
+            <a:avLst/>
+          </a:prstGeom>
+        </p:spPr>
+      </p:pic>
+      <p:sp>
+        <p:nvSpPr>
+          <p:cNvPr id="22" name="Shape 17"/>
           <p:cNvSpPr/>
           <p:nvPr/>
         </p:nvSpPr>
         <p:spPr>
           <a:xfrm>
-            <a:off x="685800" y="3877056"/>
+            <a:off x="1298448" y="3877056"/>
             <a:ext cx="384048" cy="384048"/>
           </a:xfrm>
           <a:prstGeom prst="ellipse">
@@ -7049,13 +7265,13 @@
       </p:sp>
       <p:sp>
         <p:nvSpPr>
-          <p:cNvPr id="20" name="Text 18"/>
-          <p:cNvSpPr txBox="1"/>
-          <p:nvPr/>
-        </p:nvSpPr>
-        <p:spPr>
-          <a:xfrm>
-            <a:off x="685800" y="3877056"/>
+          <p:cNvPr id="23" name="Text 18"/>
+          <p:cNvSpPr txBox="1"/>
+          <p:nvPr/>
+        </p:nvSpPr>
+        <p:spPr>
+          <a:xfrm>
+            <a:off x="1298448" y="3877056"/>
             <a:ext cx="384048" cy="384048"/>
           </a:xfrm>
           <a:prstGeom prst="rect">
@@ -7088,14 +7304,14 @@
       </p:sp>
       <p:sp>
         <p:nvSpPr>
-          <p:cNvPr id="21" name="Text 19"/>
-          <p:cNvSpPr txBox="1"/>
-          <p:nvPr/>
-        </p:nvSpPr>
-        <p:spPr>
-          <a:xfrm>
-            <a:off x="1280160" y="3639312"/>
-            <a:ext cx="4617720" cy="914400"/>
+          <p:cNvPr id="24" name="Text 19"/>
+          <p:cNvSpPr txBox="1"/>
+          <p:nvPr/>
+        </p:nvSpPr>
+        <p:spPr>
+          <a:xfrm>
+            <a:off x="1828800" y="3639312"/>
+            <a:ext cx="4069080" cy="914400"/>
           </a:xfrm>
           <a:prstGeom prst="rect">
             <a:avLst/>
@@ -7130,7 +7346,7 @@
       </p:sp>
       <p:sp>
         <p:nvSpPr>
-          <p:cNvPr id="22" name="Text 20"/>
+          <p:cNvPr id="25" name="Text 20"/>
           <p:cNvSpPr txBox="1"/>
           <p:nvPr/>
         </p:nvSpPr>
@@ -7172,7 +7388,7 @@
       </p:sp>
       <p:sp>
         <p:nvSpPr>
-          <p:cNvPr id="23" name="Text 21"/>
+          <p:cNvPr id="26" name="Text 21"/>
           <p:cNvSpPr txBox="1"/>
           <p:nvPr/>
         </p:nvSpPr>
@@ -7214,7 +7430,7 @@
       </p:sp>
       <p:sp>
         <p:nvSpPr>
-          <p:cNvPr id="24" name="Text 22"/>
+          <p:cNvPr id="27" name="Text 22"/>
           <p:cNvSpPr txBox="1"/>
           <p:nvPr/>
         </p:nvSpPr>
@@ -7256,7 +7472,7 @@
       </p:sp>
       <p:sp>
         <p:nvSpPr>
-          <p:cNvPr id="25" name="Text 23"/>
+          <p:cNvPr id="28" name="Text 23"/>
           <p:cNvSpPr txBox="1"/>
           <p:nvPr/>
         </p:nvSpPr>
@@ -7295,7 +7511,7 @@
       </p:sp>
       <p:sp>
         <p:nvSpPr>
-          <p:cNvPr id="26" name="Text 24"/>
+          <p:cNvPr id="29" name="Text 24"/>
           <p:cNvSpPr txBox="1"/>
           <p:nvPr/>
         </p:nvSpPr>
@@ -7334,7 +7550,7 @@
       </p:sp>
       <p:sp>
         <p:nvSpPr>
-          <p:cNvPr id="27" name="Text 25"/>
+          <p:cNvPr id="30" name="Text 25"/>
           <p:cNvSpPr txBox="1"/>
           <p:nvPr/>
         </p:nvSpPr>
@@ -7373,7 +7589,7 @@
       </p:sp>
       <p:sp>
         <p:nvSpPr>
-          <p:cNvPr id="28" name="Text 26"/>
+          <p:cNvPr id="31" name="Text 26"/>
           <p:cNvSpPr txBox="1"/>
           <p:nvPr/>
         </p:nvSpPr>
@@ -7412,7 +7628,7 @@
       </p:sp>
       <p:sp>
         <p:nvSpPr>
-          <p:cNvPr id="29" name="Shape 27"/>
+          <p:cNvPr id="32" name="Shape 27"/>
           <p:cNvSpPr/>
           <p:nvPr/>
         </p:nvSpPr>
@@ -7434,7 +7650,7 @@
       </p:sp>
       <p:sp>
         <p:nvSpPr>
-          <p:cNvPr id="30" name="Text 28"/>
+          <p:cNvPr id="33" name="Text 28"/>
           <p:cNvSpPr txBox="1"/>
           <p:nvPr/>
         </p:nvSpPr>
@@ -7493,7 +7709,7 @@
       </p:sp>
       <p:sp>
         <p:nvSpPr>
-          <p:cNvPr id="31" name="Text 29"/>
+          <p:cNvPr id="34" name="Text 29"/>
           <p:cNvSpPr txBox="1"/>
           <p:nvPr/>
         </p:nvSpPr>
@@ -7532,7 +7748,7 @@
       </p:sp>
       <p:sp>
         <p:nvSpPr>
-          <p:cNvPr id="32" name="Text 30"/>
+          <p:cNvPr id="35" name="Text 30"/>
           <p:cNvSpPr txBox="1"/>
           <p:nvPr/>
         </p:nvSpPr>

--- a/DECK.pptx
+++ b/DECK.pptx
@@ -11,10 +11,9 @@
     <p:sldId id="259" r:id="rId5"/>
     <p:sldId id="260" r:id="rId6"/>
     <p:sldId id="261" r:id="rId7"/>
-    <p:sldId id="262" r:id="rId8"/>
   </p:sldIdLst>
   <p:notesMasterIdLst>
-    <p:notesMasterId r:id="rId9"/>
+    <p:notesMasterId r:id="rId8"/>
   </p:notesMasterIdLst>
   <p:sldSz cx="12192000" cy="6858000"/>
   <p:notesSz cx="6858000" cy="12192000"/>
@@ -1082,7 +1081,7 @@
           <a:p>
             <a:r>
               <a:rPr lang="en-US" dirty="0"/>
-              <a:t/>
+              <a:t>Lead with C1b ~50. C1a is a Legal scenario. Campaign 0 pp. 98.7% R2A.</a:t>
             </a:r>
             <a:endParaRPr lang="en-US" dirty="0"/>
           </a:p>
@@ -1170,7 +1169,7 @@
           <a:p>
             <a:r>
               <a:rPr lang="en-US" dirty="0"/>
-              <a:t>Talk track: ~180, medium confidence (~134 RC + ~50 Insurance). 98.7% take a first trip.</a:t>
+              <a:t/>
             </a:r>
             <a:endParaRPr lang="en-US" dirty="0"/>
           </a:p>
@@ -1546,94 +1545,6 @@
             <a:fld id="{F7021451-1387-4CA6-816F-3879F97B5CBC}" type="slidenum">
               <a:rPr lang="en-US"/>
               <a:t>6</a:t>
-            </a:fld>
-            <a:endParaRPr lang="en-US"/>
-          </a:p>
-        </p:txBody>
-      </p:sp>
-    </p:spTree>
-    <p:extLst>
-      <p:ext uri="{BB962C8B-B14F-4D97-AF65-F5344CB8AC3E}">
-        <p14:creationId xmlns:p14="http://schemas.microsoft.com/office/powerpoint/2010/main" val="1024086991"/>
-      </p:ext>
-    </p:extLst>
-  </p:cSld>
-  <p:clrMapOvr>
-    <a:masterClrMapping/>
-  </p:clrMapOvr>
-</p:notes>
-</file>
-
-<file path=ppt/notesSlides/notesSlide7.xml><?xml version="1.0" encoding="utf-8"?>
-<p:notes xmlns:a="http://schemas.openxmlformats.org/drawingml/2006/main" xmlns:r="http://schemas.openxmlformats.org/officeDocument/2006/relationships" xmlns:p="http://schemas.openxmlformats.org/presentationml/2006/main">
-  <p:cSld>
-    <p:spTree>
-      <p:nvGrpSpPr>
-        <p:cNvPr id="1" name=""/>
-        <p:cNvGrpSpPr/>
-        <p:nvPr/>
-      </p:nvGrpSpPr>
-      <p:grpSpPr>
-        <a:xfrm>
-          <a:off x="0" y="0"/>
-          <a:ext cx="0" cy="0"/>
-          <a:chOff x="0" y="0"/>
-          <a:chExt cx="0" cy="0"/>
-        </a:xfrm>
-      </p:grpSpPr>
-      <p:sp>
-        <p:nvSpPr>
-          <p:cNvPr id="2" name="Slide Image Placeholder 1"/>
-          <p:cNvSpPr>
-            <a:spLocks noGrp="1" noRot="1" noChangeAspect="1"/>
-          </p:cNvSpPr>
-          <p:nvPr>
-            <p:ph type="sldImg"/>
-          </p:nvPr>
-        </p:nvSpPr>
-        <p:spPr/>
-      </p:sp>
-      <p:sp>
-        <p:nvSpPr>
-          <p:cNvPr id="3" name="Notes Placeholder 2"/>
-          <p:cNvSpPr>
-            <a:spLocks noGrp="1"/>
-          </p:cNvSpPr>
-          <p:nvPr>
-            <p:ph type="body" idx="1"/>
-          </p:nvPr>
-        </p:nvSpPr>
-        <p:spPr/>
-        <p:txBody>
-          <a:bodyPr/>
-          <a:lstStyle/>
-          <a:p>
-            <a:r>
-              <a:rPr lang="en-US" dirty="0"/>
-              <a:t/>
-            </a:r>
-            <a:endParaRPr lang="en-US" dirty="0"/>
-          </a:p>
-        </p:txBody>
-      </p:sp>
-      <p:sp>
-        <p:nvSpPr>
-          <p:cNvPr id="4" name="Slide Number Placeholder 3"/>
-          <p:cNvSpPr>
-            <a:spLocks noGrp="1"/>
-          </p:cNvSpPr>
-          <p:nvPr>
-            <p:ph type="sldNum" sz="quarter" idx="10"/>
-          </p:nvPr>
-        </p:nvSpPr>
-        <p:spPr/>
-        <p:txBody>
-          <a:bodyPr/>
-          <a:lstStyle/>
-          <a:p>
-            <a:fld id="{F7021451-1387-4CA6-816F-3879F97B5CBC}" type="slidenum">
-              <a:rPr lang="en-US"/>
-              <a:t>7</a:t>
             </a:fld>
             <a:endParaRPr lang="en-US"/>
           </a:p>
@@ -1985,90 +1896,30 @@
       </p:grpSpPr>
       <p:sp>
         <p:nvSpPr>
-          <p:cNvPr id="2" name="Shape 0"/>
-          <p:cNvSpPr/>
-          <p:nvPr/>
-        </p:nvSpPr>
-        <p:spPr>
-          <a:xfrm>
-            <a:off x="8778240" y="-2194560"/>
-            <a:ext cx="5852160" cy="5852160"/>
-          </a:xfrm>
-          <a:prstGeom prst="ellipse">
-            <a:avLst/>
-          </a:prstGeom>
-          <a:solidFill>
-            <a:srgbClr val="F6E4D4"/>
-          </a:solidFill>
-          <a:ln/>
-        </p:spPr>
-      </p:sp>
-      <p:sp>
-        <p:nvSpPr>
-          <p:cNvPr id="3" name="Shape 1"/>
-          <p:cNvSpPr/>
-          <p:nvPr/>
-        </p:nvSpPr>
-        <p:spPr>
-          <a:xfrm>
-            <a:off x="-2377440" y="4206240"/>
-            <a:ext cx="4754880" cy="4754880"/>
-          </a:xfrm>
-          <a:prstGeom prst="ellipse">
-            <a:avLst/>
-          </a:prstGeom>
-          <a:solidFill>
-            <a:srgbClr val="F8F1E3"/>
-          </a:solidFill>
-          <a:ln/>
-        </p:spPr>
-      </p:sp>
-      <p:sp>
-        <p:nvSpPr>
-          <p:cNvPr id="4" name="Shape 2"/>
-          <p:cNvSpPr/>
-          <p:nvPr/>
-        </p:nvSpPr>
-        <p:spPr>
-          <a:xfrm>
-            <a:off x="9509760" y="4480560"/>
-            <a:ext cx="3108960" cy="3108960"/>
-          </a:xfrm>
-          <a:prstGeom prst="ellipse">
-            <a:avLst/>
-          </a:prstGeom>
-          <a:solidFill>
-            <a:srgbClr val="F3E6C0"/>
-          </a:solidFill>
-          <a:ln/>
-        </p:spPr>
-      </p:sp>
-      <p:sp>
-        <p:nvSpPr>
-          <p:cNvPr id="5" name="Text 3"/>
-          <p:cNvSpPr txBox="1"/>
-          <p:nvPr/>
-        </p:nvSpPr>
-        <p:spPr>
-          <a:xfrm>
-            <a:off x="685800" y="1051560"/>
-            <a:ext cx="8686800" cy="329184"/>
-          </a:xfrm>
-          <a:prstGeom prst="rect">
-            <a:avLst/>
-          </a:prstGeom>
-          <a:noFill/>
-          <a:ln/>
-        </p:spPr>
-        <p:txBody>
-          <a:bodyPr wrap="square" lIns="0" tIns="0" rIns="0" bIns="0" rtlCol="0" anchor="ctr"/>
-          <a:lstStyle/>
-          <a:p>
-            <a:pPr indent="0" marL="0">
-              <a:buNone/>
-            </a:pPr>
-            <a:r>
-              <a:rPr lang="en-US" sz="1400" b="1" spc="220" kern="0" dirty="0">
+          <p:cNvPr id="2" name="Text 0"/>
+          <p:cNvSpPr txBox="1"/>
+          <p:nvPr/>
+        </p:nvSpPr>
+        <p:spPr>
+          <a:xfrm>
+            <a:off x="548640" y="292608"/>
+            <a:ext cx="9601200" cy="292608"/>
+          </a:xfrm>
+          <a:prstGeom prst="rect">
+            <a:avLst/>
+          </a:prstGeom>
+          <a:noFill/>
+          <a:ln/>
+        </p:spPr>
+        <p:txBody>
+          <a:bodyPr wrap="square" lIns="0" tIns="0" rIns="0" bIns="0" rtlCol="0" anchor="ctr"/>
+          <a:lstStyle/>
+          <a:p>
+            <a:pPr algn="l" indent="0" marL="0">
+              <a:buNone/>
+            </a:pPr>
+            <a:r>
+              <a:rPr lang="en-US" sz="1300" b="1" spc="180" kern="0" dirty="0">
                 <a:solidFill>
                   <a:srgbClr val="C45C26"/>
                 </a:solidFill>
@@ -2076,242 +1927,15 @@
                 <a:ea typeface="Calibri" pitchFamily="34" charset="-122"/>
                 <a:cs typeface="Calibri" pitchFamily="34" charset="-120"/>
               </a:rPr>
-              <a:t>RAPIDO DATA SCIENCE ASSESSMENT</a:t>
-            </a:r>
-            <a:endParaRPr lang="en-US" sz="1400" dirty="0"/>
-          </a:p>
-        </p:txBody>
-      </p:sp>
-      <p:sp>
-        <p:nvSpPr>
-          <p:cNvPr id="6" name="Text 4"/>
-          <p:cNvSpPr txBox="1"/>
-          <p:nvPr/>
-        </p:nvSpPr>
-        <p:spPr>
-          <a:xfrm>
-            <a:off x="640080" y="1444752"/>
-            <a:ext cx="8046720" cy="1554480"/>
-          </a:xfrm>
-          <a:prstGeom prst="rect">
-            <a:avLst/>
-          </a:prstGeom>
-          <a:noFill/>
-          <a:ln/>
-        </p:spPr>
-        <p:txBody>
-          <a:bodyPr wrap="square" lIns="0" tIns="0" rIns="0" bIns="0" rtlCol="0" anchor="ctr"/>
-          <a:lstStyle/>
-          <a:p>
-            <a:pPr algn="l" indent="0" marL="0">
-              <a:lnSpc>
-                <a:spcPct val="112000"/>
-              </a:lnSpc>
-              <a:buNone/>
-            </a:pPr>
-            <a:r>
-              <a:rPr lang="en-US" sz="3400" b="1" dirty="0">
-                <a:solidFill>
-                  <a:srgbClr val="1C1917"/>
-                </a:solidFill>
-                <a:latin typeface="Cambria" pitchFamily="34" charset="0"/>
-                <a:ea typeface="Cambria" pitchFamily="34" charset="-122"/>
-                <a:cs typeface="Cambria" pitchFamily="34" charset="-120"/>
-              </a:rPr>
-              <a:t>Captain onboarding leak</a:t>
-            </a:r>
-            <a:endParaRPr lang="en-US" sz="3400" dirty="0"/>
-          </a:p>
-          <a:p>
-            <a:pPr algn="l" indent="0" marL="0">
-              <a:lnSpc>
-                <a:spcPct val="112000"/>
-              </a:lnSpc>
-              <a:buNone/>
-            </a:pPr>
-            <a:r>
-              <a:rPr lang="en-US" sz="3400" b="1" dirty="0">
-                <a:solidFill>
-                  <a:srgbClr val="1C1917"/>
-                </a:solidFill>
-                <a:latin typeface="Cambria" pitchFamily="34" charset="0"/>
-                <a:ea typeface="Cambria" pitchFamily="34" charset="-122"/>
-                <a:cs typeface="Cambria" pitchFamily="34" charset="-120"/>
-              </a:rPr>
-              <a:t>&amp; overnight airport supply</a:t>
-            </a:r>
-            <a:endParaRPr lang="en-US" sz="3400" dirty="0"/>
-          </a:p>
-        </p:txBody>
-      </p:sp>
-      <p:sp>
-        <p:nvSpPr>
-          <p:cNvPr id="7" name="Text 5"/>
-          <p:cNvSpPr txBox="1"/>
-          <p:nvPr/>
-        </p:nvSpPr>
-        <p:spPr>
-          <a:xfrm>
-            <a:off x="685800" y="3127248"/>
-            <a:ext cx="7680960" cy="822960"/>
-          </a:xfrm>
-          <a:prstGeom prst="rect">
-            <a:avLst/>
-          </a:prstGeom>
-          <a:noFill/>
-          <a:ln/>
-        </p:spPr>
-        <p:txBody>
-          <a:bodyPr wrap="square" lIns="0" tIns="0" rIns="0" bIns="0" rtlCol="0" anchor="ctr"/>
-          <a:lstStyle/>
-          <a:p>
-            <a:pPr algn="l" indent="0" marL="0">
-              <a:lnSpc>
-                <a:spcPct val="128000"/>
-              </a:lnSpc>
-              <a:buNone/>
-            </a:pPr>
-            <a:r>
-              <a:rPr lang="en-US" sz="1600" dirty="0">
-                <a:solidFill>
-                  <a:srgbClr val="57534E"/>
-                </a:solidFill>
-                <a:latin typeface="Calibri" pitchFamily="34" charset="0"/>
-                <a:ea typeface="Calibri" pitchFamily="34" charset="-122"/>
-                <a:cs typeface="Calibri" pitchFamily="34" charset="-120"/>
-              </a:rPr>
-              <a:t>Where the extra ~180 approved captains a month come from, and why overnight airport supply is an economics problem, not a headcount one.</a:t>
-            </a:r>
-            <a:endParaRPr lang="en-US" sz="1600" dirty="0"/>
-          </a:p>
-        </p:txBody>
-      </p:sp>
-      <p:sp>
-        <p:nvSpPr>
-          <p:cNvPr id="8" name="Shape 6"/>
-          <p:cNvSpPr/>
-          <p:nvPr/>
-        </p:nvSpPr>
-        <p:spPr>
-          <a:xfrm>
-            <a:off x="685800" y="4096512"/>
-            <a:ext cx="2377440" cy="0"/>
-          </a:xfrm>
-          <a:prstGeom prst="line">
-            <a:avLst/>
-          </a:prstGeom>
-          <a:noFill/>
-          <a:ln w="31750">
-            <a:solidFill>
-              <a:srgbClr val="F0C9A0"/>
-            </a:solidFill>
-            <a:prstDash val="solid"/>
-          </a:ln>
-        </p:spPr>
-      </p:sp>
-      <p:sp>
-        <p:nvSpPr>
-          <p:cNvPr id="9" name="Text 7"/>
-          <p:cNvSpPr txBox="1"/>
-          <p:nvPr/>
-        </p:nvSpPr>
-        <p:spPr>
-          <a:xfrm>
-            <a:off x="685800" y="4261104"/>
-            <a:ext cx="6400800" cy="384048"/>
-          </a:xfrm>
-          <a:prstGeom prst="rect">
-            <a:avLst/>
-          </a:prstGeom>
-          <a:noFill/>
-          <a:ln/>
-        </p:spPr>
-        <p:txBody>
-          <a:bodyPr wrap="square" lIns="0" tIns="0" rIns="0" bIns="0" rtlCol="0" anchor="ctr"/>
-          <a:lstStyle/>
-          <a:p>
-            <a:pPr indent="0" marL="0">
-              <a:buNone/>
-            </a:pPr>
-            <a:r>
-              <a:rPr lang="en-US" sz="2200" b="1" dirty="0">
-                <a:solidFill>
-                  <a:srgbClr val="1C1917"/>
-                </a:solidFill>
-                <a:latin typeface="Cambria" pitchFamily="34" charset="0"/>
-                <a:ea typeface="Cambria" pitchFamily="34" charset="-122"/>
-                <a:cs typeface="Cambria" pitchFamily="34" charset="-120"/>
-              </a:rPr>
-              <a:t>Ramanathan K R</a:t>
-            </a:r>
-            <a:endParaRPr lang="en-US" sz="2200" dirty="0"/>
-          </a:p>
-        </p:txBody>
-      </p:sp>
-      <p:sp>
-        <p:nvSpPr>
-          <p:cNvPr id="10" name="Text 8"/>
-          <p:cNvSpPr txBox="1"/>
-          <p:nvPr/>
-        </p:nvSpPr>
-        <p:spPr>
-          <a:xfrm>
-            <a:off x="685800" y="4681728"/>
-            <a:ext cx="7772400" cy="292608"/>
-          </a:xfrm>
-          <a:prstGeom prst="rect">
-            <a:avLst/>
-          </a:prstGeom>
-          <a:noFill/>
-          <a:ln/>
-        </p:spPr>
-        <p:txBody>
-          <a:bodyPr wrap="square" lIns="0" tIns="0" rIns="0" bIns="0" rtlCol="0" anchor="ctr"/>
-          <a:lstStyle/>
-          <a:p>
-            <a:pPr indent="0" marL="0">
-              <a:buNone/>
-            </a:pPr>
-            <a:r>
-              <a:rPr lang="en-US" sz="1400" dirty="0">
-                <a:solidFill>
-                  <a:srgbClr val="57534E"/>
-                </a:solidFill>
-                <a:latin typeface="Calibri" pitchFamily="34" charset="0"/>
-                <a:ea typeface="Calibri" pitchFamily="34" charset="-122"/>
-                <a:cs typeface="Calibri" pitchFamily="34" charset="-120"/>
-              </a:rPr>
-              <a:t>10 September 2026  ·  Data extract as of 30 Jun 2026, 23:59 IST</a:t>
-            </a:r>
-            <a:endParaRPr lang="en-US" sz="1400" dirty="0"/>
-          </a:p>
-        </p:txBody>
-      </p:sp>
-      <p:sp>
-        <p:nvSpPr>
-          <p:cNvPr id="11" name="Shape 9"/>
-          <p:cNvSpPr/>
-          <p:nvPr/>
-        </p:nvSpPr>
-        <p:spPr>
-          <a:xfrm>
-            <a:off x="8549640" y="3127248"/>
-            <a:ext cx="3200400" cy="3108960"/>
-          </a:xfrm>
-          <a:prstGeom prst="roundRect">
-            <a:avLst>
-              <a:gd name="adj" fmla="val 4706"/>
-            </a:avLst>
-          </a:prstGeom>
-          <a:solidFill>
-            <a:srgbClr val="F6E4D4"/>
-          </a:solidFill>
-          <a:ln/>
-        </p:spPr>
+              <a:t>RAPIDO  ·  RAMANATHAN K R  ·  EXTRACT 30 JUN 2026, 23:59 IST</a:t>
+            </a:r>
+            <a:endParaRPr lang="en-US" sz="1300" dirty="0"/>
+          </a:p>
+        </p:txBody>
       </p:sp>
       <p:pic>
         <p:nvPicPr>
-          <p:cNvPr id="12" name="Image 0" descr="preencoded.png">    </p:cNvPr>
+          <p:cNvPr id="3" name="Image 0" descr="preencoded.png">    </p:cNvPr>
           <p:cNvPicPr>
             <a:picLocks noChangeAspect="1"/>
           </p:cNvPicPr>
@@ -2325,17 +1949,161 @@
         </p:blipFill>
         <p:spPr>
           <a:xfrm>
-            <a:off x="8686800" y="3218688"/>
-            <a:ext cx="1417320" cy="1417320"/>
+            <a:off x="11018520" y="164592"/>
+            <a:ext cx="868680" cy="868680"/>
           </a:xfrm>
           <a:prstGeom prst="rect">
             <a:avLst/>
           </a:prstGeom>
         </p:spPr>
       </p:pic>
+      <p:sp>
+        <p:nvSpPr>
+          <p:cNvPr id="4" name="Text 1"/>
+          <p:cNvSpPr txBox="1"/>
+          <p:nvPr/>
+        </p:nvSpPr>
+        <p:spPr>
+          <a:xfrm>
+            <a:off x="548640" y="585216"/>
+            <a:ext cx="10332720" cy="713232"/>
+          </a:xfrm>
+          <a:prstGeom prst="rect">
+            <a:avLst/>
+          </a:prstGeom>
+          <a:noFill/>
+          <a:ln/>
+        </p:spPr>
+        <p:txBody>
+          <a:bodyPr wrap="square" lIns="0" tIns="0" rIns="0" bIns="0" rtlCol="0" anchor="ctr"/>
+          <a:lstStyle/>
+          <a:p>
+            <a:pPr indent="0" marL="0">
+              <a:buNone/>
+            </a:pPr>
+            <a:r>
+              <a:rPr lang="en-US" sz="2200" b="1" dirty="0">
+                <a:solidFill>
+                  <a:srgbClr val="1C1917"/>
+                </a:solidFill>
+                <a:latin typeface="Cambria" pitchFamily="34" charset="0"/>
+                <a:ea typeface="Cambria" pitchFamily="34" charset="-122"/>
+                <a:cs typeface="Cambria" pitchFamily="34" charset="-120"/>
+              </a:rPr>
+              <a:t>Ship Insurance capture this week (~50/mo). Do not 5× WhatsApp. Do not hire the airport.</a:t>
+            </a:r>
+            <a:endParaRPr lang="en-US" sz="2200" dirty="0"/>
+          </a:p>
+        </p:txBody>
+      </p:sp>
+      <p:sp>
+        <p:nvSpPr>
+          <p:cNvPr id="5" name="Text 2"/>
+          <p:cNvSpPr txBox="1"/>
+          <p:nvPr/>
+        </p:nvSpPr>
+        <p:spPr>
+          <a:xfrm>
+            <a:off x="548640" y="1298448"/>
+            <a:ext cx="11064240" cy="640080"/>
+          </a:xfrm>
+          <a:prstGeom prst="rect">
+            <a:avLst/>
+          </a:prstGeom>
+          <a:noFill/>
+          <a:ln/>
+        </p:spPr>
+        <p:txBody>
+          <a:bodyPr wrap="square" lIns="0" tIns="0" rIns="0" bIns="0" rtlCol="0" anchor="ctr"/>
+          <a:lstStyle/>
+          <a:p>
+            <a:pPr indent="0" marL="0">
+              <a:buNone/>
+            </a:pPr>
+            <a:r>
+              <a:rPr lang="en-US" sz="1400" dirty="0">
+                <a:solidFill>
+                  <a:srgbClr val="57534E"/>
+                </a:solidFill>
+                <a:latin typeface="Calibri" pitchFamily="34" charset="0"/>
+                <a:ea typeface="Calibri" pitchFamily="34" charset="-122"/>
+                <a:cs typeface="Calibri" pitchFamily="34" charset="-120"/>
+              </a:rPr>
+              <a:t>The number I will put my name on this week is ~50 extra approved / month (C1b, no Legal). RC grace is ~134/mo only if Legal treats deferred RC as activation — otherwise ~36. 98.7% of mature approved already take a first trip (3,895 / 3,946): documents, not first-order.</a:t>
+            </a:r>
+            <a:endParaRPr lang="en-US" sz="1400" dirty="0"/>
+          </a:p>
+        </p:txBody>
+      </p:sp>
+      <p:sp>
+        <p:nvSpPr>
+          <p:cNvPr id="6" name="Shape 3"/>
+          <p:cNvSpPr/>
+          <p:nvPr/>
+        </p:nvSpPr>
+        <p:spPr>
+          <a:xfrm>
+            <a:off x="502920" y="1993392"/>
+            <a:ext cx="6903720" cy="3950208"/>
+          </a:xfrm>
+          <a:prstGeom prst="roundRect">
+            <a:avLst>
+              <a:gd name="adj" fmla="val 2315"/>
+            </a:avLst>
+          </a:prstGeom>
+          <a:solidFill>
+            <a:srgbClr val="FFFFFF"/>
+          </a:solidFill>
+          <a:ln w="15875">
+            <a:solidFill>
+              <a:srgbClr val="E8D5C0"/>
+            </a:solidFill>
+            <a:prstDash val="solid"/>
+          </a:ln>
+        </p:spPr>
+      </p:sp>
+      <p:sp>
+        <p:nvSpPr>
+          <p:cNvPr id="7" name="Text 4"/>
+          <p:cNvSpPr txBox="1"/>
+          <p:nvPr/>
+        </p:nvSpPr>
+        <p:spPr>
+          <a:xfrm>
+            <a:off x="685800" y="2066544"/>
+            <a:ext cx="6537960" cy="329184"/>
+          </a:xfrm>
+          <a:prstGeom prst="rect">
+            <a:avLst/>
+          </a:prstGeom>
+          <a:noFill/>
+          <a:ln/>
+        </p:spPr>
+        <p:txBody>
+          <a:bodyPr wrap="square" lIns="0" tIns="0" rIns="0" bIns="0" rtlCol="0" anchor="ctr"/>
+          <a:lstStyle/>
+          <a:p>
+            <a:pPr indent="0" marL="0">
+              <a:buNone/>
+            </a:pPr>
+            <a:r>
+              <a:rPr lang="en-US" sz="1300" b="1" dirty="0">
+                <a:solidFill>
+                  <a:srgbClr val="1C1917"/>
+                </a:solidFill>
+                <a:latin typeface="Calibri" pitchFamily="34" charset="0"/>
+                <a:ea typeface="Calibri" pitchFamily="34" charset="-122"/>
+                <a:cs typeface="Calibri" pitchFamily="34" charset="-120"/>
+              </a:rPr>
+              <a:t>If Legal says yes, C1a + C1b (disjoint) — not an unconditional bank</a:t>
+            </a:r>
+            <a:endParaRPr lang="en-US" sz="1300" dirty="0"/>
+          </a:p>
+        </p:txBody>
+      </p:sp>
       <p:pic>
         <p:nvPicPr>
-          <p:cNvPr id="13" name="Image 1" descr="preencoded.png">    </p:cNvPr>
+          <p:cNvPr id="8" name="Image 1" descr="preencoded.png">    </p:cNvPr>
           <p:cNvPicPr>
             <a:picLocks noChangeAspect="1"/>
           </p:cNvPicPr>
@@ -2349,62 +2117,436 @@
         </p:blipFill>
         <p:spPr>
           <a:xfrm>
-            <a:off x="10149840" y="3218688"/>
-            <a:ext cx="1417320" cy="1417320"/>
+            <a:off x="685800" y="2359152"/>
+            <a:ext cx="6537960" cy="3429000"/>
           </a:xfrm>
           <a:prstGeom prst="rect">
             <a:avLst/>
           </a:prstGeom>
         </p:spPr>
       </p:pic>
-      <p:pic>
-        <p:nvPicPr>
-          <p:cNvPr id="14" name="Image 2" descr="preencoded.png">    </p:cNvPr>
-          <p:cNvPicPr>
-            <a:picLocks noChangeAspect="1"/>
-          </p:cNvPicPr>
-          <p:nvPr/>
-        </p:nvPicPr>
-        <p:blipFill>
-          <a:blip r:embed="rId3"/>
-          <a:stretch>
-            <a:fillRect/>
-          </a:stretch>
-        </p:blipFill>
-        <p:spPr>
-          <a:xfrm>
-            <a:off x="8686800" y="4709160"/>
-            <a:ext cx="1417320" cy="1417320"/>
-          </a:xfrm>
-          <a:prstGeom prst="rect">
-            <a:avLst/>
-          </a:prstGeom>
-        </p:spPr>
-      </p:pic>
-      <p:pic>
-        <p:nvPicPr>
-          <p:cNvPr id="15" name="Image 3" descr="preencoded.png">    </p:cNvPr>
-          <p:cNvPicPr>
-            <a:picLocks noChangeAspect="1"/>
-          </p:cNvPicPr>
-          <p:nvPr/>
-        </p:nvPicPr>
-        <p:blipFill>
-          <a:blip r:embed="rId4"/>
-          <a:stretch>
-            <a:fillRect/>
-          </a:stretch>
-        </p:blipFill>
-        <p:spPr>
-          <a:xfrm>
-            <a:off x="10149840" y="4709160"/>
-            <a:ext cx="1417320" cy="1417320"/>
-          </a:xfrm>
-          <a:prstGeom prst="rect">
-            <a:avLst/>
-          </a:prstGeom>
-        </p:spPr>
-      </p:pic>
+      <p:sp>
+        <p:nvSpPr>
+          <p:cNvPr id="9" name="Shape 5"/>
+          <p:cNvSpPr/>
+          <p:nvPr/>
+        </p:nvSpPr>
+        <p:spPr>
+          <a:xfrm>
+            <a:off x="7589520" y="1993392"/>
+            <a:ext cx="4069080" cy="1261872"/>
+          </a:xfrm>
+          <a:prstGeom prst="roundRect">
+            <a:avLst>
+              <a:gd name="adj" fmla="val 7246"/>
+            </a:avLst>
+          </a:prstGeom>
+          <a:solidFill>
+            <a:srgbClr val="FFFFFF"/>
+          </a:solidFill>
+          <a:ln w="15875">
+            <a:solidFill>
+              <a:srgbClr val="E8D5C0"/>
+            </a:solidFill>
+            <a:prstDash val="solid"/>
+          </a:ln>
+        </p:spPr>
+      </p:sp>
+      <p:sp>
+        <p:nvSpPr>
+          <p:cNvPr id="10" name="Text 6"/>
+          <p:cNvSpPr txBox="1"/>
+          <p:nvPr/>
+        </p:nvSpPr>
+        <p:spPr>
+          <a:xfrm>
+            <a:off x="7772400" y="2121408"/>
+            <a:ext cx="3703320" cy="530352"/>
+          </a:xfrm>
+          <a:prstGeom prst="rect">
+            <a:avLst/>
+          </a:prstGeom>
+          <a:noFill/>
+          <a:ln/>
+        </p:spPr>
+        <p:txBody>
+          <a:bodyPr wrap="square" lIns="0" tIns="0" rIns="0" bIns="0" rtlCol="0" anchor="ctr"/>
+          <a:lstStyle/>
+          <a:p>
+            <a:pPr indent="0" marL="0">
+              <a:buNone/>
+            </a:pPr>
+            <a:r>
+              <a:rPr lang="en-US" sz="2800" b="1" dirty="0">
+                <a:solidFill>
+                  <a:srgbClr val="1C1917"/>
+                </a:solidFill>
+                <a:latin typeface="Cambria" pitchFamily="34" charset="0"/>
+                <a:ea typeface="Cambria" pitchFamily="34" charset="-122"/>
+                <a:cs typeface="Cambria" pitchFamily="34" charset="-120"/>
+              </a:rPr>
+              <a:t>~50 / mo</a:t>
+            </a:r>
+            <a:endParaRPr lang="en-US" sz="2800" dirty="0"/>
+          </a:p>
+        </p:txBody>
+      </p:sp>
+      <p:sp>
+        <p:nvSpPr>
+          <p:cNvPr id="11" name="Text 7"/>
+          <p:cNvSpPr txBox="1"/>
+          <p:nvPr/>
+        </p:nvSpPr>
+        <p:spPr>
+          <a:xfrm>
+            <a:off x="7772400" y="2651760"/>
+            <a:ext cx="3703320" cy="475488"/>
+          </a:xfrm>
+          <a:prstGeom prst="rect">
+            <a:avLst/>
+          </a:prstGeom>
+          <a:noFill/>
+          <a:ln/>
+        </p:spPr>
+        <p:txBody>
+          <a:bodyPr wrap="square" lIns="0" tIns="0" rIns="0" bIns="0" rtlCol="0" anchor="ctr"/>
+          <a:lstStyle/>
+          <a:p>
+            <a:pPr indent="0" marL="0">
+              <a:lnSpc>
+                <a:spcPct val="115000"/>
+              </a:lnSpc>
+              <a:buNone/>
+            </a:pPr>
+            <a:r>
+              <a:rPr lang="en-US" sz="1300" dirty="0">
+                <a:solidFill>
+                  <a:srgbClr val="57534E"/>
+                </a:solidFill>
+                <a:latin typeface="Calibri" pitchFamily="34" charset="0"/>
+                <a:ea typeface="Calibri" pitchFamily="34" charset="-122"/>
+                <a:cs typeface="Calibri" pitchFamily="34" charset="-120"/>
+              </a:rPr>
+              <a:t>C1b Insurance UX. Ship this week. Engineering only. This is the unconditional number.</a:t>
+            </a:r>
+            <a:endParaRPr lang="en-US" sz="1300" dirty="0"/>
+          </a:p>
+        </p:txBody>
+      </p:sp>
+      <p:sp>
+        <p:nvSpPr>
+          <p:cNvPr id="12" name="Shape 8"/>
+          <p:cNvSpPr/>
+          <p:nvPr/>
+        </p:nvSpPr>
+        <p:spPr>
+          <a:xfrm>
+            <a:off x="7589520" y="3364992"/>
+            <a:ext cx="4069080" cy="1261872"/>
+          </a:xfrm>
+          <a:prstGeom prst="roundRect">
+            <a:avLst>
+              <a:gd name="adj" fmla="val 7246"/>
+            </a:avLst>
+          </a:prstGeom>
+          <a:solidFill>
+            <a:srgbClr val="FFFFFF"/>
+          </a:solidFill>
+          <a:ln w="15875">
+            <a:solidFill>
+              <a:srgbClr val="E8D5C0"/>
+            </a:solidFill>
+            <a:prstDash val="solid"/>
+          </a:ln>
+        </p:spPr>
+      </p:sp>
+      <p:sp>
+        <p:nvSpPr>
+          <p:cNvPr id="13" name="Text 9"/>
+          <p:cNvSpPr txBox="1"/>
+          <p:nvPr/>
+        </p:nvSpPr>
+        <p:spPr>
+          <a:xfrm>
+            <a:off x="7772400" y="3493008"/>
+            <a:ext cx="3703320" cy="530352"/>
+          </a:xfrm>
+          <a:prstGeom prst="rect">
+            <a:avLst/>
+          </a:prstGeom>
+          <a:noFill/>
+          <a:ln/>
+        </p:spPr>
+        <p:txBody>
+          <a:bodyPr wrap="square" lIns="0" tIns="0" rIns="0" bIns="0" rtlCol="0" anchor="ctr"/>
+          <a:lstStyle/>
+          <a:p>
+            <a:pPr indent="0" marL="0">
+              <a:buNone/>
+            </a:pPr>
+            <a:r>
+              <a:rPr lang="en-US" sz="2800" b="1" dirty="0">
+                <a:solidFill>
+                  <a:srgbClr val="1C1917"/>
+                </a:solidFill>
+                <a:latin typeface="Cambria" pitchFamily="34" charset="0"/>
+                <a:ea typeface="Cambria" pitchFamily="34" charset="-122"/>
+                <a:cs typeface="Cambria" pitchFamily="34" charset="-120"/>
+              </a:rPr>
+              <a:t>~134 / ~36</a:t>
+            </a:r>
+            <a:endParaRPr lang="en-US" sz="2800" dirty="0"/>
+          </a:p>
+        </p:txBody>
+      </p:sp>
+      <p:sp>
+        <p:nvSpPr>
+          <p:cNvPr id="14" name="Text 10"/>
+          <p:cNvSpPr txBox="1"/>
+          <p:nvPr/>
+        </p:nvSpPr>
+        <p:spPr>
+          <a:xfrm>
+            <a:off x="7772400" y="4023360"/>
+            <a:ext cx="3703320" cy="475488"/>
+          </a:xfrm>
+          <a:prstGeom prst="rect">
+            <a:avLst/>
+          </a:prstGeom>
+          <a:noFill/>
+          <a:ln/>
+        </p:spPr>
+        <p:txBody>
+          <a:bodyPr wrap="square" lIns="0" tIns="0" rIns="0" bIns="0" rtlCol="0" anchor="ctr"/>
+          <a:lstStyle/>
+          <a:p>
+            <a:pPr indent="0" marL="0">
+              <a:lnSpc>
+                <a:spcPct val="115000"/>
+              </a:lnSpc>
+              <a:buNone/>
+            </a:pPr>
+            <a:r>
+              <a:rPr lang="en-US" sz="1300" dirty="0">
+                <a:solidFill>
+                  <a:srgbClr val="57534E"/>
+                </a:solidFill>
+                <a:latin typeface="Calibri" pitchFamily="34" charset="0"/>
+                <a:ea typeface="Calibri" pitchFamily="34" charset="-122"/>
+                <a:cs typeface="Calibri" pitchFamily="34" charset="-120"/>
+              </a:rPr>
+              <a:t>C1a RC grace at 60% show-up if Legal yes. If remaining docs still bind: ~36.</a:t>
+            </a:r>
+            <a:endParaRPr lang="en-US" sz="1300" dirty="0"/>
+          </a:p>
+        </p:txBody>
+      </p:sp>
+      <p:sp>
+        <p:nvSpPr>
+          <p:cNvPr id="15" name="Shape 11"/>
+          <p:cNvSpPr/>
+          <p:nvPr/>
+        </p:nvSpPr>
+        <p:spPr>
+          <a:xfrm>
+            <a:off x="7589520" y="4736592"/>
+            <a:ext cx="4069080" cy="1207008"/>
+          </a:xfrm>
+          <a:prstGeom prst="roundRect">
+            <a:avLst>
+              <a:gd name="adj" fmla="val 7576"/>
+            </a:avLst>
+          </a:prstGeom>
+          <a:solidFill>
+            <a:srgbClr val="FFFFFF"/>
+          </a:solidFill>
+          <a:ln w="15875">
+            <a:solidFill>
+              <a:srgbClr val="E8D5C0"/>
+            </a:solidFill>
+            <a:prstDash val="solid"/>
+          </a:ln>
+        </p:spPr>
+      </p:sp>
+      <p:sp>
+        <p:nvSpPr>
+          <p:cNvPr id="16" name="Text 12"/>
+          <p:cNvSpPr txBox="1"/>
+          <p:nvPr/>
+        </p:nvSpPr>
+        <p:spPr>
+          <a:xfrm>
+            <a:off x="7772400" y="4864608"/>
+            <a:ext cx="3703320" cy="530352"/>
+          </a:xfrm>
+          <a:prstGeom prst="rect">
+            <a:avLst/>
+          </a:prstGeom>
+          <a:noFill/>
+          <a:ln/>
+        </p:spPr>
+        <p:txBody>
+          <a:bodyPr wrap="square" lIns="0" tIns="0" rIns="0" bIns="0" rtlCol="0" anchor="ctr"/>
+          <a:lstStyle/>
+          <a:p>
+            <a:pPr indent="0" marL="0">
+              <a:buNone/>
+            </a:pPr>
+            <a:r>
+              <a:rPr lang="en-US" sz="2800" b="1" dirty="0">
+                <a:solidFill>
+                  <a:srgbClr val="1C1917"/>
+                </a:solidFill>
+                <a:latin typeface="Cambria" pitchFamily="34" charset="0"/>
+                <a:ea typeface="Cambria" pitchFamily="34" charset="-122"/>
+                <a:cs typeface="Cambria" pitchFamily="34" charset="-120"/>
+              </a:rPr>
+              <a:t>0 pp</a:t>
+            </a:r>
+            <a:endParaRPr lang="en-US" sz="2800" dirty="0"/>
+          </a:p>
+        </p:txBody>
+      </p:sp>
+      <p:sp>
+        <p:nvSpPr>
+          <p:cNvPr id="17" name="Text 13"/>
+          <p:cNvSpPr txBox="1"/>
+          <p:nvPr/>
+        </p:nvSpPr>
+        <p:spPr>
+          <a:xfrm>
+            <a:off x="7772400" y="5394960"/>
+            <a:ext cx="3703320" cy="420624"/>
+          </a:xfrm>
+          <a:prstGeom prst="rect">
+            <a:avLst/>
+          </a:prstGeom>
+          <a:noFill/>
+          <a:ln/>
+        </p:spPr>
+        <p:txBody>
+          <a:bodyPr wrap="square" lIns="0" tIns="0" rIns="0" bIns="0" rtlCol="0" anchor="ctr"/>
+          <a:lstStyle/>
+          <a:p>
+            <a:pPr indent="0" marL="0">
+              <a:lnSpc>
+                <a:spcPct val="115000"/>
+              </a:lnSpc>
+              <a:buNone/>
+            </a:pPr>
+            <a:r>
+              <a:rPr lang="en-US" sz="1300" dirty="0">
+                <a:solidFill>
+                  <a:srgbClr val="57534E"/>
+                </a:solidFill>
+                <a:latin typeface="Calibri" pitchFamily="34" charset="0"/>
+                <a:ea typeface="Calibri" pitchFamily="34" charset="-122"/>
+                <a:cs typeface="Calibri" pitchFamily="34" charset="-120"/>
+              </a:rPr>
+              <a:t>CAMP_WA_002 honest contrast (clicked vs not). Do not fund 5×.</a:t>
+            </a:r>
+            <a:endParaRPr lang="en-US" sz="1300" dirty="0"/>
+          </a:p>
+        </p:txBody>
+      </p:sp>
+      <p:sp>
+        <p:nvSpPr>
+          <p:cNvPr id="18" name="Shape 14"/>
+          <p:cNvSpPr/>
+          <p:nvPr/>
+        </p:nvSpPr>
+        <p:spPr>
+          <a:xfrm>
+            <a:off x="0" y="6419088"/>
+            <a:ext cx="12191695" cy="438912"/>
+          </a:xfrm>
+          <a:prstGeom prst="rect">
+            <a:avLst/>
+          </a:prstGeom>
+          <a:solidFill>
+            <a:srgbClr val="F6E4D4"/>
+          </a:solidFill>
+          <a:ln/>
+        </p:spPr>
+      </p:sp>
+      <p:sp>
+        <p:nvSpPr>
+          <p:cNvPr id="19" name="Text 15"/>
+          <p:cNvSpPr txBox="1"/>
+          <p:nvPr/>
+        </p:nvSpPr>
+        <p:spPr>
+          <a:xfrm>
+            <a:off x="502920" y="6473952"/>
+            <a:ext cx="6583680" cy="292608"/>
+          </a:xfrm>
+          <a:prstGeom prst="rect">
+            <a:avLst/>
+          </a:prstGeom>
+          <a:noFill/>
+          <a:ln/>
+        </p:spPr>
+        <p:txBody>
+          <a:bodyPr wrap="square" lIns="0" tIns="0" rIns="0" bIns="0" rtlCol="0" anchor="ctr"/>
+          <a:lstStyle/>
+          <a:p>
+            <a:pPr algn="l" indent="0" marL="0">
+              <a:buNone/>
+            </a:pPr>
+            <a:r>
+              <a:rPr lang="en-US" sz="1100" dirty="0">
+                <a:solidFill>
+                  <a:srgbClr val="57534E"/>
+                </a:solidFill>
+                <a:latin typeface="Calibri" pitchFamily="34" charset="0"/>
+                <a:ea typeface="Calibri" pitchFamily="34" charset="-122"/>
+                <a:cs typeface="Calibri" pitchFamily="34" charset="-120"/>
+              </a:rPr>
+              <a:t>Rapido Supply  ·  Captain onboarding &amp; airport supply</a:t>
+            </a:r>
+            <a:endParaRPr lang="en-US" sz="1100" dirty="0"/>
+          </a:p>
+        </p:txBody>
+      </p:sp>
+      <p:sp>
+        <p:nvSpPr>
+          <p:cNvPr id="20" name="Text 16"/>
+          <p:cNvSpPr txBox="1"/>
+          <p:nvPr/>
+        </p:nvSpPr>
+        <p:spPr>
+          <a:xfrm>
+            <a:off x="6339535" y="6473952"/>
+            <a:ext cx="5349240" cy="292608"/>
+          </a:xfrm>
+          <a:prstGeom prst="rect">
+            <a:avLst/>
+          </a:prstGeom>
+          <a:noFill/>
+          <a:ln/>
+        </p:spPr>
+        <p:txBody>
+          <a:bodyPr wrap="square" lIns="0" tIns="0" rIns="0" bIns="0" rtlCol="0" anchor="ctr"/>
+          <a:lstStyle/>
+          <a:p>
+            <a:pPr algn="r" indent="0" marL="0">
+              <a:buNone/>
+            </a:pPr>
+            <a:r>
+              <a:rPr lang="en-US" sz="1100" dirty="0">
+                <a:solidFill>
+                  <a:srgbClr val="57534E"/>
+                </a:solidFill>
+                <a:latin typeface="Calibri" pitchFamily="34" charset="0"/>
+                <a:ea typeface="Calibri" pitchFamily="34" charset="-122"/>
+                <a:cs typeface="Calibri" pitchFamily="34" charset="-120"/>
+              </a:rPr>
+              <a:t>Ramanathan K R  ·  Rapido Data Science Assessment     1 / 6</a:t>
+            </a:r>
+            <a:endParaRPr lang="en-US" sz="1100" dirty="0"/>
+          </a:p>
+        </p:txBody>
+      </p:sp>
     </p:spTree>
   </p:cSld>
   <p:clrMapOvr>
@@ -2470,7 +2612,7 @@
                 <a:ea typeface="Calibri" pitchFamily="34" charset="-122"/>
                 <a:cs typeface="Calibri" pitchFamily="34" charset="-120"/>
               </a:rPr>
-              <a:t>CAPTAIN ONBOARDING — THE HEADLINE</a:t>
+              <a:t>ROOT CAUSE</a:t>
             </a:r>
             <a:endParaRPr lang="en-US" sz="1300" dirty="0"/>
           </a:p>
@@ -2509,23 +2651,23 @@
         <p:spPr>
           <a:xfrm>
             <a:off x="548640" y="621792"/>
-            <a:ext cx="10241280" cy="640080"/>
-          </a:xfrm>
-          <a:prstGeom prst="rect">
-            <a:avLst/>
-          </a:prstGeom>
-          <a:noFill/>
-          <a:ln/>
-        </p:spPr>
-        <p:txBody>
-          <a:bodyPr wrap="square" lIns="0" tIns="0" rIns="0" bIns="0" rtlCol="0" anchor="ctr"/>
-          <a:lstStyle/>
-          <a:p>
-            <a:pPr indent="0" marL="0">
-              <a:buNone/>
-            </a:pPr>
-            <a:r>
-              <a:rPr lang="en-US" sz="2600" b="1" dirty="0">
+            <a:ext cx="10332720" cy="566928"/>
+          </a:xfrm>
+          <a:prstGeom prst="rect">
+            <a:avLst/>
+          </a:prstGeom>
+          <a:noFill/>
+          <a:ln/>
+        </p:spPr>
+        <p:txBody>
+          <a:bodyPr wrap="square" lIns="0" tIns="0" rIns="0" bIns="0" rtlCol="0" anchor="ctr"/>
+          <a:lstStyle/>
+          <a:p>
+            <a:pPr indent="0" marL="0">
+              <a:buNone/>
+            </a:pPr>
+            <a:r>
+              <a:rPr lang="en-US" sz="2400" b="1" dirty="0">
                 <a:solidFill>
                   <a:srgbClr val="1C1917"/>
                 </a:solidFill>
@@ -2533,9 +2675,9 @@
                 <a:ea typeface="Cambria" pitchFamily="34" charset="-122"/>
                 <a:cs typeface="Cambria" pitchFamily="34" charset="-120"/>
               </a:rPr>
-              <a:t>One broken capture step costs ~180 captains/month.</a:t>
-            </a:r>
-            <a:endParaRPr lang="en-US" sz="2600" dirty="0"/>
+              <a:t>RC and Insurance are failing as photographs, not documents</a:t>
+            </a:r>
+            <a:endParaRPr lang="en-US" sz="2400" dirty="0"/>
           </a:p>
         </p:txBody>
       </p:sp>
@@ -2547,7 +2689,7 @@
         </p:nvSpPr>
         <p:spPr>
           <a:xfrm>
-            <a:off x="548640" y="1280160"/>
+            <a:off x="548640" y="1207008"/>
             <a:ext cx="11064240" cy="502920"/>
           </a:xfrm>
           <a:prstGeom prst="rect">
@@ -2572,7 +2714,7 @@
                 <a:ea typeface="Calibri" pitchFamily="34" charset="-122"/>
                 <a:cs typeface="Calibri" pitchFamily="34" charset="-120"/>
               </a:rPr>
-              <a:t>Two capture-quality fixes on RC and Insurance — not a mix of five things — recover ~180 additional approved captains/month at medium confidence.</a:t>
+              <a:t>Capture-class failures (blur, weak OCR, illegibility) dominate RC and Insurance, and later attempts pass more often. That is a capture / UX problem, not an eligibility one.</a:t>
             </a:r>
             <a:endParaRPr lang="en-US" sz="1500" dirty="0"/>
           </a:p>
@@ -2586,12 +2728,12 @@
         </p:nvSpPr>
         <p:spPr>
           <a:xfrm>
-            <a:off x="502920" y="1920240"/>
-            <a:ext cx="6903720" cy="4023360"/>
+            <a:off x="502920" y="1847088"/>
+            <a:ext cx="5486400" cy="3703320"/>
           </a:xfrm>
           <a:prstGeom prst="roundRect">
             <a:avLst>
-              <a:gd name="adj" fmla="val 2273"/>
+              <a:gd name="adj" fmla="val 2469"/>
             </a:avLst>
           </a:prstGeom>
           <a:solidFill>
@@ -2613,8 +2755,8 @@
         </p:nvSpPr>
         <p:spPr>
           <a:xfrm>
-            <a:off x="685800" y="2011680"/>
-            <a:ext cx="6537960" cy="310896"/>
+            <a:off x="685800" y="1938528"/>
+            <a:ext cx="5120640" cy="292608"/>
           </a:xfrm>
           <a:prstGeom prst="rect">
             <a:avLst/>
@@ -2638,7 +2780,7 @@
                 <a:ea typeface="Calibri" pitchFamily="34" charset="-122"/>
                 <a:cs typeface="Calibri" pitchFamily="34" charset="-120"/>
               </a:rPr>
-              <a:t>Split of the ~180  (disjoint C1a + C1b)</a:t>
+              <a:t>RC loss: only the photo slice is C1a</a:t>
             </a:r>
             <a:endParaRPr lang="en-US" sz="1400" dirty="0"/>
           </a:p>
@@ -2660,8 +2802,8 @@
         </p:blipFill>
         <p:spPr>
           <a:xfrm>
-            <a:off x="685800" y="2304288"/>
-            <a:ext cx="6537960" cy="3474720"/>
+            <a:off x="640080" y="2212848"/>
+            <a:ext cx="5212080" cy="3200400"/>
           </a:xfrm>
           <a:prstGeom prst="rect">
             <a:avLst/>
@@ -2676,12 +2818,12 @@
         </p:nvSpPr>
         <p:spPr>
           <a:xfrm>
-            <a:off x="7589520" y="1920240"/>
-            <a:ext cx="4069080" cy="1261872"/>
+            <a:off x="6172200" y="1847088"/>
+            <a:ext cx="5532120" cy="3703320"/>
           </a:xfrm>
           <a:prstGeom prst="roundRect">
             <a:avLst>
-              <a:gd name="adj" fmla="val 7246"/>
+              <a:gd name="adj" fmla="val 2469"/>
             </a:avLst>
           </a:prstGeom>
           <a:solidFill>
@@ -2703,97 +2845,79 @@
         </p:nvSpPr>
         <p:spPr>
           <a:xfrm>
-            <a:off x="7772400" y="2048256"/>
-            <a:ext cx="3703320" cy="530352"/>
-          </a:xfrm>
-          <a:prstGeom prst="rect">
-            <a:avLst/>
-          </a:prstGeom>
-          <a:noFill/>
-          <a:ln/>
-        </p:spPr>
-        <p:txBody>
-          <a:bodyPr wrap="square" lIns="0" tIns="0" rIns="0" bIns="0" rtlCol="0" anchor="ctr"/>
-          <a:lstStyle/>
-          <a:p>
-            <a:pPr indent="0" marL="0">
-              <a:buNone/>
-            </a:pPr>
-            <a:r>
-              <a:rPr lang="en-US" sz="2800" b="1" dirty="0">
+            <a:off x="6355080" y="1938528"/>
+            <a:ext cx="5166360" cy="292608"/>
+          </a:xfrm>
+          <a:prstGeom prst="rect">
+            <a:avLst/>
+          </a:prstGeom>
+          <a:noFill/>
+          <a:ln/>
+        </p:spPr>
+        <p:txBody>
+          <a:bodyPr wrap="square" lIns="0" tIns="0" rIns="0" bIns="0" rtlCol="0" anchor="ctr"/>
+          <a:lstStyle/>
+          <a:p>
+            <a:pPr indent="0" marL="0">
+              <a:buNone/>
+            </a:pPr>
+            <a:r>
+              <a:rPr lang="en-US" sz="1400" b="1" dirty="0">
                 <a:solidFill>
                   <a:srgbClr val="1C1917"/>
                 </a:solidFill>
-                <a:latin typeface="Cambria" pitchFamily="34" charset="0"/>
-                <a:ea typeface="Cambria" pitchFamily="34" charset="-122"/>
-                <a:cs typeface="Cambria" pitchFamily="34" charset="-120"/>
-              </a:rPr>
-              <a:t>98.7%</a:t>
-            </a:r>
-            <a:endParaRPr lang="en-US" sz="2800" dirty="0"/>
-          </a:p>
-        </p:txBody>
-      </p:sp>
-      <p:sp>
-        <p:nvSpPr>
-          <p:cNvPr id="11" name="Text 7"/>
-          <p:cNvSpPr txBox="1"/>
-          <p:nvPr/>
-        </p:nvSpPr>
-        <p:spPr>
-          <a:xfrm>
-            <a:off x="7772400" y="2578608"/>
-            <a:ext cx="3703320" cy="475488"/>
-          </a:xfrm>
-          <a:prstGeom prst="rect">
-            <a:avLst/>
-          </a:prstGeom>
-          <a:noFill/>
-          <a:ln/>
-        </p:spPr>
-        <p:txBody>
-          <a:bodyPr wrap="square" lIns="0" tIns="0" rIns="0" bIns="0" rtlCol="0" anchor="ctr"/>
-          <a:lstStyle/>
-          <a:p>
-            <a:pPr indent="0" marL="0">
-              <a:lnSpc>
-                <a:spcPct val="115000"/>
-              </a:lnSpc>
-              <a:buNone/>
-            </a:pPr>
-            <a:r>
-              <a:rPr lang="en-US" sz="1300" dirty="0">
-                <a:solidFill>
-                  <a:srgbClr val="57534E"/>
-                </a:solidFill>
-                <a:latin typeface="Calibri" pitchFamily="34" charset="0"/>
-                <a:ea typeface="Calibri" pitchFamily="34" charset="-122"/>
-                <a:cs typeface="Calibri" pitchFamily="34" charset="-120"/>
-              </a:rPr>
-              <a:t>of mature approved captains take a first trip (3,895 / 3,946). Documents are the bottleneck.</a:t>
-            </a:r>
-            <a:endParaRPr lang="en-US" sz="1300" dirty="0"/>
-          </a:p>
-        </p:txBody>
-      </p:sp>
-      <p:sp>
-        <p:nvSpPr>
-          <p:cNvPr id="12" name="Shape 8"/>
+                <a:latin typeface="Calibri" pitchFamily="34" charset="0"/>
+                <a:ea typeface="Calibri" pitchFamily="34" charset="-122"/>
+                <a:cs typeface="Calibri" pitchFamily="34" charset="-120"/>
+              </a:rPr>
+              <a:t>Insurance leftovers — only 411 are C1b</a:t>
+            </a:r>
+            <a:endParaRPr lang="en-US" sz="1400" dirty="0"/>
+          </a:p>
+        </p:txBody>
+      </p:sp>
+      <p:pic>
+        <p:nvPicPr>
+          <p:cNvPr id="11" name="Image 2" descr="preencoded.png">    </p:cNvPr>
+          <p:cNvPicPr>
+            <a:picLocks noChangeAspect="1"/>
+          </p:cNvPicPr>
+          <p:nvPr/>
+        </p:nvPicPr>
+        <p:blipFill>
+          <a:blip r:embed="rId3"/>
+          <a:stretch>
+            <a:fillRect/>
+          </a:stretch>
+        </p:blipFill>
+        <p:spPr>
+          <a:xfrm>
+            <a:off x="6309360" y="2212848"/>
+            <a:ext cx="5257800" cy="3200400"/>
+          </a:xfrm>
+          <a:prstGeom prst="rect">
+            <a:avLst/>
+          </a:prstGeom>
+        </p:spPr>
+      </p:pic>
+      <p:sp>
+        <p:nvSpPr>
+          <p:cNvPr id="12" name="Shape 7"/>
           <p:cNvSpPr/>
           <p:nvPr/>
         </p:nvSpPr>
         <p:spPr>
           <a:xfrm>
-            <a:off x="7589520" y="3291840"/>
-            <a:ext cx="4069080" cy="1261872"/>
+            <a:off x="502920" y="5650992"/>
+            <a:ext cx="11201400" cy="713232"/>
           </a:xfrm>
           <a:prstGeom prst="roundRect">
             <a:avLst>
-              <a:gd name="adj" fmla="val 7246"/>
+              <a:gd name="adj" fmla="val 12821"/>
             </a:avLst>
           </a:prstGeom>
           <a:solidFill>
-            <a:srgbClr val="FFFFFF"/>
+            <a:srgbClr val="F3E6C0"/>
           </a:solidFill>
           <a:ln w="15875">
             <a:solidFill>
@@ -2805,196 +2929,46 @@
       </p:sp>
       <p:sp>
         <p:nvSpPr>
-          <p:cNvPr id="13" name="Text 9"/>
-          <p:cNvSpPr txBox="1"/>
-          <p:nvPr/>
-        </p:nvSpPr>
-        <p:spPr>
-          <a:xfrm>
-            <a:off x="7772400" y="3419856"/>
-            <a:ext cx="3703320" cy="530352"/>
-          </a:xfrm>
-          <a:prstGeom prst="rect">
-            <a:avLst/>
-          </a:prstGeom>
-          <a:noFill/>
-          <a:ln/>
-        </p:spPr>
-        <p:txBody>
-          <a:bodyPr wrap="square" lIns="0" tIns="0" rIns="0" bIns="0" rtlCol="0" anchor="ctr"/>
-          <a:lstStyle/>
-          <a:p>
-            <a:pPr indent="0" marL="0">
-              <a:buNone/>
-            </a:pPr>
-            <a:r>
-              <a:rPr lang="en-US" sz="2800" b="1" dirty="0">
+          <p:cNvPr id="13" name="Text 8"/>
+          <p:cNvSpPr txBox="1"/>
+          <p:nvPr/>
+        </p:nvSpPr>
+        <p:spPr>
+          <a:xfrm>
+            <a:off x="685800" y="5650992"/>
+            <a:ext cx="10835640" cy="713232"/>
+          </a:xfrm>
+          <a:prstGeom prst="rect">
+            <a:avLst/>
+          </a:prstGeom>
+          <a:noFill/>
+          <a:ln/>
+        </p:spPr>
+        <p:txBody>
+          <a:bodyPr wrap="square" lIns="0" tIns="0" rIns="0" bIns="0" rtlCol="0" anchor="ctr"/>
+          <a:lstStyle/>
+          <a:p>
+            <a:pPr indent="0" marL="0">
+              <a:buNone/>
+            </a:pPr>
+            <a:r>
+              <a:rPr lang="en-US" sz="1400" dirty="0">
                 <a:solidFill>
                   <a:srgbClr val="1C1917"/>
                 </a:solidFill>
-                <a:latin typeface="Cambria" pitchFamily="34" charset="0"/>
-                <a:ea typeface="Cambria" pitchFamily="34" charset="-122"/>
-                <a:cs typeface="Cambria" pitchFamily="34" charset="-120"/>
-              </a:rPr>
-              <a:t>~134 / mo</a:t>
-            </a:r>
-            <a:endParaRPr lang="en-US" sz="2800" dirty="0"/>
-          </a:p>
-        </p:txBody>
-      </p:sp>
-      <p:sp>
-        <p:nvSpPr>
-          <p:cNvPr id="14" name="Text 10"/>
-          <p:cNvSpPr txBox="1"/>
-          <p:nvPr/>
-        </p:nvSpPr>
-        <p:spPr>
-          <a:xfrm>
-            <a:off x="7772400" y="3950208"/>
-            <a:ext cx="3703320" cy="475488"/>
-          </a:xfrm>
-          <a:prstGeom prst="rect">
-            <a:avLst/>
-          </a:prstGeom>
-          <a:noFill/>
-          <a:ln/>
-        </p:spPr>
-        <p:txBody>
-          <a:bodyPr wrap="square" lIns="0" tIns="0" rIns="0" bIns="0" rtlCol="0" anchor="ctr"/>
-          <a:lstStyle/>
-          <a:p>
-            <a:pPr indent="0" marL="0">
-              <a:lnSpc>
-                <a:spcPct val="115000"/>
-              </a:lnSpc>
-              <a:buNone/>
-            </a:pPr>
-            <a:r>
-              <a:rPr lang="en-US" sz="1300" dirty="0">
-                <a:solidFill>
-                  <a:srgbClr val="57534E"/>
-                </a:solidFill>
-                <a:latin typeface="Calibri" pitchFamily="34" charset="0"/>
-                <a:ea typeface="Calibri" pitchFamily="34" charset="-122"/>
-                <a:cs typeface="Calibri" pitchFamily="34" charset="-120"/>
-              </a:rPr>
-              <a:t>Recovered from an RC in-person grace window (C1a).</a:t>
-            </a:r>
-            <a:endParaRPr lang="en-US" sz="1300" dirty="0"/>
-          </a:p>
-        </p:txBody>
-      </p:sp>
-      <p:sp>
-        <p:nvSpPr>
-          <p:cNvPr id="15" name="Shape 11"/>
-          <p:cNvSpPr/>
-          <p:nvPr/>
-        </p:nvSpPr>
-        <p:spPr>
-          <a:xfrm>
-            <a:off x="7589520" y="4663440"/>
-            <a:ext cx="4069080" cy="1261872"/>
-          </a:xfrm>
-          <a:prstGeom prst="roundRect">
-            <a:avLst>
-              <a:gd name="adj" fmla="val 7246"/>
-            </a:avLst>
-          </a:prstGeom>
-          <a:solidFill>
-            <a:srgbClr val="FFFFFF"/>
-          </a:solidFill>
-          <a:ln w="15875">
-            <a:solidFill>
-              <a:srgbClr val="E8D5C0"/>
-            </a:solidFill>
-            <a:prstDash val="solid"/>
-          </a:ln>
-        </p:spPr>
-      </p:sp>
-      <p:sp>
-        <p:nvSpPr>
-          <p:cNvPr id="16" name="Text 12"/>
-          <p:cNvSpPr txBox="1"/>
-          <p:nvPr/>
-        </p:nvSpPr>
-        <p:spPr>
-          <a:xfrm>
-            <a:off x="7772400" y="4791456"/>
-            <a:ext cx="3703320" cy="530352"/>
-          </a:xfrm>
-          <a:prstGeom prst="rect">
-            <a:avLst/>
-          </a:prstGeom>
-          <a:noFill/>
-          <a:ln/>
-        </p:spPr>
-        <p:txBody>
-          <a:bodyPr wrap="square" lIns="0" tIns="0" rIns="0" bIns="0" rtlCol="0" anchor="ctr"/>
-          <a:lstStyle/>
-          <a:p>
-            <a:pPr indent="0" marL="0">
-              <a:buNone/>
-            </a:pPr>
-            <a:r>
-              <a:rPr lang="en-US" sz="2800" b="1" dirty="0">
-                <a:solidFill>
-                  <a:srgbClr val="1C1917"/>
-                </a:solidFill>
-                <a:latin typeface="Cambria" pitchFamily="34" charset="0"/>
-                <a:ea typeface="Cambria" pitchFamily="34" charset="-122"/>
-                <a:cs typeface="Cambria" pitchFamily="34" charset="-120"/>
-              </a:rPr>
-              <a:t>~50 / mo</a:t>
-            </a:r>
-            <a:endParaRPr lang="en-US" sz="2800" dirty="0"/>
-          </a:p>
-        </p:txBody>
-      </p:sp>
-      <p:sp>
-        <p:nvSpPr>
-          <p:cNvPr id="17" name="Text 13"/>
-          <p:cNvSpPr txBox="1"/>
-          <p:nvPr/>
-        </p:nvSpPr>
-        <p:spPr>
-          <a:xfrm>
-            <a:off x="7772400" y="5321808"/>
-            <a:ext cx="3703320" cy="475488"/>
-          </a:xfrm>
-          <a:prstGeom prst="rect">
-            <a:avLst/>
-          </a:prstGeom>
-          <a:noFill/>
-          <a:ln/>
-        </p:spPr>
-        <p:txBody>
-          <a:bodyPr wrap="square" lIns="0" tIns="0" rIns="0" bIns="0" rtlCol="0" anchor="ctr"/>
-          <a:lstStyle/>
-          <a:p>
-            <a:pPr indent="0" marL="0">
-              <a:lnSpc>
-                <a:spcPct val="115000"/>
-              </a:lnSpc>
-              <a:buNone/>
-            </a:pPr>
-            <a:r>
-              <a:rPr lang="en-US" sz="1300" dirty="0">
-                <a:solidFill>
-                  <a:srgbClr val="57534E"/>
-                </a:solidFill>
-                <a:latin typeface="Calibri" pitchFamily="34" charset="0"/>
-                <a:ea typeface="Calibri" pitchFamily="34" charset="-122"/>
-                <a:cs typeface="Calibri" pitchFamily="34" charset="-120"/>
-              </a:rPr>
-              <a:t>Recovered from Insurance guided capture UX (C1b).</a:t>
-            </a:r>
-            <a:endParaRPr lang="en-US" sz="1300" dirty="0"/>
-          </a:p>
-        </p:txBody>
-      </p:sp>
-      <p:sp>
-        <p:nvSpPr>
-          <p:cNvPr id="18" name="Shape 14"/>
+                <a:latin typeface="Calibri" pitchFamily="34" charset="0"/>
+                <a:ea typeface="Calibri" pitchFamily="34" charset="-122"/>
+                <a:cs typeface="Calibri" pitchFamily="34" charset="-120"/>
+              </a:rPr>
+              <a:t>1,637 RC and 411 Insurance captains are capture-only fails — isolated from eligibility (expired, duplicate, wrong type). DL (1,166) is 100% uploaded-fail and cannot be deferred.</a:t>
+            </a:r>
+            <a:endParaRPr lang="en-US" sz="1400" dirty="0"/>
+          </a:p>
+        </p:txBody>
+      </p:sp>
+      <p:sp>
+        <p:nvSpPr>
+          <p:cNvPr id="14" name="Shape 9"/>
           <p:cNvSpPr/>
           <p:nvPr/>
         </p:nvSpPr>
@@ -3014,7 +2988,7 @@
       </p:sp>
       <p:sp>
         <p:nvSpPr>
-          <p:cNvPr id="19" name="Text 15"/>
+          <p:cNvPr id="15" name="Text 10"/>
           <p:cNvSpPr txBox="1"/>
           <p:nvPr/>
         </p:nvSpPr>
@@ -3053,7 +3027,7 @@
       </p:sp>
       <p:sp>
         <p:nvSpPr>
-          <p:cNvPr id="20" name="Text 16"/>
+          <p:cNvPr id="16" name="Text 11"/>
           <p:cNvSpPr txBox="1"/>
           <p:nvPr/>
         </p:nvSpPr>
@@ -3084,7 +3058,7 @@
                 <a:ea typeface="Calibri" pitchFamily="34" charset="-122"/>
                 <a:cs typeface="Calibri" pitchFamily="34" charset="-120"/>
               </a:rPr>
-              <a:t>Ramanathan K R  ·  Rapido Data Science Assessment     1 / 6</a:t>
+              <a:t>Ramanathan K R  ·  Rapido Data Science Assessment     2 / 6</a:t>
             </a:r>
             <a:endParaRPr lang="en-US" sz="1100" dirty="0"/>
           </a:p>
@@ -3155,7 +3129,7 @@
                 <a:ea typeface="Calibri" pitchFamily="34" charset="-122"/>
                 <a:cs typeface="Calibri" pitchFamily="34" charset="-120"/>
               </a:rPr>
-              <a:t>ROOT CAUSE</a:t>
+              <a:t>THE FIX</a:t>
             </a:r>
             <a:endParaRPr lang="en-US" sz="1300" dirty="0"/>
           </a:p>
@@ -3194,23 +3168,23 @@
         <p:spPr>
           <a:xfrm>
             <a:off x="548640" y="621792"/>
-            <a:ext cx="10332720" cy="566928"/>
-          </a:xfrm>
-          <a:prstGeom prst="rect">
-            <a:avLst/>
-          </a:prstGeom>
-          <a:noFill/>
-          <a:ln/>
-        </p:spPr>
-        <p:txBody>
-          <a:bodyPr wrap="square" lIns="0" tIns="0" rIns="0" bIns="0" rtlCol="0" anchor="ctr"/>
-          <a:lstStyle/>
-          <a:p>
-            <a:pPr indent="0" marL="0">
-              <a:buNone/>
-            </a:pPr>
-            <a:r>
-              <a:rPr lang="en-US" sz="2400" b="1" dirty="0">
+            <a:ext cx="10332720" cy="530352"/>
+          </a:xfrm>
+          <a:prstGeom prst="rect">
+            <a:avLst/>
+          </a:prstGeom>
+          <a:noFill/>
+          <a:ln/>
+        </p:spPr>
+        <p:txBody>
+          <a:bodyPr wrap="square" lIns="0" tIns="0" rIns="0" bIns="0" rtlCol="0" anchor="ctr"/>
+          <a:lstStyle/>
+          <a:p>
+            <a:pPr indent="0" marL="0">
+              <a:buNone/>
+            </a:pPr>
+            <a:r>
+              <a:rPr lang="en-US" sz="2200" b="1" dirty="0">
                 <a:solidFill>
                   <a:srgbClr val="1C1917"/>
                 </a:solidFill>
@@ -3218,65 +3192,26 @@
                 <a:ea typeface="Cambria" pitchFamily="34" charset="-122"/>
                 <a:cs typeface="Cambria" pitchFamily="34" charset="-120"/>
               </a:rPr>
-              <a:t>RC and Insurance are failing as photographs, not documents</a:t>
-            </a:r>
-            <a:endParaRPr lang="en-US" sz="2400" dirty="0"/>
-          </a:p>
-        </p:txBody>
-      </p:sp>
-      <p:sp>
-        <p:nvSpPr>
-          <p:cNvPr id="5" name="Text 2"/>
-          <p:cNvSpPr txBox="1"/>
-          <p:nvPr/>
-        </p:nvSpPr>
-        <p:spPr>
-          <a:xfrm>
-            <a:off x="548640" y="1207008"/>
-            <a:ext cx="11064240" cy="502920"/>
-          </a:xfrm>
-          <a:prstGeom prst="rect">
-            <a:avLst/>
-          </a:prstGeom>
-          <a:noFill/>
-          <a:ln/>
-        </p:spPr>
-        <p:txBody>
-          <a:bodyPr wrap="square" lIns="0" tIns="0" rIns="0" bIns="0" rtlCol="0" anchor="ctr"/>
-          <a:lstStyle/>
-          <a:p>
-            <a:pPr indent="0" marL="0">
-              <a:buNone/>
-            </a:pPr>
-            <a:r>
-              <a:rPr lang="en-US" sz="1500" dirty="0">
-                <a:solidFill>
-                  <a:srgbClr val="57534E"/>
-                </a:solidFill>
-                <a:latin typeface="Calibri" pitchFamily="34" charset="0"/>
-                <a:ea typeface="Calibri" pitchFamily="34" charset="-122"/>
-                <a:cs typeface="Calibri" pitchFamily="34" charset="-120"/>
-              </a:rPr>
-              <a:t>Capture-class failures (blur, weak OCR, illegibility) dominate RC and Insurance, and later attempts pass more often. That is a capture / UX problem, not an eligibility one.</a:t>
-            </a:r>
-            <a:endParaRPr lang="en-US" sz="1500" dirty="0"/>
-          </a:p>
-        </p:txBody>
-      </p:sp>
-      <p:sp>
-        <p:nvSpPr>
-          <p:cNvPr id="6" name="Shape 3"/>
+              <a:t>C1b ships this week. C1a is a Legal decision, not a bank.</a:t>
+            </a:r>
+            <a:endParaRPr lang="en-US" sz="2200" dirty="0"/>
+          </a:p>
+        </p:txBody>
+      </p:sp>
+      <p:sp>
+        <p:nvSpPr>
+          <p:cNvPr id="5" name="Shape 2"/>
           <p:cNvSpPr/>
           <p:nvPr/>
         </p:nvSpPr>
         <p:spPr>
           <a:xfrm>
-            <a:off x="502920" y="1847088"/>
-            <a:ext cx="5486400" cy="3703320"/>
+            <a:off x="457200" y="1280160"/>
+            <a:ext cx="5532120" cy="4709160"/>
           </a:xfrm>
           <a:prstGeom prst="roundRect">
             <a:avLst>
-              <a:gd name="adj" fmla="val 2469"/>
+              <a:gd name="adj" fmla="val 1942"/>
             </a:avLst>
           </a:prstGeom>
           <a:solidFill>
@@ -3292,81 +3227,444 @@
       </p:sp>
       <p:sp>
         <p:nvSpPr>
-          <p:cNvPr id="7" name="Text 4"/>
-          <p:cNvSpPr txBox="1"/>
-          <p:nvPr/>
-        </p:nvSpPr>
-        <p:spPr>
-          <a:xfrm>
-            <a:off x="685800" y="1938528"/>
-            <a:ext cx="5120640" cy="292608"/>
-          </a:xfrm>
-          <a:prstGeom prst="rect">
-            <a:avLst/>
-          </a:prstGeom>
-          <a:noFill/>
-          <a:ln/>
-        </p:spPr>
-        <p:txBody>
-          <a:bodyPr wrap="square" lIns="0" tIns="0" rIns="0" bIns="0" rtlCol="0" anchor="ctr"/>
-          <a:lstStyle/>
-          <a:p>
-            <a:pPr indent="0" marL="0">
-              <a:buNone/>
-            </a:pPr>
-            <a:r>
-              <a:rPr lang="en-US" sz="1400" b="1" dirty="0">
-                <a:solidFill>
-                  <a:srgbClr val="1C1917"/>
-                </a:solidFill>
-                <a:latin typeface="Calibri" pitchFamily="34" charset="0"/>
-                <a:ea typeface="Calibri" pitchFamily="34" charset="-122"/>
-                <a:cs typeface="Calibri" pitchFamily="34" charset="-120"/>
-              </a:rPr>
-              <a:t>RC loss: only the photo slice is C1a</a:t>
-            </a:r>
-            <a:endParaRPr lang="en-US" sz="1400" dirty="0"/>
-          </a:p>
-        </p:txBody>
-      </p:sp>
-      <p:pic>
-        <p:nvPicPr>
-          <p:cNvPr id="8" name="Image 1" descr="preencoded.png">    </p:cNvPr>
-          <p:cNvPicPr>
-            <a:picLocks noChangeAspect="1"/>
-          </p:cNvPicPr>
-          <p:nvPr/>
-        </p:nvPicPr>
-        <p:blipFill>
-          <a:blip r:embed="rId2"/>
-          <a:stretch>
-            <a:fillRect/>
-          </a:stretch>
-        </p:blipFill>
-        <p:spPr>
-          <a:xfrm>
-            <a:off x="640080" y="2212848"/>
-            <a:ext cx="5212080" cy="3200400"/>
-          </a:xfrm>
-          <a:prstGeom prst="rect">
-            <a:avLst/>
-          </a:prstGeom>
-        </p:spPr>
-      </p:pic>
-      <p:sp>
-        <p:nvSpPr>
-          <p:cNvPr id="9" name="Shape 5"/>
+          <p:cNvPr id="6" name="Shape 3"/>
           <p:cNvSpPr/>
           <p:nvPr/>
         </p:nvSpPr>
         <p:spPr>
           <a:xfrm>
-            <a:off x="6172200" y="1847088"/>
-            <a:ext cx="5532120" cy="3703320"/>
+            <a:off x="713232" y="1444752"/>
+            <a:ext cx="1965960" cy="365760"/>
           </a:xfrm>
           <a:prstGeom prst="roundRect">
             <a:avLst>
-              <a:gd name="adj" fmla="val 2469"/>
+              <a:gd name="adj" fmla="val 50000"/>
+            </a:avLst>
+          </a:prstGeom>
+          <a:solidFill>
+            <a:srgbClr val="F3E6C0"/>
+          </a:solidFill>
+          <a:ln/>
+        </p:spPr>
+      </p:sp>
+      <p:sp>
+        <p:nvSpPr>
+          <p:cNvPr id="7" name="Text 4"/>
+          <p:cNvSpPr txBox="1"/>
+          <p:nvPr/>
+        </p:nvSpPr>
+        <p:spPr>
+          <a:xfrm>
+            <a:off x="713232" y="1444752"/>
+            <a:ext cx="1965960" cy="365760"/>
+          </a:xfrm>
+          <a:prstGeom prst="rect">
+            <a:avLst/>
+          </a:prstGeom>
+          <a:noFill/>
+          <a:ln/>
+        </p:spPr>
+        <p:txBody>
+          <a:bodyPr wrap="square" lIns="0" tIns="0" rIns="0" bIns="0" rtlCol="0" anchor="ctr"/>
+          <a:lstStyle/>
+          <a:p>
+            <a:pPr algn="ctr" indent="0" marL="0">
+              <a:buNone/>
+            </a:pPr>
+            <a:r>
+              <a:rPr lang="en-US" sz="1300" b="1" dirty="0">
+                <a:solidFill>
+                  <a:srgbClr val="1C1917"/>
+                </a:solidFill>
+                <a:latin typeface="Calibri" pitchFamily="34" charset="0"/>
+                <a:ea typeface="Calibri" pitchFamily="34" charset="-122"/>
+                <a:cs typeface="Calibri" pitchFamily="34" charset="-120"/>
+              </a:rPr>
+              <a:t>C1b — ship now</a:t>
+            </a:r>
+            <a:endParaRPr lang="en-US" sz="1300" dirty="0"/>
+          </a:p>
+        </p:txBody>
+      </p:sp>
+      <p:sp>
+        <p:nvSpPr>
+          <p:cNvPr id="8" name="Text 5"/>
+          <p:cNvSpPr txBox="1"/>
+          <p:nvPr/>
+        </p:nvSpPr>
+        <p:spPr>
+          <a:xfrm>
+            <a:off x="713232" y="1901952"/>
+            <a:ext cx="5029200" cy="640080"/>
+          </a:xfrm>
+          <a:prstGeom prst="rect">
+            <a:avLst/>
+          </a:prstGeom>
+          <a:noFill/>
+          <a:ln/>
+        </p:spPr>
+        <p:txBody>
+          <a:bodyPr wrap="square" lIns="0" tIns="0" rIns="0" bIns="0" rtlCol="0" anchor="ctr"/>
+          <a:lstStyle/>
+          <a:p>
+            <a:pPr indent="0" marL="0">
+              <a:buNone/>
+            </a:pPr>
+            <a:r>
+              <a:rPr lang="en-US" sz="1600" b="1" dirty="0">
+                <a:solidFill>
+                  <a:srgbClr val="1C1917"/>
+                </a:solidFill>
+                <a:latin typeface="Cambria" pitchFamily="34" charset="0"/>
+                <a:ea typeface="Cambria" pitchFamily="34" charset="-122"/>
+                <a:cs typeface="Cambria" pitchFamily="34" charset="-120"/>
+              </a:rPr>
+              <a:t>Guided Insurance capture UX — no deferral</a:t>
+            </a:r>
+            <a:endParaRPr lang="en-US" sz="1600" dirty="0"/>
+          </a:p>
+        </p:txBody>
+      </p:sp>
+      <p:sp>
+        <p:nvSpPr>
+          <p:cNvPr id="9" name="Text 6"/>
+          <p:cNvSpPr txBox="1"/>
+          <p:nvPr/>
+        </p:nvSpPr>
+        <p:spPr>
+          <a:xfrm>
+            <a:off x="713232" y="2606040"/>
+            <a:ext cx="5029200" cy="475488"/>
+          </a:xfrm>
+          <a:prstGeom prst="rect">
+            <a:avLst/>
+          </a:prstGeom>
+          <a:noFill/>
+          <a:ln/>
+        </p:spPr>
+        <p:txBody>
+          <a:bodyPr wrap="square" lIns="0" tIns="0" rIns="0" bIns="0" rtlCol="0" anchor="ctr"/>
+          <a:lstStyle/>
+          <a:p>
+            <a:pPr indent="0" marL="0">
+              <a:buNone/>
+            </a:pPr>
+            <a:r>
+              <a:rPr lang="en-US" sz="1400" b="1" dirty="0">
+                <a:solidFill>
+                  <a:srgbClr val="C45C26"/>
+                </a:solidFill>
+                <a:latin typeface="Calibri" pitchFamily="34" charset="0"/>
+                <a:ea typeface="Calibri" pitchFamily="34" charset="-122"/>
+                <a:cs typeface="Calibri" pitchFamily="34" charset="-120"/>
+              </a:rPr>
+              <a:t>Who  </a:t>
+            </a:r>
+            <a:pPr indent="0" marL="0">
+              <a:buNone/>
+            </a:pPr>
+            <a:r>
+              <a:rPr lang="en-US" sz="1400" dirty="0">
+                <a:solidFill>
+                  <a:srgbClr val="1C1917"/>
+                </a:solidFill>
+                <a:latin typeface="Calibri" pitchFamily="34" charset="0"/>
+                <a:ea typeface="Calibri" pitchFamily="34" charset="-122"/>
+                <a:cs typeface="Calibri" pitchFamily="34" charset="-120"/>
+              </a:rPr>
+              <a:t>411 Insurance capture-only fails (~75/mo)</a:t>
+            </a:r>
+            <a:endParaRPr lang="en-US" sz="1400" dirty="0"/>
+          </a:p>
+        </p:txBody>
+      </p:sp>
+      <p:sp>
+        <p:nvSpPr>
+          <p:cNvPr id="10" name="Text 7"/>
+          <p:cNvSpPr txBox="1"/>
+          <p:nvPr/>
+        </p:nvSpPr>
+        <p:spPr>
+          <a:xfrm>
+            <a:off x="713232" y="3099816"/>
+            <a:ext cx="5029200" cy="475488"/>
+          </a:xfrm>
+          <a:prstGeom prst="rect">
+            <a:avLst/>
+          </a:prstGeom>
+          <a:noFill/>
+          <a:ln/>
+        </p:spPr>
+        <p:txBody>
+          <a:bodyPr wrap="square" lIns="0" tIns="0" rIns="0" bIns="0" rtlCol="0" anchor="ctr"/>
+          <a:lstStyle/>
+          <a:p>
+            <a:pPr indent="0" marL="0">
+              <a:buNone/>
+            </a:pPr>
+            <a:r>
+              <a:rPr lang="en-US" sz="1400" b="1" dirty="0">
+                <a:solidFill>
+                  <a:srgbClr val="C45C26"/>
+                </a:solidFill>
+                <a:latin typeface="Calibri" pitchFamily="34" charset="0"/>
+                <a:ea typeface="Calibri" pitchFamily="34" charset="-122"/>
+                <a:cs typeface="Calibri" pitchFamily="34" charset="-120"/>
+              </a:rPr>
+              <a:t>Why not defer  </a:t>
+            </a:r>
+            <a:pPr indent="0" marL="0">
+              <a:buNone/>
+            </a:pPr>
+            <a:r>
+              <a:rPr lang="en-US" sz="1400" dirty="0">
+                <a:solidFill>
+                  <a:srgbClr val="1C1917"/>
+                </a:solidFill>
+                <a:latin typeface="Calibri" pitchFamily="34" charset="0"/>
+                <a:ea typeface="Calibri" pitchFamily="34" charset="-122"/>
+                <a:cs typeface="Calibri" pitchFamily="34" charset="-120"/>
+              </a:rPr>
+              <a:t>Liability document — must clear before first ride</a:t>
+            </a:r>
+            <a:endParaRPr lang="en-US" sz="1400" dirty="0"/>
+          </a:p>
+        </p:txBody>
+      </p:sp>
+      <p:sp>
+        <p:nvSpPr>
+          <p:cNvPr id="11" name="Text 8"/>
+          <p:cNvSpPr txBox="1"/>
+          <p:nvPr/>
+        </p:nvSpPr>
+        <p:spPr>
+          <a:xfrm>
+            <a:off x="713232" y="3593592"/>
+            <a:ext cx="5029200" cy="475488"/>
+          </a:xfrm>
+          <a:prstGeom prst="rect">
+            <a:avLst/>
+          </a:prstGeom>
+          <a:noFill/>
+          <a:ln/>
+        </p:spPr>
+        <p:txBody>
+          <a:bodyPr wrap="square" lIns="0" tIns="0" rIns="0" bIns="0" rtlCol="0" anchor="ctr"/>
+          <a:lstStyle/>
+          <a:p>
+            <a:pPr indent="0" marL="0">
+              <a:buNone/>
+            </a:pPr>
+            <a:r>
+              <a:rPr lang="en-US" sz="1400" b="1" dirty="0">
+                <a:solidFill>
+                  <a:srgbClr val="C45C26"/>
+                </a:solidFill>
+                <a:latin typeface="Calibri" pitchFamily="34" charset="0"/>
+                <a:ea typeface="Calibri" pitchFamily="34" charset="-122"/>
+                <a:cs typeface="Calibri" pitchFamily="34" charset="-120"/>
+              </a:rPr>
+              <a:t>Retry  </a:t>
+            </a:r>
+            <a:pPr indent="0" marL="0">
+              <a:buNone/>
+            </a:pPr>
+            <a:r>
+              <a:rPr lang="en-US" sz="1400" dirty="0">
+                <a:solidFill>
+                  <a:srgbClr val="1C1917"/>
+                </a:solidFill>
+                <a:latin typeface="Calibri" pitchFamily="34" charset="0"/>
+                <a:ea typeface="Calibri" pitchFamily="34" charset="-122"/>
+                <a:cs typeface="Calibri" pitchFamily="34" charset="-120"/>
+              </a:rPr>
+              <a:t>67.4% → 73.8% → 76.4% pass on own retry</a:t>
+            </a:r>
+            <a:endParaRPr lang="en-US" sz="1400" dirty="0"/>
+          </a:p>
+        </p:txBody>
+      </p:sp>
+      <p:sp>
+        <p:nvSpPr>
+          <p:cNvPr id="12" name="Text 9"/>
+          <p:cNvSpPr txBox="1"/>
+          <p:nvPr/>
+        </p:nvSpPr>
+        <p:spPr>
+          <a:xfrm>
+            <a:off x="713232" y="4087368"/>
+            <a:ext cx="5029200" cy="475488"/>
+          </a:xfrm>
+          <a:prstGeom prst="rect">
+            <a:avLst/>
+          </a:prstGeom>
+          <a:noFill/>
+          <a:ln/>
+        </p:spPr>
+        <p:txBody>
+          <a:bodyPr wrap="square" lIns="0" tIns="0" rIns="0" bIns="0" rtlCol="0" anchor="ctr"/>
+          <a:lstStyle/>
+          <a:p>
+            <a:pPr indent="0" marL="0">
+              <a:buNone/>
+            </a:pPr>
+            <a:r>
+              <a:rPr lang="en-US" sz="1400" b="1" dirty="0">
+                <a:solidFill>
+                  <a:srgbClr val="C45C26"/>
+                </a:solidFill>
+                <a:latin typeface="Calibri" pitchFamily="34" charset="0"/>
+                <a:ea typeface="Calibri" pitchFamily="34" charset="-122"/>
+                <a:cs typeface="Calibri" pitchFamily="34" charset="-120"/>
+              </a:rPr>
+              <a:t>Bank  </a:t>
+            </a:r>
+            <a:pPr indent="0" marL="0">
+              <a:buNone/>
+            </a:pPr>
+            <a:r>
+              <a:rPr lang="en-US" sz="1400" dirty="0">
+                <a:solidFill>
+                  <a:srgbClr val="1C1917"/>
+                </a:solidFill>
+                <a:latin typeface="Calibri" pitchFamily="34" charset="0"/>
+                <a:ea typeface="Calibri" pitchFamily="34" charset="-122"/>
+                <a:cs typeface="Calibri" pitchFamily="34" charset="-120"/>
+              </a:rPr>
+              <a:t>~46–52/month additional approved</a:t>
+            </a:r>
+            <a:endParaRPr lang="en-US" sz="1400" dirty="0"/>
+          </a:p>
+        </p:txBody>
+      </p:sp>
+      <p:sp>
+        <p:nvSpPr>
+          <p:cNvPr id="13" name="Text 10"/>
+          <p:cNvSpPr txBox="1"/>
+          <p:nvPr/>
+        </p:nvSpPr>
+        <p:spPr>
+          <a:xfrm>
+            <a:off x="713232" y="4581144"/>
+            <a:ext cx="5029200" cy="475488"/>
+          </a:xfrm>
+          <a:prstGeom prst="rect">
+            <a:avLst/>
+          </a:prstGeom>
+          <a:noFill/>
+          <a:ln/>
+        </p:spPr>
+        <p:txBody>
+          <a:bodyPr wrap="square" lIns="0" tIns="0" rIns="0" bIns="0" rtlCol="0" anchor="ctr"/>
+          <a:lstStyle/>
+          <a:p>
+            <a:pPr indent="0" marL="0">
+              <a:buNone/>
+            </a:pPr>
+            <a:r>
+              <a:rPr lang="en-US" sz="1400" b="1" dirty="0">
+                <a:solidFill>
+                  <a:srgbClr val="C45C26"/>
+                </a:solidFill>
+                <a:latin typeface="Calibri" pitchFamily="34" charset="0"/>
+                <a:ea typeface="Calibri" pitchFamily="34" charset="-122"/>
+                <a:cs typeface="Calibri" pitchFamily="34" charset="-120"/>
+              </a:rPr>
+              <a:t>Needs  </a:t>
+            </a:r>
+            <a:pPr indent="0" marL="0">
+              <a:buNone/>
+            </a:pPr>
+            <a:r>
+              <a:rPr lang="en-US" sz="1400" dirty="0">
+                <a:solidFill>
+                  <a:srgbClr val="1C1917"/>
+                </a:solidFill>
+                <a:latin typeface="Calibri" pitchFamily="34" charset="0"/>
+                <a:ea typeface="Calibri" pitchFamily="34" charset="-122"/>
+                <a:cs typeface="Calibri" pitchFamily="34" charset="-120"/>
+              </a:rPr>
+              <a:t>Engineering UX only — no Legal sign-off</a:t>
+            </a:r>
+            <a:endParaRPr lang="en-US" sz="1400" dirty="0"/>
+          </a:p>
+        </p:txBody>
+      </p:sp>
+      <p:sp>
+        <p:nvSpPr>
+          <p:cNvPr id="14" name="Shape 11"/>
+          <p:cNvSpPr/>
+          <p:nvPr/>
+        </p:nvSpPr>
+        <p:spPr>
+          <a:xfrm>
+            <a:off x="621792" y="5440680"/>
+            <a:ext cx="5212080" cy="438912"/>
+          </a:xfrm>
+          <a:prstGeom prst="roundRect">
+            <a:avLst>
+              <a:gd name="adj" fmla="val 12500"/>
+            </a:avLst>
+          </a:prstGeom>
+          <a:solidFill>
+            <a:srgbClr val="F8F1E3"/>
+          </a:solidFill>
+          <a:ln/>
+        </p:spPr>
+      </p:sp>
+      <p:sp>
+        <p:nvSpPr>
+          <p:cNvPr id="15" name="Text 12"/>
+          <p:cNvSpPr txBox="1"/>
+          <p:nvPr/>
+        </p:nvSpPr>
+        <p:spPr>
+          <a:xfrm>
+            <a:off x="713232" y="5440680"/>
+            <a:ext cx="5029200" cy="438912"/>
+          </a:xfrm>
+          <a:prstGeom prst="rect">
+            <a:avLst/>
+          </a:prstGeom>
+          <a:noFill/>
+          <a:ln/>
+        </p:spPr>
+        <p:txBody>
+          <a:bodyPr wrap="square" lIns="0" tIns="0" rIns="0" bIns="0" rtlCol="0" anchor="ctr"/>
+          <a:lstStyle/>
+          <a:p>
+            <a:pPr indent="0" marL="0">
+              <a:buNone/>
+            </a:pPr>
+            <a:r>
+              <a:rPr lang="en-US" sz="1200" i="1" dirty="0">
+                <a:solidFill>
+                  <a:srgbClr val="57534E"/>
+                </a:solidFill>
+                <a:latin typeface="Calibri" pitchFamily="34" charset="0"/>
+                <a:ea typeface="Calibri" pitchFamily="34" charset="-122"/>
+                <a:cs typeface="Calibri" pitchFamily="34" charset="-120"/>
+              </a:rPr>
+              <a:t>This is the number I would put in a deck with my name on it this week.</a:t>
+            </a:r>
+            <a:endParaRPr lang="en-US" sz="1200" dirty="0"/>
+          </a:p>
+        </p:txBody>
+      </p:sp>
+      <p:sp>
+        <p:nvSpPr>
+          <p:cNvPr id="16" name="Shape 13"/>
+          <p:cNvSpPr/>
+          <p:nvPr/>
+        </p:nvSpPr>
+        <p:spPr>
+          <a:xfrm>
+            <a:off x="6199632" y="1280160"/>
+            <a:ext cx="5532120" cy="4709160"/>
+          </a:xfrm>
+          <a:prstGeom prst="roundRect">
+            <a:avLst>
+              <a:gd name="adj" fmla="val 1942"/>
             </a:avLst>
           </a:prstGeom>
           <a:solidFill>
@@ -3382,115 +3680,139 @@
       </p:sp>
       <p:sp>
         <p:nvSpPr>
-          <p:cNvPr id="10" name="Text 6"/>
-          <p:cNvSpPr txBox="1"/>
-          <p:nvPr/>
-        </p:nvSpPr>
-        <p:spPr>
-          <a:xfrm>
-            <a:off x="6355080" y="1938528"/>
-            <a:ext cx="5166360" cy="292608"/>
-          </a:xfrm>
-          <a:prstGeom prst="rect">
-            <a:avLst/>
-          </a:prstGeom>
-          <a:noFill/>
-          <a:ln/>
-        </p:spPr>
-        <p:txBody>
-          <a:bodyPr wrap="square" lIns="0" tIns="0" rIns="0" bIns="0" rtlCol="0" anchor="ctr"/>
-          <a:lstStyle/>
-          <a:p>
-            <a:pPr indent="0" marL="0">
-              <a:buNone/>
-            </a:pPr>
-            <a:r>
-              <a:rPr lang="en-US" sz="1400" b="1" dirty="0">
-                <a:solidFill>
-                  <a:srgbClr val="1C1917"/>
-                </a:solidFill>
-                <a:latin typeface="Calibri" pitchFamily="34" charset="0"/>
-                <a:ea typeface="Calibri" pitchFamily="34" charset="-122"/>
-                <a:cs typeface="Calibri" pitchFamily="34" charset="-120"/>
-              </a:rPr>
-              <a:t>Insurance leftovers — only 411 are C1b</a:t>
-            </a:r>
-            <a:endParaRPr lang="en-US" sz="1400" dirty="0"/>
-          </a:p>
-        </p:txBody>
-      </p:sp>
-      <p:pic>
-        <p:nvPicPr>
-          <p:cNvPr id="11" name="Image 2" descr="preencoded.png">    </p:cNvPr>
-          <p:cNvPicPr>
-            <a:picLocks noChangeAspect="1"/>
-          </p:cNvPicPr>
-          <p:nvPr/>
-        </p:nvPicPr>
-        <p:blipFill>
-          <a:blip r:embed="rId3"/>
-          <a:stretch>
-            <a:fillRect/>
-          </a:stretch>
-        </p:blipFill>
-        <p:spPr>
-          <a:xfrm>
-            <a:off x="6309360" y="2212848"/>
-            <a:ext cx="5257800" cy="3200400"/>
-          </a:xfrm>
-          <a:prstGeom prst="rect">
-            <a:avLst/>
-          </a:prstGeom>
-        </p:spPr>
-      </p:pic>
-      <p:sp>
-        <p:nvSpPr>
-          <p:cNvPr id="12" name="Shape 7"/>
+          <p:cNvPr id="17" name="Shape 14"/>
           <p:cNvSpPr/>
           <p:nvPr/>
         </p:nvSpPr>
         <p:spPr>
           <a:xfrm>
-            <a:off x="502920" y="5650992"/>
-            <a:ext cx="11201400" cy="713232"/>
+            <a:off x="6455664" y="1444752"/>
+            <a:ext cx="1965960" cy="365760"/>
           </a:xfrm>
           <a:prstGeom prst="roundRect">
             <a:avLst>
-              <a:gd name="adj" fmla="val 12821"/>
+              <a:gd name="adj" fmla="val 50000"/>
             </a:avLst>
           </a:prstGeom>
           <a:solidFill>
             <a:srgbClr val="F3E6C0"/>
           </a:solidFill>
-          <a:ln w="15875">
-            <a:solidFill>
-              <a:srgbClr val="E8D5C0"/>
-            </a:solidFill>
-            <a:prstDash val="solid"/>
-          </a:ln>
-        </p:spPr>
-      </p:sp>
-      <p:sp>
-        <p:nvSpPr>
-          <p:cNvPr id="13" name="Text 8"/>
-          <p:cNvSpPr txBox="1"/>
-          <p:nvPr/>
-        </p:nvSpPr>
-        <p:spPr>
-          <a:xfrm>
-            <a:off x="685800" y="5650992"/>
-            <a:ext cx="10835640" cy="713232"/>
-          </a:xfrm>
-          <a:prstGeom prst="rect">
-            <a:avLst/>
-          </a:prstGeom>
-          <a:noFill/>
-          <a:ln/>
-        </p:spPr>
-        <p:txBody>
-          <a:bodyPr wrap="square" lIns="0" tIns="0" rIns="0" bIns="0" rtlCol="0" anchor="ctr"/>
-          <a:lstStyle/>
-          <a:p>
+          <a:ln/>
+        </p:spPr>
+      </p:sp>
+      <p:sp>
+        <p:nvSpPr>
+          <p:cNvPr id="18" name="Text 15"/>
+          <p:cNvSpPr txBox="1"/>
+          <p:nvPr/>
+        </p:nvSpPr>
+        <p:spPr>
+          <a:xfrm>
+            <a:off x="6455664" y="1444752"/>
+            <a:ext cx="1965960" cy="365760"/>
+          </a:xfrm>
+          <a:prstGeom prst="rect">
+            <a:avLst/>
+          </a:prstGeom>
+          <a:noFill/>
+          <a:ln/>
+        </p:spPr>
+        <p:txBody>
+          <a:bodyPr wrap="square" lIns="0" tIns="0" rIns="0" bIns="0" rtlCol="0" anchor="ctr"/>
+          <a:lstStyle/>
+          <a:p>
+            <a:pPr algn="ctr" indent="0" marL="0">
+              <a:buNone/>
+            </a:pPr>
+            <a:r>
+              <a:rPr lang="en-US" sz="1300" b="1" dirty="0">
+                <a:solidFill>
+                  <a:srgbClr val="1C1917"/>
+                </a:solidFill>
+                <a:latin typeface="Calibri" pitchFamily="34" charset="0"/>
+                <a:ea typeface="Calibri" pitchFamily="34" charset="-122"/>
+                <a:cs typeface="Calibri" pitchFamily="34" charset="-120"/>
+              </a:rPr>
+              <a:t>C1a — if Legal</a:t>
+            </a:r>
+            <a:endParaRPr lang="en-US" sz="1300" dirty="0"/>
+          </a:p>
+        </p:txBody>
+      </p:sp>
+      <p:sp>
+        <p:nvSpPr>
+          <p:cNvPr id="19" name="Text 16"/>
+          <p:cNvSpPr txBox="1"/>
+          <p:nvPr/>
+        </p:nvSpPr>
+        <p:spPr>
+          <a:xfrm>
+            <a:off x="6455664" y="1901952"/>
+            <a:ext cx="5029200" cy="640080"/>
+          </a:xfrm>
+          <a:prstGeom prst="rect">
+            <a:avLst/>
+          </a:prstGeom>
+          <a:noFill/>
+          <a:ln/>
+        </p:spPr>
+        <p:txBody>
+          <a:bodyPr wrap="square" lIns="0" tIns="0" rIns="0" bIns="0" rtlCol="0" anchor="ctr"/>
+          <a:lstStyle/>
+          <a:p>
+            <a:pPr indent="0" marL="0">
+              <a:buNone/>
+            </a:pPr>
+            <a:r>
+              <a:rPr lang="en-US" sz="1600" b="1" dirty="0">
+                <a:solidFill>
+                  <a:srgbClr val="1C1917"/>
+                </a:solidFill>
+                <a:latin typeface="Cambria" pitchFamily="34" charset="0"/>
+                <a:ea typeface="Cambria" pitchFamily="34" charset="-122"/>
+                <a:cs typeface="Cambria" pitchFamily="34" charset="-120"/>
+              </a:rPr>
+              <a:t>Provisional RC · 10-day in-person grace</a:t>
+            </a:r>
+            <a:endParaRPr lang="en-US" sz="1600" dirty="0"/>
+          </a:p>
+        </p:txBody>
+      </p:sp>
+      <p:sp>
+        <p:nvSpPr>
+          <p:cNvPr id="20" name="Text 17"/>
+          <p:cNvSpPr txBox="1"/>
+          <p:nvPr/>
+        </p:nvSpPr>
+        <p:spPr>
+          <a:xfrm>
+            <a:off x="6455664" y="2606040"/>
+            <a:ext cx="5029200" cy="475488"/>
+          </a:xfrm>
+          <a:prstGeom prst="rect">
+            <a:avLst/>
+          </a:prstGeom>
+          <a:noFill/>
+          <a:ln/>
+        </p:spPr>
+        <p:txBody>
+          <a:bodyPr wrap="square" lIns="0" tIns="0" rIns="0" bIns="0" rtlCol="0" anchor="ctr"/>
+          <a:lstStyle/>
+          <a:p>
+            <a:pPr indent="0" marL="0">
+              <a:buNone/>
+            </a:pPr>
+            <a:r>
+              <a:rPr lang="en-US" sz="1400" b="1" dirty="0">
+                <a:solidFill>
+                  <a:srgbClr val="C45C26"/>
+                </a:solidFill>
+                <a:latin typeface="Calibri" pitchFamily="34" charset="0"/>
+                <a:ea typeface="Calibri" pitchFamily="34" charset="-122"/>
+                <a:cs typeface="Calibri" pitchFamily="34" charset="-120"/>
+              </a:rPr>
+              <a:t>Who  </a:t>
+            </a:r>
             <a:pPr indent="0" marL="0">
               <a:buNone/>
             </a:pPr>
@@ -3503,7 +3825,7 @@
                 <a:ea typeface="Calibri" pitchFamily="34" charset="-122"/>
                 <a:cs typeface="Calibri" pitchFamily="34" charset="-120"/>
               </a:rPr>
-              <a:t>1,637 RC and 411 Insurance captains are capture-only fails — isolated from eligibility (expired, duplicate, wrong type). DL (1,166) is 100% uploaded-fail and cannot be deferred.</a:t>
+              <a:t>1,637 RC capture-only fails (~300/mo)</a:t>
             </a:r>
             <a:endParaRPr lang="en-US" sz="1400" dirty="0"/>
           </a:p>
@@ -3511,7 +3833,280 @@
       </p:sp>
       <p:sp>
         <p:nvSpPr>
-          <p:cNvPr id="14" name="Shape 9"/>
+          <p:cNvPr id="21" name="Text 18"/>
+          <p:cNvSpPr txBox="1"/>
+          <p:nvPr/>
+        </p:nvSpPr>
+        <p:spPr>
+          <a:xfrm>
+            <a:off x="6455664" y="3099816"/>
+            <a:ext cx="5029200" cy="475488"/>
+          </a:xfrm>
+          <a:prstGeom prst="rect">
+            <a:avLst/>
+          </a:prstGeom>
+          <a:noFill/>
+          <a:ln/>
+        </p:spPr>
+        <p:txBody>
+          <a:bodyPr wrap="square" lIns="0" tIns="0" rIns="0" bIns="0" rtlCol="0" anchor="ctr"/>
+          <a:lstStyle/>
+          <a:p>
+            <a:pPr indent="0" marL="0">
+              <a:buNone/>
+            </a:pPr>
+            <a:r>
+              <a:rPr lang="en-US" sz="1400" b="1" dirty="0">
+                <a:solidFill>
+                  <a:srgbClr val="C45C26"/>
+                </a:solidFill>
+                <a:latin typeface="Calibri" pitchFamily="34" charset="0"/>
+                <a:ea typeface="Calibri" pitchFamily="34" charset="-122"/>
+                <a:cs typeface="Calibri" pitchFamily="34" charset="-120"/>
+              </a:rPr>
+              <a:t>Why defer  </a:t>
+            </a:r>
+            <a:pPr indent="0" marL="0">
+              <a:buNone/>
+            </a:pPr>
+            <a:r>
+              <a:rPr lang="en-US" sz="1400" dirty="0">
+                <a:solidFill>
+                  <a:srgbClr val="1C1917"/>
+                </a:solidFill>
+                <a:latin typeface="Calibri" pitchFamily="34" charset="0"/>
+                <a:ea typeface="Calibri" pitchFamily="34" charset="-122"/>
+                <a:cs typeface="Calibri" pitchFamily="34" charset="-120"/>
+              </a:rPr>
+              <a:t>Vehicle identity — no passenger-liability exposure</a:t>
+            </a:r>
+            <a:endParaRPr lang="en-US" sz="1400" dirty="0"/>
+          </a:p>
+        </p:txBody>
+      </p:sp>
+      <p:sp>
+        <p:nvSpPr>
+          <p:cNvPr id="22" name="Text 19"/>
+          <p:cNvSpPr txBox="1"/>
+          <p:nvPr/>
+        </p:nvSpPr>
+        <p:spPr>
+          <a:xfrm>
+            <a:off x="6455664" y="3593592"/>
+            <a:ext cx="5029200" cy="475488"/>
+          </a:xfrm>
+          <a:prstGeom prst="rect">
+            <a:avLst/>
+          </a:prstGeom>
+          <a:noFill/>
+          <a:ln/>
+        </p:spPr>
+        <p:txBody>
+          <a:bodyPr wrap="square" lIns="0" tIns="0" rIns="0" bIns="0" rtlCol="0" anchor="ctr"/>
+          <a:lstStyle/>
+          <a:p>
+            <a:pPr indent="0" marL="0">
+              <a:buNone/>
+            </a:pPr>
+            <a:r>
+              <a:rPr lang="en-US" sz="1400" b="1" dirty="0">
+                <a:solidFill>
+                  <a:srgbClr val="C45C26"/>
+                </a:solidFill>
+                <a:latin typeface="Calibri" pitchFamily="34" charset="0"/>
+                <a:ea typeface="Calibri" pitchFamily="34" charset="-122"/>
+                <a:cs typeface="Calibri" pitchFamily="34" charset="-120"/>
+              </a:rPr>
+              <a:t>Show-up  </a:t>
+            </a:r>
+            <a:pPr indent="0" marL="0">
+              <a:buNone/>
+            </a:pPr>
+            <a:r>
+              <a:rPr lang="en-US" sz="1400" dirty="0">
+                <a:solidFill>
+                  <a:srgbClr val="1C1917"/>
+                </a:solidFill>
+                <a:latin typeface="Calibri" pitchFamily="34" charset="0"/>
+                <a:ea typeface="Calibri" pitchFamily="34" charset="-122"/>
+                <a:cs typeface="Calibri" pitchFamily="34" charset="-120"/>
+              </a:rPr>
+              <a:t>Unobserved. 40 / 60 / 80% × 74–78% pass</a:t>
+            </a:r>
+            <a:endParaRPr lang="en-US" sz="1400" dirty="0"/>
+          </a:p>
+        </p:txBody>
+      </p:sp>
+      <p:sp>
+        <p:nvSpPr>
+          <p:cNvPr id="23" name="Text 20"/>
+          <p:cNvSpPr txBox="1"/>
+          <p:nvPr/>
+        </p:nvSpPr>
+        <p:spPr>
+          <a:xfrm>
+            <a:off x="6455664" y="4087368"/>
+            <a:ext cx="5029200" cy="475488"/>
+          </a:xfrm>
+          <a:prstGeom prst="rect">
+            <a:avLst/>
+          </a:prstGeom>
+          <a:noFill/>
+          <a:ln/>
+        </p:spPr>
+        <p:txBody>
+          <a:bodyPr wrap="square" lIns="0" tIns="0" rIns="0" bIns="0" rtlCol="0" anchor="ctr"/>
+          <a:lstStyle/>
+          <a:p>
+            <a:pPr indent="0" marL="0">
+              <a:buNone/>
+            </a:pPr>
+            <a:r>
+              <a:rPr lang="en-US" sz="1400" b="1" dirty="0">
+                <a:solidFill>
+                  <a:srgbClr val="C45C26"/>
+                </a:solidFill>
+                <a:latin typeface="Calibri" pitchFamily="34" charset="0"/>
+                <a:ea typeface="Calibri" pitchFamily="34" charset="-122"/>
+                <a:cs typeface="Calibri" pitchFamily="34" charset="-120"/>
+              </a:rPr>
+              <a:t>If Legal yes  </a:t>
+            </a:r>
+            <a:pPr indent="0" marL="0">
+              <a:buNone/>
+            </a:pPr>
+            <a:r>
+              <a:rPr lang="en-US" sz="1400" dirty="0">
+                <a:solidFill>
+                  <a:srgbClr val="1C1917"/>
+                </a:solidFill>
+                <a:latin typeface="Calibri" pitchFamily="34" charset="0"/>
+                <a:ea typeface="Calibri" pitchFamily="34" charset="-122"/>
+                <a:cs typeface="Calibri" pitchFamily="34" charset="-120"/>
+              </a:rPr>
+              <a:t>~134/month at 60% show-up</a:t>
+            </a:r>
+            <a:endParaRPr lang="en-US" sz="1400" dirty="0"/>
+          </a:p>
+        </p:txBody>
+      </p:sp>
+      <p:sp>
+        <p:nvSpPr>
+          <p:cNvPr id="24" name="Text 21"/>
+          <p:cNvSpPr txBox="1"/>
+          <p:nvPr/>
+        </p:nvSpPr>
+        <p:spPr>
+          <a:xfrm>
+            <a:off x="6455664" y="4581144"/>
+            <a:ext cx="5029200" cy="475488"/>
+          </a:xfrm>
+          <a:prstGeom prst="rect">
+            <a:avLst/>
+          </a:prstGeom>
+          <a:noFill/>
+          <a:ln/>
+        </p:spPr>
+        <p:txBody>
+          <a:bodyPr wrap="square" lIns="0" tIns="0" rIns="0" bIns="0" rtlCol="0" anchor="ctr"/>
+          <a:lstStyle/>
+          <a:p>
+            <a:pPr indent="0" marL="0">
+              <a:buNone/>
+            </a:pPr>
+            <a:r>
+              <a:rPr lang="en-US" sz="1400" b="1" dirty="0">
+                <a:solidFill>
+                  <a:srgbClr val="C45C26"/>
+                </a:solidFill>
+                <a:latin typeface="Calibri" pitchFamily="34" charset="0"/>
+                <a:ea typeface="Calibri" pitchFamily="34" charset="-122"/>
+                <a:cs typeface="Calibri" pitchFamily="34" charset="-120"/>
+              </a:rPr>
+              <a:t>If docs still bind  </a:t>
+            </a:r>
+            <a:pPr indent="0" marL="0">
+              <a:buNone/>
+            </a:pPr>
+            <a:r>
+              <a:rPr lang="en-US" sz="1400" dirty="0">
+                <a:solidFill>
+                  <a:srgbClr val="1C1917"/>
+                </a:solidFill>
+                <a:latin typeface="Calibri" pitchFamily="34" charset="0"/>
+                <a:ea typeface="Calibri" pitchFamily="34" charset="-122"/>
+                <a:cs typeface="Calibri" pitchFamily="34" charset="-120"/>
+              </a:rPr>
+              <a:t>~36/month (27% approved | passed RC)</a:t>
+            </a:r>
+            <a:endParaRPr lang="en-US" sz="1400" dirty="0"/>
+          </a:p>
+        </p:txBody>
+      </p:sp>
+      <p:sp>
+        <p:nvSpPr>
+          <p:cNvPr id="25" name="Shape 22"/>
+          <p:cNvSpPr/>
+          <p:nvPr/>
+        </p:nvSpPr>
+        <p:spPr>
+          <a:xfrm>
+            <a:off x="6364224" y="5440680"/>
+            <a:ext cx="5212080" cy="438912"/>
+          </a:xfrm>
+          <a:prstGeom prst="roundRect">
+            <a:avLst>
+              <a:gd name="adj" fmla="val 12500"/>
+            </a:avLst>
+          </a:prstGeom>
+          <a:solidFill>
+            <a:srgbClr val="F8F1E3"/>
+          </a:solidFill>
+          <a:ln/>
+        </p:spPr>
+      </p:sp>
+      <p:sp>
+        <p:nvSpPr>
+          <p:cNvPr id="26" name="Text 23"/>
+          <p:cNvSpPr txBox="1"/>
+          <p:nvPr/>
+        </p:nvSpPr>
+        <p:spPr>
+          <a:xfrm>
+            <a:off x="6455664" y="5440680"/>
+            <a:ext cx="5029200" cy="438912"/>
+          </a:xfrm>
+          <a:prstGeom prst="rect">
+            <a:avLst/>
+          </a:prstGeom>
+          <a:noFill/>
+          <a:ln/>
+        </p:spPr>
+        <p:txBody>
+          <a:bodyPr wrap="square" lIns="0" tIns="0" rIns="0" bIns="0" rtlCol="0" anchor="ctr"/>
+          <a:lstStyle/>
+          <a:p>
+            <a:pPr indent="0" marL="0">
+              <a:buNone/>
+            </a:pPr>
+            <a:r>
+              <a:rPr lang="en-US" sz="1200" i="1" dirty="0">
+                <a:solidFill>
+                  <a:srgbClr val="57534E"/>
+                </a:solidFill>
+                <a:latin typeface="Calibri" pitchFamily="34" charset="0"/>
+                <a:ea typeface="Calibri" pitchFamily="34" charset="-122"/>
+                <a:cs typeface="Calibri" pitchFamily="34" charset="-120"/>
+              </a:rPr>
+              <a:t>Do not add C1a to ~50 until Legal/T&amp;S treat deferred RC as activation.</a:t>
+            </a:r>
+            <a:endParaRPr lang="en-US" sz="1200" dirty="0"/>
+          </a:p>
+        </p:txBody>
+      </p:sp>
+      <p:sp>
+        <p:nvSpPr>
+          <p:cNvPr id="27" name="Shape 24"/>
           <p:cNvSpPr/>
           <p:nvPr/>
         </p:nvSpPr>
@@ -3531,7 +4126,7 @@
       </p:sp>
       <p:sp>
         <p:nvSpPr>
-          <p:cNvPr id="15" name="Text 10"/>
+          <p:cNvPr id="28" name="Text 25"/>
           <p:cNvSpPr txBox="1"/>
           <p:nvPr/>
         </p:nvSpPr>
@@ -3570,7 +4165,7 @@
       </p:sp>
       <p:sp>
         <p:nvSpPr>
-          <p:cNvPr id="16" name="Text 11"/>
+          <p:cNvPr id="29" name="Text 26"/>
           <p:cNvSpPr txBox="1"/>
           <p:nvPr/>
         </p:nvSpPr>
@@ -3601,7 +4196,7 @@
                 <a:ea typeface="Calibri" pitchFamily="34" charset="-122"/>
                 <a:cs typeface="Calibri" pitchFamily="34" charset="-120"/>
               </a:rPr>
-              <a:t>Ramanathan K R  ·  Rapido Data Science Assessment     2 / 6</a:t>
+              <a:t>Ramanathan K R  ·  Rapido Data Science Assessment     3 / 6</a:t>
             </a:r>
             <a:endParaRPr lang="en-US" sz="1100" dirty="0"/>
           </a:p>
@@ -3672,7 +4267,7 @@
                 <a:ea typeface="Calibri" pitchFamily="34" charset="-122"/>
                 <a:cs typeface="Calibri" pitchFamily="34" charset="-120"/>
               </a:rPr>
-              <a:t>THE FIX</a:t>
+              <a:t>AIRPORT SUPPLY</a:t>
             </a:r>
             <a:endParaRPr lang="en-US" sz="1300" dirty="0"/>
           </a:p>
@@ -3710,24 +4305,24 @@
         </p:nvSpPr>
         <p:spPr>
           <a:xfrm>
-            <a:off x="548640" y="621792"/>
-            <a:ext cx="10332720" cy="530352"/>
-          </a:xfrm>
-          <a:prstGeom prst="rect">
-            <a:avLst/>
-          </a:prstGeom>
-          <a:noFill/>
-          <a:ln/>
-        </p:spPr>
-        <p:txBody>
-          <a:bodyPr wrap="square" lIns="0" tIns="0" rIns="0" bIns="0" rtlCol="0" anchor="ctr"/>
-          <a:lstStyle/>
-          <a:p>
-            <a:pPr indent="0" marL="0">
-              <a:buNone/>
-            </a:pPr>
-            <a:r>
-              <a:rPr lang="en-US" sz="2400" b="1" dirty="0">
+            <a:off x="548640" y="603504"/>
+            <a:ext cx="10332720" cy="457200"/>
+          </a:xfrm>
+          <a:prstGeom prst="rect">
+            <a:avLst/>
+          </a:prstGeom>
+          <a:noFill/>
+          <a:ln/>
+        </p:spPr>
+        <p:txBody>
+          <a:bodyPr wrap="square" lIns="0" tIns="0" rIns="0" bIns="0" rtlCol="0" anchor="ctr"/>
+          <a:lstStyle/>
+          <a:p>
+            <a:pPr indent="0" marL="0">
+              <a:buNone/>
+            </a:pPr>
+            <a:r>
+              <a:rPr lang="en-US" sz="2200" b="1" dirty="0">
                 <a:solidFill>
                   <a:srgbClr val="1C1917"/>
                 </a:solidFill>
@@ -3735,9 +4330,9 @@
                 <a:ea typeface="Cambria" pitchFamily="34" charset="-122"/>
                 <a:cs typeface="Cambria" pitchFamily="34" charset="-120"/>
               </a:rPr>
-              <a:t>One recommendation, two sub-actions — RC defers, Insurance doesn’t</a:t>
-            </a:r>
-            <a:endParaRPr lang="en-US" sz="2400" dirty="0"/>
+              <a:t>Do not hire the catchment. After the trip, the night still loses money.</a:t>
+            </a:r>
+            <a:endParaRPr lang="en-US" sz="2200" dirty="0"/>
           </a:p>
         </p:txBody>
       </p:sp>
@@ -3749,12 +4344,12 @@
         </p:nvSpPr>
         <p:spPr>
           <a:xfrm>
-            <a:off x="457200" y="1280160"/>
-            <a:ext cx="5532120" cy="4709160"/>
+            <a:off x="502920" y="1115568"/>
+            <a:ext cx="5486400" cy="2944368"/>
           </a:xfrm>
           <a:prstGeom prst="roundRect">
             <a:avLst>
-              <a:gd name="adj" fmla="val 1942"/>
+              <a:gd name="adj" fmla="val 3106"/>
             </a:avLst>
           </a:prstGeom>
           <a:solidFill>
@@ -3770,444 +4365,81 @@
       </p:sp>
       <p:sp>
         <p:nvSpPr>
-          <p:cNvPr id="6" name="Shape 3"/>
+          <p:cNvPr id="6" name="Text 3"/>
+          <p:cNvSpPr txBox="1"/>
+          <p:nvPr/>
+        </p:nvSpPr>
+        <p:spPr>
+          <a:xfrm>
+            <a:off x="685800" y="1170432"/>
+            <a:ext cx="5120640" cy="256032"/>
+          </a:xfrm>
+          <a:prstGeom prst="rect">
+            <a:avLst/>
+          </a:prstGeom>
+          <a:noFill/>
+          <a:ln/>
+        </p:spPr>
+        <p:txBody>
+          <a:bodyPr wrap="square" lIns="0" tIns="0" rIns="0" bIns="0" rtlCol="0" anchor="ctr"/>
+          <a:lstStyle/>
+          <a:p>
+            <a:pPr indent="0" marL="0">
+              <a:buNone/>
+            </a:pPr>
+            <a:r>
+              <a:rPr lang="en-US" sz="1400" b="1" dirty="0">
+                <a:solidFill>
+                  <a:srgbClr val="1C1917"/>
+                </a:solidFill>
+                <a:latin typeface="Calibri" pitchFamily="34" charset="0"/>
+                <a:ea typeface="Calibri" pitchFamily="34" charset="-122"/>
+                <a:cs typeface="Calibri" pitchFamily="34" charset="-120"/>
+              </a:rPr>
+              <a:t>B1 — when the pain sits</a:t>
+            </a:r>
+            <a:endParaRPr lang="en-US" sz="1400" dirty="0"/>
+          </a:p>
+        </p:txBody>
+      </p:sp>
+      <p:pic>
+        <p:nvPicPr>
+          <p:cNvPr id="7" name="Image 1" descr="preencoded.png">    </p:cNvPr>
+          <p:cNvPicPr>
+            <a:picLocks noChangeAspect="1"/>
+          </p:cNvPicPr>
+          <p:nvPr/>
+        </p:nvPicPr>
+        <p:blipFill>
+          <a:blip r:embed="rId2"/>
+          <a:stretch>
+            <a:fillRect/>
+          </a:stretch>
+        </p:blipFill>
+        <p:spPr>
+          <a:xfrm>
+            <a:off x="640080" y="1408176"/>
+            <a:ext cx="5212080" cy="2560320"/>
+          </a:xfrm>
+          <a:prstGeom prst="rect">
+            <a:avLst/>
+          </a:prstGeom>
+        </p:spPr>
+      </p:pic>
+      <p:sp>
+        <p:nvSpPr>
+          <p:cNvPr id="8" name="Shape 4"/>
           <p:cNvSpPr/>
           <p:nvPr/>
         </p:nvSpPr>
         <p:spPr>
           <a:xfrm>
-            <a:off x="713232" y="1444752"/>
-            <a:ext cx="1965960" cy="365760"/>
+            <a:off x="6172200" y="1115568"/>
+            <a:ext cx="5532120" cy="2944368"/>
           </a:xfrm>
           <a:prstGeom prst="roundRect">
             <a:avLst>
-              <a:gd name="adj" fmla="val 50000"/>
-            </a:avLst>
-          </a:prstGeom>
-          <a:solidFill>
-            <a:srgbClr val="F3E6C0"/>
-          </a:solidFill>
-          <a:ln/>
-        </p:spPr>
-      </p:sp>
-      <p:sp>
-        <p:nvSpPr>
-          <p:cNvPr id="7" name="Text 4"/>
-          <p:cNvSpPr txBox="1"/>
-          <p:nvPr/>
-        </p:nvSpPr>
-        <p:spPr>
-          <a:xfrm>
-            <a:off x="713232" y="1444752"/>
-            <a:ext cx="1965960" cy="365760"/>
-          </a:xfrm>
-          <a:prstGeom prst="rect">
-            <a:avLst/>
-          </a:prstGeom>
-          <a:noFill/>
-          <a:ln/>
-        </p:spPr>
-        <p:txBody>
-          <a:bodyPr wrap="square" lIns="0" tIns="0" rIns="0" bIns="0" rtlCol="0" anchor="ctr"/>
-          <a:lstStyle/>
-          <a:p>
-            <a:pPr algn="ctr" indent="0" marL="0">
-              <a:buNone/>
-            </a:pPr>
-            <a:r>
-              <a:rPr lang="en-US" sz="1300" b="1" dirty="0">
-                <a:solidFill>
-                  <a:srgbClr val="1C1917"/>
-                </a:solidFill>
-                <a:latin typeface="Calibri" pitchFamily="34" charset="0"/>
-                <a:ea typeface="Calibri" pitchFamily="34" charset="-122"/>
-                <a:cs typeface="Calibri" pitchFamily="34" charset="-120"/>
-              </a:rPr>
-              <a:t>C1a — RC</a:t>
-            </a:r>
-            <a:endParaRPr lang="en-US" sz="1300" dirty="0"/>
-          </a:p>
-        </p:txBody>
-      </p:sp>
-      <p:sp>
-        <p:nvSpPr>
-          <p:cNvPr id="8" name="Text 5"/>
-          <p:cNvSpPr txBox="1"/>
-          <p:nvPr/>
-        </p:nvSpPr>
-        <p:spPr>
-          <a:xfrm>
-            <a:off x="713232" y="1901952"/>
-            <a:ext cx="5029200" cy="640080"/>
-          </a:xfrm>
-          <a:prstGeom prst="rect">
-            <a:avLst/>
-          </a:prstGeom>
-          <a:noFill/>
-          <a:ln/>
-        </p:spPr>
-        <p:txBody>
-          <a:bodyPr wrap="square" lIns="0" tIns="0" rIns="0" bIns="0" rtlCol="0" anchor="ctr"/>
-          <a:lstStyle/>
-          <a:p>
-            <a:pPr indent="0" marL="0">
-              <a:buNone/>
-            </a:pPr>
-            <a:r>
-              <a:rPr lang="en-US" sz="1600" b="1" dirty="0">
-                <a:solidFill>
-                  <a:srgbClr val="1C1917"/>
-                </a:solidFill>
-                <a:latin typeface="Cambria" pitchFamily="34" charset="0"/>
-                <a:ea typeface="Cambria" pitchFamily="34" charset="-122"/>
-                <a:cs typeface="Cambria" pitchFamily="34" charset="-120"/>
-              </a:rPr>
-              <a:t>Provisional activation · 10-day in-person grace</a:t>
-            </a:r>
-            <a:endParaRPr lang="en-US" sz="1600" dirty="0"/>
-          </a:p>
-        </p:txBody>
-      </p:sp>
-      <p:sp>
-        <p:nvSpPr>
-          <p:cNvPr id="9" name="Text 6"/>
-          <p:cNvSpPr txBox="1"/>
-          <p:nvPr/>
-        </p:nvSpPr>
-        <p:spPr>
-          <a:xfrm>
-            <a:off x="713232" y="2606040"/>
-            <a:ext cx="5029200" cy="475488"/>
-          </a:xfrm>
-          <a:prstGeom prst="rect">
-            <a:avLst/>
-          </a:prstGeom>
-          <a:noFill/>
-          <a:ln/>
-        </p:spPr>
-        <p:txBody>
-          <a:bodyPr wrap="square" lIns="0" tIns="0" rIns="0" bIns="0" rtlCol="0" anchor="ctr"/>
-          <a:lstStyle/>
-          <a:p>
-            <a:pPr indent="0" marL="0">
-              <a:buNone/>
-            </a:pPr>
-            <a:r>
-              <a:rPr lang="en-US" sz="1400" b="1" dirty="0">
-                <a:solidFill>
-                  <a:srgbClr val="C45C26"/>
-                </a:solidFill>
-                <a:latin typeface="Calibri" pitchFamily="34" charset="0"/>
-                <a:ea typeface="Calibri" pitchFamily="34" charset="-122"/>
-                <a:cs typeface="Calibri" pitchFamily="34" charset="-120"/>
-              </a:rPr>
-              <a:t>Who  </a:t>
-            </a:r>
-            <a:pPr indent="0" marL="0">
-              <a:buNone/>
-            </a:pPr>
-            <a:r>
-              <a:rPr lang="en-US" sz="1400" dirty="0">
-                <a:solidFill>
-                  <a:srgbClr val="1C1917"/>
-                </a:solidFill>
-                <a:latin typeface="Calibri" pitchFamily="34" charset="0"/>
-                <a:ea typeface="Calibri" pitchFamily="34" charset="-122"/>
-                <a:cs typeface="Calibri" pitchFamily="34" charset="-120"/>
-              </a:rPr>
-              <a:t>1,637 RC capture-only fails (~300/mo)</a:t>
-            </a:r>
-            <a:endParaRPr lang="en-US" sz="1400" dirty="0"/>
-          </a:p>
-        </p:txBody>
-      </p:sp>
-      <p:sp>
-        <p:nvSpPr>
-          <p:cNvPr id="10" name="Text 7"/>
-          <p:cNvSpPr txBox="1"/>
-          <p:nvPr/>
-        </p:nvSpPr>
-        <p:spPr>
-          <a:xfrm>
-            <a:off x="713232" y="3099816"/>
-            <a:ext cx="5029200" cy="475488"/>
-          </a:xfrm>
-          <a:prstGeom prst="rect">
-            <a:avLst/>
-          </a:prstGeom>
-          <a:noFill/>
-          <a:ln/>
-        </p:spPr>
-        <p:txBody>
-          <a:bodyPr wrap="square" lIns="0" tIns="0" rIns="0" bIns="0" rtlCol="0" anchor="ctr"/>
-          <a:lstStyle/>
-          <a:p>
-            <a:pPr indent="0" marL="0">
-              <a:buNone/>
-            </a:pPr>
-            <a:r>
-              <a:rPr lang="en-US" sz="1400" b="1" dirty="0">
-                <a:solidFill>
-                  <a:srgbClr val="C45C26"/>
-                </a:solidFill>
-                <a:latin typeface="Calibri" pitchFamily="34" charset="0"/>
-                <a:ea typeface="Calibri" pitchFamily="34" charset="-122"/>
-                <a:cs typeface="Calibri" pitchFamily="34" charset="-120"/>
-              </a:rPr>
-              <a:t>Why  </a:t>
-            </a:r>
-            <a:pPr indent="0" marL="0">
-              <a:buNone/>
-            </a:pPr>
-            <a:r>
-              <a:rPr lang="en-US" sz="1400" dirty="0">
-                <a:solidFill>
-                  <a:srgbClr val="1C1917"/>
-                </a:solidFill>
-                <a:latin typeface="Calibri" pitchFamily="34" charset="0"/>
-                <a:ea typeface="Calibri" pitchFamily="34" charset="-122"/>
-                <a:cs typeface="Calibri" pitchFamily="34" charset="-120"/>
-              </a:rPr>
-              <a:t>Vehicle identity — no passenger-liability exposure</a:t>
-            </a:r>
-            <a:endParaRPr lang="en-US" sz="1400" dirty="0"/>
-          </a:p>
-        </p:txBody>
-      </p:sp>
-      <p:sp>
-        <p:nvSpPr>
-          <p:cNvPr id="11" name="Text 8"/>
-          <p:cNvSpPr txBox="1"/>
-          <p:nvPr/>
-        </p:nvSpPr>
-        <p:spPr>
-          <a:xfrm>
-            <a:off x="713232" y="3593592"/>
-            <a:ext cx="5029200" cy="475488"/>
-          </a:xfrm>
-          <a:prstGeom prst="rect">
-            <a:avLst/>
-          </a:prstGeom>
-          <a:noFill/>
-          <a:ln/>
-        </p:spPr>
-        <p:txBody>
-          <a:bodyPr wrap="square" lIns="0" tIns="0" rIns="0" bIns="0" rtlCol="0" anchor="ctr"/>
-          <a:lstStyle/>
-          <a:p>
-            <a:pPr indent="0" marL="0">
-              <a:buNone/>
-            </a:pPr>
-            <a:r>
-              <a:rPr lang="en-US" sz="1400" b="1" dirty="0">
-                <a:solidFill>
-                  <a:srgbClr val="C45C26"/>
-                </a:solidFill>
-                <a:latin typeface="Calibri" pitchFamily="34" charset="0"/>
-                <a:ea typeface="Calibri" pitchFamily="34" charset="-122"/>
-                <a:cs typeface="Calibri" pitchFamily="34" charset="-120"/>
-              </a:rPr>
-              <a:t>Show-up  </a:t>
-            </a:r>
-            <a:pPr indent="0" marL="0">
-              <a:buNone/>
-            </a:pPr>
-            <a:r>
-              <a:rPr lang="en-US" sz="1400" dirty="0">
-                <a:solidFill>
-                  <a:srgbClr val="1C1917"/>
-                </a:solidFill>
-                <a:latin typeface="Calibri" pitchFamily="34" charset="0"/>
-                <a:ea typeface="Calibri" pitchFamily="34" charset="-122"/>
-                <a:cs typeface="Calibri" pitchFamily="34" charset="-120"/>
-              </a:rPr>
-              <a:t>40 / 60 / 80% × 74–78% pass rate</a:t>
-            </a:r>
-            <a:endParaRPr lang="en-US" sz="1400" dirty="0"/>
-          </a:p>
-        </p:txBody>
-      </p:sp>
-      <p:sp>
-        <p:nvSpPr>
-          <p:cNvPr id="12" name="Text 9"/>
-          <p:cNvSpPr txBox="1"/>
-          <p:nvPr/>
-        </p:nvSpPr>
-        <p:spPr>
-          <a:xfrm>
-            <a:off x="713232" y="4087368"/>
-            <a:ext cx="5029200" cy="475488"/>
-          </a:xfrm>
-          <a:prstGeom prst="rect">
-            <a:avLst/>
-          </a:prstGeom>
-          <a:noFill/>
-          <a:ln/>
-        </p:spPr>
-        <p:txBody>
-          <a:bodyPr wrap="square" lIns="0" tIns="0" rIns="0" bIns="0" rtlCol="0" anchor="ctr"/>
-          <a:lstStyle/>
-          <a:p>
-            <a:pPr indent="0" marL="0">
-              <a:buNone/>
-            </a:pPr>
-            <a:r>
-              <a:rPr lang="en-US" sz="1400" b="1" dirty="0">
-                <a:solidFill>
-                  <a:srgbClr val="C45C26"/>
-                </a:solidFill>
-                <a:latin typeface="Calibri" pitchFamily="34" charset="0"/>
-                <a:ea typeface="Calibri" pitchFamily="34" charset="-122"/>
-                <a:cs typeface="Calibri" pitchFamily="34" charset="-120"/>
-              </a:rPr>
-              <a:t>Central  </a:t>
-            </a:r>
-            <a:pPr indent="0" marL="0">
-              <a:buNone/>
-            </a:pPr>
-            <a:r>
-              <a:rPr lang="en-US" sz="1400" dirty="0">
-                <a:solidFill>
-                  <a:srgbClr val="1C1917"/>
-                </a:solidFill>
-                <a:latin typeface="Calibri" pitchFamily="34" charset="0"/>
-                <a:ea typeface="Calibri" pitchFamily="34" charset="-122"/>
-                <a:cs typeface="Calibri" pitchFamily="34" charset="-120"/>
-              </a:rPr>
-              <a:t>~134/month additional approved</a:t>
-            </a:r>
-            <a:endParaRPr lang="en-US" sz="1400" dirty="0"/>
-          </a:p>
-        </p:txBody>
-      </p:sp>
-      <p:sp>
-        <p:nvSpPr>
-          <p:cNvPr id="13" name="Text 10"/>
-          <p:cNvSpPr txBox="1"/>
-          <p:nvPr/>
-        </p:nvSpPr>
-        <p:spPr>
-          <a:xfrm>
-            <a:off x="713232" y="4581144"/>
-            <a:ext cx="5029200" cy="475488"/>
-          </a:xfrm>
-          <a:prstGeom prst="rect">
-            <a:avLst/>
-          </a:prstGeom>
-          <a:noFill/>
-          <a:ln/>
-        </p:spPr>
-        <p:txBody>
-          <a:bodyPr wrap="square" lIns="0" tIns="0" rIns="0" bIns="0" rtlCol="0" anchor="ctr"/>
-          <a:lstStyle/>
-          <a:p>
-            <a:pPr indent="0" marL="0">
-              <a:buNone/>
-            </a:pPr>
-            <a:r>
-              <a:rPr lang="en-US" sz="1400" b="1" dirty="0">
-                <a:solidFill>
-                  <a:srgbClr val="C45C26"/>
-                </a:solidFill>
-                <a:latin typeface="Calibri" pitchFamily="34" charset="0"/>
-                <a:ea typeface="Calibri" pitchFamily="34" charset="-122"/>
-                <a:cs typeface="Calibri" pitchFamily="34" charset="-120"/>
-              </a:rPr>
-              <a:t>Needs  </a:t>
-            </a:r>
-            <a:pPr indent="0" marL="0">
-              <a:buNone/>
-            </a:pPr>
-            <a:r>
-              <a:rPr lang="en-US" sz="1400" dirty="0">
-                <a:solidFill>
-                  <a:srgbClr val="1C1917"/>
-                </a:solidFill>
-                <a:latin typeface="Calibri" pitchFamily="34" charset="0"/>
-                <a:ea typeface="Calibri" pitchFamily="34" charset="-122"/>
-                <a:cs typeface="Calibri" pitchFamily="34" charset="-120"/>
-              </a:rPr>
-              <a:t>Legal + Trust &amp; Safety sign-off on deferral</a:t>
-            </a:r>
-            <a:endParaRPr lang="en-US" sz="1400" dirty="0"/>
-          </a:p>
-        </p:txBody>
-      </p:sp>
-      <p:sp>
-        <p:nvSpPr>
-          <p:cNvPr id="14" name="Shape 11"/>
-          <p:cNvSpPr/>
-          <p:nvPr/>
-        </p:nvSpPr>
-        <p:spPr>
-          <a:xfrm>
-            <a:off x="621792" y="5440680"/>
-            <a:ext cx="5212080" cy="438912"/>
-          </a:xfrm>
-          <a:prstGeom prst="roundRect">
-            <a:avLst>
-              <a:gd name="adj" fmla="val 12500"/>
-            </a:avLst>
-          </a:prstGeom>
-          <a:solidFill>
-            <a:srgbClr val="F8F1E3"/>
-          </a:solidFill>
-          <a:ln/>
-        </p:spPr>
-      </p:sp>
-      <p:sp>
-        <p:nvSpPr>
-          <p:cNvPr id="15" name="Text 12"/>
-          <p:cNvSpPr txBox="1"/>
-          <p:nvPr/>
-        </p:nvSpPr>
-        <p:spPr>
-          <a:xfrm>
-            <a:off x="713232" y="5440680"/>
-            <a:ext cx="5029200" cy="438912"/>
-          </a:xfrm>
-          <a:prstGeom prst="rect">
-            <a:avLst/>
-          </a:prstGeom>
-          <a:noFill/>
-          <a:ln/>
-        </p:spPr>
-        <p:txBody>
-          <a:bodyPr wrap="square" lIns="0" tIns="0" rIns="0" bIns="0" rtlCol="0" anchor="ctr"/>
-          <a:lstStyle/>
-          <a:p>
-            <a:pPr indent="0" marL="0">
-              <a:buNone/>
-            </a:pPr>
-            <a:r>
-              <a:rPr lang="en-US" sz="1200" i="1" dirty="0">
-                <a:solidFill>
-                  <a:srgbClr val="57534E"/>
-                </a:solidFill>
-                <a:latin typeface="Calibri" pitchFamily="34" charset="0"/>
-                <a:ea typeface="Calibri" pitchFamily="34" charset="-122"/>
-                <a:cs typeface="Calibri" pitchFamily="34" charset="-120"/>
-              </a:rPr>
-              <a:t>If remaining docs still bind: ~36/month (Legal ask).</a:t>
-            </a:r>
-            <a:endParaRPr lang="en-US" sz="1200" dirty="0"/>
-          </a:p>
-        </p:txBody>
-      </p:sp>
-      <p:sp>
-        <p:nvSpPr>
-          <p:cNvPr id="16" name="Shape 13"/>
-          <p:cNvSpPr/>
-          <p:nvPr/>
-        </p:nvSpPr>
-        <p:spPr>
-          <a:xfrm>
-            <a:off x="6199632" y="1280160"/>
-            <a:ext cx="5532120" cy="4709160"/>
-          </a:xfrm>
-          <a:prstGeom prst="roundRect">
-            <a:avLst>
-              <a:gd name="adj" fmla="val 1942"/>
+              <a:gd name="adj" fmla="val 3106"/>
             </a:avLst>
           </a:prstGeom>
           <a:solidFill>
@@ -4223,52 +4455,112 @@
       </p:sp>
       <p:sp>
         <p:nvSpPr>
-          <p:cNvPr id="17" name="Shape 14"/>
+          <p:cNvPr id="9" name="Text 5"/>
+          <p:cNvSpPr txBox="1"/>
+          <p:nvPr/>
+        </p:nvSpPr>
+        <p:spPr>
+          <a:xfrm>
+            <a:off x="6355080" y="1170432"/>
+            <a:ext cx="5212080" cy="256032"/>
+          </a:xfrm>
+          <a:prstGeom prst="rect">
+            <a:avLst/>
+          </a:prstGeom>
+          <a:noFill/>
+          <a:ln/>
+        </p:spPr>
+        <p:txBody>
+          <a:bodyPr wrap="square" lIns="0" tIns="0" rIns="0" bIns="0" rtlCol="0" anchor="ctr"/>
+          <a:lstStyle/>
+          <a:p>
+            <a:pPr indent="0" marL="0">
+              <a:buNone/>
+            </a:pPr>
+            <a:r>
+              <a:rPr lang="en-US" sz="1400" b="1" dirty="0">
+                <a:solidFill>
+                  <a:srgbClr val="1C1917"/>
+                </a:solidFill>
+                <a:latin typeface="Calibri" pitchFamily="34" charset="0"/>
+                <a:ea typeface="Calibri" pitchFamily="34" charset="-122"/>
+                <a:cs typeface="Calibri" pitchFamily="34" charset="-120"/>
+              </a:rPr>
+              <a:t>B3 — price the deadhead (₹k/mo at ₹35.4/leg)</a:t>
+            </a:r>
+            <a:endParaRPr lang="en-US" sz="1400" dirty="0"/>
+          </a:p>
+        </p:txBody>
+      </p:sp>
+      <p:graphicFrame>
+        <p:nvGraphicFramePr>
+          <p:cNvPr id="10" name="Chart 0" descr=""/>
+          <p:cNvGraphicFramePr/>
+          <p:nvPr/>
+        </p:nvGraphicFramePr>
+        <p:xfrm>
+          <a:off x="6263640" y="1408176"/>
+          <a:ext cx="5303520" cy="2560320"/>
+        </p:xfrm>
+        <a:graphic xmlns:a="http://schemas.openxmlformats.org/drawingml/2006/main">
+          <a:graphicData uri="http://schemas.openxmlformats.org/drawingml/2006/chart">
+            <c:chart xmlns:c="http://schemas.openxmlformats.org/drawingml/2006/chart" r:id="rId3"/>
+          </a:graphicData>
+        </a:graphic>
+      </p:graphicFrame>
+      <p:sp>
+        <p:nvSpPr>
+          <p:cNvPr id="11" name="Shape 6"/>
           <p:cNvSpPr/>
           <p:nvPr/>
         </p:nvSpPr>
         <p:spPr>
           <a:xfrm>
-            <a:off x="6455664" y="1444752"/>
-            <a:ext cx="1965960" cy="365760"/>
+            <a:off x="502920" y="4133088"/>
+            <a:ext cx="11201400" cy="640080"/>
           </a:xfrm>
           <a:prstGeom prst="roundRect">
             <a:avLst>
-              <a:gd name="adj" fmla="val 50000"/>
+              <a:gd name="adj" fmla="val 14286"/>
             </a:avLst>
           </a:prstGeom>
           <a:solidFill>
             <a:srgbClr val="F3E6C0"/>
           </a:solidFill>
-          <a:ln/>
-        </p:spPr>
-      </p:sp>
-      <p:sp>
-        <p:nvSpPr>
-          <p:cNvPr id="18" name="Text 15"/>
-          <p:cNvSpPr txBox="1"/>
-          <p:nvPr/>
-        </p:nvSpPr>
-        <p:spPr>
-          <a:xfrm>
-            <a:off x="6455664" y="1444752"/>
-            <a:ext cx="1965960" cy="365760"/>
-          </a:xfrm>
-          <a:prstGeom prst="rect">
-            <a:avLst/>
-          </a:prstGeom>
-          <a:noFill/>
-          <a:ln/>
-        </p:spPr>
-        <p:txBody>
-          <a:bodyPr wrap="square" lIns="0" tIns="0" rIns="0" bIns="0" rtlCol="0" anchor="ctr"/>
-          <a:lstStyle/>
-          <a:p>
-            <a:pPr algn="ctr" indent="0" marL="0">
-              <a:buNone/>
-            </a:pPr>
-            <a:r>
-              <a:rPr lang="en-US" sz="1300" b="1" dirty="0">
+          <a:ln w="15875">
+            <a:solidFill>
+              <a:srgbClr val="E8D5C0"/>
+            </a:solidFill>
+            <a:prstDash val="solid"/>
+          </a:ln>
+        </p:spPr>
+      </p:sp>
+      <p:sp>
+        <p:nvSpPr>
+          <p:cNvPr id="12" name="Text 7"/>
+          <p:cNvSpPr txBox="1"/>
+          <p:nvPr/>
+        </p:nvSpPr>
+        <p:spPr>
+          <a:xfrm>
+            <a:off x="658368" y="4133088"/>
+            <a:ext cx="10881360" cy="640080"/>
+          </a:xfrm>
+          <a:prstGeom prst="rect">
+            <a:avLst/>
+          </a:prstGeom>
+          <a:noFill/>
+          <a:ln/>
+        </p:spPr>
+        <p:txBody>
+          <a:bodyPr wrap="square" lIns="0" tIns="0" rIns="0" bIns="0" rtlCol="0" anchor="ctr"/>
+          <a:lstStyle/>
+          <a:p>
+            <a:pPr indent="0" marL="0">
+              <a:buNone/>
+            </a:pPr>
+            <a:r>
+              <a:rPr lang="en-US" sz="1400" dirty="0">
                 <a:solidFill>
                   <a:srgbClr val="1C1917"/>
                 </a:solidFill>
@@ -4276,38 +4568,65 @@
                 <a:ea typeface="Calibri" pitchFamily="34" charset="-122"/>
                 <a:cs typeface="Calibri" pitchFamily="34" charset="-120"/>
               </a:rPr>
-              <a:t>C1b — Insurance</a:t>
-            </a:r>
-            <a:endParaRPr lang="en-US" sz="1300" dirty="0"/>
-          </a:p>
-        </p:txBody>
-      </p:sp>
-      <p:sp>
-        <p:nvSpPr>
-          <p:cNvPr id="19" name="Text 16"/>
-          <p:cNvSpPr txBox="1"/>
-          <p:nvPr/>
-        </p:nvSpPr>
-        <p:spPr>
-          <a:xfrm>
-            <a:off x="6455664" y="1901952"/>
-            <a:ext cx="5029200" cy="640080"/>
-          </a:xfrm>
-          <a:prstGeom prst="rect">
-            <a:avLst/>
-          </a:prstGeom>
-          <a:noFill/>
-          <a:ln/>
-        </p:spPr>
-        <p:txBody>
-          <a:bodyPr wrap="square" lIns="0" tIns="0" rIns="0" bIns="0" rtlCol="0" anchor="ctr"/>
-          <a:lstStyle/>
-          <a:p>
-            <a:pPr indent="0" marL="0">
-              <a:buNone/>
-            </a:pPr>
-            <a:r>
-              <a:rPr lang="en-US" sz="1600" b="1" dirty="0">
+              <a:t>B2 — after the trip: suburban backhaul and overnight return-in-20min collapse compound. Mix does not shift after dark (χ² p=0.12). New hires inherit both penalties. Not 30% of fare (₹105).</a:t>
+            </a:r>
+            <a:endParaRPr lang="en-US" sz="1400" dirty="0"/>
+          </a:p>
+        </p:txBody>
+      </p:sp>
+      <p:sp>
+        <p:nvSpPr>
+          <p:cNvPr id="13" name="Shape 8"/>
+          <p:cNvSpPr/>
+          <p:nvPr/>
+        </p:nvSpPr>
+        <p:spPr>
+          <a:xfrm>
+            <a:off x="502920" y="4846320"/>
+            <a:ext cx="3611880" cy="1078992"/>
+          </a:xfrm>
+          <a:prstGeom prst="roundRect">
+            <a:avLst>
+              <a:gd name="adj" fmla="val 8475"/>
+            </a:avLst>
+          </a:prstGeom>
+          <a:solidFill>
+            <a:srgbClr val="F6E4D4"/>
+          </a:solidFill>
+          <a:ln w="15875">
+            <a:solidFill>
+              <a:srgbClr val="E8D5C0"/>
+            </a:solidFill>
+            <a:prstDash val="solid"/>
+          </a:ln>
+        </p:spPr>
+      </p:sp>
+      <p:sp>
+        <p:nvSpPr>
+          <p:cNvPr id="14" name="Text 9"/>
+          <p:cNvSpPr txBox="1"/>
+          <p:nvPr/>
+        </p:nvSpPr>
+        <p:spPr>
+          <a:xfrm>
+            <a:off x="667512" y="4882896"/>
+            <a:ext cx="3291840" cy="384048"/>
+          </a:xfrm>
+          <a:prstGeom prst="rect">
+            <a:avLst/>
+          </a:prstGeom>
+          <a:noFill/>
+          <a:ln/>
+        </p:spPr>
+        <p:txBody>
+          <a:bodyPr wrap="square" lIns="0" tIns="0" rIns="0" bIns="0" rtlCol="0" anchor="ctr"/>
+          <a:lstStyle/>
+          <a:p>
+            <a:pPr indent="0" marL="0">
+              <a:buNone/>
+            </a:pPr>
+            <a:r>
+              <a:rPr lang="en-US" sz="2400" b="1" dirty="0">
                 <a:solidFill>
                   <a:srgbClr val="1C1917"/>
                 </a:solidFill>
@@ -4315,325 +4634,143 @@
                 <a:ea typeface="Cambria" pitchFamily="34" charset="-122"/>
                 <a:cs typeface="Cambria" pitchFamily="34" charset="-120"/>
               </a:rPr>
-              <a:t>Guided capture UX — no deferral possible</a:t>
-            </a:r>
-            <a:endParaRPr lang="en-US" sz="1600" dirty="0"/>
-          </a:p>
-        </p:txBody>
-      </p:sp>
-      <p:sp>
-        <p:nvSpPr>
-          <p:cNvPr id="20" name="Text 17"/>
-          <p:cNvSpPr txBox="1"/>
-          <p:nvPr/>
-        </p:nvSpPr>
-        <p:spPr>
-          <a:xfrm>
-            <a:off x="6455664" y="2606040"/>
-            <a:ext cx="5029200" cy="475488"/>
-          </a:xfrm>
-          <a:prstGeom prst="rect">
-            <a:avLst/>
-          </a:prstGeom>
-          <a:noFill/>
-          <a:ln/>
-        </p:spPr>
-        <p:txBody>
-          <a:bodyPr wrap="square" lIns="0" tIns="0" rIns="0" bIns="0" rtlCol="0" anchor="ctr"/>
-          <a:lstStyle/>
-          <a:p>
-            <a:pPr indent="0" marL="0">
-              <a:buNone/>
-            </a:pPr>
-            <a:r>
-              <a:rPr lang="en-US" sz="1400" b="1" dirty="0">
-                <a:solidFill>
-                  <a:srgbClr val="C45C26"/>
-                </a:solidFill>
-                <a:latin typeface="Calibri" pitchFamily="34" charset="0"/>
-                <a:ea typeface="Calibri" pitchFamily="34" charset="-122"/>
-                <a:cs typeface="Calibri" pitchFamily="34" charset="-120"/>
-              </a:rPr>
-              <a:t>Who  </a:t>
-            </a:r>
-            <a:pPr indent="0" marL="0">
-              <a:buNone/>
-            </a:pPr>
-            <a:r>
-              <a:rPr lang="en-US" sz="1400" dirty="0">
-                <a:solidFill>
-                  <a:srgbClr val="1C1917"/>
-                </a:solidFill>
-                <a:latin typeface="Calibri" pitchFamily="34" charset="0"/>
-                <a:ea typeface="Calibri" pitchFamily="34" charset="-122"/>
-                <a:cs typeface="Calibri" pitchFamily="34" charset="-120"/>
-              </a:rPr>
-              <a:t>411 Insurance capture-only fails (~75/mo)</a:t>
-            </a:r>
-            <a:endParaRPr lang="en-US" sz="1400" dirty="0"/>
-          </a:p>
-        </p:txBody>
-      </p:sp>
-      <p:sp>
-        <p:nvSpPr>
-          <p:cNvPr id="21" name="Text 18"/>
-          <p:cNvSpPr txBox="1"/>
-          <p:nvPr/>
-        </p:nvSpPr>
-        <p:spPr>
-          <a:xfrm>
-            <a:off x="6455664" y="3099816"/>
-            <a:ext cx="5029200" cy="475488"/>
-          </a:xfrm>
-          <a:prstGeom prst="rect">
-            <a:avLst/>
-          </a:prstGeom>
-          <a:noFill/>
-          <a:ln/>
-        </p:spPr>
-        <p:txBody>
-          <a:bodyPr wrap="square" lIns="0" tIns="0" rIns="0" bIns="0" rtlCol="0" anchor="ctr"/>
-          <a:lstStyle/>
-          <a:p>
-            <a:pPr indent="0" marL="0">
-              <a:buNone/>
-            </a:pPr>
-            <a:r>
-              <a:rPr lang="en-US" sz="1400" b="1" dirty="0">
-                <a:solidFill>
-                  <a:srgbClr val="C45C26"/>
-                </a:solidFill>
-                <a:latin typeface="Calibri" pitchFamily="34" charset="0"/>
-                <a:ea typeface="Calibri" pitchFamily="34" charset="-122"/>
-                <a:cs typeface="Calibri" pitchFamily="34" charset="-120"/>
-              </a:rPr>
-              <a:t>Why not  </a:t>
-            </a:r>
-            <a:pPr indent="0" marL="0">
-              <a:buNone/>
-            </a:pPr>
-            <a:r>
-              <a:rPr lang="en-US" sz="1400" dirty="0">
-                <a:solidFill>
-                  <a:srgbClr val="1C1917"/>
-                </a:solidFill>
-                <a:latin typeface="Calibri" pitchFamily="34" charset="0"/>
-                <a:ea typeface="Calibri" pitchFamily="34" charset="-122"/>
-                <a:cs typeface="Calibri" pitchFamily="34" charset="-120"/>
-              </a:rPr>
-              <a:t>Liability document — must clear before first ride</a:t>
-            </a:r>
-            <a:endParaRPr lang="en-US" sz="1400" dirty="0"/>
-          </a:p>
-        </p:txBody>
-      </p:sp>
-      <p:sp>
-        <p:nvSpPr>
-          <p:cNvPr id="22" name="Text 19"/>
-          <p:cNvSpPr txBox="1"/>
-          <p:nvPr/>
-        </p:nvSpPr>
-        <p:spPr>
-          <a:xfrm>
-            <a:off x="6455664" y="3593592"/>
-            <a:ext cx="5029200" cy="475488"/>
-          </a:xfrm>
-          <a:prstGeom prst="rect">
-            <a:avLst/>
-          </a:prstGeom>
-          <a:noFill/>
-          <a:ln/>
-        </p:spPr>
-        <p:txBody>
-          <a:bodyPr wrap="square" lIns="0" tIns="0" rIns="0" bIns="0" rtlCol="0" anchor="ctr"/>
-          <a:lstStyle/>
-          <a:p>
-            <a:pPr indent="0" marL="0">
-              <a:buNone/>
-            </a:pPr>
-            <a:r>
-              <a:rPr lang="en-US" sz="1400" b="1" dirty="0">
-                <a:solidFill>
-                  <a:srgbClr val="C45C26"/>
-                </a:solidFill>
-                <a:latin typeface="Calibri" pitchFamily="34" charset="0"/>
-                <a:ea typeface="Calibri" pitchFamily="34" charset="-122"/>
-                <a:cs typeface="Calibri" pitchFamily="34" charset="-120"/>
-              </a:rPr>
-              <a:t>Retry  </a:t>
-            </a:r>
-            <a:pPr indent="0" marL="0">
-              <a:buNone/>
-            </a:pPr>
-            <a:r>
-              <a:rPr lang="en-US" sz="1400" dirty="0">
-                <a:solidFill>
-                  <a:srgbClr val="1C1917"/>
-                </a:solidFill>
-                <a:latin typeface="Calibri" pitchFamily="34" charset="0"/>
-                <a:ea typeface="Calibri" pitchFamily="34" charset="-122"/>
-                <a:cs typeface="Calibri" pitchFamily="34" charset="-120"/>
-              </a:rPr>
-              <a:t>67.4% → 73.8% → 76.4% pass on own retry</a:t>
-            </a:r>
-            <a:endParaRPr lang="en-US" sz="1400" dirty="0"/>
-          </a:p>
-        </p:txBody>
-      </p:sp>
-      <p:sp>
-        <p:nvSpPr>
-          <p:cNvPr id="23" name="Text 20"/>
-          <p:cNvSpPr txBox="1"/>
-          <p:nvPr/>
-        </p:nvSpPr>
-        <p:spPr>
-          <a:xfrm>
-            <a:off x="6455664" y="4087368"/>
-            <a:ext cx="5029200" cy="475488"/>
-          </a:xfrm>
-          <a:prstGeom prst="rect">
-            <a:avLst/>
-          </a:prstGeom>
-          <a:noFill/>
-          <a:ln/>
-        </p:spPr>
-        <p:txBody>
-          <a:bodyPr wrap="square" lIns="0" tIns="0" rIns="0" bIns="0" rtlCol="0" anchor="ctr"/>
-          <a:lstStyle/>
-          <a:p>
-            <a:pPr indent="0" marL="0">
-              <a:buNone/>
-            </a:pPr>
-            <a:r>
-              <a:rPr lang="en-US" sz="1400" b="1" dirty="0">
-                <a:solidFill>
-                  <a:srgbClr val="C45C26"/>
-                </a:solidFill>
-                <a:latin typeface="Calibri" pitchFamily="34" charset="0"/>
-                <a:ea typeface="Calibri" pitchFamily="34" charset="-122"/>
-                <a:cs typeface="Calibri" pitchFamily="34" charset="-120"/>
-              </a:rPr>
-              <a:t>Central  </a:t>
-            </a:r>
-            <a:pPr indent="0" marL="0">
-              <a:buNone/>
-            </a:pPr>
-            <a:r>
-              <a:rPr lang="en-US" sz="1400" dirty="0">
-                <a:solidFill>
-                  <a:srgbClr val="1C1917"/>
-                </a:solidFill>
-                <a:latin typeface="Calibri" pitchFamily="34" charset="0"/>
-                <a:ea typeface="Calibri" pitchFamily="34" charset="-122"/>
-                <a:cs typeface="Calibri" pitchFamily="34" charset="-120"/>
-              </a:rPr>
-              <a:t>~46–52/month additional approved</a:t>
-            </a:r>
-            <a:endParaRPr lang="en-US" sz="1400" dirty="0"/>
-          </a:p>
-        </p:txBody>
-      </p:sp>
-      <p:sp>
-        <p:nvSpPr>
-          <p:cNvPr id="24" name="Text 21"/>
-          <p:cNvSpPr txBox="1"/>
-          <p:nvPr/>
-        </p:nvSpPr>
-        <p:spPr>
-          <a:xfrm>
-            <a:off x="6455664" y="4581144"/>
-            <a:ext cx="5029200" cy="475488"/>
-          </a:xfrm>
-          <a:prstGeom prst="rect">
-            <a:avLst/>
-          </a:prstGeom>
-          <a:noFill/>
-          <a:ln/>
-        </p:spPr>
-        <p:txBody>
-          <a:bodyPr wrap="square" lIns="0" tIns="0" rIns="0" bIns="0" rtlCol="0" anchor="ctr"/>
-          <a:lstStyle/>
-          <a:p>
-            <a:pPr indent="0" marL="0">
-              <a:buNone/>
-            </a:pPr>
-            <a:r>
-              <a:rPr lang="en-US" sz="1400" b="1" dirty="0">
-                <a:solidFill>
-                  <a:srgbClr val="C45C26"/>
-                </a:solidFill>
-                <a:latin typeface="Calibri" pitchFamily="34" charset="0"/>
-                <a:ea typeface="Calibri" pitchFamily="34" charset="-122"/>
-                <a:cs typeface="Calibri" pitchFamily="34" charset="-120"/>
-              </a:rPr>
-              <a:t>Needs  </a:t>
-            </a:r>
-            <a:pPr indent="0" marL="0">
-              <a:buNone/>
-            </a:pPr>
-            <a:r>
-              <a:rPr lang="en-US" sz="1400" dirty="0">
-                <a:solidFill>
-                  <a:srgbClr val="1C1917"/>
-                </a:solidFill>
-                <a:latin typeface="Calibri" pitchFamily="34" charset="0"/>
-                <a:ea typeface="Calibri" pitchFamily="34" charset="-122"/>
-                <a:cs typeface="Calibri" pitchFamily="34" charset="-120"/>
-              </a:rPr>
-              <a:t>Engineering UX only — no sign-off required</a:t>
-            </a:r>
-            <a:endParaRPr lang="en-US" sz="1400" dirty="0"/>
-          </a:p>
-        </p:txBody>
-      </p:sp>
-      <p:sp>
-        <p:nvSpPr>
-          <p:cNvPr id="25" name="Shape 22"/>
+              <a:t>40%</a:t>
+            </a:r>
+            <a:endParaRPr lang="en-US" sz="2400" dirty="0"/>
+          </a:p>
+        </p:txBody>
+      </p:sp>
+      <p:sp>
+        <p:nvSpPr>
+          <p:cNvPr id="15" name="Text 10"/>
+          <p:cNvSpPr txBox="1"/>
+          <p:nvPr/>
+        </p:nvSpPr>
+        <p:spPr>
+          <a:xfrm>
+            <a:off x="667512" y="5266944"/>
+            <a:ext cx="3291840" cy="585216"/>
+          </a:xfrm>
+          <a:prstGeom prst="rect">
+            <a:avLst/>
+          </a:prstGeom>
+          <a:noFill/>
+          <a:ln/>
+        </p:spPr>
+        <p:txBody>
+          <a:bodyPr wrap="square" lIns="0" tIns="0" rIns="0" bIns="0" rtlCol="0" anchor="ctr"/>
+          <a:lstStyle/>
+          <a:p>
+            <a:pPr indent="0" marL="0">
+              <a:buNone/>
+            </a:pPr>
+            <a:r>
+              <a:rPr lang="en-US" sz="1300" dirty="0">
+                <a:solidFill>
+                  <a:srgbClr val="57534E"/>
+                </a:solidFill>
+                <a:latin typeface="Calibri" pitchFamily="34" charset="0"/>
+                <a:ea typeface="Calibri" pitchFamily="34" charset="-122"/>
+                <a:cs typeface="Calibri" pitchFamily="34" charset="-120"/>
+              </a:rPr>
+              <a:t>Unfulfilled at terminals vs ~3% elsewhere</a:t>
+            </a:r>
+            <a:endParaRPr lang="en-US" sz="1300" dirty="0"/>
+          </a:p>
+        </p:txBody>
+      </p:sp>
+      <p:sp>
+        <p:nvSpPr>
+          <p:cNvPr id="16" name="Shape 11"/>
           <p:cNvSpPr/>
           <p:nvPr/>
         </p:nvSpPr>
         <p:spPr>
           <a:xfrm>
-            <a:off x="6364224" y="5440680"/>
-            <a:ext cx="5212080" cy="438912"/>
+            <a:off x="4251960" y="4846320"/>
+            <a:ext cx="3611880" cy="1078992"/>
           </a:xfrm>
           <a:prstGeom prst="roundRect">
             <a:avLst>
-              <a:gd name="adj" fmla="val 12500"/>
+              <a:gd name="adj" fmla="val 8475"/>
             </a:avLst>
           </a:prstGeom>
           <a:solidFill>
-            <a:srgbClr val="F8F1E3"/>
+            <a:srgbClr val="F3E6C0"/>
           </a:solidFill>
-          <a:ln/>
-        </p:spPr>
-      </p:sp>
-      <p:sp>
-        <p:nvSpPr>
-          <p:cNvPr id="26" name="Text 23"/>
-          <p:cNvSpPr txBox="1"/>
-          <p:nvPr/>
-        </p:nvSpPr>
-        <p:spPr>
-          <a:xfrm>
-            <a:off x="6455664" y="5440680"/>
-            <a:ext cx="5029200" cy="438912"/>
-          </a:xfrm>
-          <a:prstGeom prst="rect">
-            <a:avLst/>
-          </a:prstGeom>
-          <a:noFill/>
-          <a:ln/>
-        </p:spPr>
-        <p:txBody>
-          <a:bodyPr wrap="square" lIns="0" tIns="0" rIns="0" bIns="0" rtlCol="0" anchor="ctr"/>
-          <a:lstStyle/>
-          <a:p>
-            <a:pPr indent="0" marL="0">
-              <a:buNone/>
-            </a:pPr>
-            <a:r>
-              <a:rPr lang="en-US" sz="1200" i="1" dirty="0">
+          <a:ln w="15875">
+            <a:solidFill>
+              <a:srgbClr val="E8D5C0"/>
+            </a:solidFill>
+            <a:prstDash val="solid"/>
+          </a:ln>
+        </p:spPr>
+      </p:sp>
+      <p:sp>
+        <p:nvSpPr>
+          <p:cNvPr id="17" name="Text 12"/>
+          <p:cNvSpPr txBox="1"/>
+          <p:nvPr/>
+        </p:nvSpPr>
+        <p:spPr>
+          <a:xfrm>
+            <a:off x="4416552" y="4882896"/>
+            <a:ext cx="3291840" cy="384048"/>
+          </a:xfrm>
+          <a:prstGeom prst="rect">
+            <a:avLst/>
+          </a:prstGeom>
+          <a:noFill/>
+          <a:ln/>
+        </p:spPr>
+        <p:txBody>
+          <a:bodyPr wrap="square" lIns="0" tIns="0" rIns="0" bIns="0" rtlCol="0" anchor="ctr"/>
+          <a:lstStyle/>
+          <a:p>
+            <a:pPr indent="0" marL="0">
+              <a:buNone/>
+            </a:pPr>
+            <a:r>
+              <a:rPr lang="en-US" sz="2400" b="1" dirty="0">
+                <a:solidFill>
+                  <a:srgbClr val="1C1917"/>
+                </a:solidFill>
+                <a:latin typeface="Cambria" pitchFamily="34" charset="0"/>
+                <a:ea typeface="Cambria" pitchFamily="34" charset="-122"/>
+                <a:cs typeface="Cambria" pitchFamily="34" charset="-120"/>
+              </a:rPr>
+              <a:t>84%</a:t>
+            </a:r>
+            <a:endParaRPr lang="en-US" sz="2400" dirty="0"/>
+          </a:p>
+        </p:txBody>
+      </p:sp>
+      <p:sp>
+        <p:nvSpPr>
+          <p:cNvPr id="18" name="Text 13"/>
+          <p:cNvSpPr txBox="1"/>
+          <p:nvPr/>
+        </p:nvSpPr>
+        <p:spPr>
+          <a:xfrm>
+            <a:off x="4416552" y="5266944"/>
+            <a:ext cx="3291840" cy="585216"/>
+          </a:xfrm>
+          <a:prstGeom prst="rect">
+            <a:avLst/>
+          </a:prstGeom>
+          <a:noFill/>
+          <a:ln/>
+        </p:spPr>
+        <p:txBody>
+          <a:bodyPr wrap="square" lIns="0" tIns="0" rIns="0" bIns="0" rtlCol="0" anchor="ctr"/>
+          <a:lstStyle/>
+          <a:p>
+            <a:pPr indent="0" marL="0">
+              <a:buNone/>
+            </a:pPr>
+            <a:r>
+              <a:rPr lang="en-US" sz="1300" dirty="0">
                 <a:solidFill>
                   <a:srgbClr val="57534E"/>
                 </a:solidFill>
@@ -4641,35 +4778,140 @@
                 <a:ea typeface="Calibri" pitchFamily="34" charset="-122"/>
                 <a:cs typeface="Calibri" pitchFamily="34" charset="-120"/>
               </a:rPr>
-              <a:t>Ship C1b this week. Start Legal on C1a in parallel.</a:t>
-            </a:r>
-            <a:endParaRPr lang="en-US" sz="1200" dirty="0"/>
-          </a:p>
-        </p:txBody>
-      </p:sp>
-      <p:sp>
-        <p:nvSpPr>
-          <p:cNvPr id="27" name="Shape 24"/>
+              <a:t>Of that gap is 21:00–03:59 — ~13 captains vs ~37 by day</a:t>
+            </a:r>
+            <a:endParaRPr lang="en-US" sz="1300" dirty="0"/>
+          </a:p>
+        </p:txBody>
+      </p:sp>
+      <p:sp>
+        <p:nvSpPr>
+          <p:cNvPr id="19" name="Shape 14"/>
           <p:cNvSpPr/>
           <p:nvPr/>
         </p:nvSpPr>
         <p:spPr>
           <a:xfrm>
-            <a:off x="0" y="6419088"/>
-            <a:ext cx="12191695" cy="438912"/>
-          </a:xfrm>
-          <a:prstGeom prst="rect">
-            <a:avLst/>
+            <a:off x="8001000" y="4846320"/>
+            <a:ext cx="3611880" cy="1078992"/>
+          </a:xfrm>
+          <a:prstGeom prst="roundRect">
+            <a:avLst>
+              <a:gd name="adj" fmla="val 8475"/>
+            </a:avLst>
           </a:prstGeom>
           <a:solidFill>
             <a:srgbClr val="F6E4D4"/>
           </a:solidFill>
-          <a:ln/>
-        </p:spPr>
-      </p:sp>
-      <p:sp>
-        <p:nvSpPr>
-          <p:cNvPr id="28" name="Text 25"/>
+          <a:ln w="15875">
+            <a:solidFill>
+              <a:srgbClr val="E8D5C0"/>
+            </a:solidFill>
+            <a:prstDash val="solid"/>
+          </a:ln>
+        </p:spPr>
+      </p:sp>
+      <p:sp>
+        <p:nvSpPr>
+          <p:cNvPr id="20" name="Text 15"/>
+          <p:cNvSpPr txBox="1"/>
+          <p:nvPr/>
+        </p:nvSpPr>
+        <p:spPr>
+          <a:xfrm>
+            <a:off x="8165592" y="4882896"/>
+            <a:ext cx="3291840" cy="384048"/>
+          </a:xfrm>
+          <a:prstGeom prst="rect">
+            <a:avLst/>
+          </a:prstGeom>
+          <a:noFill/>
+          <a:ln/>
+        </p:spPr>
+        <p:txBody>
+          <a:bodyPr wrap="square" lIns="0" tIns="0" rIns="0" bIns="0" rtlCol="0" anchor="ctr"/>
+          <a:lstStyle/>
+          <a:p>
+            <a:pPr indent="0" marL="0">
+              <a:buNone/>
+            </a:pPr>
+            <a:r>
+              <a:rPr lang="en-US" sz="2400" b="1" dirty="0">
+                <a:solidFill>
+                  <a:srgbClr val="1C1917"/>
+                </a:solidFill>
+                <a:latin typeface="Cambria" pitchFamily="34" charset="0"/>
+                <a:ea typeface="Cambria" pitchFamily="34" charset="-122"/>
+                <a:cs typeface="Cambria" pitchFamily="34" charset="-120"/>
+              </a:rPr>
+              <a:t>₹35.4</a:t>
+            </a:r>
+            <a:endParaRPr lang="en-US" sz="2400" dirty="0"/>
+          </a:p>
+        </p:txBody>
+      </p:sp>
+      <p:sp>
+        <p:nvSpPr>
+          <p:cNvPr id="21" name="Text 16"/>
+          <p:cNvSpPr txBox="1"/>
+          <p:nvPr/>
+        </p:nvSpPr>
+        <p:spPr>
+          <a:xfrm>
+            <a:off x="8165592" y="5266944"/>
+            <a:ext cx="3291840" cy="585216"/>
+          </a:xfrm>
+          <a:prstGeom prst="rect">
+            <a:avLst/>
+          </a:prstGeom>
+          <a:noFill/>
+          <a:ln/>
+        </p:spPr>
+        <p:txBody>
+          <a:bodyPr wrap="square" lIns="0" tIns="0" rIns="0" bIns="0" rtlCol="0" anchor="ctr"/>
+          <a:lstStyle/>
+          <a:p>
+            <a:pPr indent="0" marL="0">
+              <a:buNone/>
+            </a:pPr>
+            <a:r>
+              <a:rPr lang="en-US" sz="1300" dirty="0">
+                <a:solidFill>
+                  <a:srgbClr val="57534E"/>
+                </a:solidFill>
+                <a:latin typeface="Calibri" pitchFamily="34" charset="0"/>
+                <a:ea typeface="Calibri" pitchFamily="34" charset="-122"/>
+                <a:cs typeface="Calibri" pitchFamily="34" charset="-120"/>
+              </a:rPr>
+              <a:t>Per eligible night-suburban leg. 4-week pilot; hire only if run-rate falls.</a:t>
+            </a:r>
+            <a:endParaRPr lang="en-US" sz="1300" dirty="0"/>
+          </a:p>
+        </p:txBody>
+      </p:sp>
+      <p:sp>
+        <p:nvSpPr>
+          <p:cNvPr id="22" name="Shape 17"/>
+          <p:cNvSpPr/>
+          <p:nvPr/>
+        </p:nvSpPr>
+        <p:spPr>
+          <a:xfrm>
+            <a:off x="0" y="6419088"/>
+            <a:ext cx="12191695" cy="438912"/>
+          </a:xfrm>
+          <a:prstGeom prst="rect">
+            <a:avLst/>
+          </a:prstGeom>
+          <a:solidFill>
+            <a:srgbClr val="F6E4D4"/>
+          </a:solidFill>
+          <a:ln/>
+        </p:spPr>
+      </p:sp>
+      <p:sp>
+        <p:nvSpPr>
+          <p:cNvPr id="23" name="Text 18"/>
           <p:cNvSpPr txBox="1"/>
           <p:nvPr/>
         </p:nvSpPr>
@@ -4708,7 +4950,7 @@
       </p:sp>
       <p:sp>
         <p:nvSpPr>
-          <p:cNvPr id="29" name="Text 26"/>
+          <p:cNvPr id="24" name="Text 19"/>
           <p:cNvSpPr txBox="1"/>
           <p:nvPr/>
         </p:nvSpPr>
@@ -4739,7 +4981,7 @@
                 <a:ea typeface="Calibri" pitchFamily="34" charset="-122"/>
                 <a:cs typeface="Calibri" pitchFamily="34" charset="-120"/>
               </a:rPr>
-              <a:t>Ramanathan K R  ·  Rapido Data Science Assessment     3 / 6</a:t>
+              <a:t>Ramanathan K R  ·  Rapido Data Science Assessment     4 / 6</a:t>
             </a:r>
             <a:endParaRPr lang="en-US" sz="1100" dirty="0"/>
           </a:p>
@@ -4810,7 +5052,7 @@
                 <a:ea typeface="Calibri" pitchFamily="34" charset="-122"/>
                 <a:cs typeface="Calibri" pitchFamily="34" charset="-120"/>
               </a:rPr>
-              <a:t>AIRPORT SUPPLY</a:t>
+              <a:t>WHAT DOES NOT WORK — AND HOW EASY IT IS TO BE FOOLED</a:t>
             </a:r>
             <a:endParaRPr lang="en-US" sz="1300" dirty="0"/>
           </a:p>
@@ -4849,23 +5091,23 @@
         <p:spPr>
           <a:xfrm>
             <a:off x="548640" y="621792"/>
-            <a:ext cx="10332720" cy="566928"/>
-          </a:xfrm>
-          <a:prstGeom prst="rect">
-            <a:avLst/>
-          </a:prstGeom>
-          <a:noFill/>
-          <a:ln/>
-        </p:spPr>
-        <p:txBody>
-          <a:bodyPr wrap="square" lIns="0" tIns="0" rIns="0" bIns="0" rtlCol="0" anchor="ctr"/>
-          <a:lstStyle/>
-          <a:p>
-            <a:pPr indent="0" marL="0">
-              <a:buNone/>
-            </a:pPr>
-            <a:r>
-              <a:rPr lang="en-US" sz="2200" b="1" dirty="0">
+            <a:ext cx="10332720" cy="475488"/>
+          </a:xfrm>
+          <a:prstGeom prst="rect">
+            <a:avLst/>
+          </a:prstGeom>
+          <a:noFill/>
+          <a:ln/>
+        </p:spPr>
+        <p:txBody>
+          <a:bodyPr wrap="square" lIns="0" tIns="0" rIns="0" bIns="0" rtlCol="0" anchor="ctr"/>
+          <a:lstStyle/>
+          <a:p>
+            <a:pPr indent="0" marL="0">
+              <a:buNone/>
+            </a:pPr>
+            <a:r>
+              <a:rPr lang="en-US" sz="2400" b="1" dirty="0">
                 <a:solidFill>
                   <a:srgbClr val="1C1917"/>
                 </a:solidFill>
@@ -4873,9 +5115,9 @@
                 <a:ea typeface="Cambria" pitchFamily="34" charset="-122"/>
                 <a:cs typeface="Cambria" pitchFamily="34" charset="-120"/>
               </a:rPr>
-              <a:t>Overnight airport is compounding economics, not a headcount problem</a:t>
-            </a:r>
-            <a:endParaRPr lang="en-US" sz="2200" dirty="0"/>
+              <a:t>A campaign with 0 pp lift, and a gap we must not bank</a:t>
+            </a:r>
+            <a:endParaRPr lang="en-US" sz="2400" dirty="0"/>
           </a:p>
         </p:txBody>
       </p:sp>
@@ -4887,12 +5129,12 @@
         </p:nvSpPr>
         <p:spPr>
           <a:xfrm>
-            <a:off x="502920" y="1298448"/>
-            <a:ext cx="5486400" cy="3246120"/>
+            <a:off x="502920" y="1207008"/>
+            <a:ext cx="5532120" cy="4315968"/>
           </a:xfrm>
           <a:prstGeom prst="roundRect">
             <a:avLst>
-              <a:gd name="adj" fmla="val 2817"/>
+              <a:gd name="adj" fmla="val 2119"/>
             </a:avLst>
           </a:prstGeom>
           <a:solidFill>
@@ -4914,8 +5156,47 @@
         </p:nvSpPr>
         <p:spPr>
           <a:xfrm>
-            <a:off x="685800" y="1371600"/>
-            <a:ext cx="5120640" cy="292608"/>
+            <a:off x="685800" y="1298448"/>
+            <a:ext cx="5166360" cy="329184"/>
+          </a:xfrm>
+          <a:prstGeom prst="rect">
+            <a:avLst/>
+          </a:prstGeom>
+          <a:noFill/>
+          <a:ln/>
+        </p:spPr>
+        <p:txBody>
+          <a:bodyPr wrap="square" lIns="0" tIns="0" rIns="0" bIns="0" rtlCol="0" anchor="ctr"/>
+          <a:lstStyle/>
+          <a:p>
+            <a:pPr indent="0" marL="0">
+              <a:buNone/>
+            </a:pPr>
+            <a:r>
+              <a:rPr lang="en-US" sz="1600" b="1" dirty="0">
+                <a:solidFill>
+                  <a:srgbClr val="1C1917"/>
+                </a:solidFill>
+                <a:latin typeface="Cambria" pitchFamily="34" charset="0"/>
+                <a:ea typeface="Cambria" pitchFamily="34" charset="-122"/>
+                <a:cs typeface="Cambria" pitchFamily="34" charset="-120"/>
+              </a:rPr>
+              <a:t>CAMP_WA_002 — WhatsApp campaign</a:t>
+            </a:r>
+            <a:endParaRPr lang="en-US" sz="1600" dirty="0"/>
+          </a:p>
+        </p:txBody>
+      </p:sp>
+      <p:sp>
+        <p:nvSpPr>
+          <p:cNvPr id="7" name="Text 4"/>
+          <p:cNvSpPr txBox="1"/>
+          <p:nvPr/>
+        </p:nvSpPr>
+        <p:spPr>
+          <a:xfrm>
+            <a:off x="685800" y="1645920"/>
+            <a:ext cx="5166360" cy="292608"/>
           </a:xfrm>
           <a:prstGeom prst="rect">
             <a:avLst/>
@@ -4933,56 +5214,126 @@
             <a:r>
               <a:rPr lang="en-US" sz="1400" b="1" dirty="0">
                 <a:solidFill>
+                  <a:srgbClr val="C45C26"/>
+                </a:solidFill>
+                <a:latin typeface="Calibri" pitchFamily="34" charset="0"/>
+                <a:ea typeface="Calibri" pitchFamily="34" charset="-122"/>
+                <a:cs typeface="Calibri" pitchFamily="34" charset="-120"/>
+              </a:rPr>
+              <a:t>The 29% vs 11% headline is targeting, not effect.</a:t>
+            </a:r>
+            <a:endParaRPr lang="en-US" sz="1400" dirty="0"/>
+          </a:p>
+        </p:txBody>
+      </p:sp>
+      <p:graphicFrame>
+        <p:nvGraphicFramePr>
+          <p:cNvPr id="8" name="Chart 0" descr=""/>
+          <p:cNvGraphicFramePr/>
+          <p:nvPr/>
+        </p:nvGraphicFramePr>
+        <p:xfrm>
+          <a:off x="594360" y="1938528"/>
+          <a:ext cx="5303520" cy="2331720"/>
+        </p:xfrm>
+        <a:graphic xmlns:a="http://schemas.openxmlformats.org/drawingml/2006/main">
+          <a:graphicData uri="http://schemas.openxmlformats.org/drawingml/2006/chart">
+            <c:chart xmlns:c="http://schemas.openxmlformats.org/drawingml/2006/chart" r:id="rId2"/>
+          </a:graphicData>
+        </a:graphic>
+      </p:graphicFrame>
+      <p:sp>
+        <p:nvSpPr>
+          <p:cNvPr id="9" name="Text 5"/>
+          <p:cNvSpPr txBox="1"/>
+          <p:nvPr/>
+        </p:nvSpPr>
+        <p:spPr>
+          <a:xfrm>
+            <a:off x="685800" y="4315968"/>
+            <a:ext cx="5166360" cy="640080"/>
+          </a:xfrm>
+          <a:prstGeom prst="rect">
+            <a:avLst/>
+          </a:prstGeom>
+          <a:noFill/>
+          <a:ln/>
+        </p:spPr>
+        <p:txBody>
+          <a:bodyPr wrap="square" lIns="0" tIns="0" rIns="0" bIns="0" rtlCol="0" anchor="ctr"/>
+          <a:lstStyle/>
+          <a:p>
+            <a:pPr indent="0" marL="0">
+              <a:buNone/>
+            </a:pPr>
+            <a:r>
+              <a:rPr lang="en-US" sz="1300" dirty="0">
+                <a:solidFill>
                   <a:srgbClr val="1C1917"/>
                 </a:solidFill>
                 <a:latin typeface="Calibri" pitchFamily="34" charset="0"/>
                 <a:ea typeface="Calibri" pitchFamily="34" charset="-122"/>
                 <a:cs typeface="Calibri" pitchFamily="34" charset="-120"/>
               </a:rPr>
-              <a:t>When the pain sits (unfulfilled volume)</a:t>
-            </a:r>
-            <a:endParaRPr lang="en-US" sz="1400" dirty="0"/>
-          </a:p>
-        </p:txBody>
-      </p:sp>
-      <p:pic>
-        <p:nvPicPr>
-          <p:cNvPr id="7" name="Image 1" descr="preencoded.png">    </p:cNvPr>
-          <p:cNvPicPr>
-            <a:picLocks noChangeAspect="1"/>
-          </p:cNvPicPr>
-          <p:nvPr/>
-        </p:nvPicPr>
-        <p:blipFill>
-          <a:blip r:embed="rId2"/>
-          <a:stretch>
-            <a:fillRect/>
-          </a:stretch>
-        </p:blipFill>
-        <p:spPr>
-          <a:xfrm>
-            <a:off x="640080" y="1664208"/>
-            <a:ext cx="5212080" cy="2788920"/>
-          </a:xfrm>
-          <a:prstGeom prst="rect">
-            <a:avLst/>
-          </a:prstGeom>
-        </p:spPr>
-      </p:pic>
-      <p:sp>
-        <p:nvSpPr>
-          <p:cNvPr id="8" name="Shape 4"/>
+              <a:t>Honest comparison: clicked vs not-clicked (delivered only) = −1.5 pp; 95% CI [−3.6, +0.6]. That is 0 pp lift. Do not fund 5×.</a:t>
+            </a:r>
+            <a:endParaRPr lang="en-US" sz="1300" dirty="0"/>
+          </a:p>
+        </p:txBody>
+      </p:sp>
+      <p:sp>
+        <p:nvSpPr>
+          <p:cNvPr id="10" name="Text 6"/>
+          <p:cNvSpPr txBox="1"/>
+          <p:nvPr/>
+        </p:nvSpPr>
+        <p:spPr>
+          <a:xfrm>
+            <a:off x="685800" y="4956048"/>
+            <a:ext cx="5166360" cy="384048"/>
+          </a:xfrm>
+          <a:prstGeom prst="rect">
+            <a:avLst/>
+          </a:prstGeom>
+          <a:noFill/>
+          <a:ln/>
+        </p:spPr>
+        <p:txBody>
+          <a:bodyPr wrap="square" lIns="0" tIns="0" rIns="0" bIns="0" rtlCol="0" anchor="ctr"/>
+          <a:lstStyle/>
+          <a:p>
+            <a:pPr indent="0" marL="0">
+              <a:buNone/>
+            </a:pPr>
+            <a:r>
+              <a:rPr lang="en-US" sz="1300" i="1" dirty="0">
+                <a:solidFill>
+                  <a:srgbClr val="57534E"/>
+                </a:solidFill>
+                <a:latin typeface="Calibri" pitchFamily="34" charset="0"/>
+                <a:ea typeface="Calibri" pitchFamily="34" charset="-122"/>
+                <a:cs typeface="Calibri" pitchFamily="34" charset="-120"/>
+              </a:rPr>
+              <a:t>~30% of recipients also got another campaign — confounding further inflated.</a:t>
+            </a:r>
+            <a:endParaRPr lang="en-US" sz="1300" dirty="0"/>
+          </a:p>
+        </p:txBody>
+      </p:sp>
+      <p:sp>
+        <p:nvSpPr>
+          <p:cNvPr id="11" name="Shape 7"/>
           <p:cNvSpPr/>
           <p:nvPr/>
         </p:nvSpPr>
         <p:spPr>
           <a:xfrm>
-            <a:off x="6172200" y="1298448"/>
-            <a:ext cx="5532120" cy="3246120"/>
+            <a:off x="6199632" y="1207008"/>
+            <a:ext cx="5532120" cy="4315968"/>
           </a:xfrm>
           <a:prstGeom prst="roundRect">
             <a:avLst>
-              <a:gd name="adj" fmla="val 2817"/>
+              <a:gd name="adj" fmla="val 2119"/>
             </a:avLst>
           </a:prstGeom>
           <a:solidFill>
@@ -4998,397 +5349,361 @@
       </p:sp>
       <p:sp>
         <p:nvSpPr>
-          <p:cNvPr id="9" name="Text 5"/>
-          <p:cNvSpPr txBox="1"/>
-          <p:nvPr/>
-        </p:nvSpPr>
-        <p:spPr>
-          <a:xfrm>
-            <a:off x="6355080" y="1371600"/>
-            <a:ext cx="5212080" cy="292608"/>
-          </a:xfrm>
-          <a:prstGeom prst="rect">
-            <a:avLst/>
-          </a:prstGeom>
-          <a:noFill/>
-          <a:ln/>
-        </p:spPr>
-        <p:txBody>
-          <a:bodyPr wrap="square" lIns="0" tIns="0" rIns="0" bIns="0" rtlCol="0" anchor="ctr"/>
-          <a:lstStyle/>
-          <a:p>
-            <a:pPr indent="0" marL="0">
-              <a:buNone/>
-            </a:pPr>
-            <a:r>
-              <a:rPr lang="en-US" sz="1400" b="1" dirty="0">
+          <p:cNvPr id="12" name="Text 8"/>
+          <p:cNvSpPr txBox="1"/>
+          <p:nvPr/>
+        </p:nvSpPr>
+        <p:spPr>
+          <a:xfrm>
+            <a:off x="6382512" y="1298448"/>
+            <a:ext cx="5166360" cy="365760"/>
+          </a:xfrm>
+          <a:prstGeom prst="rect">
+            <a:avLst/>
+          </a:prstGeom>
+          <a:noFill/>
+          <a:ln/>
+        </p:spPr>
+        <p:txBody>
+          <a:bodyPr wrap="square" lIns="0" tIns="0" rIns="0" bIns="0" rtlCol="0" anchor="ctr"/>
+          <a:lstStyle/>
+          <a:p>
+            <a:pPr indent="0" marL="0">
+              <a:buNone/>
+            </a:pPr>
+            <a:r>
+              <a:rPr lang="en-US" sz="1600" b="1" dirty="0">
                 <a:solidFill>
                   <a:srgbClr val="1C1917"/>
                 </a:solidFill>
-                <a:latin typeface="Calibri" pitchFamily="34" charset="0"/>
-                <a:ea typeface="Calibri" pitchFamily="34" charset="-122"/>
-                <a:cs typeface="Calibri" pitchFamily="34" charset="-120"/>
-              </a:rPr>
-              <a:t>ARA monthly payout (₹k/month) at ₹35.4/leg</a:t>
-            </a:r>
-            <a:endParaRPr lang="en-US" sz="1400" dirty="0"/>
-          </a:p>
-        </p:txBody>
-      </p:sp>
-      <p:graphicFrame>
-        <p:nvGraphicFramePr>
-          <p:cNvPr id="10" name="Chart 0" descr=""/>
-          <p:cNvGraphicFramePr/>
-          <p:nvPr/>
-        </p:nvGraphicFramePr>
-        <p:xfrm>
-          <a:off x="6263640" y="1664208"/>
-          <a:ext cx="5303520" cy="2788920"/>
-        </p:xfrm>
-        <a:graphic xmlns:a="http://schemas.openxmlformats.org/drawingml/2006/main">
-          <a:graphicData uri="http://schemas.openxmlformats.org/drawingml/2006/chart">
-            <c:chart xmlns:c="http://schemas.openxmlformats.org/drawingml/2006/chart" r:id="rId3"/>
-          </a:graphicData>
-        </a:graphic>
-      </p:graphicFrame>
-      <p:sp>
-        <p:nvSpPr>
-          <p:cNvPr id="11" name="Shape 6"/>
+                <a:latin typeface="Cambria" pitchFamily="34" charset="0"/>
+                <a:ea typeface="Cambria" pitchFamily="34" charset="-122"/>
+                <a:cs typeface="Cambria" pitchFamily="34" charset="-120"/>
+              </a:rPr>
+              <a:t>Field vs self-serve — do not double-count</a:t>
+            </a:r>
+            <a:endParaRPr lang="en-US" sz="1600" dirty="0"/>
+          </a:p>
+        </p:txBody>
+      </p:sp>
+      <p:sp>
+        <p:nvSpPr>
+          <p:cNvPr id="13" name="Shape 9"/>
           <p:cNvSpPr/>
           <p:nvPr/>
         </p:nvSpPr>
         <p:spPr>
           <a:xfrm>
-            <a:off x="502920" y="4663440"/>
-            <a:ext cx="3611880" cy="1280160"/>
-          </a:xfrm>
-          <a:prstGeom prst="roundRect">
-            <a:avLst>
-              <a:gd name="adj" fmla="val 7143"/>
-            </a:avLst>
+            <a:off x="6400800" y="1847088"/>
+            <a:ext cx="128016" cy="128016"/>
+          </a:xfrm>
+          <a:prstGeom prst="ellipse">
+            <a:avLst/>
+          </a:prstGeom>
+          <a:solidFill>
+            <a:srgbClr val="F0C9A0"/>
+          </a:solidFill>
+          <a:ln/>
+        </p:spPr>
+      </p:sp>
+      <p:sp>
+        <p:nvSpPr>
+          <p:cNvPr id="14" name="Text 10"/>
+          <p:cNvSpPr txBox="1"/>
+          <p:nvPr/>
+        </p:nvSpPr>
+        <p:spPr>
+          <a:xfrm>
+            <a:off x="6656832" y="1755648"/>
+            <a:ext cx="4892040" cy="658368"/>
+          </a:xfrm>
+          <a:prstGeom prst="rect">
+            <a:avLst/>
+          </a:prstGeom>
+          <a:noFill/>
+          <a:ln/>
+        </p:spPr>
+        <p:txBody>
+          <a:bodyPr wrap="square" lIns="0" tIns="0" rIns="0" bIns="0" rtlCol="0" anchor="ctr"/>
+          <a:lstStyle/>
+          <a:p>
+            <a:pPr indent="0" marL="0">
+              <a:buNone/>
+            </a:pPr>
+            <a:r>
+              <a:rPr lang="en-US" sz="1300" dirty="0">
+                <a:solidFill>
+                  <a:srgbClr val="1C1917"/>
+                </a:solidFill>
+                <a:latin typeface="Calibri" pitchFamily="34" charset="0"/>
+                <a:ea typeface="Calibri" pitchFamily="34" charset="-122"/>
+                <a:cs typeface="Calibri" pitchFamily="34" charset="-120"/>
+              </a:rPr>
+              <a:t>Mechanical ceiling if app/paid converted like field: 128–256 additional/month.</a:t>
+            </a:r>
+            <a:endParaRPr lang="en-US" sz="1300" dirty="0"/>
+          </a:p>
+        </p:txBody>
+      </p:sp>
+      <p:sp>
+        <p:nvSpPr>
+          <p:cNvPr id="15" name="Shape 11"/>
+          <p:cNvSpPr/>
+          <p:nvPr/>
+        </p:nvSpPr>
+        <p:spPr>
+          <a:xfrm>
+            <a:off x="6400800" y="2560320"/>
+            <a:ext cx="128016" cy="128016"/>
+          </a:xfrm>
+          <a:prstGeom prst="ellipse">
+            <a:avLst/>
+          </a:prstGeom>
+          <a:solidFill>
+            <a:srgbClr val="F0C9A0"/>
+          </a:solidFill>
+          <a:ln/>
+        </p:spPr>
+      </p:sp>
+      <p:sp>
+        <p:nvSpPr>
+          <p:cNvPr id="16" name="Text 12"/>
+          <p:cNvSpPr txBox="1"/>
+          <p:nvPr/>
+        </p:nvSpPr>
+        <p:spPr>
+          <a:xfrm>
+            <a:off x="6656832" y="2468880"/>
+            <a:ext cx="4892040" cy="658368"/>
+          </a:xfrm>
+          <a:prstGeom prst="rect">
+            <a:avLst/>
+          </a:prstGeom>
+          <a:noFill/>
+          <a:ln/>
+        </p:spPr>
+        <p:txBody>
+          <a:bodyPr wrap="square" lIns="0" tIns="0" rIns="0" bIns="0" rtlCol="0" anchor="ctr"/>
+          <a:lstStyle/>
+          <a:p>
+            <a:pPr indent="0" marL="0">
+              <a:buNone/>
+            </a:pPr>
+            <a:r>
+              <a:rPr lang="en-US" sz="1300" dirty="0">
+                <a:solidFill>
+                  <a:srgbClr val="1C1917"/>
+                </a:solidFill>
+                <a:latin typeface="Calibri" pitchFamily="34" charset="0"/>
+                <a:ea typeface="Calibri" pitchFamily="34" charset="-122"/>
+                <a:cs typeface="Calibri" pitchFamily="34" charset="-120"/>
+              </a:rPr>
+              <a:t>Field teams recruit in person — extract cannot separate who they recruit from how they onboard.</a:t>
+            </a:r>
+            <a:endParaRPr lang="en-US" sz="1300" dirty="0"/>
+          </a:p>
+        </p:txBody>
+      </p:sp>
+      <p:sp>
+        <p:nvSpPr>
+          <p:cNvPr id="17" name="Shape 13"/>
+          <p:cNvSpPr/>
+          <p:nvPr/>
+        </p:nvSpPr>
+        <p:spPr>
+          <a:xfrm>
+            <a:off x="6400800" y="3273552"/>
+            <a:ext cx="128016" cy="128016"/>
+          </a:xfrm>
+          <a:prstGeom prst="ellipse">
+            <a:avLst/>
+          </a:prstGeom>
+          <a:solidFill>
+            <a:srgbClr val="F0C9A0"/>
+          </a:solidFill>
+          <a:ln/>
+        </p:spPr>
+      </p:sp>
+      <p:sp>
+        <p:nvSpPr>
+          <p:cNvPr id="18" name="Text 14"/>
+          <p:cNvSpPr txBox="1"/>
+          <p:nvPr/>
+        </p:nvSpPr>
+        <p:spPr>
+          <a:xfrm>
+            <a:off x="6656832" y="3182112"/>
+            <a:ext cx="4892040" cy="658368"/>
+          </a:xfrm>
+          <a:prstGeom prst="rect">
+            <a:avLst/>
+          </a:prstGeom>
+          <a:noFill/>
+          <a:ln/>
+        </p:spPr>
+        <p:txBody>
+          <a:bodyPr wrap="square" lIns="0" tIns="0" rIns="0" bIns="0" rtlCol="0" anchor="ctr"/>
+          <a:lstStyle/>
+          <a:p>
+            <a:pPr indent="0" marL="0">
+              <a:buNone/>
+            </a:pPr>
+            <a:r>
+              <a:rPr lang="en-US" sz="1300" dirty="0">
+                <a:solidFill>
+                  <a:srgbClr val="1C1917"/>
+                </a:solidFill>
+                <a:latin typeface="Calibri" pitchFamily="34" charset="0"/>
+                <a:ea typeface="Calibri" pitchFamily="34" charset="-122"/>
+                <a:cs typeface="Calibri" pitchFamily="34" charset="-120"/>
+              </a:rPr>
+              <a:t>726 of the C1a RC group are the same self-serve captains this gap already counts. Do not add 180 + 128–256.</a:t>
+            </a:r>
+            <a:endParaRPr lang="en-US" sz="1300" dirty="0"/>
+          </a:p>
+        </p:txBody>
+      </p:sp>
+      <p:sp>
+        <p:nvSpPr>
+          <p:cNvPr id="19" name="Shape 15"/>
+          <p:cNvSpPr/>
+          <p:nvPr/>
+        </p:nvSpPr>
+        <p:spPr>
+          <a:xfrm>
+            <a:off x="6400800" y="3986784"/>
+            <a:ext cx="128016" cy="128016"/>
+          </a:xfrm>
+          <a:prstGeom prst="ellipse">
+            <a:avLst/>
+          </a:prstGeom>
+          <a:solidFill>
+            <a:srgbClr val="F0C9A0"/>
+          </a:solidFill>
+          <a:ln/>
+        </p:spPr>
+      </p:sp>
+      <p:sp>
+        <p:nvSpPr>
+          <p:cNvPr id="20" name="Text 16"/>
+          <p:cNvSpPr txBox="1"/>
+          <p:nvPr/>
+        </p:nvSpPr>
+        <p:spPr>
+          <a:xfrm>
+            <a:off x="6656832" y="3895344"/>
+            <a:ext cx="4892040" cy="658368"/>
+          </a:xfrm>
+          <a:prstGeom prst="rect">
+            <a:avLst/>
+          </a:prstGeom>
+          <a:noFill/>
+          <a:ln/>
+        </p:spPr>
+        <p:txBody>
+          <a:bodyPr wrap="square" lIns="0" tIns="0" rIns="0" bIns="0" rtlCol="0" anchor="ctr"/>
+          <a:lstStyle/>
+          <a:p>
+            <a:pPr indent="0" marL="0">
+              <a:buNone/>
+            </a:pPr>
+            <a:r>
+              <a:rPr lang="en-US" sz="1300" dirty="0">
+                <a:solidFill>
+                  <a:srgbClr val="1C1917"/>
+                </a:solidFill>
+                <a:latin typeface="Calibri" pitchFamily="34" charset="0"/>
+                <a:ea typeface="Calibri" pitchFamily="34" charset="-122"/>
+                <a:cs typeface="Calibri" pitchFamily="34" charset="-120"/>
+              </a:rPr>
+              <a:t>Fos abandonment after Fitness: 26% vs paid 43% — in-person assist, not WhatsApp.</a:t>
+            </a:r>
+            <a:endParaRPr lang="en-US" sz="1300" dirty="0"/>
+          </a:p>
+        </p:txBody>
+      </p:sp>
+      <p:sp>
+        <p:nvSpPr>
+          <p:cNvPr id="21" name="Shape 17"/>
+          <p:cNvSpPr/>
+          <p:nvPr/>
+        </p:nvSpPr>
+        <p:spPr>
+          <a:xfrm>
+            <a:off x="6400800" y="4700016"/>
+            <a:ext cx="128016" cy="128016"/>
+          </a:xfrm>
+          <a:prstGeom prst="ellipse">
+            <a:avLst/>
+          </a:prstGeom>
+          <a:solidFill>
+            <a:srgbClr val="F0C9A0"/>
+          </a:solidFill>
+          <a:ln/>
+        </p:spPr>
+      </p:sp>
+      <p:sp>
+        <p:nvSpPr>
+          <p:cNvPr id="22" name="Text 18"/>
+          <p:cNvSpPr txBox="1"/>
+          <p:nvPr/>
+        </p:nvSpPr>
+        <p:spPr>
+          <a:xfrm>
+            <a:off x="6656832" y="4608576"/>
+            <a:ext cx="4892040" cy="658368"/>
+          </a:xfrm>
+          <a:prstGeom prst="rect">
+            <a:avLst/>
+          </a:prstGeom>
+          <a:noFill/>
+          <a:ln/>
+        </p:spPr>
+        <p:txBody>
+          <a:bodyPr wrap="square" lIns="0" tIns="0" rIns="0" bIns="0" rtlCol="0" anchor="ctr"/>
+          <a:lstStyle/>
+          <a:p>
+            <a:pPr indent="0" marL="0">
+              <a:buNone/>
+            </a:pPr>
+            <a:r>
+              <a:rPr lang="en-US" sz="1300" dirty="0">
+                <a:solidFill>
+                  <a:srgbClr val="1C1917"/>
+                </a:solidFill>
+                <a:latin typeface="Calibri" pitchFamily="34" charset="0"/>
+                <a:ea typeface="Calibri" pitchFamily="34" charset="-122"/>
+                <a:cs typeface="Calibri" pitchFamily="34" charset="-120"/>
+              </a:rPr>
+              <a:t>Correct move: randomised assisted-onboarding pilot on app/paid (~900 per arm to detect a 5 pp lift).</a:t>
+            </a:r>
+            <a:endParaRPr lang="en-US" sz="1300" dirty="0"/>
+          </a:p>
+        </p:txBody>
+      </p:sp>
+      <p:sp>
+        <p:nvSpPr>
+          <p:cNvPr id="23" name="Shape 19"/>
+          <p:cNvSpPr/>
+          <p:nvPr/>
+        </p:nvSpPr>
+        <p:spPr>
+          <a:xfrm>
+            <a:off x="0" y="6419088"/>
+            <a:ext cx="12191695" cy="438912"/>
+          </a:xfrm>
+          <a:prstGeom prst="rect">
+            <a:avLst/>
           </a:prstGeom>
           <a:solidFill>
             <a:srgbClr val="F6E4D4"/>
           </a:solidFill>
-          <a:ln w="15875">
-            <a:solidFill>
-              <a:srgbClr val="E8D5C0"/>
-            </a:solidFill>
-            <a:prstDash val="solid"/>
-          </a:ln>
-        </p:spPr>
-      </p:sp>
-      <p:sp>
-        <p:nvSpPr>
-          <p:cNvPr id="12" name="Text 7"/>
-          <p:cNvSpPr txBox="1"/>
-          <p:nvPr/>
-        </p:nvSpPr>
-        <p:spPr>
-          <a:xfrm>
-            <a:off x="667512" y="4736592"/>
-            <a:ext cx="3291840" cy="457200"/>
-          </a:xfrm>
-          <a:prstGeom prst="rect">
-            <a:avLst/>
-          </a:prstGeom>
-          <a:noFill/>
-          <a:ln/>
-        </p:spPr>
-        <p:txBody>
-          <a:bodyPr wrap="square" lIns="0" tIns="0" rIns="0" bIns="0" rtlCol="0" anchor="ctr"/>
-          <a:lstStyle/>
-          <a:p>
-            <a:pPr indent="0" marL="0">
-              <a:buNone/>
-            </a:pPr>
-            <a:r>
-              <a:rPr lang="en-US" sz="2600" b="1" dirty="0">
-                <a:solidFill>
-                  <a:srgbClr val="1C1917"/>
-                </a:solidFill>
-                <a:latin typeface="Cambria" pitchFamily="34" charset="0"/>
-                <a:ea typeface="Cambria" pitchFamily="34" charset="-122"/>
-                <a:cs typeface="Cambria" pitchFamily="34" charset="-120"/>
-              </a:rPr>
-              <a:t>40%</a:t>
-            </a:r>
-            <a:endParaRPr lang="en-US" sz="2600" dirty="0"/>
-          </a:p>
-        </p:txBody>
-      </p:sp>
-      <p:sp>
-        <p:nvSpPr>
-          <p:cNvPr id="13" name="Text 8"/>
-          <p:cNvSpPr txBox="1"/>
-          <p:nvPr/>
-        </p:nvSpPr>
-        <p:spPr>
-          <a:xfrm>
-            <a:off x="667512" y="5193792"/>
-            <a:ext cx="3291840" cy="658368"/>
-          </a:xfrm>
-          <a:prstGeom prst="rect">
-            <a:avLst/>
-          </a:prstGeom>
-          <a:noFill/>
-          <a:ln/>
-        </p:spPr>
-        <p:txBody>
-          <a:bodyPr wrap="square" lIns="0" tIns="0" rIns="0" bIns="0" rtlCol="0" anchor="ctr"/>
-          <a:lstStyle/>
-          <a:p>
-            <a:pPr indent="0" marL="0">
-              <a:buNone/>
-            </a:pPr>
-            <a:r>
-              <a:rPr lang="en-US" sz="1300" dirty="0">
-                <a:solidFill>
-                  <a:srgbClr val="57534E"/>
-                </a:solidFill>
-                <a:latin typeface="Calibri" pitchFamily="34" charset="0"/>
-                <a:ea typeface="Calibri" pitchFamily="34" charset="-122"/>
-                <a:cs typeface="Calibri" pitchFamily="34" charset="-120"/>
-              </a:rPr>
-              <a:t>Airport demand unfulfilled vs ~3% elsewhere</a:t>
-            </a:r>
-            <a:endParaRPr lang="en-US" sz="1300" dirty="0"/>
-          </a:p>
-        </p:txBody>
-      </p:sp>
-      <p:sp>
-        <p:nvSpPr>
-          <p:cNvPr id="14" name="Shape 9"/>
-          <p:cNvSpPr/>
-          <p:nvPr/>
-        </p:nvSpPr>
-        <p:spPr>
-          <a:xfrm>
-            <a:off x="4251960" y="4663440"/>
-            <a:ext cx="3611880" cy="1280160"/>
-          </a:xfrm>
-          <a:prstGeom prst="roundRect">
-            <a:avLst>
-              <a:gd name="adj" fmla="val 7143"/>
-            </a:avLst>
-          </a:prstGeom>
-          <a:solidFill>
-            <a:srgbClr val="F3E6C0"/>
-          </a:solidFill>
-          <a:ln w="15875">
-            <a:solidFill>
-              <a:srgbClr val="E8D5C0"/>
-            </a:solidFill>
-            <a:prstDash val="solid"/>
-          </a:ln>
-        </p:spPr>
-      </p:sp>
-      <p:sp>
-        <p:nvSpPr>
-          <p:cNvPr id="15" name="Text 10"/>
-          <p:cNvSpPr txBox="1"/>
-          <p:nvPr/>
-        </p:nvSpPr>
-        <p:spPr>
-          <a:xfrm>
-            <a:off x="4416552" y="4736592"/>
-            <a:ext cx="3291840" cy="457200"/>
-          </a:xfrm>
-          <a:prstGeom prst="rect">
-            <a:avLst/>
-          </a:prstGeom>
-          <a:noFill/>
-          <a:ln/>
-        </p:spPr>
-        <p:txBody>
-          <a:bodyPr wrap="square" lIns="0" tIns="0" rIns="0" bIns="0" rtlCol="0" anchor="ctr"/>
-          <a:lstStyle/>
-          <a:p>
-            <a:pPr indent="0" marL="0">
-              <a:buNone/>
-            </a:pPr>
-            <a:r>
-              <a:rPr lang="en-US" sz="2600" b="1" dirty="0">
-                <a:solidFill>
-                  <a:srgbClr val="1C1917"/>
-                </a:solidFill>
-                <a:latin typeface="Cambria" pitchFamily="34" charset="0"/>
-                <a:ea typeface="Cambria" pitchFamily="34" charset="-122"/>
-                <a:cs typeface="Cambria" pitchFamily="34" charset="-120"/>
-              </a:rPr>
-              <a:t>84%</a:t>
-            </a:r>
-            <a:endParaRPr lang="en-US" sz="2600" dirty="0"/>
-          </a:p>
-        </p:txBody>
-      </p:sp>
-      <p:sp>
-        <p:nvSpPr>
-          <p:cNvPr id="16" name="Text 11"/>
-          <p:cNvSpPr txBox="1"/>
-          <p:nvPr/>
-        </p:nvSpPr>
-        <p:spPr>
-          <a:xfrm>
-            <a:off x="4416552" y="5193792"/>
-            <a:ext cx="3291840" cy="658368"/>
-          </a:xfrm>
-          <a:prstGeom prst="rect">
-            <a:avLst/>
-          </a:prstGeom>
-          <a:noFill/>
-          <a:ln/>
-        </p:spPr>
-        <p:txBody>
-          <a:bodyPr wrap="square" lIns="0" tIns="0" rIns="0" bIns="0" rtlCol="0" anchor="ctr"/>
-          <a:lstStyle/>
-          <a:p>
-            <a:pPr indent="0" marL="0">
-              <a:buNone/>
-            </a:pPr>
-            <a:r>
-              <a:rPr lang="en-US" sz="1300" dirty="0">
-                <a:solidFill>
-                  <a:srgbClr val="57534E"/>
-                </a:solidFill>
-                <a:latin typeface="Calibri" pitchFamily="34" charset="0"/>
-                <a:ea typeface="Calibri" pitchFamily="34" charset="-122"/>
-                <a:cs typeface="Calibri" pitchFamily="34" charset="-120"/>
-              </a:rPr>
-              <a:t>Of the night gap sits in 21:00–03:59 — ~13 captains vs ~37 by day</a:t>
-            </a:r>
-            <a:endParaRPr lang="en-US" sz="1300" dirty="0"/>
-          </a:p>
-        </p:txBody>
-      </p:sp>
-      <p:sp>
-        <p:nvSpPr>
-          <p:cNvPr id="17" name="Shape 12"/>
-          <p:cNvSpPr/>
-          <p:nvPr/>
-        </p:nvSpPr>
-        <p:spPr>
-          <a:xfrm>
-            <a:off x="8001000" y="4663440"/>
-            <a:ext cx="3611880" cy="1280160"/>
-          </a:xfrm>
-          <a:prstGeom prst="roundRect">
-            <a:avLst>
-              <a:gd name="adj" fmla="val 7143"/>
-            </a:avLst>
-          </a:prstGeom>
-          <a:solidFill>
-            <a:srgbClr val="F6E4D4"/>
-          </a:solidFill>
-          <a:ln w="15875">
-            <a:solidFill>
-              <a:srgbClr val="E8D5C0"/>
-            </a:solidFill>
-            <a:prstDash val="solid"/>
-          </a:ln>
-        </p:spPr>
-      </p:sp>
-      <p:sp>
-        <p:nvSpPr>
-          <p:cNvPr id="18" name="Text 13"/>
-          <p:cNvSpPr txBox="1"/>
-          <p:nvPr/>
-        </p:nvSpPr>
-        <p:spPr>
-          <a:xfrm>
-            <a:off x="8165592" y="4736592"/>
-            <a:ext cx="3291840" cy="457200"/>
-          </a:xfrm>
-          <a:prstGeom prst="rect">
-            <a:avLst/>
-          </a:prstGeom>
-          <a:noFill/>
-          <a:ln/>
-        </p:spPr>
-        <p:txBody>
-          <a:bodyPr wrap="square" lIns="0" tIns="0" rIns="0" bIns="0" rtlCol="0" anchor="ctr"/>
-          <a:lstStyle/>
-          <a:p>
-            <a:pPr indent="0" marL="0">
-              <a:buNone/>
-            </a:pPr>
-            <a:r>
-              <a:rPr lang="en-US" sz="2600" b="1" dirty="0">
-                <a:solidFill>
-                  <a:srgbClr val="1C1917"/>
-                </a:solidFill>
-                <a:latin typeface="Cambria" pitchFamily="34" charset="0"/>
-                <a:ea typeface="Cambria" pitchFamily="34" charset="-122"/>
-                <a:cs typeface="Cambria" pitchFamily="34" charset="-120"/>
-              </a:rPr>
-              <a:t>₹35.4</a:t>
-            </a:r>
-            <a:endParaRPr lang="en-US" sz="2600" dirty="0"/>
-          </a:p>
-        </p:txBody>
-      </p:sp>
-      <p:sp>
-        <p:nvSpPr>
-          <p:cNvPr id="19" name="Text 14"/>
-          <p:cNvSpPr txBox="1"/>
-          <p:nvPr/>
-        </p:nvSpPr>
-        <p:spPr>
-          <a:xfrm>
-            <a:off x="8165592" y="5193792"/>
-            <a:ext cx="3291840" cy="658368"/>
-          </a:xfrm>
-          <a:prstGeom prst="rect">
-            <a:avLst/>
-          </a:prstGeom>
-          <a:noFill/>
-          <a:ln/>
-        </p:spPr>
-        <p:txBody>
-          <a:bodyPr wrap="square" lIns="0" tIns="0" rIns="0" bIns="0" rtlCol="0" anchor="ctr"/>
-          <a:lstStyle/>
-          <a:p>
-            <a:pPr indent="0" marL="0">
-              <a:buNone/>
-            </a:pPr>
-            <a:r>
-              <a:rPr lang="en-US" sz="1300" dirty="0">
-                <a:solidFill>
-                  <a:srgbClr val="57534E"/>
-                </a:solidFill>
-                <a:latin typeface="Calibri" pitchFamily="34" charset="0"/>
-                <a:ea typeface="Calibri" pitchFamily="34" charset="-122"/>
-                <a:cs typeface="Calibri" pitchFamily="34" charset="-120"/>
-              </a:rPr>
-              <a:t>Per eligible leg — derived ARA. Not 30% of fare (₹105).</a:t>
-            </a:r>
-            <a:endParaRPr lang="en-US" sz="1300" dirty="0"/>
-          </a:p>
-        </p:txBody>
-      </p:sp>
-      <p:sp>
-        <p:nvSpPr>
-          <p:cNvPr id="20" name="Shape 15"/>
-          <p:cNvSpPr/>
-          <p:nvPr/>
-        </p:nvSpPr>
-        <p:spPr>
-          <a:xfrm>
-            <a:off x="0" y="6419088"/>
-            <a:ext cx="12191695" cy="438912"/>
-          </a:xfrm>
-          <a:prstGeom prst="rect">
-            <a:avLst/>
-          </a:prstGeom>
-          <a:solidFill>
-            <a:srgbClr val="F6E4D4"/>
-          </a:solidFill>
-          <a:ln/>
-        </p:spPr>
-      </p:sp>
-      <p:sp>
-        <p:nvSpPr>
-          <p:cNvPr id="21" name="Text 16"/>
+          <a:ln/>
+        </p:spPr>
+      </p:sp>
+      <p:sp>
+        <p:nvSpPr>
+          <p:cNvPr id="24" name="Text 20"/>
           <p:cNvSpPr txBox="1"/>
           <p:nvPr/>
         </p:nvSpPr>
@@ -5427,7 +5742,7 @@
       </p:sp>
       <p:sp>
         <p:nvSpPr>
-          <p:cNvPr id="22" name="Text 17"/>
+          <p:cNvPr id="25" name="Text 21"/>
           <p:cNvSpPr txBox="1"/>
           <p:nvPr/>
         </p:nvSpPr>
@@ -5458,7 +5773,7 @@
                 <a:ea typeface="Calibri" pitchFamily="34" charset="-122"/>
                 <a:cs typeface="Calibri" pitchFamily="34" charset="-120"/>
               </a:rPr>
-              <a:t>Ramanathan K R  ·  Rapido Data Science Assessment     4 / 6</a:t>
+              <a:t>Ramanathan K R  ·  Rapido Data Science Assessment     5 / 6</a:t>
             </a:r>
             <a:endParaRPr lang="en-US" sz="1100" dirty="0"/>
           </a:p>
@@ -5529,7 +5844,7 @@
                 <a:ea typeface="Calibri" pitchFamily="34" charset="-122"/>
                 <a:cs typeface="Calibri" pitchFamily="34" charset="-120"/>
               </a:rPr>
-              <a:t>WHAT DOES NOT WORK — AND HOW EASY IT IS TO BE FOOLED</a:t>
+              <a:t>RECOMMENDATIONS &amp; DECISION POINTS</a:t>
             </a:r>
             <a:endParaRPr lang="en-US" sz="1300" dirty="0"/>
           </a:p>
@@ -5568,23 +5883,23 @@
         <p:spPr>
           <a:xfrm>
             <a:off x="548640" y="621792"/>
-            <a:ext cx="10332720" cy="475488"/>
-          </a:xfrm>
-          <a:prstGeom prst="rect">
-            <a:avLst/>
-          </a:prstGeom>
-          <a:noFill/>
-          <a:ln/>
-        </p:spPr>
-        <p:txBody>
-          <a:bodyPr wrap="square" lIns="0" tIns="0" rIns="0" bIns="0" rtlCol="0" anchor="ctr"/>
-          <a:lstStyle/>
-          <a:p>
-            <a:pPr indent="0" marL="0">
-              <a:buNone/>
-            </a:pPr>
-            <a:r>
-              <a:rPr lang="en-US" sz="2400" b="1" dirty="0">
+            <a:ext cx="10332720" cy="457200"/>
+          </a:xfrm>
+          <a:prstGeom prst="rect">
+            <a:avLst/>
+          </a:prstGeom>
+          <a:noFill/>
+          <a:ln/>
+        </p:spPr>
+        <p:txBody>
+          <a:bodyPr wrap="square" lIns="0" tIns="0" rIns="0" bIns="0" rtlCol="0" anchor="ctr"/>
+          <a:lstStyle/>
+          <a:p>
+            <a:pPr indent="0" marL="0">
+              <a:buNone/>
+            </a:pPr>
+            <a:r>
+              <a:rPr lang="en-US" sz="2200" b="1" dirty="0">
                 <a:solidFill>
                   <a:srgbClr val="1C1917"/>
                 </a:solidFill>
@@ -5592,26 +5907,143 @@
                 <a:ea typeface="Cambria" pitchFamily="34" charset="-122"/>
                 <a:cs typeface="Cambria" pitchFamily="34" charset="-120"/>
               </a:rPr>
-              <a:t>A campaign with 0 pp lift, and a gap we must not bank</a:t>
-            </a:r>
-            <a:endParaRPr lang="en-US" sz="2400" dirty="0"/>
-          </a:p>
-        </p:txBody>
-      </p:sp>
-      <p:sp>
-        <p:nvSpPr>
-          <p:cNvPr id="5" name="Shape 2"/>
+              <a:t>Ranked by what can start Monday. C1a is not in the unconditional bank.</a:t>
+            </a:r>
+            <a:endParaRPr lang="en-US" sz="2200" dirty="0"/>
+          </a:p>
+        </p:txBody>
+      </p:sp>
+      <p:sp>
+        <p:nvSpPr>
+          <p:cNvPr id="5" name="Text 2"/>
+          <p:cNvSpPr txBox="1"/>
+          <p:nvPr/>
+        </p:nvSpPr>
+        <p:spPr>
+          <a:xfrm>
+            <a:off x="1965960" y="1170432"/>
+            <a:ext cx="3931920" cy="237744"/>
+          </a:xfrm>
+          <a:prstGeom prst="rect">
+            <a:avLst/>
+          </a:prstGeom>
+          <a:noFill/>
+          <a:ln/>
+        </p:spPr>
+        <p:txBody>
+          <a:bodyPr wrap="square" lIns="0" tIns="0" rIns="0" bIns="0" rtlCol="0" anchor="ctr"/>
+          <a:lstStyle/>
+          <a:p>
+            <a:pPr indent="0" marL="0">
+              <a:buNone/>
+            </a:pPr>
+            <a:r>
+              <a:rPr lang="en-US" sz="1200" b="1" spc="120" kern="0" dirty="0">
+                <a:solidFill>
+                  <a:srgbClr val="C45C26"/>
+                </a:solidFill>
+                <a:latin typeface="Calibri" pitchFamily="34" charset="0"/>
+                <a:ea typeface="Calibri" pitchFamily="34" charset="-122"/>
+                <a:cs typeface="Calibri" pitchFamily="34" charset="-120"/>
+              </a:rPr>
+              <a:t>ACTION</a:t>
+            </a:r>
+            <a:endParaRPr lang="en-US" sz="1200" dirty="0"/>
+          </a:p>
+        </p:txBody>
+      </p:sp>
+      <p:sp>
+        <p:nvSpPr>
+          <p:cNvPr id="6" name="Text 3"/>
+          <p:cNvSpPr txBox="1"/>
+          <p:nvPr/>
+        </p:nvSpPr>
+        <p:spPr>
+          <a:xfrm>
+            <a:off x="5989320" y="1170432"/>
+            <a:ext cx="2240280" cy="237744"/>
+          </a:xfrm>
+          <a:prstGeom prst="rect">
+            <a:avLst/>
+          </a:prstGeom>
+          <a:noFill/>
+          <a:ln/>
+        </p:spPr>
+        <p:txBody>
+          <a:bodyPr wrap="square" lIns="0" tIns="0" rIns="0" bIns="0" rtlCol="0" anchor="ctr"/>
+          <a:lstStyle/>
+          <a:p>
+            <a:pPr indent="0" marL="0">
+              <a:buNone/>
+            </a:pPr>
+            <a:r>
+              <a:rPr lang="en-US" sz="1200" b="1" spc="120" kern="0" dirty="0">
+                <a:solidFill>
+                  <a:srgbClr val="C45C26"/>
+                </a:solidFill>
+                <a:latin typeface="Calibri" pitchFamily="34" charset="0"/>
+                <a:ea typeface="Calibri" pitchFamily="34" charset="-122"/>
+                <a:cs typeface="Calibri" pitchFamily="34" charset="-120"/>
+              </a:rPr>
+              <a:t>MONTHLY IMPACT</a:t>
+            </a:r>
+            <a:endParaRPr lang="en-US" sz="1200" dirty="0"/>
+          </a:p>
+        </p:txBody>
+      </p:sp>
+      <p:sp>
+        <p:nvSpPr>
+          <p:cNvPr id="7" name="Text 4"/>
+          <p:cNvSpPr txBox="1"/>
+          <p:nvPr/>
+        </p:nvSpPr>
+        <p:spPr>
+          <a:xfrm>
+            <a:off x="8321040" y="1170432"/>
+            <a:ext cx="3108960" cy="237744"/>
+          </a:xfrm>
+          <a:prstGeom prst="rect">
+            <a:avLst/>
+          </a:prstGeom>
+          <a:noFill/>
+          <a:ln/>
+        </p:spPr>
+        <p:txBody>
+          <a:bodyPr wrap="square" lIns="0" tIns="0" rIns="0" bIns="0" rtlCol="0" anchor="ctr"/>
+          <a:lstStyle/>
+          <a:p>
+            <a:pPr indent="0" marL="0">
+              <a:buNone/>
+            </a:pPr>
+            <a:r>
+              <a:rPr lang="en-US" sz="1200" b="1" spc="120" kern="0" dirty="0">
+                <a:solidFill>
+                  <a:srgbClr val="C45C26"/>
+                </a:solidFill>
+                <a:latin typeface="Calibri" pitchFamily="34" charset="0"/>
+                <a:ea typeface="Calibri" pitchFamily="34" charset="-122"/>
+                <a:cs typeface="Calibri" pitchFamily="34" charset="-120"/>
+              </a:rPr>
+              <a:t>COST / RISK</a:t>
+            </a:r>
+            <a:endParaRPr lang="en-US" sz="1200" dirty="0"/>
+          </a:p>
+        </p:txBody>
+      </p:sp>
+      <p:sp>
+        <p:nvSpPr>
+          <p:cNvPr id="8" name="Shape 5"/>
           <p:cNvSpPr/>
           <p:nvPr/>
         </p:nvSpPr>
         <p:spPr>
           <a:xfrm>
-            <a:off x="502920" y="1207008"/>
-            <a:ext cx="5532120" cy="4315968"/>
+            <a:off x="502920" y="1444752"/>
+            <a:ext cx="11201400" cy="1078992"/>
           </a:xfrm>
           <a:prstGeom prst="roundRect">
             <a:avLst>
-              <a:gd name="adj" fmla="val 2119"/>
+              <a:gd name="adj" fmla="val 8475"/>
             </a:avLst>
           </a:prstGeom>
           <a:solidFill>
@@ -5627,26 +6059,46 @@
       </p:sp>
       <p:sp>
         <p:nvSpPr>
-          <p:cNvPr id="6" name="Text 3"/>
-          <p:cNvSpPr txBox="1"/>
-          <p:nvPr/>
-        </p:nvSpPr>
-        <p:spPr>
-          <a:xfrm>
-            <a:off x="685800" y="1298448"/>
-            <a:ext cx="5166360" cy="329184"/>
-          </a:xfrm>
-          <a:prstGeom prst="rect">
-            <a:avLst/>
-          </a:prstGeom>
-          <a:noFill/>
-          <a:ln/>
-        </p:spPr>
-        <p:txBody>
-          <a:bodyPr wrap="square" lIns="0" tIns="0" rIns="0" bIns="0" rtlCol="0" anchor="ctr"/>
-          <a:lstStyle/>
-          <a:p>
-            <a:pPr indent="0" marL="0">
+          <p:cNvPr id="9" name="Shape 6"/>
+          <p:cNvSpPr/>
+          <p:nvPr/>
+        </p:nvSpPr>
+        <p:spPr>
+          <a:xfrm>
+            <a:off x="713232" y="1755648"/>
+            <a:ext cx="457200" cy="457200"/>
+          </a:xfrm>
+          <a:prstGeom prst="ellipse">
+            <a:avLst/>
+          </a:prstGeom>
+          <a:solidFill>
+            <a:srgbClr val="F0C9A0"/>
+          </a:solidFill>
+          <a:ln/>
+        </p:spPr>
+      </p:sp>
+      <p:sp>
+        <p:nvSpPr>
+          <p:cNvPr id="10" name="Text 7"/>
+          <p:cNvSpPr txBox="1"/>
+          <p:nvPr/>
+        </p:nvSpPr>
+        <p:spPr>
+          <a:xfrm>
+            <a:off x="713232" y="1755648"/>
+            <a:ext cx="457200" cy="457200"/>
+          </a:xfrm>
+          <a:prstGeom prst="rect">
+            <a:avLst/>
+          </a:prstGeom>
+          <a:noFill/>
+          <a:ln/>
+        </p:spPr>
+        <p:txBody>
+          <a:bodyPr wrap="square" lIns="0" tIns="0" rIns="0" bIns="0" rtlCol="0" anchor="ctr"/>
+          <a:lstStyle/>
+          <a:p>
+            <a:pPr algn="ctr" indent="0" marL="0">
               <a:buNone/>
             </a:pPr>
             <a:r>
@@ -5658,7 +6110,7 @@
                 <a:ea typeface="Cambria" pitchFamily="34" charset="-122"/>
                 <a:cs typeface="Cambria" pitchFamily="34" charset="-120"/>
               </a:rPr>
-              <a:t>CAMP_WA_002 — WhatsApp campaign</a:t>
+              <a:t>1</a:t>
             </a:r>
             <a:endParaRPr lang="en-US" sz="1600" dirty="0"/>
           </a:p>
@@ -5666,14 +6118,14 @@
       </p:sp>
       <p:sp>
         <p:nvSpPr>
-          <p:cNvPr id="7" name="Text 4"/>
-          <p:cNvSpPr txBox="1"/>
-          <p:nvPr/>
-        </p:nvSpPr>
-        <p:spPr>
-          <a:xfrm>
-            <a:off x="685800" y="1645920"/>
-            <a:ext cx="5166360" cy="292608"/>
+          <p:cNvPr id="11" name="Text 8"/>
+          <p:cNvSpPr txBox="1"/>
+          <p:nvPr/>
+        </p:nvSpPr>
+        <p:spPr>
+          <a:xfrm>
+            <a:off x="1371600" y="1536192"/>
+            <a:ext cx="4434840" cy="896112"/>
           </a:xfrm>
           <a:prstGeom prst="rect">
             <a:avLst/>
@@ -5691,44 +6143,101 @@
             <a:r>
               <a:rPr lang="en-US" sz="1400" b="1" dirty="0">
                 <a:solidFill>
+                  <a:srgbClr val="1C1917"/>
+                </a:solidFill>
+                <a:latin typeface="Calibri" pitchFamily="34" charset="0"/>
+                <a:ea typeface="Calibri" pitchFamily="34" charset="-122"/>
+                <a:cs typeface="Calibri" pitchFamily="34" charset="-120"/>
+              </a:rPr>
+              <a:t>C1b Insurance capture UX — ship this week</a:t>
+            </a:r>
+            <a:endParaRPr lang="en-US" sz="1400" dirty="0"/>
+          </a:p>
+          <a:p>
+            <a:pPr indent="0" marL="0">
+              <a:buNone/>
+            </a:pPr>
+            <a:r>
+              <a:rPr lang="en-US" sz="1400" b="1" dirty="0">
+                <a:solidFill>
+                  <a:srgbClr val="1C1917"/>
+                </a:solidFill>
+                <a:latin typeface="Calibri" pitchFamily="34" charset="0"/>
+                <a:ea typeface="Calibri" pitchFamily="34" charset="-122"/>
+                <a:cs typeface="Calibri" pitchFamily="34" charset="-120"/>
+              </a:rPr>
+              <a:t>Then Legal scoping on C1a RC grace (do not bank 134 yet)</a:t>
+            </a:r>
+            <a:endParaRPr lang="en-US" sz="1400" dirty="0"/>
+          </a:p>
+        </p:txBody>
+      </p:sp>
+      <p:sp>
+        <p:nvSpPr>
+          <p:cNvPr id="12" name="Text 9"/>
+          <p:cNvSpPr txBox="1"/>
+          <p:nvPr/>
+        </p:nvSpPr>
+        <p:spPr>
+          <a:xfrm>
+            <a:off x="5943600" y="1536192"/>
+            <a:ext cx="2286000" cy="896112"/>
+          </a:xfrm>
+          <a:prstGeom prst="rect">
+            <a:avLst/>
+          </a:prstGeom>
+          <a:noFill/>
+          <a:ln/>
+        </p:spPr>
+        <p:txBody>
+          <a:bodyPr wrap="square" lIns="0" tIns="0" rIns="0" bIns="0" rtlCol="0" anchor="ctr"/>
+          <a:lstStyle/>
+          <a:p>
+            <a:pPr indent="0" marL="0">
+              <a:buNone/>
+            </a:pPr>
+            <a:r>
+              <a:rPr lang="en-US" sz="1400" b="1" dirty="0">
+                <a:solidFill>
                   <a:srgbClr val="C45C26"/>
                 </a:solidFill>
                 <a:latin typeface="Calibri" pitchFamily="34" charset="0"/>
                 <a:ea typeface="Calibri" pitchFamily="34" charset="-122"/>
                 <a:cs typeface="Calibri" pitchFamily="34" charset="-120"/>
               </a:rPr>
-              <a:t>The 29% vs 11% headline is targeting, not effect.</a:t>
+              <a:t>~50/mo now</a:t>
             </a:r>
             <a:endParaRPr lang="en-US" sz="1400" dirty="0"/>
           </a:p>
-        </p:txBody>
-      </p:sp>
-      <p:graphicFrame>
-        <p:nvGraphicFramePr>
-          <p:cNvPr id="8" name="Chart 0" descr=""/>
-          <p:cNvGraphicFramePr/>
-          <p:nvPr/>
-        </p:nvGraphicFramePr>
-        <p:xfrm>
-          <a:off x="594360" y="1938528"/>
-          <a:ext cx="5303520" cy="2331720"/>
-        </p:xfrm>
-        <a:graphic xmlns:a="http://schemas.openxmlformats.org/drawingml/2006/main">
-          <a:graphicData uri="http://schemas.openxmlformats.org/drawingml/2006/chart">
-            <c:chart xmlns:c="http://schemas.openxmlformats.org/drawingml/2006/chart" r:id="rId2"/>
-          </a:graphicData>
-        </a:graphic>
-      </p:graphicFrame>
-      <p:sp>
-        <p:nvSpPr>
-          <p:cNvPr id="9" name="Text 5"/>
-          <p:cNvSpPr txBox="1"/>
-          <p:nvPr/>
-        </p:nvSpPr>
-        <p:spPr>
-          <a:xfrm>
-            <a:off x="685800" y="4315968"/>
-            <a:ext cx="5166360" cy="640080"/>
+          <a:p>
+            <a:pPr indent="0" marL="0">
+              <a:buNone/>
+            </a:pPr>
+            <a:r>
+              <a:rPr lang="en-US" sz="1400" b="1" dirty="0">
+                <a:solidFill>
+                  <a:srgbClr val="C45C26"/>
+                </a:solidFill>
+                <a:latin typeface="Calibri" pitchFamily="34" charset="0"/>
+                <a:ea typeface="Calibri" pitchFamily="34" charset="-122"/>
+                <a:cs typeface="Calibri" pitchFamily="34" charset="-120"/>
+              </a:rPr>
+              <a:t>(+134 only if Legal)</a:t>
+            </a:r>
+            <a:endParaRPr lang="en-US" sz="1400" dirty="0"/>
+          </a:p>
+        </p:txBody>
+      </p:sp>
+      <p:sp>
+        <p:nvSpPr>
+          <p:cNvPr id="13" name="Text 10"/>
+          <p:cNvSpPr txBox="1"/>
+          <p:nvPr/>
+        </p:nvSpPr>
+        <p:spPr>
+          <a:xfrm>
+            <a:off x="8321040" y="1536192"/>
+            <a:ext cx="3154680" cy="896112"/>
           </a:xfrm>
           <a:prstGeom prst="rect">
             <a:avLst/>
@@ -5746,13 +6255,13 @@
             <a:r>
               <a:rPr lang="en-US" sz="1300" dirty="0">
                 <a:solidFill>
-                  <a:srgbClr val="1C1917"/>
-                </a:solidFill>
-                <a:latin typeface="Calibri" pitchFamily="34" charset="0"/>
-                <a:ea typeface="Calibri" pitchFamily="34" charset="-122"/>
-                <a:cs typeface="Calibri" pitchFamily="34" charset="-120"/>
-              </a:rPr>
-              <a:t>Honest comparison: clicked vs not-clicked (delivered only) = −1.5 pp; 95% CI [−3.6, +0.6]. That is 0 pp lift. Do not fund 5×.</a:t>
+                  <a:srgbClr val="57534E"/>
+                </a:solidFill>
+                <a:latin typeface="Calibri" pitchFamily="34" charset="0"/>
+                <a:ea typeface="Calibri" pitchFamily="34" charset="-122"/>
+                <a:cs typeface="Calibri" pitchFamily="34" charset="-120"/>
+              </a:rPr>
+              <a:t>C1b: engineering. C1a: Legal/T&amp;S. Show-up unobserved.</a:t>
             </a:r>
             <a:endParaRPr lang="en-US" sz="1300" dirty="0"/>
           </a:p>
@@ -5760,57 +6269,238 @@
       </p:sp>
       <p:sp>
         <p:nvSpPr>
-          <p:cNvPr id="10" name="Text 6"/>
-          <p:cNvSpPr txBox="1"/>
-          <p:nvPr/>
-        </p:nvSpPr>
-        <p:spPr>
-          <a:xfrm>
-            <a:off x="685800" y="4956048"/>
-            <a:ext cx="5166360" cy="384048"/>
-          </a:xfrm>
-          <a:prstGeom prst="rect">
-            <a:avLst/>
-          </a:prstGeom>
-          <a:noFill/>
-          <a:ln/>
-        </p:spPr>
-        <p:txBody>
-          <a:bodyPr wrap="square" lIns="0" tIns="0" rIns="0" bIns="0" rtlCol="0" anchor="ctr"/>
-          <a:lstStyle/>
-          <a:p>
-            <a:pPr indent="0" marL="0">
-              <a:buNone/>
-            </a:pPr>
-            <a:r>
-              <a:rPr lang="en-US" sz="1300" i="1" dirty="0">
-                <a:solidFill>
-                  <a:srgbClr val="57534E"/>
-                </a:solidFill>
-                <a:latin typeface="Calibri" pitchFamily="34" charset="0"/>
-                <a:ea typeface="Calibri" pitchFamily="34" charset="-122"/>
-                <a:cs typeface="Calibri" pitchFamily="34" charset="-120"/>
-              </a:rPr>
-              <a:t>~30% of recipients also got another campaign — confounding further inflated.</a:t>
-            </a:r>
-            <a:endParaRPr lang="en-US" sz="1300" dirty="0"/>
-          </a:p>
-        </p:txBody>
-      </p:sp>
-      <p:sp>
-        <p:nvSpPr>
-          <p:cNvPr id="11" name="Shape 7"/>
+          <p:cNvPr id="14" name="Shape 11"/>
           <p:cNvSpPr/>
           <p:nvPr/>
         </p:nvSpPr>
         <p:spPr>
           <a:xfrm>
-            <a:off x="6199632" y="1207008"/>
-            <a:ext cx="5532120" cy="4315968"/>
+            <a:off x="502920" y="2596896"/>
+            <a:ext cx="11201400" cy="1078992"/>
           </a:xfrm>
           <a:prstGeom prst="roundRect">
             <a:avLst>
-              <a:gd name="adj" fmla="val 2119"/>
+              <a:gd name="adj" fmla="val 8475"/>
+            </a:avLst>
+          </a:prstGeom>
+          <a:solidFill>
+            <a:srgbClr val="F8F1E3"/>
+          </a:solidFill>
+          <a:ln w="15875">
+            <a:solidFill>
+              <a:srgbClr val="E8D5C0"/>
+            </a:solidFill>
+            <a:prstDash val="solid"/>
+          </a:ln>
+        </p:spPr>
+      </p:sp>
+      <p:sp>
+        <p:nvSpPr>
+          <p:cNvPr id="15" name="Shape 12"/>
+          <p:cNvSpPr/>
+          <p:nvPr/>
+        </p:nvSpPr>
+        <p:spPr>
+          <a:xfrm>
+            <a:off x="713232" y="2907792"/>
+            <a:ext cx="457200" cy="457200"/>
+          </a:xfrm>
+          <a:prstGeom prst="ellipse">
+            <a:avLst/>
+          </a:prstGeom>
+          <a:solidFill>
+            <a:srgbClr val="F0C9A0"/>
+          </a:solidFill>
+          <a:ln/>
+        </p:spPr>
+      </p:sp>
+      <p:sp>
+        <p:nvSpPr>
+          <p:cNvPr id="16" name="Text 13"/>
+          <p:cNvSpPr txBox="1"/>
+          <p:nvPr/>
+        </p:nvSpPr>
+        <p:spPr>
+          <a:xfrm>
+            <a:off x="713232" y="2907792"/>
+            <a:ext cx="457200" cy="457200"/>
+          </a:xfrm>
+          <a:prstGeom prst="rect">
+            <a:avLst/>
+          </a:prstGeom>
+          <a:noFill/>
+          <a:ln/>
+        </p:spPr>
+        <p:txBody>
+          <a:bodyPr wrap="square" lIns="0" tIns="0" rIns="0" bIns="0" rtlCol="0" anchor="ctr"/>
+          <a:lstStyle/>
+          <a:p>
+            <a:pPr algn="ctr" indent="0" marL="0">
+              <a:buNone/>
+            </a:pPr>
+            <a:r>
+              <a:rPr lang="en-US" sz="1600" b="1" dirty="0">
+                <a:solidFill>
+                  <a:srgbClr val="1C1917"/>
+                </a:solidFill>
+                <a:latin typeface="Cambria" pitchFamily="34" charset="0"/>
+                <a:ea typeface="Cambria" pitchFamily="34" charset="-122"/>
+                <a:cs typeface="Cambria" pitchFamily="34" charset="-120"/>
+              </a:rPr>
+              <a:t>2</a:t>
+            </a:r>
+            <a:endParaRPr lang="en-US" sz="1600" dirty="0"/>
+          </a:p>
+        </p:txBody>
+      </p:sp>
+      <p:sp>
+        <p:nvSpPr>
+          <p:cNvPr id="17" name="Text 14"/>
+          <p:cNvSpPr txBox="1"/>
+          <p:nvPr/>
+        </p:nvSpPr>
+        <p:spPr>
+          <a:xfrm>
+            <a:off x="1371600" y="2688336"/>
+            <a:ext cx="4434840" cy="896112"/>
+          </a:xfrm>
+          <a:prstGeom prst="rect">
+            <a:avLst/>
+          </a:prstGeom>
+          <a:noFill/>
+          <a:ln/>
+        </p:spPr>
+        <p:txBody>
+          <a:bodyPr wrap="square" lIns="0" tIns="0" rIns="0" bIns="0" rtlCol="0" anchor="ctr"/>
+          <a:lstStyle/>
+          <a:p>
+            <a:pPr indent="0" marL="0">
+              <a:buNone/>
+            </a:pPr>
+            <a:r>
+              <a:rPr lang="en-US" sz="1400" b="1" dirty="0">
+                <a:solidFill>
+                  <a:srgbClr val="1C1917"/>
+                </a:solidFill>
+                <a:latin typeface="Calibri" pitchFamily="34" charset="0"/>
+                <a:ea typeface="Calibri" pitchFamily="34" charset="-122"/>
+                <a:cs typeface="Calibri" pitchFamily="34" charset="-120"/>
+              </a:rPr>
+              <a:t>Airport Return Assurance at ₹35.4/leg</a:t>
+            </a:r>
+            <a:endParaRPr lang="en-US" sz="1400" dirty="0"/>
+          </a:p>
+          <a:p>
+            <a:pPr indent="0" marL="0">
+              <a:buNone/>
+            </a:pPr>
+            <a:r>
+              <a:rPr lang="en-US" sz="1400" b="1" dirty="0">
+                <a:solidFill>
+                  <a:srgbClr val="1C1917"/>
+                </a:solidFill>
+                <a:latin typeface="Calibri" pitchFamily="34" charset="0"/>
+                <a:ea typeface="Calibri" pitchFamily="34" charset="-122"/>
+                <a:cs typeface="Calibri" pitchFamily="34" charset="-120"/>
+              </a:rPr>
+              <a:t>Do not hire. After-trip mix does not shift (p=0.12).</a:t>
+            </a:r>
+            <a:endParaRPr lang="en-US" sz="1400" dirty="0"/>
+          </a:p>
+        </p:txBody>
+      </p:sp>
+      <p:sp>
+        <p:nvSpPr>
+          <p:cNvPr id="18" name="Text 15"/>
+          <p:cNvSpPr txBox="1"/>
+          <p:nvPr/>
+        </p:nvSpPr>
+        <p:spPr>
+          <a:xfrm>
+            <a:off x="5943600" y="2688336"/>
+            <a:ext cx="2286000" cy="896112"/>
+          </a:xfrm>
+          <a:prstGeom prst="rect">
+            <a:avLst/>
+          </a:prstGeom>
+          <a:noFill/>
+          <a:ln/>
+        </p:spPr>
+        <p:txBody>
+          <a:bodyPr wrap="square" lIns="0" tIns="0" rIns="0" bIns="0" rtlCol="0" anchor="ctr"/>
+          <a:lstStyle/>
+          <a:p>
+            <a:pPr indent="0" marL="0">
+              <a:buNone/>
+            </a:pPr>
+            <a:r>
+              <a:rPr lang="en-US" sz="1400" b="1" dirty="0">
+                <a:solidFill>
+                  <a:srgbClr val="C45C26"/>
+                </a:solidFill>
+                <a:latin typeface="Calibri" pitchFamily="34" charset="0"/>
+                <a:ea typeface="Calibri" pitchFamily="34" charset="-122"/>
+                <a:cs typeface="Calibri" pitchFamily="34" charset="-120"/>
+              </a:rPr>
+              <a:t>₹69k–103k/mo sample</a:t>
+            </a:r>
+            <a:endParaRPr lang="en-US" sz="1400" dirty="0"/>
+          </a:p>
+        </p:txBody>
+      </p:sp>
+      <p:sp>
+        <p:nvSpPr>
+          <p:cNvPr id="19" name="Text 16"/>
+          <p:cNvSpPr txBox="1"/>
+          <p:nvPr/>
+        </p:nvSpPr>
+        <p:spPr>
+          <a:xfrm>
+            <a:off x="8321040" y="2688336"/>
+            <a:ext cx="3154680" cy="896112"/>
+          </a:xfrm>
+          <a:prstGeom prst="rect">
+            <a:avLst/>
+          </a:prstGeom>
+          <a:noFill/>
+          <a:ln/>
+        </p:spPr>
+        <p:txBody>
+          <a:bodyPr wrap="square" lIns="0" tIns="0" rIns="0" bIns="0" rtlCol="0" anchor="ctr"/>
+          <a:lstStyle/>
+          <a:p>
+            <a:pPr indent="0" marL="0">
+              <a:buNone/>
+            </a:pPr>
+            <a:r>
+              <a:rPr lang="en-US" sz="1300" dirty="0">
+                <a:solidFill>
+                  <a:srgbClr val="57534E"/>
+                </a:solidFill>
+                <a:latin typeface="Calibri" pitchFamily="34" charset="0"/>
+                <a:ea typeface="Calibri" pitchFamily="34" charset="-122"/>
+                <a:cs typeface="Calibri" pitchFamily="34" charset="-120"/>
+              </a:rPr>
+              <a:t>Sampled trips ≠ city P&amp;L. Rest-suburban only.</a:t>
+            </a:r>
+            <a:endParaRPr lang="en-US" sz="1300" dirty="0"/>
+          </a:p>
+        </p:txBody>
+      </p:sp>
+      <p:sp>
+        <p:nvSpPr>
+          <p:cNvPr id="20" name="Shape 17"/>
+          <p:cNvSpPr/>
+          <p:nvPr/>
+        </p:nvSpPr>
+        <p:spPr>
+          <a:xfrm>
+            <a:off x="502920" y="3749040"/>
+            <a:ext cx="11201400" cy="1078992"/>
+          </a:xfrm>
+          <a:prstGeom prst="roundRect">
+            <a:avLst>
+              <a:gd name="adj" fmla="val 8475"/>
             </a:avLst>
           </a:prstGeom>
           <a:solidFill>
@@ -5826,26 +6516,46 @@
       </p:sp>
       <p:sp>
         <p:nvSpPr>
-          <p:cNvPr id="12" name="Text 8"/>
-          <p:cNvSpPr txBox="1"/>
-          <p:nvPr/>
-        </p:nvSpPr>
-        <p:spPr>
-          <a:xfrm>
-            <a:off x="6382512" y="1298448"/>
-            <a:ext cx="5166360" cy="365760"/>
-          </a:xfrm>
-          <a:prstGeom prst="rect">
-            <a:avLst/>
-          </a:prstGeom>
-          <a:noFill/>
-          <a:ln/>
-        </p:spPr>
-        <p:txBody>
-          <a:bodyPr wrap="square" lIns="0" tIns="0" rIns="0" bIns="0" rtlCol="0" anchor="ctr"/>
-          <a:lstStyle/>
-          <a:p>
-            <a:pPr indent="0" marL="0">
+          <p:cNvPr id="21" name="Shape 18"/>
+          <p:cNvSpPr/>
+          <p:nvPr/>
+        </p:nvSpPr>
+        <p:spPr>
+          <a:xfrm>
+            <a:off x="713232" y="4059936"/>
+            <a:ext cx="457200" cy="457200"/>
+          </a:xfrm>
+          <a:prstGeom prst="ellipse">
+            <a:avLst/>
+          </a:prstGeom>
+          <a:solidFill>
+            <a:srgbClr val="F0C9A0"/>
+          </a:solidFill>
+          <a:ln/>
+        </p:spPr>
+      </p:sp>
+      <p:sp>
+        <p:nvSpPr>
+          <p:cNvPr id="22" name="Text 19"/>
+          <p:cNvSpPr txBox="1"/>
+          <p:nvPr/>
+        </p:nvSpPr>
+        <p:spPr>
+          <a:xfrm>
+            <a:off x="713232" y="4059936"/>
+            <a:ext cx="457200" cy="457200"/>
+          </a:xfrm>
+          <a:prstGeom prst="rect">
+            <a:avLst/>
+          </a:prstGeom>
+          <a:noFill/>
+          <a:ln/>
+        </p:spPr>
+        <p:txBody>
+          <a:bodyPr wrap="square" lIns="0" tIns="0" rIns="0" bIns="0" rtlCol="0" anchor="ctr"/>
+          <a:lstStyle/>
+          <a:p>
+            <a:pPr algn="ctr" indent="0" marL="0">
               <a:buNone/>
             </a:pPr>
             <a:r>
@@ -5857,1176 +6567,6 @@
                 <a:ea typeface="Cambria" pitchFamily="34" charset="-122"/>
                 <a:cs typeface="Cambria" pitchFamily="34" charset="-120"/>
               </a:rPr>
-              <a:t>Field vs self-serve — do not double-count</a:t>
-            </a:r>
-            <a:endParaRPr lang="en-US" sz="1600" dirty="0"/>
-          </a:p>
-        </p:txBody>
-      </p:sp>
-      <p:sp>
-        <p:nvSpPr>
-          <p:cNvPr id="13" name="Shape 9"/>
-          <p:cNvSpPr/>
-          <p:nvPr/>
-        </p:nvSpPr>
-        <p:spPr>
-          <a:xfrm>
-            <a:off x="6400800" y="1847088"/>
-            <a:ext cx="128016" cy="128016"/>
-          </a:xfrm>
-          <a:prstGeom prst="ellipse">
-            <a:avLst/>
-          </a:prstGeom>
-          <a:solidFill>
-            <a:srgbClr val="F0C9A0"/>
-          </a:solidFill>
-          <a:ln/>
-        </p:spPr>
-      </p:sp>
-      <p:sp>
-        <p:nvSpPr>
-          <p:cNvPr id="14" name="Text 10"/>
-          <p:cNvSpPr txBox="1"/>
-          <p:nvPr/>
-        </p:nvSpPr>
-        <p:spPr>
-          <a:xfrm>
-            <a:off x="6656832" y="1755648"/>
-            <a:ext cx="4892040" cy="658368"/>
-          </a:xfrm>
-          <a:prstGeom prst="rect">
-            <a:avLst/>
-          </a:prstGeom>
-          <a:noFill/>
-          <a:ln/>
-        </p:spPr>
-        <p:txBody>
-          <a:bodyPr wrap="square" lIns="0" tIns="0" rIns="0" bIns="0" rtlCol="0" anchor="ctr"/>
-          <a:lstStyle/>
-          <a:p>
-            <a:pPr indent="0" marL="0">
-              <a:buNone/>
-            </a:pPr>
-            <a:r>
-              <a:rPr lang="en-US" sz="1300" dirty="0">
-                <a:solidFill>
-                  <a:srgbClr val="1C1917"/>
-                </a:solidFill>
-                <a:latin typeface="Calibri" pitchFamily="34" charset="0"/>
-                <a:ea typeface="Calibri" pitchFamily="34" charset="-122"/>
-                <a:cs typeface="Calibri" pitchFamily="34" charset="-120"/>
-              </a:rPr>
-              <a:t>Mechanical ceiling if app/paid converted like field: 128–256 additional/month.</a:t>
-            </a:r>
-            <a:endParaRPr lang="en-US" sz="1300" dirty="0"/>
-          </a:p>
-        </p:txBody>
-      </p:sp>
-      <p:sp>
-        <p:nvSpPr>
-          <p:cNvPr id="15" name="Shape 11"/>
-          <p:cNvSpPr/>
-          <p:nvPr/>
-        </p:nvSpPr>
-        <p:spPr>
-          <a:xfrm>
-            <a:off x="6400800" y="2560320"/>
-            <a:ext cx="128016" cy="128016"/>
-          </a:xfrm>
-          <a:prstGeom prst="ellipse">
-            <a:avLst/>
-          </a:prstGeom>
-          <a:solidFill>
-            <a:srgbClr val="F0C9A0"/>
-          </a:solidFill>
-          <a:ln/>
-        </p:spPr>
-      </p:sp>
-      <p:sp>
-        <p:nvSpPr>
-          <p:cNvPr id="16" name="Text 12"/>
-          <p:cNvSpPr txBox="1"/>
-          <p:nvPr/>
-        </p:nvSpPr>
-        <p:spPr>
-          <a:xfrm>
-            <a:off x="6656832" y="2468880"/>
-            <a:ext cx="4892040" cy="658368"/>
-          </a:xfrm>
-          <a:prstGeom prst="rect">
-            <a:avLst/>
-          </a:prstGeom>
-          <a:noFill/>
-          <a:ln/>
-        </p:spPr>
-        <p:txBody>
-          <a:bodyPr wrap="square" lIns="0" tIns="0" rIns="0" bIns="0" rtlCol="0" anchor="ctr"/>
-          <a:lstStyle/>
-          <a:p>
-            <a:pPr indent="0" marL="0">
-              <a:buNone/>
-            </a:pPr>
-            <a:r>
-              <a:rPr lang="en-US" sz="1300" dirty="0">
-                <a:solidFill>
-                  <a:srgbClr val="1C1917"/>
-                </a:solidFill>
-                <a:latin typeface="Calibri" pitchFamily="34" charset="0"/>
-                <a:ea typeface="Calibri" pitchFamily="34" charset="-122"/>
-                <a:cs typeface="Calibri" pitchFamily="34" charset="-120"/>
-              </a:rPr>
-              <a:t>Field teams recruit in person — extract cannot separate who they recruit from how they onboard.</a:t>
-            </a:r>
-            <a:endParaRPr lang="en-US" sz="1300" dirty="0"/>
-          </a:p>
-        </p:txBody>
-      </p:sp>
-      <p:sp>
-        <p:nvSpPr>
-          <p:cNvPr id="17" name="Shape 13"/>
-          <p:cNvSpPr/>
-          <p:nvPr/>
-        </p:nvSpPr>
-        <p:spPr>
-          <a:xfrm>
-            <a:off x="6400800" y="3273552"/>
-            <a:ext cx="128016" cy="128016"/>
-          </a:xfrm>
-          <a:prstGeom prst="ellipse">
-            <a:avLst/>
-          </a:prstGeom>
-          <a:solidFill>
-            <a:srgbClr val="F0C9A0"/>
-          </a:solidFill>
-          <a:ln/>
-        </p:spPr>
-      </p:sp>
-      <p:sp>
-        <p:nvSpPr>
-          <p:cNvPr id="18" name="Text 14"/>
-          <p:cNvSpPr txBox="1"/>
-          <p:nvPr/>
-        </p:nvSpPr>
-        <p:spPr>
-          <a:xfrm>
-            <a:off x="6656832" y="3182112"/>
-            <a:ext cx="4892040" cy="658368"/>
-          </a:xfrm>
-          <a:prstGeom prst="rect">
-            <a:avLst/>
-          </a:prstGeom>
-          <a:noFill/>
-          <a:ln/>
-        </p:spPr>
-        <p:txBody>
-          <a:bodyPr wrap="square" lIns="0" tIns="0" rIns="0" bIns="0" rtlCol="0" anchor="ctr"/>
-          <a:lstStyle/>
-          <a:p>
-            <a:pPr indent="0" marL="0">
-              <a:buNone/>
-            </a:pPr>
-            <a:r>
-              <a:rPr lang="en-US" sz="1300" dirty="0">
-                <a:solidFill>
-                  <a:srgbClr val="1C1917"/>
-                </a:solidFill>
-                <a:latin typeface="Calibri" pitchFamily="34" charset="0"/>
-                <a:ea typeface="Calibri" pitchFamily="34" charset="-122"/>
-                <a:cs typeface="Calibri" pitchFamily="34" charset="-120"/>
-              </a:rPr>
-              <a:t>726 of the C1a RC group are the same self-serve captains this gap already counts. Do not add 180 + 128–256.</a:t>
-            </a:r>
-            <a:endParaRPr lang="en-US" sz="1300" dirty="0"/>
-          </a:p>
-        </p:txBody>
-      </p:sp>
-      <p:sp>
-        <p:nvSpPr>
-          <p:cNvPr id="19" name="Shape 15"/>
-          <p:cNvSpPr/>
-          <p:nvPr/>
-        </p:nvSpPr>
-        <p:spPr>
-          <a:xfrm>
-            <a:off x="6400800" y="3986784"/>
-            <a:ext cx="128016" cy="128016"/>
-          </a:xfrm>
-          <a:prstGeom prst="ellipse">
-            <a:avLst/>
-          </a:prstGeom>
-          <a:solidFill>
-            <a:srgbClr val="F0C9A0"/>
-          </a:solidFill>
-          <a:ln/>
-        </p:spPr>
-      </p:sp>
-      <p:sp>
-        <p:nvSpPr>
-          <p:cNvPr id="20" name="Text 16"/>
-          <p:cNvSpPr txBox="1"/>
-          <p:nvPr/>
-        </p:nvSpPr>
-        <p:spPr>
-          <a:xfrm>
-            <a:off x="6656832" y="3895344"/>
-            <a:ext cx="4892040" cy="658368"/>
-          </a:xfrm>
-          <a:prstGeom prst="rect">
-            <a:avLst/>
-          </a:prstGeom>
-          <a:noFill/>
-          <a:ln/>
-        </p:spPr>
-        <p:txBody>
-          <a:bodyPr wrap="square" lIns="0" tIns="0" rIns="0" bIns="0" rtlCol="0" anchor="ctr"/>
-          <a:lstStyle/>
-          <a:p>
-            <a:pPr indent="0" marL="0">
-              <a:buNone/>
-            </a:pPr>
-            <a:r>
-              <a:rPr lang="en-US" sz="1300" dirty="0">
-                <a:solidFill>
-                  <a:srgbClr val="1C1917"/>
-                </a:solidFill>
-                <a:latin typeface="Calibri" pitchFamily="34" charset="0"/>
-                <a:ea typeface="Calibri" pitchFamily="34" charset="-122"/>
-                <a:cs typeface="Calibri" pitchFamily="34" charset="-120"/>
-              </a:rPr>
-              <a:t>Fos abandonment after Fitness: 26% vs paid 43% — in-person assist, not WhatsApp.</a:t>
-            </a:r>
-            <a:endParaRPr lang="en-US" sz="1300" dirty="0"/>
-          </a:p>
-        </p:txBody>
-      </p:sp>
-      <p:sp>
-        <p:nvSpPr>
-          <p:cNvPr id="21" name="Shape 17"/>
-          <p:cNvSpPr/>
-          <p:nvPr/>
-        </p:nvSpPr>
-        <p:spPr>
-          <a:xfrm>
-            <a:off x="6400800" y="4700016"/>
-            <a:ext cx="128016" cy="128016"/>
-          </a:xfrm>
-          <a:prstGeom prst="ellipse">
-            <a:avLst/>
-          </a:prstGeom>
-          <a:solidFill>
-            <a:srgbClr val="F0C9A0"/>
-          </a:solidFill>
-          <a:ln/>
-        </p:spPr>
-      </p:sp>
-      <p:sp>
-        <p:nvSpPr>
-          <p:cNvPr id="22" name="Text 18"/>
-          <p:cNvSpPr txBox="1"/>
-          <p:nvPr/>
-        </p:nvSpPr>
-        <p:spPr>
-          <a:xfrm>
-            <a:off x="6656832" y="4608576"/>
-            <a:ext cx="4892040" cy="658368"/>
-          </a:xfrm>
-          <a:prstGeom prst="rect">
-            <a:avLst/>
-          </a:prstGeom>
-          <a:noFill/>
-          <a:ln/>
-        </p:spPr>
-        <p:txBody>
-          <a:bodyPr wrap="square" lIns="0" tIns="0" rIns="0" bIns="0" rtlCol="0" anchor="ctr"/>
-          <a:lstStyle/>
-          <a:p>
-            <a:pPr indent="0" marL="0">
-              <a:buNone/>
-            </a:pPr>
-            <a:r>
-              <a:rPr lang="en-US" sz="1300" dirty="0">
-                <a:solidFill>
-                  <a:srgbClr val="1C1917"/>
-                </a:solidFill>
-                <a:latin typeface="Calibri" pitchFamily="34" charset="0"/>
-                <a:ea typeface="Calibri" pitchFamily="34" charset="-122"/>
-                <a:cs typeface="Calibri" pitchFamily="34" charset="-120"/>
-              </a:rPr>
-              <a:t>Correct move: randomised assisted-onboarding pilot on app/paid (~900 per arm to detect a 5 pp lift).</a:t>
-            </a:r>
-            <a:endParaRPr lang="en-US" sz="1300" dirty="0"/>
-          </a:p>
-        </p:txBody>
-      </p:sp>
-      <p:sp>
-        <p:nvSpPr>
-          <p:cNvPr id="23" name="Shape 19"/>
-          <p:cNvSpPr/>
-          <p:nvPr/>
-        </p:nvSpPr>
-        <p:spPr>
-          <a:xfrm>
-            <a:off x="0" y="6419088"/>
-            <a:ext cx="12191695" cy="438912"/>
-          </a:xfrm>
-          <a:prstGeom prst="rect">
-            <a:avLst/>
-          </a:prstGeom>
-          <a:solidFill>
-            <a:srgbClr val="F6E4D4"/>
-          </a:solidFill>
-          <a:ln/>
-        </p:spPr>
-      </p:sp>
-      <p:sp>
-        <p:nvSpPr>
-          <p:cNvPr id="24" name="Text 20"/>
-          <p:cNvSpPr txBox="1"/>
-          <p:nvPr/>
-        </p:nvSpPr>
-        <p:spPr>
-          <a:xfrm>
-            <a:off x="502920" y="6473952"/>
-            <a:ext cx="6583680" cy="292608"/>
-          </a:xfrm>
-          <a:prstGeom prst="rect">
-            <a:avLst/>
-          </a:prstGeom>
-          <a:noFill/>
-          <a:ln/>
-        </p:spPr>
-        <p:txBody>
-          <a:bodyPr wrap="square" lIns="0" tIns="0" rIns="0" bIns="0" rtlCol="0" anchor="ctr"/>
-          <a:lstStyle/>
-          <a:p>
-            <a:pPr algn="l" indent="0" marL="0">
-              <a:buNone/>
-            </a:pPr>
-            <a:r>
-              <a:rPr lang="en-US" sz="1100" dirty="0">
-                <a:solidFill>
-                  <a:srgbClr val="57534E"/>
-                </a:solidFill>
-                <a:latin typeface="Calibri" pitchFamily="34" charset="0"/>
-                <a:ea typeface="Calibri" pitchFamily="34" charset="-122"/>
-                <a:cs typeface="Calibri" pitchFamily="34" charset="-120"/>
-              </a:rPr>
-              <a:t>Rapido Supply  ·  Captain onboarding &amp; airport supply</a:t>
-            </a:r>
-            <a:endParaRPr lang="en-US" sz="1100" dirty="0"/>
-          </a:p>
-        </p:txBody>
-      </p:sp>
-      <p:sp>
-        <p:nvSpPr>
-          <p:cNvPr id="25" name="Text 21"/>
-          <p:cNvSpPr txBox="1"/>
-          <p:nvPr/>
-        </p:nvSpPr>
-        <p:spPr>
-          <a:xfrm>
-            <a:off x="6339535" y="6473952"/>
-            <a:ext cx="5349240" cy="292608"/>
-          </a:xfrm>
-          <a:prstGeom prst="rect">
-            <a:avLst/>
-          </a:prstGeom>
-          <a:noFill/>
-          <a:ln/>
-        </p:spPr>
-        <p:txBody>
-          <a:bodyPr wrap="square" lIns="0" tIns="0" rIns="0" bIns="0" rtlCol="0" anchor="ctr"/>
-          <a:lstStyle/>
-          <a:p>
-            <a:pPr algn="r" indent="0" marL="0">
-              <a:buNone/>
-            </a:pPr>
-            <a:r>
-              <a:rPr lang="en-US" sz="1100" dirty="0">
-                <a:solidFill>
-                  <a:srgbClr val="57534E"/>
-                </a:solidFill>
-                <a:latin typeface="Calibri" pitchFamily="34" charset="0"/>
-                <a:ea typeface="Calibri" pitchFamily="34" charset="-122"/>
-                <a:cs typeface="Calibri" pitchFamily="34" charset="-120"/>
-              </a:rPr>
-              <a:t>Ramanathan K R  ·  Rapido Data Science Assessment     5 / 6</a:t>
-            </a:r>
-            <a:endParaRPr lang="en-US" sz="1100" dirty="0"/>
-          </a:p>
-        </p:txBody>
-      </p:sp>
-    </p:spTree>
-  </p:cSld>
-  <p:clrMapOvr>
-    <a:masterClrMapping/>
-  </p:clrMapOvr>
-</p:sld>
-</file>
-
-<file path=ppt/slides/slide7.xml><?xml version="1.0" encoding="utf-8"?>
-<p:sld xmlns:a="http://schemas.openxmlformats.org/drawingml/2006/main" xmlns:r="http://schemas.openxmlformats.org/officeDocument/2006/relationships" xmlns:p="http://schemas.openxmlformats.org/presentationml/2006/main">
-  <p:cSld name="Slide 7">
-    <p:bg>
-      <p:bgPr>
-        <a:solidFill>
-          <a:srgbClr val="FAF7F2"/>
-        </a:solidFill>
-      </p:bgPr>
-    </p:bg>
-    <p:spTree>
-      <p:nvGrpSpPr>
-        <p:cNvPr id="1" name=""/>
-        <p:cNvGrpSpPr/>
-        <p:nvPr/>
-      </p:nvGrpSpPr>
-      <p:grpSpPr>
-        <a:xfrm>
-          <a:off x="0" y="0"/>
-          <a:ext cx="0" cy="0"/>
-          <a:chOff x="0" y="0"/>
-          <a:chExt cx="0" cy="0"/>
-        </a:xfrm>
-      </p:grpSpPr>
-      <p:sp>
-        <p:nvSpPr>
-          <p:cNvPr id="2" name="Text 0"/>
-          <p:cNvSpPr txBox="1"/>
-          <p:nvPr/>
-        </p:nvSpPr>
-        <p:spPr>
-          <a:xfrm>
-            <a:off x="548640" y="292608"/>
-            <a:ext cx="9601200" cy="292608"/>
-          </a:xfrm>
-          <a:prstGeom prst="rect">
-            <a:avLst/>
-          </a:prstGeom>
-          <a:noFill/>
-          <a:ln/>
-        </p:spPr>
-        <p:txBody>
-          <a:bodyPr wrap="square" lIns="0" tIns="0" rIns="0" bIns="0" rtlCol="0" anchor="ctr"/>
-          <a:lstStyle/>
-          <a:p>
-            <a:pPr algn="l" indent="0" marL="0">
-              <a:buNone/>
-            </a:pPr>
-            <a:r>
-              <a:rPr lang="en-US" sz="1300" b="1" spc="180" kern="0" dirty="0">
-                <a:solidFill>
-                  <a:srgbClr val="C45C26"/>
-                </a:solidFill>
-                <a:latin typeface="Calibri" pitchFamily="34" charset="0"/>
-                <a:ea typeface="Calibri" pitchFamily="34" charset="-122"/>
-                <a:cs typeface="Calibri" pitchFamily="34" charset="-120"/>
-              </a:rPr>
-              <a:t>RECOMMENDATIONS &amp; DECISION POINTS</a:t>
-            </a:r>
-            <a:endParaRPr lang="en-US" sz="1300" dirty="0"/>
-          </a:p>
-        </p:txBody>
-      </p:sp>
-      <p:pic>
-        <p:nvPicPr>
-          <p:cNvPr id="3" name="Image 0" descr="preencoded.png">    </p:cNvPr>
-          <p:cNvPicPr>
-            <a:picLocks noChangeAspect="1"/>
-          </p:cNvPicPr>
-          <p:nvPr/>
-        </p:nvPicPr>
-        <p:blipFill>
-          <a:blip r:embed="rId1"/>
-          <a:stretch>
-            <a:fillRect/>
-          </a:stretch>
-        </p:blipFill>
-        <p:spPr>
-          <a:xfrm>
-            <a:off x="11018520" y="164592"/>
-            <a:ext cx="868680" cy="868680"/>
-          </a:xfrm>
-          <a:prstGeom prst="rect">
-            <a:avLst/>
-          </a:prstGeom>
-        </p:spPr>
-      </p:pic>
-      <p:sp>
-        <p:nvSpPr>
-          <p:cNvPr id="4" name="Text 1"/>
-          <p:cNvSpPr txBox="1"/>
-          <p:nvPr/>
-        </p:nvSpPr>
-        <p:spPr>
-          <a:xfrm>
-            <a:off x="548640" y="621792"/>
-            <a:ext cx="10332720" cy="457200"/>
-          </a:xfrm>
-          <a:prstGeom prst="rect">
-            <a:avLst/>
-          </a:prstGeom>
-          <a:noFill/>
-          <a:ln/>
-        </p:spPr>
-        <p:txBody>
-          <a:bodyPr wrap="square" lIns="0" tIns="0" rIns="0" bIns="0" rtlCol="0" anchor="ctr"/>
-          <a:lstStyle/>
-          <a:p>
-            <a:pPr indent="0" marL="0">
-              <a:buNone/>
-            </a:pPr>
-            <a:r>
-              <a:rPr lang="en-US" sz="2400" b="1" dirty="0">
-                <a:solidFill>
-                  <a:srgbClr val="1C1917"/>
-                </a:solidFill>
-                <a:latin typeface="Cambria" pitchFamily="34" charset="0"/>
-                <a:ea typeface="Cambria" pitchFamily="34" charset="-122"/>
-                <a:cs typeface="Cambria" pitchFamily="34" charset="-120"/>
-              </a:rPr>
-              <a:t>Ranked by monthly impact. The campaign call is the fastest yes.</a:t>
-            </a:r>
-            <a:endParaRPr lang="en-US" sz="2400" dirty="0"/>
-          </a:p>
-        </p:txBody>
-      </p:sp>
-      <p:sp>
-        <p:nvSpPr>
-          <p:cNvPr id="5" name="Text 2"/>
-          <p:cNvSpPr txBox="1"/>
-          <p:nvPr/>
-        </p:nvSpPr>
-        <p:spPr>
-          <a:xfrm>
-            <a:off x="1965960" y="1170432"/>
-            <a:ext cx="3931920" cy="237744"/>
-          </a:xfrm>
-          <a:prstGeom prst="rect">
-            <a:avLst/>
-          </a:prstGeom>
-          <a:noFill/>
-          <a:ln/>
-        </p:spPr>
-        <p:txBody>
-          <a:bodyPr wrap="square" lIns="0" tIns="0" rIns="0" bIns="0" rtlCol="0" anchor="ctr"/>
-          <a:lstStyle/>
-          <a:p>
-            <a:pPr indent="0" marL="0">
-              <a:buNone/>
-            </a:pPr>
-            <a:r>
-              <a:rPr lang="en-US" sz="1200" b="1" spc="120" kern="0" dirty="0">
-                <a:solidFill>
-                  <a:srgbClr val="C45C26"/>
-                </a:solidFill>
-                <a:latin typeface="Calibri" pitchFamily="34" charset="0"/>
-                <a:ea typeface="Calibri" pitchFamily="34" charset="-122"/>
-                <a:cs typeface="Calibri" pitchFamily="34" charset="-120"/>
-              </a:rPr>
-              <a:t>ACTION</a:t>
-            </a:r>
-            <a:endParaRPr lang="en-US" sz="1200" dirty="0"/>
-          </a:p>
-        </p:txBody>
-      </p:sp>
-      <p:sp>
-        <p:nvSpPr>
-          <p:cNvPr id="6" name="Text 3"/>
-          <p:cNvSpPr txBox="1"/>
-          <p:nvPr/>
-        </p:nvSpPr>
-        <p:spPr>
-          <a:xfrm>
-            <a:off x="5989320" y="1170432"/>
-            <a:ext cx="2240280" cy="237744"/>
-          </a:xfrm>
-          <a:prstGeom prst="rect">
-            <a:avLst/>
-          </a:prstGeom>
-          <a:noFill/>
-          <a:ln/>
-        </p:spPr>
-        <p:txBody>
-          <a:bodyPr wrap="square" lIns="0" tIns="0" rIns="0" bIns="0" rtlCol="0" anchor="ctr"/>
-          <a:lstStyle/>
-          <a:p>
-            <a:pPr indent="0" marL="0">
-              <a:buNone/>
-            </a:pPr>
-            <a:r>
-              <a:rPr lang="en-US" sz="1200" b="1" spc="120" kern="0" dirty="0">
-                <a:solidFill>
-                  <a:srgbClr val="C45C26"/>
-                </a:solidFill>
-                <a:latin typeface="Calibri" pitchFamily="34" charset="0"/>
-                <a:ea typeface="Calibri" pitchFamily="34" charset="-122"/>
-                <a:cs typeface="Calibri" pitchFamily="34" charset="-120"/>
-              </a:rPr>
-              <a:t>MONTHLY IMPACT</a:t>
-            </a:r>
-            <a:endParaRPr lang="en-US" sz="1200" dirty="0"/>
-          </a:p>
-        </p:txBody>
-      </p:sp>
-      <p:sp>
-        <p:nvSpPr>
-          <p:cNvPr id="7" name="Text 4"/>
-          <p:cNvSpPr txBox="1"/>
-          <p:nvPr/>
-        </p:nvSpPr>
-        <p:spPr>
-          <a:xfrm>
-            <a:off x="8321040" y="1170432"/>
-            <a:ext cx="3108960" cy="237744"/>
-          </a:xfrm>
-          <a:prstGeom prst="rect">
-            <a:avLst/>
-          </a:prstGeom>
-          <a:noFill/>
-          <a:ln/>
-        </p:spPr>
-        <p:txBody>
-          <a:bodyPr wrap="square" lIns="0" tIns="0" rIns="0" bIns="0" rtlCol="0" anchor="ctr"/>
-          <a:lstStyle/>
-          <a:p>
-            <a:pPr indent="0" marL="0">
-              <a:buNone/>
-            </a:pPr>
-            <a:r>
-              <a:rPr lang="en-US" sz="1200" b="1" spc="120" kern="0" dirty="0">
-                <a:solidFill>
-                  <a:srgbClr val="C45C26"/>
-                </a:solidFill>
-                <a:latin typeface="Calibri" pitchFamily="34" charset="0"/>
-                <a:ea typeface="Calibri" pitchFamily="34" charset="-122"/>
-                <a:cs typeface="Calibri" pitchFamily="34" charset="-120"/>
-              </a:rPr>
-              <a:t>COST / RISK</a:t>
-            </a:r>
-            <a:endParaRPr lang="en-US" sz="1200" dirty="0"/>
-          </a:p>
-        </p:txBody>
-      </p:sp>
-      <p:sp>
-        <p:nvSpPr>
-          <p:cNvPr id="8" name="Shape 5"/>
-          <p:cNvSpPr/>
-          <p:nvPr/>
-        </p:nvSpPr>
-        <p:spPr>
-          <a:xfrm>
-            <a:off x="502920" y="1444752"/>
-            <a:ext cx="11201400" cy="1078992"/>
-          </a:xfrm>
-          <a:prstGeom prst="roundRect">
-            <a:avLst>
-              <a:gd name="adj" fmla="val 8475"/>
-            </a:avLst>
-          </a:prstGeom>
-          <a:solidFill>
-            <a:srgbClr val="FFFFFF"/>
-          </a:solidFill>
-          <a:ln w="15875">
-            <a:solidFill>
-              <a:srgbClr val="E8D5C0"/>
-            </a:solidFill>
-            <a:prstDash val="solid"/>
-          </a:ln>
-        </p:spPr>
-      </p:sp>
-      <p:sp>
-        <p:nvSpPr>
-          <p:cNvPr id="9" name="Shape 6"/>
-          <p:cNvSpPr/>
-          <p:nvPr/>
-        </p:nvSpPr>
-        <p:spPr>
-          <a:xfrm>
-            <a:off x="713232" y="1755648"/>
-            <a:ext cx="457200" cy="457200"/>
-          </a:xfrm>
-          <a:prstGeom prst="ellipse">
-            <a:avLst/>
-          </a:prstGeom>
-          <a:solidFill>
-            <a:srgbClr val="F0C9A0"/>
-          </a:solidFill>
-          <a:ln/>
-        </p:spPr>
-      </p:sp>
-      <p:sp>
-        <p:nvSpPr>
-          <p:cNvPr id="10" name="Text 7"/>
-          <p:cNvSpPr txBox="1"/>
-          <p:nvPr/>
-        </p:nvSpPr>
-        <p:spPr>
-          <a:xfrm>
-            <a:off x="713232" y="1755648"/>
-            <a:ext cx="457200" cy="457200"/>
-          </a:xfrm>
-          <a:prstGeom prst="rect">
-            <a:avLst/>
-          </a:prstGeom>
-          <a:noFill/>
-          <a:ln/>
-        </p:spPr>
-        <p:txBody>
-          <a:bodyPr wrap="square" lIns="0" tIns="0" rIns="0" bIns="0" rtlCol="0" anchor="ctr"/>
-          <a:lstStyle/>
-          <a:p>
-            <a:pPr algn="ctr" indent="0" marL="0">
-              <a:buNone/>
-            </a:pPr>
-            <a:r>
-              <a:rPr lang="en-US" sz="1600" b="1" dirty="0">
-                <a:solidFill>
-                  <a:srgbClr val="1C1917"/>
-                </a:solidFill>
-                <a:latin typeface="Cambria" pitchFamily="34" charset="0"/>
-                <a:ea typeface="Cambria" pitchFamily="34" charset="-122"/>
-                <a:cs typeface="Cambria" pitchFamily="34" charset="-120"/>
-              </a:rPr>
-              <a:t>1</a:t>
-            </a:r>
-            <a:endParaRPr lang="en-US" sz="1600" dirty="0"/>
-          </a:p>
-        </p:txBody>
-      </p:sp>
-      <p:sp>
-        <p:nvSpPr>
-          <p:cNvPr id="11" name="Text 8"/>
-          <p:cNvSpPr txBox="1"/>
-          <p:nvPr/>
-        </p:nvSpPr>
-        <p:spPr>
-          <a:xfrm>
-            <a:off x="1371600" y="1536192"/>
-            <a:ext cx="4434840" cy="896112"/>
-          </a:xfrm>
-          <a:prstGeom prst="rect">
-            <a:avLst/>
-          </a:prstGeom>
-          <a:noFill/>
-          <a:ln/>
-        </p:spPr>
-        <p:txBody>
-          <a:bodyPr wrap="square" lIns="0" tIns="0" rIns="0" bIns="0" rtlCol="0" anchor="ctr"/>
-          <a:lstStyle/>
-          <a:p>
-            <a:pPr indent="0" marL="0">
-              <a:buNone/>
-            </a:pPr>
-            <a:r>
-              <a:rPr lang="en-US" sz="1400" b="1" dirty="0">
-                <a:solidFill>
-                  <a:srgbClr val="1C1917"/>
-                </a:solidFill>
-                <a:latin typeface="Calibri" pitchFamily="34" charset="0"/>
-                <a:ea typeface="Calibri" pitchFamily="34" charset="-122"/>
-                <a:cs typeface="Calibri" pitchFamily="34" charset="-120"/>
-              </a:rPr>
-              <a:t>C1a: 10-day RC in-person grace</a:t>
-            </a:r>
-            <a:endParaRPr lang="en-US" sz="1400" dirty="0"/>
-          </a:p>
-          <a:p>
-            <a:pPr indent="0" marL="0">
-              <a:buNone/>
-            </a:pPr>
-            <a:r>
-              <a:rPr lang="en-US" sz="1400" b="1" dirty="0">
-                <a:solidFill>
-                  <a:srgbClr val="1C1917"/>
-                </a:solidFill>
-                <a:latin typeface="Calibri" pitchFamily="34" charset="0"/>
-                <a:ea typeface="Calibri" pitchFamily="34" charset="-122"/>
-                <a:cs typeface="Calibri" pitchFamily="34" charset="-120"/>
-              </a:rPr>
-              <a:t>C1b: Insurance upload UX (ship this week)</a:t>
-            </a:r>
-            <a:endParaRPr lang="en-US" sz="1400" dirty="0"/>
-          </a:p>
-        </p:txBody>
-      </p:sp>
-      <p:sp>
-        <p:nvSpPr>
-          <p:cNvPr id="12" name="Text 9"/>
-          <p:cNvSpPr txBox="1"/>
-          <p:nvPr/>
-        </p:nvSpPr>
-        <p:spPr>
-          <a:xfrm>
-            <a:off x="5943600" y="1536192"/>
-            <a:ext cx="2286000" cy="896112"/>
-          </a:xfrm>
-          <a:prstGeom prst="rect">
-            <a:avLst/>
-          </a:prstGeom>
-          <a:noFill/>
-          <a:ln/>
-        </p:spPr>
-        <p:txBody>
-          <a:bodyPr wrap="square" lIns="0" tIns="0" rIns="0" bIns="0" rtlCol="0" anchor="ctr"/>
-          <a:lstStyle/>
-          <a:p>
-            <a:pPr indent="0" marL="0">
-              <a:buNone/>
-            </a:pPr>
-            <a:r>
-              <a:rPr lang="en-US" sz="1400" b="1" dirty="0">
-                <a:solidFill>
-                  <a:srgbClr val="C45C26"/>
-                </a:solidFill>
-                <a:latin typeface="Calibri" pitchFamily="34" charset="0"/>
-                <a:ea typeface="Calibri" pitchFamily="34" charset="-122"/>
-                <a:cs typeface="Calibri" pitchFamily="34" charset="-120"/>
-              </a:rPr>
-              <a:t>~180/mo approved</a:t>
-            </a:r>
-            <a:endParaRPr lang="en-US" sz="1400" dirty="0"/>
-          </a:p>
-        </p:txBody>
-      </p:sp>
-      <p:sp>
-        <p:nvSpPr>
-          <p:cNvPr id="13" name="Text 10"/>
-          <p:cNvSpPr txBox="1"/>
-          <p:nvPr/>
-        </p:nvSpPr>
-        <p:spPr>
-          <a:xfrm>
-            <a:off x="8321040" y="1536192"/>
-            <a:ext cx="3154680" cy="896112"/>
-          </a:xfrm>
-          <a:prstGeom prst="rect">
-            <a:avLst/>
-          </a:prstGeom>
-          <a:noFill/>
-          <a:ln/>
-        </p:spPr>
-        <p:txBody>
-          <a:bodyPr wrap="square" lIns="0" tIns="0" rIns="0" bIns="0" rtlCol="0" anchor="ctr"/>
-          <a:lstStyle/>
-          <a:p>
-            <a:pPr indent="0" marL="0">
-              <a:buNone/>
-            </a:pPr>
-            <a:r>
-              <a:rPr lang="en-US" sz="1300" dirty="0">
-                <a:solidFill>
-                  <a:srgbClr val="57534E"/>
-                </a:solidFill>
-                <a:latin typeface="Calibri" pitchFamily="34" charset="0"/>
-                <a:ea typeface="Calibri" pitchFamily="34" charset="-122"/>
-                <a:cs typeface="Calibri" pitchFamily="34" charset="-120"/>
-              </a:rPr>
-              <a:t>C1a: Legal + T&amp;S. C1b: engineering only.</a:t>
-            </a:r>
-            <a:endParaRPr lang="en-US" sz="1300" dirty="0"/>
-          </a:p>
-        </p:txBody>
-      </p:sp>
-      <p:sp>
-        <p:nvSpPr>
-          <p:cNvPr id="14" name="Shape 11"/>
-          <p:cNvSpPr/>
-          <p:nvPr/>
-        </p:nvSpPr>
-        <p:spPr>
-          <a:xfrm>
-            <a:off x="502920" y="2596896"/>
-            <a:ext cx="11201400" cy="1078992"/>
-          </a:xfrm>
-          <a:prstGeom prst="roundRect">
-            <a:avLst>
-              <a:gd name="adj" fmla="val 8475"/>
-            </a:avLst>
-          </a:prstGeom>
-          <a:solidFill>
-            <a:srgbClr val="F8F1E3"/>
-          </a:solidFill>
-          <a:ln w="15875">
-            <a:solidFill>
-              <a:srgbClr val="E8D5C0"/>
-            </a:solidFill>
-            <a:prstDash val="solid"/>
-          </a:ln>
-        </p:spPr>
-      </p:sp>
-      <p:sp>
-        <p:nvSpPr>
-          <p:cNvPr id="15" name="Shape 12"/>
-          <p:cNvSpPr/>
-          <p:nvPr/>
-        </p:nvSpPr>
-        <p:spPr>
-          <a:xfrm>
-            <a:off x="713232" y="2907792"/>
-            <a:ext cx="457200" cy="457200"/>
-          </a:xfrm>
-          <a:prstGeom prst="ellipse">
-            <a:avLst/>
-          </a:prstGeom>
-          <a:solidFill>
-            <a:srgbClr val="F0C9A0"/>
-          </a:solidFill>
-          <a:ln/>
-        </p:spPr>
-      </p:sp>
-      <p:sp>
-        <p:nvSpPr>
-          <p:cNvPr id="16" name="Text 13"/>
-          <p:cNvSpPr txBox="1"/>
-          <p:nvPr/>
-        </p:nvSpPr>
-        <p:spPr>
-          <a:xfrm>
-            <a:off x="713232" y="2907792"/>
-            <a:ext cx="457200" cy="457200"/>
-          </a:xfrm>
-          <a:prstGeom prst="rect">
-            <a:avLst/>
-          </a:prstGeom>
-          <a:noFill/>
-          <a:ln/>
-        </p:spPr>
-        <p:txBody>
-          <a:bodyPr wrap="square" lIns="0" tIns="0" rIns="0" bIns="0" rtlCol="0" anchor="ctr"/>
-          <a:lstStyle/>
-          <a:p>
-            <a:pPr algn="ctr" indent="0" marL="0">
-              <a:buNone/>
-            </a:pPr>
-            <a:r>
-              <a:rPr lang="en-US" sz="1600" b="1" dirty="0">
-                <a:solidFill>
-                  <a:srgbClr val="1C1917"/>
-                </a:solidFill>
-                <a:latin typeface="Cambria" pitchFamily="34" charset="0"/>
-                <a:ea typeface="Cambria" pitchFamily="34" charset="-122"/>
-                <a:cs typeface="Cambria" pitchFamily="34" charset="-120"/>
-              </a:rPr>
-              <a:t>2</a:t>
-            </a:r>
-            <a:endParaRPr lang="en-US" sz="1600" dirty="0"/>
-          </a:p>
-        </p:txBody>
-      </p:sp>
-      <p:sp>
-        <p:nvSpPr>
-          <p:cNvPr id="17" name="Text 14"/>
-          <p:cNvSpPr txBox="1"/>
-          <p:nvPr/>
-        </p:nvSpPr>
-        <p:spPr>
-          <a:xfrm>
-            <a:off x="1371600" y="2688336"/>
-            <a:ext cx="4434840" cy="896112"/>
-          </a:xfrm>
-          <a:prstGeom prst="rect">
-            <a:avLst/>
-          </a:prstGeom>
-          <a:noFill/>
-          <a:ln/>
-        </p:spPr>
-        <p:txBody>
-          <a:bodyPr wrap="square" lIns="0" tIns="0" rIns="0" bIns="0" rtlCol="0" anchor="ctr"/>
-          <a:lstStyle/>
-          <a:p>
-            <a:pPr indent="0" marL="0">
-              <a:buNone/>
-            </a:pPr>
-            <a:r>
-              <a:rPr lang="en-US" sz="1400" b="1" dirty="0">
-                <a:solidFill>
-                  <a:srgbClr val="1C1917"/>
-                </a:solidFill>
-                <a:latin typeface="Calibri" pitchFamily="34" charset="0"/>
-                <a:ea typeface="Calibri" pitchFamily="34" charset="-122"/>
-                <a:cs typeface="Calibri" pitchFamily="34" charset="-120"/>
-              </a:rPr>
-              <a:t>Airport Return Assurance at ₹35.4/leg</a:t>
-            </a:r>
-            <a:endParaRPr lang="en-US" sz="1400" dirty="0"/>
-          </a:p>
-          <a:p>
-            <a:pPr indent="0" marL="0">
-              <a:buNone/>
-            </a:pPr>
-            <a:r>
-              <a:rPr lang="en-US" sz="1400" b="1" dirty="0">
-                <a:solidFill>
-                  <a:srgbClr val="1C1917"/>
-                </a:solidFill>
-                <a:latin typeface="Calibri" pitchFamily="34" charset="0"/>
-                <a:ea typeface="Calibri" pitchFamily="34" charset="-122"/>
-                <a:cs typeface="Calibri" pitchFamily="34" charset="-120"/>
-              </a:rPr>
-              <a:t>(derived payout — not 30% of fare)</a:t>
-            </a:r>
-            <a:endParaRPr lang="en-US" sz="1400" dirty="0"/>
-          </a:p>
-        </p:txBody>
-      </p:sp>
-      <p:sp>
-        <p:nvSpPr>
-          <p:cNvPr id="18" name="Text 15"/>
-          <p:cNvSpPr txBox="1"/>
-          <p:nvPr/>
-        </p:nvSpPr>
-        <p:spPr>
-          <a:xfrm>
-            <a:off x="5943600" y="2688336"/>
-            <a:ext cx="2286000" cy="896112"/>
-          </a:xfrm>
-          <a:prstGeom prst="rect">
-            <a:avLst/>
-          </a:prstGeom>
-          <a:noFill/>
-          <a:ln/>
-        </p:spPr>
-        <p:txBody>
-          <a:bodyPr wrap="square" lIns="0" tIns="0" rIns="0" bIns="0" rtlCol="0" anchor="ctr"/>
-          <a:lstStyle/>
-          <a:p>
-            <a:pPr indent="0" marL="0">
-              <a:buNone/>
-            </a:pPr>
-            <a:r>
-              <a:rPr lang="en-US" sz="1400" b="1" dirty="0">
-                <a:solidFill>
-                  <a:srgbClr val="C45C26"/>
-                </a:solidFill>
-                <a:latin typeface="Calibri" pitchFamily="34" charset="0"/>
-                <a:ea typeface="Calibri" pitchFamily="34" charset="-122"/>
-                <a:cs typeface="Calibri" pitchFamily="34" charset="-120"/>
-              </a:rPr>
-              <a:t>₹69k–103k/mo sample</a:t>
-            </a:r>
-            <a:endParaRPr lang="en-US" sz="1400" dirty="0"/>
-          </a:p>
-        </p:txBody>
-      </p:sp>
-      <p:sp>
-        <p:nvSpPr>
-          <p:cNvPr id="19" name="Text 16"/>
-          <p:cNvSpPr txBox="1"/>
-          <p:nvPr/>
-        </p:nvSpPr>
-        <p:spPr>
-          <a:xfrm>
-            <a:off x="8321040" y="2688336"/>
-            <a:ext cx="3154680" cy="896112"/>
-          </a:xfrm>
-          <a:prstGeom prst="rect">
-            <a:avLst/>
-          </a:prstGeom>
-          <a:noFill/>
-          <a:ln/>
-        </p:spPr>
-        <p:txBody>
-          <a:bodyPr wrap="square" lIns="0" tIns="0" rIns="0" bIns="0" rtlCol="0" anchor="ctr"/>
-          <a:lstStyle/>
-          <a:p>
-            <a:pPr indent="0" marL="0">
-              <a:buNone/>
-            </a:pPr>
-            <a:r>
-              <a:rPr lang="en-US" sz="1300" dirty="0">
-                <a:solidFill>
-                  <a:srgbClr val="57534E"/>
-                </a:solidFill>
-                <a:latin typeface="Calibri" pitchFamily="34" charset="0"/>
-                <a:ea typeface="Calibri" pitchFamily="34" charset="-122"/>
-                <a:cs typeface="Calibri" pitchFamily="34" charset="-120"/>
-              </a:rPr>
-              <a:t>Sampled trips ≠ city P&amp;L. Rest-suburban only.</a:t>
-            </a:r>
-            <a:endParaRPr lang="en-US" sz="1300" dirty="0"/>
-          </a:p>
-        </p:txBody>
-      </p:sp>
-      <p:sp>
-        <p:nvSpPr>
-          <p:cNvPr id="20" name="Shape 17"/>
-          <p:cNvSpPr/>
-          <p:nvPr/>
-        </p:nvSpPr>
-        <p:spPr>
-          <a:xfrm>
-            <a:off x="502920" y="3749040"/>
-            <a:ext cx="11201400" cy="1078992"/>
-          </a:xfrm>
-          <a:prstGeom prst="roundRect">
-            <a:avLst>
-              <a:gd name="adj" fmla="val 8475"/>
-            </a:avLst>
-          </a:prstGeom>
-          <a:solidFill>
-            <a:srgbClr val="FFFFFF"/>
-          </a:solidFill>
-          <a:ln w="15875">
-            <a:solidFill>
-              <a:srgbClr val="E8D5C0"/>
-            </a:solidFill>
-            <a:prstDash val="solid"/>
-          </a:ln>
-        </p:spPr>
-      </p:sp>
-      <p:sp>
-        <p:nvSpPr>
-          <p:cNvPr id="21" name="Shape 18"/>
-          <p:cNvSpPr/>
-          <p:nvPr/>
-        </p:nvSpPr>
-        <p:spPr>
-          <a:xfrm>
-            <a:off x="713232" y="4059936"/>
-            <a:ext cx="457200" cy="457200"/>
-          </a:xfrm>
-          <a:prstGeom prst="ellipse">
-            <a:avLst/>
-          </a:prstGeom>
-          <a:solidFill>
-            <a:srgbClr val="F0C9A0"/>
-          </a:solidFill>
-          <a:ln/>
-        </p:spPr>
-      </p:sp>
-      <p:sp>
-        <p:nvSpPr>
-          <p:cNvPr id="22" name="Text 19"/>
-          <p:cNvSpPr txBox="1"/>
-          <p:nvPr/>
-        </p:nvSpPr>
-        <p:spPr>
-          <a:xfrm>
-            <a:off x="713232" y="4059936"/>
-            <a:ext cx="457200" cy="457200"/>
-          </a:xfrm>
-          <a:prstGeom prst="rect">
-            <a:avLst/>
-          </a:prstGeom>
-          <a:noFill/>
-          <a:ln/>
-        </p:spPr>
-        <p:txBody>
-          <a:bodyPr wrap="square" lIns="0" tIns="0" rIns="0" bIns="0" rtlCol="0" anchor="ctr"/>
-          <a:lstStyle/>
-          <a:p>
-            <a:pPr algn="ctr" indent="0" marL="0">
-              <a:buNone/>
-            </a:pPr>
-            <a:r>
-              <a:rPr lang="en-US" sz="1600" b="1" dirty="0">
-                <a:solidFill>
-                  <a:srgbClr val="1C1917"/>
-                </a:solidFill>
-                <a:latin typeface="Cambria" pitchFamily="34" charset="0"/>
-                <a:ea typeface="Cambria" pitchFamily="34" charset="-122"/>
-                <a:cs typeface="Cambria" pitchFamily="34" charset="-120"/>
-              </a:rPr>
               <a:t>3</a:t>
             </a:r>
             <a:endParaRPr lang="en-US" sz="1600" dirty="0"/>
@@ -7066,7 +6606,7 @@
                 <a:ea typeface="Calibri" pitchFamily="34" charset="-122"/>
                 <a:cs typeface="Calibri" pitchFamily="34" charset="-120"/>
               </a:rPr>
-              <a:t>Stop CAMP_WA_002 5× scaling. Send/no-send RCT on RC-cleared self-serve captains.</a:t>
+              <a:t>Stop CAMP_WA_002 5×. Send/no-send RCT on RC-cleared self-serve captains.</a:t>
             </a:r>
             <a:endParaRPr lang="en-US" sz="1400" dirty="0"/>
           </a:p>
@@ -7105,7 +6645,7 @@
                 <a:ea typeface="Calibri" pitchFamily="34" charset="-122"/>
                 <a:cs typeface="Calibri" pitchFamily="34" charset="-120"/>
               </a:rPr>
-              <a:t>Cost avoided + 4–6 week answer</a:t>
+              <a:t>0 pp  ·  cost avoided</a:t>
             </a:r>
             <a:endParaRPr lang="en-US" sz="1400" dirty="0"/>
           </a:p>
@@ -7210,7 +6750,7 @@
                 <a:ea typeface="Calibri" pitchFamily="34" charset="-122"/>
                 <a:cs typeface="Calibri" pitchFamily="34" charset="-120"/>
               </a:rPr>
-              <a:t>Ask of the room   (1) Ship Insurance capture UX — no need to wait.   (2) Legal scoping on RC deferral, this week.   (3) Kill the 5× WhatsApp paper; stand up the RCT.   (4) Four-week ARA pilot at the derived ₹35.4, not 30% of fare.</a:t>
+              <a:t>Ask of the room   (1) Ship Insurance capture UX this week — the ~50.   (2) Legal: is deferred RC activation? If no, C1a is ~36 not ~134.   (3) Kill 5× WhatsApp; stand up the RCT.   (4) Four-week ARA at ₹35.4, not 30% of fare.</a:t>
             </a:r>
             <a:endParaRPr lang="en-US" sz="1400" dirty="0"/>
           </a:p>
